--- a/presentation/progress_update.pptx
+++ b/presentation/progress_update.pptx
@@ -12,9 +12,10 @@
     <p:sldId id="260" r:id="rId6"/>
     <p:sldId id="261" r:id="rId7"/>
     <p:sldId id="262" r:id="rId8"/>
+    <p:sldId id="263" r:id="rId9"/>
   </p:sldIdLst>
   <p:notesMasterIdLst>
-    <p:notesMasterId r:id="rId9"/>
+    <p:notesMasterId r:id="rId10"/>
   </p:notesMasterIdLst>
   <p:sldSz cx="9144000" cy="5143500"/>
   <p:notesSz cx="5143500" cy="9144000"/>
@@ -540,6 +541,420 @@
 </c:chartSpace>
 </file>
 
+<file path=ppt/charts/chart2.xml><?xml version="1.0" encoding="utf-8"?>
+<c:chartSpace xmlns:c="http://schemas.openxmlformats.org/drawingml/2006/chart" xmlns:a="http://schemas.openxmlformats.org/drawingml/2006/main" xmlns:r="http://schemas.openxmlformats.org/officeDocument/2006/relationships">
+  <c:date1904 val="0"/>
+  <c:roundedCorners val="1"/>
+  <c:chart>
+    <c:autoTitleDeleted val="1"/>
+    <c:plotArea>
+      <c:layout/>
+      <c:barChart>
+        <c:barDir val="col"/>
+        <c:grouping val="clustered"/>
+        <c:varyColors val="0"/>
+        <c:ser>
+          <c:idx val="0"/>
+          <c:order val="0"/>
+          <c:tx>
+            <c:strRef>
+              <c:f>Sheet1!$B$1</c:f>
+              <c:strCache>
+                <c:ptCount val="1"/>
+                <c:pt idx="0">
+                  <c:v>Per-sender</c:v>
+                </c:pt>
+              </c:strCache>
+            </c:strRef>
+          </c:tx>
+          <c:spPr>
+            <a:solidFill>
+              <a:srgbClr val="9AA9B5"/>
+            </a:solidFill>
+            <a:effectLst/>
+          </c:spPr>
+          <c:invertIfNegative val="0"/>
+          <c:dLbls>
+            <c:numFmt formatCode="0.000" sourceLinked="0"/>
+            <c:txPr>
+              <a:bodyPr/>
+              <a:lstStyle/>
+              <a:p>
+                <a:pPr>
+                  <a:defRPr b="0" i="0" strike="noStrike" sz="900" u="none">
+                    <a:solidFill>
+                      <a:srgbClr val="1B2A38"/>
+                    </a:solidFill>
+                    <a:latin typeface="Arial"/>
+                  </a:defRPr>
+                </a:pPr>
+              </a:p>
+            </c:txPr>
+            <c:showLegendKey val="0"/>
+            <c:showVal val="1"/>
+            <c:showCatName val="0"/>
+            <c:showSerName val="0"/>
+            <c:showPercent val="0"/>
+            <c:showBubbleSize val="0"/>
+            <c:showLeaderLines val="0"/>
+          </c:dLbls>
+          <c:cat>
+            <c:multiLvlStrRef>
+              <c:f>Sheet1!$A$2:$A$5</c:f>
+              <c:multiLvlStrCache>
+                <c:ptCount val="4"/>
+                <c:lvl>
+                  <c:pt idx="0">
+                    <c:v>0-10%</c:v>
+                  </c:pt>
+                  <c:pt idx="1">
+                    <c:v>10-30%</c:v>
+                  </c:pt>
+                  <c:pt idx="2">
+                    <c:v>30-50%</c:v>
+                  </c:pt>
+                  <c:pt idx="3">
+                    <c:v>50-100%</c:v>
+                  </c:pt>
+                </c:lvl>
+              </c:multiLvlStrCache>
+            </c:multiLvlStrRef>
+          </c:cat>
+          <c:val>
+            <c:numRef>
+              <c:f>Sheet1!$B$2:$B$5</c:f>
+              <c:numCache>
+                <c:formatCode>General</c:formatCode>
+                <c:ptCount val="4"/>
+                <c:pt idx="0">
+                  <c:v>0.956</c:v>
+                </c:pt>
+                <c:pt idx="1">
+                  <c:v>0.966</c:v>
+                </c:pt>
+                <c:pt idx="2">
+                  <c:v>0.959</c:v>
+                </c:pt>
+                <c:pt idx="3">
+                  <c:v>0.953</c:v>
+                </c:pt>
+              </c:numCache>
+            </c:numRef>
+          </c:val>
+        </c:ser>
+        <c:ser>
+          <c:idx val="1"/>
+          <c:order val="1"/>
+          <c:tx>
+            <c:strRef>
+              <c:f>Sheet1!$C$1</c:f>
+              <c:strCache>
+                <c:ptCount val="1"/>
+                <c:pt idx="0">
+                  <c:v>Full model</c:v>
+                </c:pt>
+              </c:strCache>
+            </c:strRef>
+          </c:tx>
+          <c:spPr>
+            <a:solidFill>
+              <a:srgbClr val="1C7C7D"/>
+            </a:solidFill>
+            <a:effectLst/>
+          </c:spPr>
+          <c:invertIfNegative val="0"/>
+          <c:dLbls>
+            <c:numFmt formatCode="0.000" sourceLinked="0"/>
+            <c:txPr>
+              <a:bodyPr/>
+              <a:lstStyle/>
+              <a:p>
+                <a:pPr>
+                  <a:defRPr b="0" i="0" strike="noStrike" sz="900" u="none">
+                    <a:solidFill>
+                      <a:srgbClr val="1B2A38"/>
+                    </a:solidFill>
+                    <a:latin typeface="Arial"/>
+                  </a:defRPr>
+                </a:pPr>
+              </a:p>
+            </c:txPr>
+            <c:showLegendKey val="0"/>
+            <c:showVal val="1"/>
+            <c:showCatName val="0"/>
+            <c:showSerName val="0"/>
+            <c:showPercent val="0"/>
+            <c:showBubbleSize val="0"/>
+            <c:showLeaderLines val="0"/>
+          </c:dLbls>
+          <c:cat>
+            <c:multiLvlStrRef>
+              <c:f>Sheet1!$A$2:$A$5</c:f>
+              <c:multiLvlStrCache>
+                <c:ptCount val="4"/>
+                <c:lvl>
+                  <c:pt idx="0">
+                    <c:v>0-10%</c:v>
+                  </c:pt>
+                  <c:pt idx="1">
+                    <c:v>10-30%</c:v>
+                  </c:pt>
+                  <c:pt idx="2">
+                    <c:v>30-50%</c:v>
+                  </c:pt>
+                  <c:pt idx="3">
+                    <c:v>50-100%</c:v>
+                  </c:pt>
+                </c:lvl>
+              </c:multiLvlStrCache>
+            </c:multiLvlStrRef>
+          </c:cat>
+          <c:val>
+            <c:numRef>
+              <c:f>Sheet1!$C$2:$C$5</c:f>
+              <c:numCache>
+                <c:formatCode>General</c:formatCode>
+                <c:ptCount val="4"/>
+                <c:pt idx="0">
+                  <c:v>0.973</c:v>
+                </c:pt>
+                <c:pt idx="1">
+                  <c:v>0.981</c:v>
+                </c:pt>
+                <c:pt idx="2">
+                  <c:v>0.974</c:v>
+                </c:pt>
+                <c:pt idx="3">
+                  <c:v>0.971</c:v>
+                </c:pt>
+              </c:numCache>
+            </c:numRef>
+          </c:val>
+        </c:ser>
+        <c:dLbls>
+          <c:numFmt formatCode="0.000" sourceLinked="0"/>
+          <c:txPr>
+            <a:bodyPr/>
+            <a:lstStyle/>
+            <a:p>
+              <a:pPr>
+                <a:defRPr b="0" i="0" strike="noStrike" sz="900" u="none">
+                  <a:solidFill>
+                    <a:srgbClr val="1B2A38"/>
+                  </a:solidFill>
+                  <a:latin typeface="Arial"/>
+                </a:defRPr>
+              </a:pPr>
+            </a:p>
+          </c:txPr>
+          <c:showLegendKey val="0"/>
+          <c:showVal val="1"/>
+          <c:showCatName val="0"/>
+          <c:showSerName val="0"/>
+          <c:showPercent val="0"/>
+          <c:showBubbleSize val="0"/>
+          <c:showLeaderLines val="0"/>
+        </c:dLbls>
+        <c:gapWidth val="150"/>
+        <c:overlap val="0"/>
+        <c:axId val="2094734554"/>
+        <c:axId val="2094734552"/>
+        <c:axId val="2094734556"/>
+      </c:barChart>
+      <c:catAx>
+        <c:axId val="2094734554"/>
+        <c:scaling>
+          <c:orientation val="minMax"/>
+        </c:scaling>
+        <c:delete val="0"/>
+        <c:axPos val="b"/>
+        <c:title>
+          <c:tx>
+            <c:rich>
+              <a:bodyPr/>
+              <a:lstStyle/>
+              <a:p>
+                <a:pPr>
+                  <a:defRPr sz="1100" b="0" i="0" u="none" strike="noStrike">
+                    <a:solidFill>
+                      <a:srgbClr val="5B6B7A"/>
+                    </a:solidFill>
+                    <a:latin typeface="Arial"/>
+                  </a:defRPr>
+                </a:pPr>
+                <a:r>
+                  <a:rPr sz="1100" b="0" i="0" u="none" strike="noStrike">
+                    <a:solidFill>
+                      <a:srgbClr val="5B6B7A"/>
+                    </a:solidFill>
+                    <a:latin typeface="Arial"/>
+                  </a:rPr>
+                  <a:t>Share of a sender's neighbours that are malicious</a:t>
+                </a:r>
+              </a:p>
+            </c:rich>
+          </c:tx>
+          <c:layout/>
+          <c:overlay val="0"/>
+        </c:title>
+        <c:numFmt formatCode="General" sourceLinked="1"/>
+        <c:majorTickMark val="out"/>
+        <c:minorTickMark val="none"/>
+        <c:tickLblPos val="low"/>
+        <c:spPr>
+          <a:ln w="12700" cap="flat">
+            <a:solidFill>
+              <a:srgbClr val="888888"/>
+            </a:solidFill>
+            <a:prstDash val="solid"/>
+            <a:round/>
+          </a:ln>
+        </c:spPr>
+        <c:txPr>
+          <a:bodyPr/>
+          <a:lstStyle/>
+          <a:p>
+            <a:pPr>
+              <a:defRPr sz="1200" b="0" i="0" u="none" strike="noStrike">
+                <a:solidFill>
+                  <a:srgbClr val="1B2A38"/>
+                </a:solidFill>
+                <a:latin typeface="Arial"/>
+              </a:defRPr>
+            </a:pPr>
+            <a:endParaRPr lang="en-US"/>
+          </a:p>
+        </c:txPr>
+        <c:crossAx val="2094734552"/>
+        <c:crosses val="autoZero"/>
+        <c:auto val="1"/>
+        <c:lblAlgn val="ctr"/>
+        <c:noMultiLvlLbl val="1"/>
+      </c:catAx>
+      <c:valAx>
+        <c:axId val="2094734552"/>
+        <c:scaling>
+          <c:orientation val="minMax"/>
+          <c:max val="1"/>
+          <c:min val="0.9"/>
+        </c:scaling>
+        <c:delete val="0"/>
+        <c:axPos val="l"/>
+        <c:majorGridlines>
+          <c:spPr>
+            <a:ln w="6350" cap="flat">
+              <a:solidFill>
+                <a:srgbClr val="E3E8EC"/>
+              </a:solidFill>
+              <a:prstDash val="solid"/>
+              <a:round/>
+            </a:ln>
+          </c:spPr>
+        </c:majorGridlines>
+        <c:title>
+          <c:tx>
+            <c:rich>
+              <a:bodyPr/>
+              <a:lstStyle/>
+              <a:p>
+                <a:pPr>
+                  <a:defRPr sz="1100" b="0" i="0" u="none" strike="noStrike">
+                    <a:solidFill>
+                      <a:srgbClr val="5B6B7A"/>
+                    </a:solidFill>
+                    <a:latin typeface="Arial"/>
+                  </a:defRPr>
+                </a:pPr>
+                <a:r>
+                  <a:rPr sz="1100" b="0" i="0" u="none" strike="noStrike">
+                    <a:solidFill>
+                      <a:srgbClr val="5B6B7A"/>
+                    </a:solidFill>
+                    <a:latin typeface="Arial"/>
+                  </a:rPr>
+                  <a:t>Recall</a:t>
+                </a:r>
+              </a:p>
+            </c:rich>
+          </c:tx>
+          <c:layout/>
+          <c:overlay val="0"/>
+        </c:title>
+        <c:numFmt formatCode="0.00" sourceLinked="0"/>
+        <c:majorTickMark val="out"/>
+        <c:minorTickMark val="none"/>
+        <c:tickLblPos val="nextTo"/>
+        <c:spPr>
+          <a:ln w="12700" cap="flat">
+            <a:solidFill>
+              <a:srgbClr val="888888"/>
+            </a:solidFill>
+            <a:prstDash val="solid"/>
+            <a:round/>
+          </a:ln>
+        </c:spPr>
+        <c:txPr>
+          <a:bodyPr/>
+          <a:lstStyle/>
+          <a:p>
+            <a:pPr>
+              <a:defRPr sz="1100" b="0" i="0" u="none" strike="noStrike">
+                <a:solidFill>
+                  <a:srgbClr val="5B6B7A"/>
+                </a:solidFill>
+                <a:latin typeface="Arial"/>
+              </a:defRPr>
+            </a:pPr>
+            <a:endParaRPr lang="en-US"/>
+          </a:p>
+        </c:txPr>
+        <c:crossAx val="2094734554"/>
+        <c:crosses val="autoZero"/>
+        <c:crossBetween val="between"/>
+        <c:majorUnit val="0.02"/>
+      </c:valAx>
+      <c:spPr>
+        <a:noFill/>
+        <a:ln>
+          <a:noFill/>
+        </a:ln>
+        <a:effectLst/>
+      </c:spPr>
+    </c:plotArea>
+    <c:legend>
+      <c:legendPos val="b"/>
+      <c:overlay val="0"/>
+      <c:txPr>
+        <a:bodyPr/>
+        <a:lstStyle/>
+        <a:p>
+          <a:pPr>
+            <a:defRPr sz="1100">
+              <a:solidFill>
+                <a:srgbClr val="1B2A38"/>
+              </a:solidFill>
+            </a:defRPr>
+          </a:pPr>
+          <a:endParaRPr lang="en-US"/>
+        </a:p>
+      </c:txPr>
+    </c:legend>
+    <c:plotVisOnly val="1"/>
+    <c:dispBlanksAs val="span"/>
+  </c:chart>
+  <c:spPr>
+    <a:noFill/>
+    <a:ln>
+      <a:noFill/>
+    </a:ln>
+    <a:effectLst/>
+  </c:spPr>
+  <c:externalData r:id="rId1">
+    <c:autoUpdate val="0"/>
+  </c:externalData>
+</c:chartSpace>
+</file>
+
 <file path=ppt/notesMasters/notesMaster1.xml><?xml version="1.0" encoding="utf-8"?>
 <p:notesMaster xmlns:a="http://schemas.openxmlformats.org/drawingml/2006/main" xmlns:r="http://schemas.openxmlformats.org/officeDocument/2006/relationships" xmlns:p="http://schemas.openxmlformats.org/presentationml/2006/main">
   <p:cSld>
@@ -1375,7 +1790,7 @@
           <a:p>
             <a:r>
               <a:rPr lang="en-US" dirty="0"/>
-              <a:t/>
+              <a:t>Addresses professor point 1: precision, recall, F1, FPR and detection latency.</a:t>
             </a:r>
             <a:endParaRPr lang="en-US" dirty="0"/>
           </a:p>
@@ -1463,7 +1878,7 @@
           <a:p>
             <a:r>
               <a:rPr lang="en-US" dirty="0"/>
-              <a:t/>
+              <a:t>Addresses professor point 2. Recall by share of malicious neighbours; false-positive rate stays below 0.8% in every bucket.</a:t>
             </a:r>
             <a:endParaRPr lang="en-US" dirty="0"/>
           </a:p>
@@ -1487,6 +1902,94 @@
             <a:fld id="{F7021451-1387-4CA6-816F-3879F97B5CBC}" type="slidenum">
               <a:rPr lang="en-US"/>
               <a:t>7</a:t>
+            </a:fld>
+            <a:endParaRPr lang="en-US"/>
+          </a:p>
+        </p:txBody>
+      </p:sp>
+    </p:spTree>
+    <p:extLst>
+      <p:ext uri="{BB962C8B-B14F-4D97-AF65-F5344CB8AC3E}">
+        <p14:creationId xmlns:p14="http://schemas.microsoft.com/office/powerpoint/2010/main" val="1024086991"/>
+      </p:ext>
+    </p:extLst>
+  </p:cSld>
+  <p:clrMapOvr>
+    <a:masterClrMapping/>
+  </p:clrMapOvr>
+</p:notes>
+</file>
+
+<file path=ppt/notesSlides/notesSlide8.xml><?xml version="1.0" encoding="utf-8"?>
+<p:notes xmlns:a="http://schemas.openxmlformats.org/drawingml/2006/main" xmlns:r="http://schemas.openxmlformats.org/officeDocument/2006/relationships" xmlns:p="http://schemas.openxmlformats.org/presentationml/2006/main">
+  <p:cSld>
+    <p:spTree>
+      <p:nvGrpSpPr>
+        <p:cNvPr id="1" name=""/>
+        <p:cNvGrpSpPr/>
+        <p:nvPr/>
+      </p:nvGrpSpPr>
+      <p:grpSpPr>
+        <a:xfrm>
+          <a:off x="0" y="0"/>
+          <a:ext cx="0" cy="0"/>
+          <a:chOff x="0" y="0"/>
+          <a:chExt cx="0" cy="0"/>
+        </a:xfrm>
+      </p:grpSpPr>
+      <p:sp>
+        <p:nvSpPr>
+          <p:cNvPr id="2" name="Slide Image Placeholder 1"/>
+          <p:cNvSpPr>
+            <a:spLocks noGrp="1" noRot="1" noChangeAspect="1"/>
+          </p:cNvSpPr>
+          <p:nvPr>
+            <p:ph type="sldImg"/>
+          </p:nvPr>
+        </p:nvSpPr>
+        <p:spPr/>
+      </p:sp>
+      <p:sp>
+        <p:nvSpPr>
+          <p:cNvPr id="3" name="Notes Placeholder 2"/>
+          <p:cNvSpPr>
+            <a:spLocks noGrp="1"/>
+          </p:cNvSpPr>
+          <p:nvPr>
+            <p:ph type="body" idx="1"/>
+          </p:nvPr>
+        </p:nvSpPr>
+        <p:spPr/>
+        <p:txBody>
+          <a:bodyPr/>
+          <a:lstStyle/>
+          <a:p>
+            <a:r>
+              <a:rPr lang="en-US" dirty="0"/>
+              <a:t/>
+            </a:r>
+            <a:endParaRPr lang="en-US" dirty="0"/>
+          </a:p>
+        </p:txBody>
+      </p:sp>
+      <p:sp>
+        <p:nvSpPr>
+          <p:cNvPr id="4" name="Slide Number Placeholder 3"/>
+          <p:cNvSpPr>
+            <a:spLocks noGrp="1"/>
+          </p:cNvSpPr>
+          <p:nvPr>
+            <p:ph type="sldNum" sz="quarter" idx="10"/>
+          </p:nvPr>
+        </p:nvSpPr>
+        <p:spPr/>
+        <p:txBody>
+          <a:bodyPr/>
+          <a:lstStyle/>
+          <a:p>
+            <a:fld id="{F7021451-1387-4CA6-816F-3879F97B5CBC}" type="slidenum">
+              <a:rPr lang="en-US"/>
+              <a:t>8</a:t>
             </a:fld>
             <a:endParaRPr lang="en-US"/>
           </a:p>
@@ -3528,49 +4031,1051 @@
                 <a:ea typeface="Cambria" pitchFamily="34" charset="-122"/>
                 <a:cs typeface="Cambria" pitchFamily="34" charset="-120"/>
               </a:rPr>
-              <a:t>Professor feedback: in progress</a:t>
+              <a:t>Full metric set and detection latency</a:t>
             </a:r>
             <a:endParaRPr lang="en-US" sz="3200" dirty="0"/>
           </a:p>
         </p:txBody>
       </p:sp>
-      <p:sp>
-        <p:nvSpPr>
-          <p:cNvPr id="3" name="card"/>
-          <p:cNvSpPr/>
+      <p:graphicFrame>
+        <p:nvGraphicFramePr>
+          <p:cNvPr id="7" name="Table 0"/>
+          <p:cNvGraphicFramePr>
+            <a:graphicFrameLocks noGrp="1"/>
+          </p:cNvGraphicFramePr>
+          <p:nvPr>
+            <p:extLst>
+              <p:ext uri="{D42A27DB-BD31-4B8C-83A1-F6EECF244321}">
+                <p14:modId xmlns:p14="http://schemas.microsoft.com/office/powerpoint/2010/main" val="1579011935"/>
+              </p:ext>
+            </p:extLst>
+          </p:nvPr>
+        </p:nvGraphicFramePr>
+        <p:xfrm>
+          <a:off x="548640" y="1188720"/>
+          <a:ext cx="8046720" cy="914400"/>
+        </p:xfrm>
+        <a:graphic>
+          <a:graphicData uri="http://schemas.openxmlformats.org/drawingml/2006/table">
+            <a:tbl>
+              <a:tblPr/>
+              <a:tblGrid>
+                <a:gridCol w="2194560"/>
+                <a:gridCol w="1463040"/>
+                <a:gridCol w="1463040"/>
+                <a:gridCol w="1463040"/>
+                <a:gridCol w="1463040"/>
+              </a:tblGrid>
+              <a:tr h="384048">
+                <a:tc>
+                  <a:txBody>
+                    <a:bodyPr/>
+                    <a:lstStyle/>
+                    <a:p>
+                      <a:pPr algn="ctr" indent="0" marL="0">
+                        <a:buNone/>
+                      </a:pPr>
+                      <a:r>
+                        <a:rPr lang="en-US" sz="1300" b="1" dirty="0">
+                          <a:solidFill>
+                            <a:srgbClr val="FFFFFF"/>
+                          </a:solidFill>
+                          <a:latin typeface="Calibri" pitchFamily="34" charset="0"/>
+                          <a:ea typeface="Calibri" pitchFamily="34" charset="-122"/>
+                          <a:cs typeface="Calibri" pitchFamily="34" charset="-120"/>
+                        </a:rPr>
+                        <a:t>Model</a:t>
+                      </a:r>
+                      <a:endParaRPr lang="en-US" sz="1300" dirty="0">
+                        <a:latin typeface="Calibri" charset="0"/>
+                        <a:ea typeface="Calibri" charset="0"/>
+                        <a:cs typeface="Calibri" charset="0"/>
+                      </a:endParaRPr>
+                    </a:p>
+                  </a:txBody>
+                  <a:tcPr marL="91440" marR="91440" marT="45720" marB="45720">
+                    <a:lnL w="9525" cap="flat" cmpd="sng" algn="ctr">
+                      <a:solidFill>
+                        <a:srgbClr val="D5DDE3"/>
+                      </a:solidFill>
+                      <a:prstDash val="solid"/>
+                      <a:round/>
+                      <a:headEnd type="none" w="med" len="med"/>
+                      <a:tailEnd type="none" w="med" len="med"/>
+                    </a:lnL>
+                    <a:lnR w="9525" cap="flat" cmpd="sng" algn="ctr">
+                      <a:solidFill>
+                        <a:srgbClr val="D5DDE3"/>
+                      </a:solidFill>
+                      <a:prstDash val="solid"/>
+                      <a:round/>
+                      <a:headEnd type="none" w="med" len="med"/>
+                      <a:tailEnd type="none" w="med" len="med"/>
+                    </a:lnR>
+                    <a:lnT w="9525" cap="flat" cmpd="sng" algn="ctr">
+                      <a:solidFill>
+                        <a:srgbClr val="D5DDE3"/>
+                      </a:solidFill>
+                      <a:prstDash val="solid"/>
+                      <a:round/>
+                      <a:headEnd type="none" w="med" len="med"/>
+                      <a:tailEnd type="none" w="med" len="med"/>
+                    </a:lnT>
+                    <a:lnB w="9525" cap="flat" cmpd="sng" algn="ctr">
+                      <a:solidFill>
+                        <a:srgbClr val="D5DDE3"/>
+                      </a:solidFill>
+                      <a:prstDash val="solid"/>
+                      <a:round/>
+                      <a:headEnd type="none" w="med" len="med"/>
+                      <a:tailEnd type="none" w="med" len="med"/>
+                    </a:lnB>
+                    <a:solidFill>
+                      <a:srgbClr val="0B1F33"/>
+                    </a:solidFill>
+                  </a:tcPr>
+                </a:tc>
+                <a:tc>
+                  <a:txBody>
+                    <a:bodyPr/>
+                    <a:lstStyle/>
+                    <a:p>
+                      <a:pPr algn="ctr" indent="0" marL="0">
+                        <a:buNone/>
+                      </a:pPr>
+                      <a:r>
+                        <a:rPr lang="en-US" sz="1300" b="1" dirty="0">
+                          <a:solidFill>
+                            <a:srgbClr val="FFFFFF"/>
+                          </a:solidFill>
+                          <a:latin typeface="Calibri" pitchFamily="34" charset="0"/>
+                          <a:ea typeface="Calibri" pitchFamily="34" charset="-122"/>
+                          <a:cs typeface="Calibri" pitchFamily="34" charset="-120"/>
+                        </a:rPr>
+                        <a:t>Precision</a:t>
+                      </a:r>
+                      <a:endParaRPr lang="en-US" sz="1300" dirty="0">
+                        <a:latin typeface="Calibri" charset="0"/>
+                        <a:ea typeface="Calibri" charset="0"/>
+                        <a:cs typeface="Calibri" charset="0"/>
+                      </a:endParaRPr>
+                    </a:p>
+                  </a:txBody>
+                  <a:tcPr marL="91440" marR="91440" marT="45720" marB="45720">
+                    <a:lnL w="9525" cap="flat" cmpd="sng" algn="ctr">
+                      <a:solidFill>
+                        <a:srgbClr val="D5DDE3"/>
+                      </a:solidFill>
+                      <a:prstDash val="solid"/>
+                      <a:round/>
+                      <a:headEnd type="none" w="med" len="med"/>
+                      <a:tailEnd type="none" w="med" len="med"/>
+                    </a:lnL>
+                    <a:lnR w="9525" cap="flat" cmpd="sng" algn="ctr">
+                      <a:solidFill>
+                        <a:srgbClr val="D5DDE3"/>
+                      </a:solidFill>
+                      <a:prstDash val="solid"/>
+                      <a:round/>
+                      <a:headEnd type="none" w="med" len="med"/>
+                      <a:tailEnd type="none" w="med" len="med"/>
+                    </a:lnR>
+                    <a:lnT w="9525" cap="flat" cmpd="sng" algn="ctr">
+                      <a:solidFill>
+                        <a:srgbClr val="D5DDE3"/>
+                      </a:solidFill>
+                      <a:prstDash val="solid"/>
+                      <a:round/>
+                      <a:headEnd type="none" w="med" len="med"/>
+                      <a:tailEnd type="none" w="med" len="med"/>
+                    </a:lnT>
+                    <a:lnB w="9525" cap="flat" cmpd="sng" algn="ctr">
+                      <a:solidFill>
+                        <a:srgbClr val="D5DDE3"/>
+                      </a:solidFill>
+                      <a:prstDash val="solid"/>
+                      <a:round/>
+                      <a:headEnd type="none" w="med" len="med"/>
+                      <a:tailEnd type="none" w="med" len="med"/>
+                    </a:lnB>
+                    <a:solidFill>
+                      <a:srgbClr val="0B1F33"/>
+                    </a:solidFill>
+                  </a:tcPr>
+                </a:tc>
+                <a:tc>
+                  <a:txBody>
+                    <a:bodyPr/>
+                    <a:lstStyle/>
+                    <a:p>
+                      <a:pPr algn="ctr" indent="0" marL="0">
+                        <a:buNone/>
+                      </a:pPr>
+                      <a:r>
+                        <a:rPr lang="en-US" sz="1300" b="1" dirty="0">
+                          <a:solidFill>
+                            <a:srgbClr val="FFFFFF"/>
+                          </a:solidFill>
+                          <a:latin typeface="Calibri" pitchFamily="34" charset="0"/>
+                          <a:ea typeface="Calibri" pitchFamily="34" charset="-122"/>
+                          <a:cs typeface="Calibri" pitchFamily="34" charset="-120"/>
+                        </a:rPr>
+                        <a:t>Recall</a:t>
+                      </a:r>
+                      <a:endParaRPr lang="en-US" sz="1300" dirty="0">
+                        <a:latin typeface="Calibri" charset="0"/>
+                        <a:ea typeface="Calibri" charset="0"/>
+                        <a:cs typeface="Calibri" charset="0"/>
+                      </a:endParaRPr>
+                    </a:p>
+                  </a:txBody>
+                  <a:tcPr marL="91440" marR="91440" marT="45720" marB="45720">
+                    <a:lnL w="9525" cap="flat" cmpd="sng" algn="ctr">
+                      <a:solidFill>
+                        <a:srgbClr val="D5DDE3"/>
+                      </a:solidFill>
+                      <a:prstDash val="solid"/>
+                      <a:round/>
+                      <a:headEnd type="none" w="med" len="med"/>
+                      <a:tailEnd type="none" w="med" len="med"/>
+                    </a:lnL>
+                    <a:lnR w="9525" cap="flat" cmpd="sng" algn="ctr">
+                      <a:solidFill>
+                        <a:srgbClr val="D5DDE3"/>
+                      </a:solidFill>
+                      <a:prstDash val="solid"/>
+                      <a:round/>
+                      <a:headEnd type="none" w="med" len="med"/>
+                      <a:tailEnd type="none" w="med" len="med"/>
+                    </a:lnR>
+                    <a:lnT w="9525" cap="flat" cmpd="sng" algn="ctr">
+                      <a:solidFill>
+                        <a:srgbClr val="D5DDE3"/>
+                      </a:solidFill>
+                      <a:prstDash val="solid"/>
+                      <a:round/>
+                      <a:headEnd type="none" w="med" len="med"/>
+                      <a:tailEnd type="none" w="med" len="med"/>
+                    </a:lnT>
+                    <a:lnB w="9525" cap="flat" cmpd="sng" algn="ctr">
+                      <a:solidFill>
+                        <a:srgbClr val="D5DDE3"/>
+                      </a:solidFill>
+                      <a:prstDash val="solid"/>
+                      <a:round/>
+                      <a:headEnd type="none" w="med" len="med"/>
+                      <a:tailEnd type="none" w="med" len="med"/>
+                    </a:lnB>
+                    <a:solidFill>
+                      <a:srgbClr val="0B1F33"/>
+                    </a:solidFill>
+                  </a:tcPr>
+                </a:tc>
+                <a:tc>
+                  <a:txBody>
+                    <a:bodyPr/>
+                    <a:lstStyle/>
+                    <a:p>
+                      <a:pPr algn="ctr" indent="0" marL="0">
+                        <a:buNone/>
+                      </a:pPr>
+                      <a:r>
+                        <a:rPr lang="en-US" sz="1300" b="1" dirty="0">
+                          <a:solidFill>
+                            <a:srgbClr val="FFFFFF"/>
+                          </a:solidFill>
+                          <a:latin typeface="Calibri" pitchFamily="34" charset="0"/>
+                          <a:ea typeface="Calibri" pitchFamily="34" charset="-122"/>
+                          <a:cs typeface="Calibri" pitchFamily="34" charset="-120"/>
+                        </a:rPr>
+                        <a:t>F1</a:t>
+                      </a:r>
+                      <a:endParaRPr lang="en-US" sz="1300" dirty="0">
+                        <a:latin typeface="Calibri" charset="0"/>
+                        <a:ea typeface="Calibri" charset="0"/>
+                        <a:cs typeface="Calibri" charset="0"/>
+                      </a:endParaRPr>
+                    </a:p>
+                  </a:txBody>
+                  <a:tcPr marL="91440" marR="91440" marT="45720" marB="45720">
+                    <a:lnL w="9525" cap="flat" cmpd="sng" algn="ctr">
+                      <a:solidFill>
+                        <a:srgbClr val="D5DDE3"/>
+                      </a:solidFill>
+                      <a:prstDash val="solid"/>
+                      <a:round/>
+                      <a:headEnd type="none" w="med" len="med"/>
+                      <a:tailEnd type="none" w="med" len="med"/>
+                    </a:lnL>
+                    <a:lnR w="9525" cap="flat" cmpd="sng" algn="ctr">
+                      <a:solidFill>
+                        <a:srgbClr val="D5DDE3"/>
+                      </a:solidFill>
+                      <a:prstDash val="solid"/>
+                      <a:round/>
+                      <a:headEnd type="none" w="med" len="med"/>
+                      <a:tailEnd type="none" w="med" len="med"/>
+                    </a:lnR>
+                    <a:lnT w="9525" cap="flat" cmpd="sng" algn="ctr">
+                      <a:solidFill>
+                        <a:srgbClr val="D5DDE3"/>
+                      </a:solidFill>
+                      <a:prstDash val="solid"/>
+                      <a:round/>
+                      <a:headEnd type="none" w="med" len="med"/>
+                      <a:tailEnd type="none" w="med" len="med"/>
+                    </a:lnT>
+                    <a:lnB w="9525" cap="flat" cmpd="sng" algn="ctr">
+                      <a:solidFill>
+                        <a:srgbClr val="D5DDE3"/>
+                      </a:solidFill>
+                      <a:prstDash val="solid"/>
+                      <a:round/>
+                      <a:headEnd type="none" w="med" len="med"/>
+                      <a:tailEnd type="none" w="med" len="med"/>
+                    </a:lnB>
+                    <a:solidFill>
+                      <a:srgbClr val="0B1F33"/>
+                    </a:solidFill>
+                  </a:tcPr>
+                </a:tc>
+                <a:tc>
+                  <a:txBody>
+                    <a:bodyPr/>
+                    <a:lstStyle/>
+                    <a:p>
+                      <a:pPr algn="ctr" indent="0" marL="0">
+                        <a:buNone/>
+                      </a:pPr>
+                      <a:r>
+                        <a:rPr lang="en-US" sz="1300" b="1" dirty="0">
+                          <a:solidFill>
+                            <a:srgbClr val="FFFFFF"/>
+                          </a:solidFill>
+                          <a:latin typeface="Calibri" pitchFamily="34" charset="0"/>
+                          <a:ea typeface="Calibri" pitchFamily="34" charset="-122"/>
+                          <a:cs typeface="Calibri" pitchFamily="34" charset="-120"/>
+                        </a:rPr>
+                        <a:t>False-pos. rate</a:t>
+                      </a:r>
+                      <a:endParaRPr lang="en-US" sz="1300" dirty="0">
+                        <a:latin typeface="Calibri" charset="0"/>
+                        <a:ea typeface="Calibri" charset="0"/>
+                        <a:cs typeface="Calibri" charset="0"/>
+                      </a:endParaRPr>
+                    </a:p>
+                  </a:txBody>
+                  <a:tcPr marL="91440" marR="91440" marT="45720" marB="45720">
+                    <a:lnL w="9525" cap="flat" cmpd="sng" algn="ctr">
+                      <a:solidFill>
+                        <a:srgbClr val="D5DDE3"/>
+                      </a:solidFill>
+                      <a:prstDash val="solid"/>
+                      <a:round/>
+                      <a:headEnd type="none" w="med" len="med"/>
+                      <a:tailEnd type="none" w="med" len="med"/>
+                    </a:lnL>
+                    <a:lnR w="9525" cap="flat" cmpd="sng" algn="ctr">
+                      <a:solidFill>
+                        <a:srgbClr val="D5DDE3"/>
+                      </a:solidFill>
+                      <a:prstDash val="solid"/>
+                      <a:round/>
+                      <a:headEnd type="none" w="med" len="med"/>
+                      <a:tailEnd type="none" w="med" len="med"/>
+                    </a:lnR>
+                    <a:lnT w="9525" cap="flat" cmpd="sng" algn="ctr">
+                      <a:solidFill>
+                        <a:srgbClr val="D5DDE3"/>
+                      </a:solidFill>
+                      <a:prstDash val="solid"/>
+                      <a:round/>
+                      <a:headEnd type="none" w="med" len="med"/>
+                      <a:tailEnd type="none" w="med" len="med"/>
+                    </a:lnT>
+                    <a:lnB w="9525" cap="flat" cmpd="sng" algn="ctr">
+                      <a:solidFill>
+                        <a:srgbClr val="D5DDE3"/>
+                      </a:solidFill>
+                      <a:prstDash val="solid"/>
+                      <a:round/>
+                      <a:headEnd type="none" w="med" len="med"/>
+                      <a:tailEnd type="none" w="med" len="med"/>
+                    </a:lnB>
+                    <a:solidFill>
+                      <a:srgbClr val="0B1F33"/>
+                    </a:solidFill>
+                  </a:tcPr>
+                </a:tc>
+              </a:tr>
+              <a:tr h="384048">
+                <a:tc>
+                  <a:txBody>
+                    <a:bodyPr/>
+                    <a:lstStyle/>
+                    <a:p>
+                      <a:pPr algn="l" indent="0" marL="0">
+                        <a:buNone/>
+                      </a:pPr>
+                      <a:r>
+                        <a:rPr lang="en-US" sz="1300" dirty="0">
+                          <a:solidFill>
+                            <a:srgbClr val="1B2A38"/>
+                          </a:solidFill>
+                          <a:latin typeface="Calibri" pitchFamily="34" charset="0"/>
+                          <a:ea typeface="Calibri" pitchFamily="34" charset="-122"/>
+                          <a:cs typeface="Calibri" pitchFamily="34" charset="-120"/>
+                        </a:rPr>
+                        <a:t>Per-sender</a:t>
+                      </a:r>
+                      <a:endParaRPr lang="en-US" sz="1300" dirty="0">
+                        <a:latin typeface="Calibri" charset="0"/>
+                        <a:ea typeface="Calibri" charset="0"/>
+                        <a:cs typeface="Calibri" charset="0"/>
+                      </a:endParaRPr>
+                    </a:p>
+                  </a:txBody>
+                  <a:tcPr marL="91440" marR="91440" marT="45720" marB="45720">
+                    <a:lnL w="9525" cap="flat" cmpd="sng" algn="ctr">
+                      <a:solidFill>
+                        <a:srgbClr val="D5DDE3"/>
+                      </a:solidFill>
+                      <a:prstDash val="solid"/>
+                      <a:round/>
+                      <a:headEnd type="none" w="med" len="med"/>
+                      <a:tailEnd type="none" w="med" len="med"/>
+                    </a:lnL>
+                    <a:lnR w="9525" cap="flat" cmpd="sng" algn="ctr">
+                      <a:solidFill>
+                        <a:srgbClr val="D5DDE3"/>
+                      </a:solidFill>
+                      <a:prstDash val="solid"/>
+                      <a:round/>
+                      <a:headEnd type="none" w="med" len="med"/>
+                      <a:tailEnd type="none" w="med" len="med"/>
+                    </a:lnR>
+                    <a:lnT w="9525" cap="flat" cmpd="sng" algn="ctr">
+                      <a:solidFill>
+                        <a:srgbClr val="D5DDE3"/>
+                      </a:solidFill>
+                      <a:prstDash val="solid"/>
+                      <a:round/>
+                      <a:headEnd type="none" w="med" len="med"/>
+                      <a:tailEnd type="none" w="med" len="med"/>
+                    </a:lnT>
+                    <a:lnB w="9525" cap="flat" cmpd="sng" algn="ctr">
+                      <a:solidFill>
+                        <a:srgbClr val="D5DDE3"/>
+                      </a:solidFill>
+                      <a:prstDash val="solid"/>
+                      <a:round/>
+                      <a:headEnd type="none" w="med" len="med"/>
+                      <a:tailEnd type="none" w="med" len="med"/>
+                    </a:lnB>
+                  </a:tcPr>
+                </a:tc>
+                <a:tc>
+                  <a:txBody>
+                    <a:bodyPr/>
+                    <a:lstStyle/>
+                    <a:p>
+                      <a:pPr algn="ctr" indent="0" marL="0">
+                        <a:buNone/>
+                      </a:pPr>
+                      <a:r>
+                        <a:rPr lang="en-US" sz="1300" dirty="0">
+                          <a:solidFill>
+                            <a:srgbClr val="1B2A38"/>
+                          </a:solidFill>
+                          <a:latin typeface="Calibri" pitchFamily="34" charset="0"/>
+                          <a:ea typeface="Calibri" pitchFamily="34" charset="-122"/>
+                          <a:cs typeface="Calibri" pitchFamily="34" charset="-120"/>
+                        </a:rPr>
+                        <a:t>0.987</a:t>
+                      </a:r>
+                      <a:endParaRPr lang="en-US" sz="1300" dirty="0">
+                        <a:latin typeface="Calibri" charset="0"/>
+                        <a:ea typeface="Calibri" charset="0"/>
+                        <a:cs typeface="Calibri" charset="0"/>
+                      </a:endParaRPr>
+                    </a:p>
+                  </a:txBody>
+                  <a:tcPr marL="91440" marR="91440" marT="45720" marB="45720">
+                    <a:lnL w="9525" cap="flat" cmpd="sng" algn="ctr">
+                      <a:solidFill>
+                        <a:srgbClr val="D5DDE3"/>
+                      </a:solidFill>
+                      <a:prstDash val="solid"/>
+                      <a:round/>
+                      <a:headEnd type="none" w="med" len="med"/>
+                      <a:tailEnd type="none" w="med" len="med"/>
+                    </a:lnL>
+                    <a:lnR w="9525" cap="flat" cmpd="sng" algn="ctr">
+                      <a:solidFill>
+                        <a:srgbClr val="D5DDE3"/>
+                      </a:solidFill>
+                      <a:prstDash val="solid"/>
+                      <a:round/>
+                      <a:headEnd type="none" w="med" len="med"/>
+                      <a:tailEnd type="none" w="med" len="med"/>
+                    </a:lnR>
+                    <a:lnT w="9525" cap="flat" cmpd="sng" algn="ctr">
+                      <a:solidFill>
+                        <a:srgbClr val="D5DDE3"/>
+                      </a:solidFill>
+                      <a:prstDash val="solid"/>
+                      <a:round/>
+                      <a:headEnd type="none" w="med" len="med"/>
+                      <a:tailEnd type="none" w="med" len="med"/>
+                    </a:lnT>
+                    <a:lnB w="9525" cap="flat" cmpd="sng" algn="ctr">
+                      <a:solidFill>
+                        <a:srgbClr val="D5DDE3"/>
+                      </a:solidFill>
+                      <a:prstDash val="solid"/>
+                      <a:round/>
+                      <a:headEnd type="none" w="med" len="med"/>
+                      <a:tailEnd type="none" w="med" len="med"/>
+                    </a:lnB>
+                  </a:tcPr>
+                </a:tc>
+                <a:tc>
+                  <a:txBody>
+                    <a:bodyPr/>
+                    <a:lstStyle/>
+                    <a:p>
+                      <a:pPr algn="ctr" indent="0" marL="0">
+                        <a:buNone/>
+                      </a:pPr>
+                      <a:r>
+                        <a:rPr lang="en-US" sz="1300" dirty="0">
+                          <a:solidFill>
+                            <a:srgbClr val="1B2A38"/>
+                          </a:solidFill>
+                          <a:latin typeface="Calibri" pitchFamily="34" charset="0"/>
+                          <a:ea typeface="Calibri" pitchFamily="34" charset="-122"/>
+                          <a:cs typeface="Calibri" pitchFamily="34" charset="-120"/>
+                        </a:rPr>
+                        <a:t>0.959</a:t>
+                      </a:r>
+                      <a:endParaRPr lang="en-US" sz="1300" dirty="0">
+                        <a:latin typeface="Calibri" charset="0"/>
+                        <a:ea typeface="Calibri" charset="0"/>
+                        <a:cs typeface="Calibri" charset="0"/>
+                      </a:endParaRPr>
+                    </a:p>
+                  </a:txBody>
+                  <a:tcPr marL="91440" marR="91440" marT="45720" marB="45720">
+                    <a:lnL w="9525" cap="flat" cmpd="sng" algn="ctr">
+                      <a:solidFill>
+                        <a:srgbClr val="D5DDE3"/>
+                      </a:solidFill>
+                      <a:prstDash val="solid"/>
+                      <a:round/>
+                      <a:headEnd type="none" w="med" len="med"/>
+                      <a:tailEnd type="none" w="med" len="med"/>
+                    </a:lnL>
+                    <a:lnR w="9525" cap="flat" cmpd="sng" algn="ctr">
+                      <a:solidFill>
+                        <a:srgbClr val="D5DDE3"/>
+                      </a:solidFill>
+                      <a:prstDash val="solid"/>
+                      <a:round/>
+                      <a:headEnd type="none" w="med" len="med"/>
+                      <a:tailEnd type="none" w="med" len="med"/>
+                    </a:lnR>
+                    <a:lnT w="9525" cap="flat" cmpd="sng" algn="ctr">
+                      <a:solidFill>
+                        <a:srgbClr val="D5DDE3"/>
+                      </a:solidFill>
+                      <a:prstDash val="solid"/>
+                      <a:round/>
+                      <a:headEnd type="none" w="med" len="med"/>
+                      <a:tailEnd type="none" w="med" len="med"/>
+                    </a:lnT>
+                    <a:lnB w="9525" cap="flat" cmpd="sng" algn="ctr">
+                      <a:solidFill>
+                        <a:srgbClr val="D5DDE3"/>
+                      </a:solidFill>
+                      <a:prstDash val="solid"/>
+                      <a:round/>
+                      <a:headEnd type="none" w="med" len="med"/>
+                      <a:tailEnd type="none" w="med" len="med"/>
+                    </a:lnB>
+                  </a:tcPr>
+                </a:tc>
+                <a:tc>
+                  <a:txBody>
+                    <a:bodyPr/>
+                    <a:lstStyle/>
+                    <a:p>
+                      <a:pPr algn="ctr" indent="0" marL="0">
+                        <a:buNone/>
+                      </a:pPr>
+                      <a:r>
+                        <a:rPr lang="en-US" sz="1300" dirty="0">
+                          <a:solidFill>
+                            <a:srgbClr val="1B2A38"/>
+                          </a:solidFill>
+                          <a:latin typeface="Calibri" pitchFamily="34" charset="0"/>
+                          <a:ea typeface="Calibri" pitchFamily="34" charset="-122"/>
+                          <a:cs typeface="Calibri" pitchFamily="34" charset="-120"/>
+                        </a:rPr>
+                        <a:t>0.973</a:t>
+                      </a:r>
+                      <a:endParaRPr lang="en-US" sz="1300" dirty="0">
+                        <a:latin typeface="Calibri" charset="0"/>
+                        <a:ea typeface="Calibri" charset="0"/>
+                        <a:cs typeface="Calibri" charset="0"/>
+                      </a:endParaRPr>
+                    </a:p>
+                  </a:txBody>
+                  <a:tcPr marL="91440" marR="91440" marT="45720" marB="45720">
+                    <a:lnL w="9525" cap="flat" cmpd="sng" algn="ctr">
+                      <a:solidFill>
+                        <a:srgbClr val="D5DDE3"/>
+                      </a:solidFill>
+                      <a:prstDash val="solid"/>
+                      <a:round/>
+                      <a:headEnd type="none" w="med" len="med"/>
+                      <a:tailEnd type="none" w="med" len="med"/>
+                    </a:lnL>
+                    <a:lnR w="9525" cap="flat" cmpd="sng" algn="ctr">
+                      <a:solidFill>
+                        <a:srgbClr val="D5DDE3"/>
+                      </a:solidFill>
+                      <a:prstDash val="solid"/>
+                      <a:round/>
+                      <a:headEnd type="none" w="med" len="med"/>
+                      <a:tailEnd type="none" w="med" len="med"/>
+                    </a:lnR>
+                    <a:lnT w="9525" cap="flat" cmpd="sng" algn="ctr">
+                      <a:solidFill>
+                        <a:srgbClr val="D5DDE3"/>
+                      </a:solidFill>
+                      <a:prstDash val="solid"/>
+                      <a:round/>
+                      <a:headEnd type="none" w="med" len="med"/>
+                      <a:tailEnd type="none" w="med" len="med"/>
+                    </a:lnT>
+                    <a:lnB w="9525" cap="flat" cmpd="sng" algn="ctr">
+                      <a:solidFill>
+                        <a:srgbClr val="D5DDE3"/>
+                      </a:solidFill>
+                      <a:prstDash val="solid"/>
+                      <a:round/>
+                      <a:headEnd type="none" w="med" len="med"/>
+                      <a:tailEnd type="none" w="med" len="med"/>
+                    </a:lnB>
+                  </a:tcPr>
+                </a:tc>
+                <a:tc>
+                  <a:txBody>
+                    <a:bodyPr/>
+                    <a:lstStyle/>
+                    <a:p>
+                      <a:pPr algn="ctr" indent="0" marL="0">
+                        <a:buNone/>
+                      </a:pPr>
+                      <a:r>
+                        <a:rPr lang="en-US" sz="1300" dirty="0">
+                          <a:solidFill>
+                            <a:srgbClr val="1B2A38"/>
+                          </a:solidFill>
+                          <a:latin typeface="Calibri" pitchFamily="34" charset="0"/>
+                          <a:ea typeface="Calibri" pitchFamily="34" charset="-122"/>
+                          <a:cs typeface="Calibri" pitchFamily="34" charset="-120"/>
+                        </a:rPr>
+                        <a:t>0.5%</a:t>
+                      </a:r>
+                      <a:endParaRPr lang="en-US" sz="1300" dirty="0">
+                        <a:latin typeface="Calibri" charset="0"/>
+                        <a:ea typeface="Calibri" charset="0"/>
+                        <a:cs typeface="Calibri" charset="0"/>
+                      </a:endParaRPr>
+                    </a:p>
+                  </a:txBody>
+                  <a:tcPr marL="91440" marR="91440" marT="45720" marB="45720">
+                    <a:lnL w="9525" cap="flat" cmpd="sng" algn="ctr">
+                      <a:solidFill>
+                        <a:srgbClr val="D5DDE3"/>
+                      </a:solidFill>
+                      <a:prstDash val="solid"/>
+                      <a:round/>
+                      <a:headEnd type="none" w="med" len="med"/>
+                      <a:tailEnd type="none" w="med" len="med"/>
+                    </a:lnL>
+                    <a:lnR w="9525" cap="flat" cmpd="sng" algn="ctr">
+                      <a:solidFill>
+                        <a:srgbClr val="D5DDE3"/>
+                      </a:solidFill>
+                      <a:prstDash val="solid"/>
+                      <a:round/>
+                      <a:headEnd type="none" w="med" len="med"/>
+                      <a:tailEnd type="none" w="med" len="med"/>
+                    </a:lnR>
+                    <a:lnT w="9525" cap="flat" cmpd="sng" algn="ctr">
+                      <a:solidFill>
+                        <a:srgbClr val="D5DDE3"/>
+                      </a:solidFill>
+                      <a:prstDash val="solid"/>
+                      <a:round/>
+                      <a:headEnd type="none" w="med" len="med"/>
+                      <a:tailEnd type="none" w="med" len="med"/>
+                    </a:lnT>
+                    <a:lnB w="9525" cap="flat" cmpd="sng" algn="ctr">
+                      <a:solidFill>
+                        <a:srgbClr val="D5DDE3"/>
+                      </a:solidFill>
+                      <a:prstDash val="solid"/>
+                      <a:round/>
+                      <a:headEnd type="none" w="med" len="med"/>
+                      <a:tailEnd type="none" w="med" len="med"/>
+                    </a:lnB>
+                  </a:tcPr>
+                </a:tc>
+              </a:tr>
+              <a:tr h="384048">
+                <a:tc>
+                  <a:txBody>
+                    <a:bodyPr/>
+                    <a:lstStyle/>
+                    <a:p>
+                      <a:pPr algn="l" indent="0" marL="0">
+                        <a:buNone/>
+                      </a:pPr>
+                      <a:r>
+                        <a:rPr lang="en-US" sz="1300" dirty="0">
+                          <a:solidFill>
+                            <a:srgbClr val="1B2A38"/>
+                          </a:solidFill>
+                          <a:latin typeface="Calibri" pitchFamily="34" charset="0"/>
+                          <a:ea typeface="Calibri" pitchFamily="34" charset="-122"/>
+                          <a:cs typeface="Calibri" pitchFamily="34" charset="-120"/>
+                        </a:rPr>
+                        <a:t>Full model</a:t>
+                      </a:r>
+                      <a:endParaRPr lang="en-US" sz="1300" dirty="0">
+                        <a:latin typeface="Calibri" charset="0"/>
+                        <a:ea typeface="Calibri" charset="0"/>
+                        <a:cs typeface="Calibri" charset="0"/>
+                      </a:endParaRPr>
+                    </a:p>
+                  </a:txBody>
+                  <a:tcPr marL="91440" marR="91440" marT="45720" marB="45720">
+                    <a:lnL w="9525" cap="flat" cmpd="sng" algn="ctr">
+                      <a:solidFill>
+                        <a:srgbClr val="D5DDE3"/>
+                      </a:solidFill>
+                      <a:prstDash val="solid"/>
+                      <a:round/>
+                      <a:headEnd type="none" w="med" len="med"/>
+                      <a:tailEnd type="none" w="med" len="med"/>
+                    </a:lnL>
+                    <a:lnR w="9525" cap="flat" cmpd="sng" algn="ctr">
+                      <a:solidFill>
+                        <a:srgbClr val="D5DDE3"/>
+                      </a:solidFill>
+                      <a:prstDash val="solid"/>
+                      <a:round/>
+                      <a:headEnd type="none" w="med" len="med"/>
+                      <a:tailEnd type="none" w="med" len="med"/>
+                    </a:lnR>
+                    <a:lnT w="9525" cap="flat" cmpd="sng" algn="ctr">
+                      <a:solidFill>
+                        <a:srgbClr val="D5DDE3"/>
+                      </a:solidFill>
+                      <a:prstDash val="solid"/>
+                      <a:round/>
+                      <a:headEnd type="none" w="med" len="med"/>
+                      <a:tailEnd type="none" w="med" len="med"/>
+                    </a:lnT>
+                    <a:lnB w="9525" cap="flat" cmpd="sng" algn="ctr">
+                      <a:solidFill>
+                        <a:srgbClr val="D5DDE3"/>
+                      </a:solidFill>
+                      <a:prstDash val="solid"/>
+                      <a:round/>
+                      <a:headEnd type="none" w="med" len="med"/>
+                      <a:tailEnd type="none" w="med" len="med"/>
+                    </a:lnB>
+                  </a:tcPr>
+                </a:tc>
+                <a:tc>
+                  <a:txBody>
+                    <a:bodyPr/>
+                    <a:lstStyle/>
+                    <a:p>
+                      <a:pPr algn="ctr" indent="0" marL="0">
+                        <a:buNone/>
+                      </a:pPr>
+                      <a:r>
+                        <a:rPr lang="en-US" sz="1300" b="1" dirty="0">
+                          <a:solidFill>
+                            <a:srgbClr val="1B2A38"/>
+                          </a:solidFill>
+                          <a:latin typeface="Calibri" pitchFamily="34" charset="0"/>
+                          <a:ea typeface="Calibri" pitchFamily="34" charset="-122"/>
+                          <a:cs typeface="Calibri" pitchFamily="34" charset="-120"/>
+                        </a:rPr>
+                        <a:t>0.989</a:t>
+                      </a:r>
+                      <a:endParaRPr lang="en-US" sz="1300" dirty="0">
+                        <a:latin typeface="Calibri" charset="0"/>
+                        <a:ea typeface="Calibri" charset="0"/>
+                        <a:cs typeface="Calibri" charset="0"/>
+                      </a:endParaRPr>
+                    </a:p>
+                  </a:txBody>
+                  <a:tcPr marL="91440" marR="91440" marT="45720" marB="45720">
+                    <a:lnL w="9525" cap="flat" cmpd="sng" algn="ctr">
+                      <a:solidFill>
+                        <a:srgbClr val="D5DDE3"/>
+                      </a:solidFill>
+                      <a:prstDash val="solid"/>
+                      <a:round/>
+                      <a:headEnd type="none" w="med" len="med"/>
+                      <a:tailEnd type="none" w="med" len="med"/>
+                    </a:lnL>
+                    <a:lnR w="9525" cap="flat" cmpd="sng" algn="ctr">
+                      <a:solidFill>
+                        <a:srgbClr val="D5DDE3"/>
+                      </a:solidFill>
+                      <a:prstDash val="solid"/>
+                      <a:round/>
+                      <a:headEnd type="none" w="med" len="med"/>
+                      <a:tailEnd type="none" w="med" len="med"/>
+                    </a:lnR>
+                    <a:lnT w="9525" cap="flat" cmpd="sng" algn="ctr">
+                      <a:solidFill>
+                        <a:srgbClr val="D5DDE3"/>
+                      </a:solidFill>
+                      <a:prstDash val="solid"/>
+                      <a:round/>
+                      <a:headEnd type="none" w="med" len="med"/>
+                      <a:tailEnd type="none" w="med" len="med"/>
+                    </a:lnT>
+                    <a:lnB w="9525" cap="flat" cmpd="sng" algn="ctr">
+                      <a:solidFill>
+                        <a:srgbClr val="D5DDE3"/>
+                      </a:solidFill>
+                      <a:prstDash val="solid"/>
+                      <a:round/>
+                      <a:headEnd type="none" w="med" len="med"/>
+                      <a:tailEnd type="none" w="med" len="med"/>
+                    </a:lnB>
+                  </a:tcPr>
+                </a:tc>
+                <a:tc>
+                  <a:txBody>
+                    <a:bodyPr/>
+                    <a:lstStyle/>
+                    <a:p>
+                      <a:pPr algn="ctr" indent="0" marL="0">
+                        <a:buNone/>
+                      </a:pPr>
+                      <a:r>
+                        <a:rPr lang="en-US" sz="1300" b="1" dirty="0">
+                          <a:solidFill>
+                            <a:srgbClr val="1B2A38"/>
+                          </a:solidFill>
+                          <a:latin typeface="Calibri" pitchFamily="34" charset="0"/>
+                          <a:ea typeface="Calibri" pitchFamily="34" charset="-122"/>
+                          <a:cs typeface="Calibri" pitchFamily="34" charset="-120"/>
+                        </a:rPr>
+                        <a:t>0.975</a:t>
+                      </a:r>
+                      <a:endParaRPr lang="en-US" sz="1300" dirty="0">
+                        <a:latin typeface="Calibri" charset="0"/>
+                        <a:ea typeface="Calibri" charset="0"/>
+                        <a:cs typeface="Calibri" charset="0"/>
+                      </a:endParaRPr>
+                    </a:p>
+                  </a:txBody>
+                  <a:tcPr marL="91440" marR="91440" marT="45720" marB="45720">
+                    <a:lnL w="9525" cap="flat" cmpd="sng" algn="ctr">
+                      <a:solidFill>
+                        <a:srgbClr val="D5DDE3"/>
+                      </a:solidFill>
+                      <a:prstDash val="solid"/>
+                      <a:round/>
+                      <a:headEnd type="none" w="med" len="med"/>
+                      <a:tailEnd type="none" w="med" len="med"/>
+                    </a:lnL>
+                    <a:lnR w="9525" cap="flat" cmpd="sng" algn="ctr">
+                      <a:solidFill>
+                        <a:srgbClr val="D5DDE3"/>
+                      </a:solidFill>
+                      <a:prstDash val="solid"/>
+                      <a:round/>
+                      <a:headEnd type="none" w="med" len="med"/>
+                      <a:tailEnd type="none" w="med" len="med"/>
+                    </a:lnR>
+                    <a:lnT w="9525" cap="flat" cmpd="sng" algn="ctr">
+                      <a:solidFill>
+                        <a:srgbClr val="D5DDE3"/>
+                      </a:solidFill>
+                      <a:prstDash val="solid"/>
+                      <a:round/>
+                      <a:headEnd type="none" w="med" len="med"/>
+                      <a:tailEnd type="none" w="med" len="med"/>
+                    </a:lnT>
+                    <a:lnB w="9525" cap="flat" cmpd="sng" algn="ctr">
+                      <a:solidFill>
+                        <a:srgbClr val="D5DDE3"/>
+                      </a:solidFill>
+                      <a:prstDash val="solid"/>
+                      <a:round/>
+                      <a:headEnd type="none" w="med" len="med"/>
+                      <a:tailEnd type="none" w="med" len="med"/>
+                    </a:lnB>
+                  </a:tcPr>
+                </a:tc>
+                <a:tc>
+                  <a:txBody>
+                    <a:bodyPr/>
+                    <a:lstStyle/>
+                    <a:p>
+                      <a:pPr algn="ctr" indent="0" marL="0">
+                        <a:buNone/>
+                      </a:pPr>
+                      <a:r>
+                        <a:rPr lang="en-US" sz="1300" b="1" dirty="0">
+                          <a:solidFill>
+                            <a:srgbClr val="1B2A38"/>
+                          </a:solidFill>
+                          <a:latin typeface="Calibri" pitchFamily="34" charset="0"/>
+                          <a:ea typeface="Calibri" pitchFamily="34" charset="-122"/>
+                          <a:cs typeface="Calibri" pitchFamily="34" charset="-120"/>
+                        </a:rPr>
+                        <a:t>0.982</a:t>
+                      </a:r>
+                      <a:endParaRPr lang="en-US" sz="1300" dirty="0">
+                        <a:latin typeface="Calibri" charset="0"/>
+                        <a:ea typeface="Calibri" charset="0"/>
+                        <a:cs typeface="Calibri" charset="0"/>
+                      </a:endParaRPr>
+                    </a:p>
+                  </a:txBody>
+                  <a:tcPr marL="91440" marR="91440" marT="45720" marB="45720">
+                    <a:lnL w="9525" cap="flat" cmpd="sng" algn="ctr">
+                      <a:solidFill>
+                        <a:srgbClr val="D5DDE3"/>
+                      </a:solidFill>
+                      <a:prstDash val="solid"/>
+                      <a:round/>
+                      <a:headEnd type="none" w="med" len="med"/>
+                      <a:tailEnd type="none" w="med" len="med"/>
+                    </a:lnL>
+                    <a:lnR w="9525" cap="flat" cmpd="sng" algn="ctr">
+                      <a:solidFill>
+                        <a:srgbClr val="D5DDE3"/>
+                      </a:solidFill>
+                      <a:prstDash val="solid"/>
+                      <a:round/>
+                      <a:headEnd type="none" w="med" len="med"/>
+                      <a:tailEnd type="none" w="med" len="med"/>
+                    </a:lnR>
+                    <a:lnT w="9525" cap="flat" cmpd="sng" algn="ctr">
+                      <a:solidFill>
+                        <a:srgbClr val="D5DDE3"/>
+                      </a:solidFill>
+                      <a:prstDash val="solid"/>
+                      <a:round/>
+                      <a:headEnd type="none" w="med" len="med"/>
+                      <a:tailEnd type="none" w="med" len="med"/>
+                    </a:lnT>
+                    <a:lnB w="9525" cap="flat" cmpd="sng" algn="ctr">
+                      <a:solidFill>
+                        <a:srgbClr val="D5DDE3"/>
+                      </a:solidFill>
+                      <a:prstDash val="solid"/>
+                      <a:round/>
+                      <a:headEnd type="none" w="med" len="med"/>
+                      <a:tailEnd type="none" w="med" len="med"/>
+                    </a:lnB>
+                  </a:tcPr>
+                </a:tc>
+                <a:tc>
+                  <a:txBody>
+                    <a:bodyPr/>
+                    <a:lstStyle/>
+                    <a:p>
+                      <a:pPr algn="ctr" indent="0" marL="0">
+                        <a:buNone/>
+                      </a:pPr>
+                      <a:r>
+                        <a:rPr lang="en-US" sz="1300" b="1" dirty="0">
+                          <a:solidFill>
+                            <a:srgbClr val="1B2A38"/>
+                          </a:solidFill>
+                          <a:latin typeface="Calibri" pitchFamily="34" charset="0"/>
+                          <a:ea typeface="Calibri" pitchFamily="34" charset="-122"/>
+                          <a:cs typeface="Calibri" pitchFamily="34" charset="-120"/>
+                        </a:rPr>
+                        <a:t>0.5%</a:t>
+                      </a:r>
+                      <a:endParaRPr lang="en-US" sz="1300" dirty="0">
+                        <a:latin typeface="Calibri" charset="0"/>
+                        <a:ea typeface="Calibri" charset="0"/>
+                        <a:cs typeface="Calibri" charset="0"/>
+                      </a:endParaRPr>
+                    </a:p>
+                  </a:txBody>
+                  <a:tcPr marL="91440" marR="91440" marT="45720" marB="45720">
+                    <a:lnL w="9525" cap="flat" cmpd="sng" algn="ctr">
+                      <a:solidFill>
+                        <a:srgbClr val="D5DDE3"/>
+                      </a:solidFill>
+                      <a:prstDash val="solid"/>
+                      <a:round/>
+                      <a:headEnd type="none" w="med" len="med"/>
+                      <a:tailEnd type="none" w="med" len="med"/>
+                    </a:lnL>
+                    <a:lnR w="9525" cap="flat" cmpd="sng" algn="ctr">
+                      <a:solidFill>
+                        <a:srgbClr val="D5DDE3"/>
+                      </a:solidFill>
+                      <a:prstDash val="solid"/>
+                      <a:round/>
+                      <a:headEnd type="none" w="med" len="med"/>
+                      <a:tailEnd type="none" w="med" len="med"/>
+                    </a:lnR>
+                    <a:lnT w="9525" cap="flat" cmpd="sng" algn="ctr">
+                      <a:solidFill>
+                        <a:srgbClr val="D5DDE3"/>
+                      </a:solidFill>
+                      <a:prstDash val="solid"/>
+                      <a:round/>
+                      <a:headEnd type="none" w="med" len="med"/>
+                      <a:tailEnd type="none" w="med" len="med"/>
+                    </a:lnT>
+                    <a:lnB w="9525" cap="flat" cmpd="sng" algn="ctr">
+                      <a:solidFill>
+                        <a:srgbClr val="D5DDE3"/>
+                      </a:solidFill>
+                      <a:prstDash val="solid"/>
+                      <a:round/>
+                      <a:headEnd type="none" w="med" len="med"/>
+                      <a:tailEnd type="none" w="med" len="med"/>
+                    </a:lnB>
+                  </a:tcPr>
+                </a:tc>
+              </a:tr>
+            </a:tbl>
+          </a:graphicData>
+        </a:graphic>
+      </p:graphicFrame>
+      <p:sp>
+        <p:nvSpPr>
+          <p:cNvPr id="4" name="Text 1"/>
+          <p:cNvSpPr txBox="1"/>
           <p:nvPr/>
         </p:nvSpPr>
         <p:spPr>
           <a:xfrm>
-            <a:off x="548640" y="1188720"/>
-            <a:ext cx="3840480" cy="2286000"/>
-          </a:xfrm>
-          <a:prstGeom prst="roundRect">
-            <a:avLst>
-              <a:gd name="adj" fmla="val 3200"/>
-            </a:avLst>
-          </a:prstGeom>
-          <a:solidFill>
-            <a:srgbClr val="EAF2F3"/>
-          </a:solidFill>
-          <a:ln w="12700">
-            <a:solidFill>
-              <a:srgbClr val="EAF2F3"/>
-            </a:solidFill>
-            <a:prstDash val="solid"/>
-          </a:ln>
-        </p:spPr>
-      </p:sp>
-      <p:sp>
-        <p:nvSpPr>
-          <p:cNvPr id="4" name="Text 2"/>
-          <p:cNvSpPr txBox="1"/>
-          <p:nvPr/>
-        </p:nvSpPr>
-        <p:spPr>
-          <a:xfrm>
-            <a:off x="731520" y="1325880"/>
-            <a:ext cx="3474720" cy="365760"/>
+            <a:off x="548640" y="2606040"/>
+            <a:ext cx="8046720" cy="320040"/>
           </a:xfrm>
           <a:prstGeom prst="rect">
             <a:avLst/>
@@ -3586,7 +5091,7 @@
               <a:buNone/>
             </a:pPr>
             <a:r>
-              <a:rPr lang="en-US" sz="1600" b="1" dirty="0">
+              <a:rPr lang="en-US" sz="1800" b="1" dirty="0">
                 <a:solidFill>
                   <a:srgbClr val="1C7C7D"/>
                 </a:solidFill>
@@ -3594,22 +5099,22 @@
                 <a:ea typeface="Cambria" pitchFamily="34" charset="-122"/>
                 <a:cs typeface="Cambria" pitchFamily="34" charset="-120"/>
               </a:rPr>
-              <a:t>1. Full metric set</a:t>
-            </a:r>
-            <a:endParaRPr lang="en-US" sz="1600" dirty="0"/>
-          </a:p>
-        </p:txBody>
-      </p:sp>
-      <p:sp>
-        <p:nvSpPr>
-          <p:cNvPr id="5" name="Text 3"/>
+              <a:t>Detection latency</a:t>
+            </a:r>
+            <a:endParaRPr lang="en-US" sz="1800" dirty="0"/>
+          </a:p>
+        </p:txBody>
+      </p:sp>
+      <p:sp>
+        <p:nvSpPr>
+          <p:cNvPr id="5" name="Text 2"/>
           <p:cNvSpPr txBox="1"/>
           <p:nvPr/>
         </p:nvSpPr>
         <p:spPr>
           <a:xfrm>
-            <a:off x="731520" y="1737360"/>
-            <a:ext cx="3474720" cy="1600200"/>
+            <a:off x="548640" y="2971800"/>
+            <a:ext cx="2560320" cy="640080"/>
           </a:xfrm>
           <a:prstGeom prst="rect">
             <a:avLst/>
@@ -3618,14 +5123,53 @@
           <a:ln/>
         </p:spPr>
         <p:txBody>
-          <a:bodyPr wrap="square" lIns="0" tIns="0" rIns="0" bIns="0" rtlCol="0" anchor="t"/>
+          <a:bodyPr wrap="square" lIns="0" tIns="0" rIns="0" bIns="0" rtlCol="0" anchor="ctr"/>
           <a:lstStyle/>
           <a:p>
             <a:pPr indent="0" marL="0">
               <a:buNone/>
             </a:pPr>
             <a:r>
-              <a:rPr lang="en-US" sz="1400" dirty="0">
+              <a:rPr lang="en-US" sz="3600" b="1" dirty="0">
+                <a:solidFill>
+                  <a:srgbClr val="0B1F33"/>
+                </a:solidFill>
+                <a:latin typeface="Cambria" pitchFamily="34" charset="0"/>
+                <a:ea typeface="Cambria" pitchFamily="34" charset="-122"/>
+                <a:cs typeface="Cambria" pitchFamily="34" charset="-120"/>
+              </a:rPr>
+              <a:t>0.15 s</a:t>
+            </a:r>
+            <a:endParaRPr lang="en-US" sz="3600" dirty="0"/>
+          </a:p>
+        </p:txBody>
+      </p:sp>
+      <p:sp>
+        <p:nvSpPr>
+          <p:cNvPr id="6" name="Text 3"/>
+          <p:cNvSpPr txBox="1"/>
+          <p:nvPr/>
+        </p:nvSpPr>
+        <p:spPr>
+          <a:xfrm>
+            <a:off x="548640" y="3611880"/>
+            <a:ext cx="2468880" cy="640080"/>
+          </a:xfrm>
+          <a:prstGeom prst="rect">
+            <a:avLst/>
+          </a:prstGeom>
+          <a:noFill/>
+          <a:ln/>
+        </p:spPr>
+        <p:txBody>
+          <a:bodyPr wrap="square" lIns="0" tIns="0" rIns="0" bIns="0" rtlCol="0" anchor="t"/>
+          <a:lstStyle/>
+          <a:p>
+            <a:pPr indent="0" marL="0">
+              <a:buNone/>
+            </a:pPr>
+            <a:r>
+              <a:rPr lang="en-US" sz="1200" dirty="0">
                 <a:solidFill>
                   <a:srgbClr val="1B2A38"/>
                 </a:solidFill>
@@ -3633,49 +5177,22 @@
                 <a:ea typeface="Calibri" pitchFamily="34" charset="-122"/>
                 <a:cs typeface="Calibri" pitchFamily="34" charset="-120"/>
               </a:rPr>
-              <a:t>Precision, recall, F1, false-positive rate and detection latency (seconds to first alarm). Evaluation is running now.</a:t>
-            </a:r>
-            <a:endParaRPr lang="en-US" sz="1400" dirty="0"/>
-          </a:p>
-        </p:txBody>
-      </p:sp>
-      <p:sp>
-        <p:nvSpPr>
-          <p:cNvPr id="6" name="card"/>
-          <p:cNvSpPr/>
+              <a:t>mean time to first alarm, full model (baseline 0.70 s)</a:t>
+            </a:r>
+            <a:endParaRPr lang="en-US" sz="1200" dirty="0"/>
+          </a:p>
+        </p:txBody>
+      </p:sp>
+      <p:sp>
+        <p:nvSpPr>
+          <p:cNvPr id="7" name="Text 4"/>
+          <p:cNvSpPr txBox="1"/>
           <p:nvPr/>
         </p:nvSpPr>
         <p:spPr>
           <a:xfrm>
-            <a:off x="4754880" y="1188720"/>
-            <a:ext cx="3840480" cy="2286000"/>
-          </a:xfrm>
-          <a:prstGeom prst="roundRect">
-            <a:avLst>
-              <a:gd name="adj" fmla="val 3200"/>
-            </a:avLst>
-          </a:prstGeom>
-          <a:solidFill>
-            <a:srgbClr val="EAF2F3"/>
-          </a:solidFill>
-          <a:ln w="12700">
-            <a:solidFill>
-              <a:srgbClr val="EAF2F3"/>
-            </a:solidFill>
-            <a:prstDash val="solid"/>
-          </a:ln>
-        </p:spPr>
-      </p:sp>
-      <p:sp>
-        <p:nvSpPr>
-          <p:cNvPr id="7" name="Text 5"/>
-          <p:cNvSpPr txBox="1"/>
-          <p:nvPr/>
-        </p:nvSpPr>
-        <p:spPr>
-          <a:xfrm>
-            <a:off x="4937760" y="1325880"/>
-            <a:ext cx="3474720" cy="365760"/>
+            <a:off x="3291840" y="2971800"/>
+            <a:ext cx="2560320" cy="640080"/>
           </a:xfrm>
           <a:prstGeom prst="rect">
             <a:avLst/>
@@ -3691,30 +5208,30 @@
               <a:buNone/>
             </a:pPr>
             <a:r>
-              <a:rPr lang="en-US" sz="1600" b="1" dirty="0">
+              <a:rPr lang="en-US" sz="3600" b="1" dirty="0">
                 <a:solidFill>
-                  <a:srgbClr val="1C7C7D"/>
+                  <a:srgbClr val="0B1F33"/>
                 </a:solidFill>
                 <a:latin typeface="Cambria" pitchFamily="34" charset="0"/>
                 <a:ea typeface="Cambria" pitchFamily="34" charset="-122"/>
                 <a:cs typeface="Cambria" pitchFamily="34" charset="-120"/>
               </a:rPr>
-              <a:t>2. Malicious neighbours</a:t>
-            </a:r>
-            <a:endParaRPr lang="en-US" sz="1600" dirty="0"/>
-          </a:p>
-        </p:txBody>
-      </p:sp>
-      <p:sp>
-        <p:nvSpPr>
-          <p:cNvPr id="8" name="Text 6"/>
+              <a:t>99%</a:t>
+            </a:r>
+            <a:endParaRPr lang="en-US" sz="3600" dirty="0"/>
+          </a:p>
+        </p:txBody>
+      </p:sp>
+      <p:sp>
+        <p:nvSpPr>
+          <p:cNvPr id="8" name="Text 5"/>
           <p:cNvSpPr txBox="1"/>
           <p:nvPr/>
         </p:nvSpPr>
         <p:spPr>
           <a:xfrm>
-            <a:off x="4937760" y="1737360"/>
-            <a:ext cx="3474720" cy="1600200"/>
+            <a:off x="3291840" y="3611880"/>
+            <a:ext cx="2468880" cy="640080"/>
           </a:xfrm>
           <a:prstGeom prst="rect">
             <a:avLst/>
@@ -3730,7 +5247,7 @@
               <a:buNone/>
             </a:pPr>
             <a:r>
-              <a:rPr lang="en-US" sz="1400" dirty="0">
+              <a:rPr lang="en-US" sz="1200" dirty="0">
                 <a:solidFill>
                   <a:srgbClr val="1B2A38"/>
                 </a:solidFill>
@@ -3738,22 +5255,22 @@
                 <a:ea typeface="Calibri" pitchFamily="34" charset="-122"/>
                 <a:cs typeface="Calibri" pitchFamily="34" charset="-120"/>
               </a:rPr>
-              <a:t>Results split by the share of neighbours that are themselves attackers: does the context get poisoned? Running now.</a:t>
-            </a:r>
-            <a:endParaRPr lang="en-US" sz="1400" dirty="0"/>
-          </a:p>
-        </p:txBody>
-      </p:sp>
-      <p:sp>
-        <p:nvSpPr>
-          <p:cNvPr id="9" name="Text 7"/>
+              <a:t>of malicious sender-receiver pairs eventually flagged (baseline 96%)</a:t>
+            </a:r>
+            <a:endParaRPr lang="en-US" sz="1200" dirty="0"/>
+          </a:p>
+        </p:txBody>
+      </p:sp>
+      <p:sp>
+        <p:nvSpPr>
+          <p:cNvPr id="9" name="Text 6"/>
           <p:cNvSpPr txBox="1"/>
           <p:nvPr/>
         </p:nvSpPr>
         <p:spPr>
           <a:xfrm>
-            <a:off x="548640" y="3749040"/>
-            <a:ext cx="8046720" cy="731520"/>
+            <a:off x="6035040" y="2971800"/>
+            <a:ext cx="2560320" cy="640080"/>
           </a:xfrm>
           <a:prstGeom prst="rect">
             <a:avLst/>
@@ -3769,7 +5286,85 @@
               <a:buNone/>
             </a:pPr>
             <a:r>
-              <a:rPr lang="en-US" sz="1400" i="1" dirty="0">
+              <a:rPr lang="en-US" sz="3600" b="1" dirty="0">
+                <a:solidFill>
+                  <a:srgbClr val="0B1F33"/>
+                </a:solidFill>
+                <a:latin typeface="Cambria" pitchFamily="34" charset="0"/>
+                <a:ea typeface="Cambria" pitchFamily="34" charset="-122"/>
+                <a:cs typeface="Cambria" pitchFamily="34" charset="-120"/>
+              </a:rPr>
+              <a:t>0 s</a:t>
+            </a:r>
+            <a:endParaRPr lang="en-US" sz="3600" dirty="0"/>
+          </a:p>
+        </p:txBody>
+      </p:sp>
+      <p:sp>
+        <p:nvSpPr>
+          <p:cNvPr id="10" name="Text 7"/>
+          <p:cNvSpPr txBox="1"/>
+          <p:nvPr/>
+        </p:nvSpPr>
+        <p:spPr>
+          <a:xfrm>
+            <a:off x="6035040" y="3611880"/>
+            <a:ext cx="2468880" cy="640080"/>
+          </a:xfrm>
+          <a:prstGeom prst="rect">
+            <a:avLst/>
+          </a:prstGeom>
+          <a:noFill/>
+          <a:ln/>
+        </p:spPr>
+        <p:txBody>
+          <a:bodyPr wrap="square" lIns="0" tIns="0" rIns="0" bIns="0" rtlCol="0" anchor="t"/>
+          <a:lstStyle/>
+          <a:p>
+            <a:pPr indent="0" marL="0">
+              <a:buNone/>
+            </a:pPr>
+            <a:r>
+              <a:rPr lang="en-US" sz="1200" dirty="0">
+                <a:solidFill>
+                  <a:srgbClr val="1B2A38"/>
+                </a:solidFill>
+                <a:latin typeface="Calibri" pitchFamily="34" charset="0"/>
+                <a:ea typeface="Calibri" pitchFamily="34" charset="-122"/>
+                <a:cs typeface="Calibri" pitchFamily="34" charset="-120"/>
+              </a:rPr>
+              <a:t>90th percentile for the full model (baseline 3 s)</a:t>
+            </a:r>
+            <a:endParaRPr lang="en-US" sz="1200" dirty="0"/>
+          </a:p>
+        </p:txBody>
+      </p:sp>
+      <p:sp>
+        <p:nvSpPr>
+          <p:cNvPr id="11" name="Text 8"/>
+          <p:cNvSpPr txBox="1"/>
+          <p:nvPr/>
+        </p:nvSpPr>
+        <p:spPr>
+          <a:xfrm>
+            <a:off x="548640" y="4389120"/>
+            <a:ext cx="8046720" cy="365760"/>
+          </a:xfrm>
+          <a:prstGeom prst="rect">
+            <a:avLst/>
+          </a:prstGeom>
+          <a:noFill/>
+          <a:ln/>
+        </p:spPr>
+        <p:txBody>
+          <a:bodyPr wrap="square" lIns="0" tIns="0" rIns="0" bIns="0" rtlCol="0" anchor="ctr"/>
+          <a:lstStyle/>
+          <a:p>
+            <a:pPr indent="0" marL="0">
+              <a:buNone/>
+            </a:pPr>
+            <a:r>
+              <a:rPr lang="en-US" sz="1100" i="1" dirty="0">
                 <a:solidFill>
                   <a:srgbClr val="5B6B7A"/>
                 </a:solidFill>
@@ -3777,9 +5372,9 @@
                 <a:ea typeface="Calibri" pitchFamily="34" charset="-122"/>
                 <a:cs typeface="Calibri" pitchFamily="34" charset="-120"/>
               </a:rPr>
-              <a:t>Scope note: VeReMi simulates false-data attacks, not crash intent, and attackers act independently (about 30%). Colluding attackers are not tested.</a:t>
-            </a:r>
-            <a:endParaRPr lang="en-US" sz="1400" dirty="0"/>
+              <a:t>Latency counts from the first window that contains the sender; each window needs about 10 s of history. Mean of 3 seeds.</a:t>
+            </a:r>
+            <a:endParaRPr lang="en-US" sz="1100" dirty="0"/>
           </a:p>
         </p:txBody>
       </p:sp>
@@ -3794,6 +5389,171 @@
 <file path=ppt/slides/slide7.xml><?xml version="1.0" encoding="utf-8"?>
 <p:sld xmlns:a="http://schemas.openxmlformats.org/drawingml/2006/main" xmlns:r="http://schemas.openxmlformats.org/officeDocument/2006/relationships" xmlns:p="http://schemas.openxmlformats.org/presentationml/2006/main">
   <p:cSld name="Slide 7">
+    <p:bg>
+      <p:bgPr>
+        <a:solidFill>
+          <a:srgbClr val="FFFFFF"/>
+        </a:solidFill>
+      </p:bgPr>
+    </p:bg>
+    <p:spTree>
+      <p:nvGrpSpPr>
+        <p:cNvPr id="1" name=""/>
+        <p:cNvGrpSpPr/>
+        <p:nvPr/>
+      </p:nvGrpSpPr>
+      <p:grpSpPr>
+        <a:xfrm>
+          <a:off x="0" y="0"/>
+          <a:ext cx="0" cy="0"/>
+          <a:chOff x="0" y="0"/>
+          <a:chExt cx="0" cy="0"/>
+        </a:xfrm>
+      </p:grpSpPr>
+      <p:sp>
+        <p:nvSpPr>
+          <p:cNvPr id="2" name="Text 0"/>
+          <p:cNvSpPr txBox="1"/>
+          <p:nvPr/>
+        </p:nvSpPr>
+        <p:spPr>
+          <a:xfrm>
+            <a:off x="548640" y="320040"/>
+            <a:ext cx="8046720" cy="640080"/>
+          </a:xfrm>
+          <a:prstGeom prst="rect">
+            <a:avLst/>
+          </a:prstGeom>
+          <a:noFill/>
+          <a:ln/>
+        </p:spPr>
+        <p:txBody>
+          <a:bodyPr wrap="square" lIns="0" tIns="0" rIns="0" bIns="0" rtlCol="0" anchor="ctr"/>
+          <a:lstStyle/>
+          <a:p>
+            <a:pPr indent="0" marL="0">
+              <a:buNone/>
+            </a:pPr>
+            <a:r>
+              <a:rPr lang="en-US" sz="3200" b="1" dirty="0">
+                <a:solidFill>
+                  <a:srgbClr val="0B1F33"/>
+                </a:solidFill>
+                <a:latin typeface="Cambria" pitchFamily="34" charset="0"/>
+                <a:ea typeface="Cambria" pitchFamily="34" charset="-122"/>
+                <a:cs typeface="Cambria" pitchFamily="34" charset="-120"/>
+              </a:rPr>
+              <a:t>When neighbours are malicious too</a:t>
+            </a:r>
+            <a:endParaRPr lang="en-US" sz="3200" dirty="0"/>
+          </a:p>
+        </p:txBody>
+      </p:sp>
+      <p:graphicFrame>
+        <p:nvGraphicFramePr>
+          <p:cNvPr id="3" name="Chart 0" descr=""/>
+          <p:cNvGraphicFramePr/>
+          <p:nvPr/>
+        </p:nvGraphicFramePr>
+        <p:xfrm>
+          <a:off x="457200" y="1051560"/>
+          <a:ext cx="5303520" cy="3383280"/>
+        </p:xfrm>
+        <a:graphic xmlns:a="http://schemas.openxmlformats.org/drawingml/2006/main">
+          <a:graphicData uri="http://schemas.openxmlformats.org/drawingml/2006/chart">
+            <c:chart xmlns:c="http://schemas.openxmlformats.org/drawingml/2006/chart" r:id="rId1"/>
+          </a:graphicData>
+        </a:graphic>
+      </p:graphicFrame>
+      <p:sp>
+        <p:nvSpPr>
+          <p:cNvPr id="4" name="Text 1"/>
+          <p:cNvSpPr txBox="1"/>
+          <p:nvPr/>
+        </p:nvSpPr>
+        <p:spPr>
+          <a:xfrm>
+            <a:off x="6035040" y="1188720"/>
+            <a:ext cx="2651760" cy="1737360"/>
+          </a:xfrm>
+          <a:prstGeom prst="rect">
+            <a:avLst/>
+          </a:prstGeom>
+          <a:noFill/>
+          <a:ln/>
+        </p:spPr>
+        <p:txBody>
+          <a:bodyPr wrap="square" lIns="0" tIns="0" rIns="0" bIns="0" rtlCol="0" anchor="t"/>
+          <a:lstStyle/>
+          <a:p>
+            <a:pPr indent="0" marL="0">
+              <a:buNone/>
+            </a:pPr>
+            <a:r>
+              <a:rPr lang="en-US" sz="1400" dirty="0">
+                <a:solidFill>
+                  <a:srgbClr val="1B2A38"/>
+                </a:solidFill>
+                <a:latin typeface="Calibri" pitchFamily="34" charset="0"/>
+                <a:ea typeface="Calibri" pitchFamily="34" charset="-122"/>
+                <a:cs typeface="Calibri" pitchFamily="34" charset="-120"/>
+              </a:rPr>
+              <a:t>Recall barely moves, and false alarms do not rise, even when over half of the neighbours are attackers (0.971 vs 0.973 for the cleanest case).</a:t>
+            </a:r>
+            <a:endParaRPr lang="en-US" sz="1400" dirty="0"/>
+          </a:p>
+        </p:txBody>
+      </p:sp>
+      <p:sp>
+        <p:nvSpPr>
+          <p:cNvPr id="5" name="Text 2"/>
+          <p:cNvSpPr txBox="1"/>
+          <p:nvPr/>
+        </p:nvSpPr>
+        <p:spPr>
+          <a:xfrm>
+            <a:off x="6035040" y="3108960"/>
+            <a:ext cx="2651760" cy="1280160"/>
+          </a:xfrm>
+          <a:prstGeom prst="rect">
+            <a:avLst/>
+          </a:prstGeom>
+          <a:noFill/>
+          <a:ln/>
+        </p:spPr>
+        <p:txBody>
+          <a:bodyPr wrap="square" lIns="0" tIns="0" rIns="0" bIns="0" rtlCol="0" anchor="t"/>
+          <a:lstStyle/>
+          <a:p>
+            <a:pPr indent="0" marL="0">
+              <a:buNone/>
+            </a:pPr>
+            <a:r>
+              <a:rPr lang="en-US" sz="1200" i="1" dirty="0">
+                <a:solidFill>
+                  <a:srgbClr val="5B6B7A"/>
+                </a:solidFill>
+                <a:latin typeface="Calibri" pitchFamily="34" charset="0"/>
+                <a:ea typeface="Calibri" pitchFamily="34" charset="-122"/>
+                <a:cs typeface="Calibri" pitchFamily="34" charset="-120"/>
+              </a:rPr>
+              <a:t>Caveat: attackers here act independently (about 30%). Colluding attackers, and crash intent, are not modelled in VeReMi.</a:t>
+            </a:r>
+            <a:endParaRPr lang="en-US" sz="1200" dirty="0"/>
+          </a:p>
+        </p:txBody>
+      </p:sp>
+    </p:spTree>
+  </p:cSld>
+  <p:clrMapOvr>
+    <a:masterClrMapping/>
+  </p:clrMapOvr>
+</p:sld>
+</file>
+
+<file path=ppt/slides/slide8.xml><?xml version="1.0" encoding="utf-8"?>
+<p:sld xmlns:a="http://schemas.openxmlformats.org/drawingml/2006/main" xmlns:r="http://schemas.openxmlformats.org/officeDocument/2006/relationships" xmlns:p="http://schemas.openxmlformats.org/presentationml/2006/main">
+  <p:cSld name="Slide 8">
     <p:bg>
       <p:bgPr>
         <a:solidFill>
@@ -3891,27 +5651,6 @@
                 <a:ea typeface="Calibri" pitchFamily="34" charset="-122"/>
                 <a:cs typeface="Calibri" pitchFamily="34" charset="-120"/>
               </a:rPr>
-              <a:t>Finish extended metrics and malicious-neighbour analysis</a:t>
-            </a:r>
-            <a:endParaRPr lang="en-US" sz="1800" dirty="0"/>
-          </a:p>
-          <a:p>
-            <a:pPr marL="342900" indent="-342900">
-              <a:spcAft>
-                <a:spcPts val="1000"/>
-              </a:spcAft>
-              <a:buSzPct val="100000"/>
-              <a:buChar char="•"/>
-            </a:pPr>
-            <a:r>
-              <a:rPr lang="en-US" sz="1800" dirty="0">
-                <a:solidFill>
-                  <a:srgbClr val="FFFFFF"/>
-                </a:solidFill>
-                <a:latin typeface="Calibri" pitchFamily="34" charset="0"/>
-                <a:ea typeface="Calibri" pitchFamily="34" charset="-122"/>
-                <a:cs typeface="Calibri" pitchFamily="34" charset="-120"/>
-              </a:rPr>
               <a:t>Add more attack types: position offsets, DoS, Sybil (2 of about 20 so far)</a:t>
             </a:r>
             <a:endParaRPr lang="en-US" sz="1800" dirty="0"/>
@@ -3954,7 +5693,7 @@
                 <a:ea typeface="Calibri" pitchFamily="34" charset="-122"/>
                 <a:cs typeface="Calibri" pitchFamily="34" charset="-120"/>
               </a:rPr>
-              <a:t>Optional: spoofed-approach test for the crash scenario</a:t>
+              <a:t>Test colluding attackers and the spoofed-approach (crash) scenario</a:t>
             </a:r>
             <a:endParaRPr lang="en-US" sz="1800" dirty="0"/>
           </a:p>

--- a/presentation/progress_update.pptx
+++ b/presentation/progress_update.pptx
@@ -2450,7 +2450,7 @@
                 <a:ea typeface="Calibri" pitchFamily="34" charset="-122"/>
                 <a:cs typeface="Calibri" pitchFamily="34" charset="-120"/>
               </a:rPr>
-              <a:t>Evaluated on real VeReMi Extension data</a:t>
+              <a:t>Evaluated on the public VeReMi Extension benchmark</a:t>
             </a:r>
             <a:endParaRPr lang="en-US" sz="1600" dirty="0"/>
           </a:p>
@@ -3189,7 +3189,7 @@
                 <a:ea typeface="Cambria" pitchFamily="34" charset="-122"/>
                 <a:cs typeface="Cambria" pitchFamily="34" charset="-120"/>
               </a:rPr>
-              <a:t>Real data</a:t>
+              <a:t>Benchmark data</a:t>
             </a:r>
             <a:endParaRPr lang="en-US" sz="1800" dirty="0"/>
           </a:p>
@@ -3228,7 +3228,7 @@
                 <a:ea typeface="Calibri" pitchFamily="34" charset="-122"/>
                 <a:cs typeface="Calibri" pitchFamily="34" charset="-120"/>
               </a:rPr>
-              <a:t>VeReMi Extension from Zenodo: RandomPos and ConstSpeed attacks</a:t>
+              <a:t>VeReMi Extension (simulated traffic) from Zenodo: RandomPos and ConstSpeed attacks</a:t>
             </a:r>
             <a:endParaRPr lang="en-US" sz="1400" dirty="0"/>
           </a:p>
@@ -3441,7 +3441,7 @@
                 <a:ea typeface="Cambria" pitchFamily="34" charset="-122"/>
                 <a:cs typeface="Cambria" pitchFamily="34" charset="-120"/>
               </a:rPr>
-              <a:t>Real-data results (F1)</a:t>
+              <a:t>Benchmark results (F1)</a:t>
             </a:r>
             <a:endParaRPr lang="en-US" sz="3200" dirty="0"/>
           </a:p>
@@ -5672,7 +5672,7 @@
                 <a:ea typeface="Calibri" pitchFamily="34" charset="-122"/>
                 <a:cs typeface="Calibri" pitchFamily="34" charset="-120"/>
               </a:rPr>
-              <a:t>Rerun domain-transfer experiment on real data</a:t>
+              <a:t>Rerun domain-transfer experiment on the benchmark</a:t>
             </a:r>
             <a:endParaRPr lang="en-US" sz="1800" dirty="0"/>
           </a:p>

--- a/presentation/progress_update.pptx
+++ b/presentation/progress_update.pptx
@@ -2411,7 +2411,7 @@
                 <a:ea typeface="Calibri" pitchFamily="34" charset="-122"/>
                 <a:cs typeface="Calibri" pitchFamily="34" charset="-120"/>
               </a:rPr>
-              <a:t>Project progress update: what is done, what is left</a:t>
+              <a:t>Work in progress: preliminary results and next steps</a:t>
             </a:r>
             <a:endParaRPr lang="en-US" sz="2000" dirty="0"/>
           </a:p>
@@ -2802,7 +2802,7 @@
                 <a:ea typeface="Cambria" pitchFamily="34" charset="-122"/>
                 <a:cs typeface="Cambria" pitchFamily="34" charset="-120"/>
               </a:rPr>
-              <a:t>What is done</a:t>
+              <a:t>What is done so far</a:t>
             </a:r>
             <a:endParaRPr lang="en-US" sz="3200" dirty="0"/>
           </a:p>
@@ -3441,7 +3441,7 @@
                 <a:ea typeface="Cambria" pitchFamily="34" charset="-122"/>
                 <a:cs typeface="Cambria" pitchFamily="34" charset="-120"/>
               </a:rPr>
-              <a:t>Benchmark results (F1)</a:t>
+              <a:t>Preliminary results (F1)</a:t>
             </a:r>
             <a:endParaRPr lang="en-US" sz="3200" dirty="0"/>
           </a:p>
@@ -4031,7 +4031,7 @@
                 <a:ea typeface="Cambria" pitchFamily="34" charset="-122"/>
                 <a:cs typeface="Cambria" pitchFamily="34" charset="-120"/>
               </a:rPr>
-              <a:t>Full metric set and detection latency</a:t>
+              <a:t>Preliminary: full metrics and latency</a:t>
             </a:r>
             <a:endParaRPr lang="en-US" sz="3200" dirty="0"/>
           </a:p>

--- a/presentation/progress_update.pptx
+++ b/presentation/progress_update.pptx
@@ -13,9 +13,10 @@
     <p:sldId id="261" r:id="rId7"/>
     <p:sldId id="262" r:id="rId8"/>
     <p:sldId id="263" r:id="rId9"/>
+    <p:sldId id="264" r:id="rId10"/>
   </p:sldIdLst>
   <p:notesMasterIdLst>
-    <p:notesMasterId r:id="rId10"/>
+    <p:notesMasterId r:id="rId11"/>
   </p:notesMasterIdLst>
   <p:sldSz cx="9144000" cy="5143500"/>
   <p:notesSz cx="5143500" cy="9144000"/>
@@ -135,7 +136,7 @@
               <c:strCache>
                 <c:ptCount val="1"/>
                 <c:pt idx="0">
-                  <c:v>Per-sender</c:v>
+                  <c:v>Reference (97.37%)</c:v>
                 </c:pt>
               </c:strCache>
             </c:strRef>
@@ -148,7 +149,7 @@
           </c:spPr>
           <c:invertIfNegative val="0"/>
           <c:dLbls>
-            <c:numFmt formatCode="0.000" sourceLinked="0"/>
+            <c:numFmt formatCode="0.00" sourceLinked="0"/>
             <c:txPr>
               <a:bodyPr/>
               <a:lstStyle/>
@@ -173,18 +174,21 @@
           </c:dLbls>
           <c:cat>
             <c:multiLvlStrRef>
-              <c:f>Sheet1!$A$2:$A$4</c:f>
+              <c:f>Sheet1!$A$2:$A$5</c:f>
               <c:multiLvlStrCache>
-                <c:ptCount val="3"/>
+                <c:ptCount val="4"/>
                 <c:lvl>
                   <c:pt idx="0">
-                    <c:v>RandomPos</c:v>
+                    <c:v>Precision</c:v>
                   </c:pt>
                   <c:pt idx="1">
-                    <c:v>ConstSpeed</c:v>
+                    <c:v>Recall</c:v>
                   </c:pt>
                   <c:pt idx="2">
-                    <c:v>Overall</c:v>
+                    <c:v>F1</c:v>
+                  </c:pt>
+                  <c:pt idx="3">
+                    <c:v>Accuracy</c:v>
                   </c:pt>
                 </c:lvl>
               </c:multiLvlStrCache>
@@ -192,18 +196,21 @@
           </c:cat>
           <c:val>
             <c:numRef>
-              <c:f>Sheet1!$B$2:$B$4</c:f>
+              <c:f>Sheet1!$B$2:$B$5</c:f>
               <c:numCache>
                 <c:formatCode>General</c:formatCode>
-                <c:ptCount val="3"/>
+                <c:ptCount val="4"/>
                 <c:pt idx="0">
-                  <c:v>0.97</c:v>
+                  <c:v>97.37</c:v>
                 </c:pt>
                 <c:pt idx="1">
-                  <c:v>0.96</c:v>
+                  <c:v>97.37</c:v>
                 </c:pt>
                 <c:pt idx="2">
-                  <c:v>0.973</c:v>
+                  <c:v>97.37</c:v>
+                </c:pt>
+                <c:pt idx="3">
+                  <c:v>97.37</c:v>
                 </c:pt>
               </c:numCache>
             </c:numRef>
@@ -218,20 +225,20 @@
               <c:strCache>
                 <c:ptCount val="1"/>
                 <c:pt idx="0">
-                  <c:v>No spatial interaction</c:v>
+                  <c:v>v2 + memory, message labels</c:v>
                 </c:pt>
               </c:strCache>
             </c:strRef>
           </c:tx>
           <c:spPr>
             <a:solidFill>
-              <a:srgbClr val="F2A541"/>
+              <a:srgbClr val="1C7C7D"/>
             </a:solidFill>
             <a:effectLst/>
           </c:spPr>
           <c:invertIfNegative val="0"/>
           <c:dLbls>
-            <c:numFmt formatCode="0.000" sourceLinked="0"/>
+            <c:numFmt formatCode="0.00" sourceLinked="0"/>
             <c:txPr>
               <a:bodyPr/>
               <a:lstStyle/>
@@ -256,18 +263,21 @@
           </c:dLbls>
           <c:cat>
             <c:multiLvlStrRef>
-              <c:f>Sheet1!$A$2:$A$4</c:f>
+              <c:f>Sheet1!$A$2:$A$5</c:f>
               <c:multiLvlStrCache>
-                <c:ptCount val="3"/>
+                <c:ptCount val="4"/>
                 <c:lvl>
                   <c:pt idx="0">
-                    <c:v>RandomPos</c:v>
+                    <c:v>Precision</c:v>
                   </c:pt>
                   <c:pt idx="1">
-                    <c:v>ConstSpeed</c:v>
+                    <c:v>Recall</c:v>
                   </c:pt>
                   <c:pt idx="2">
-                    <c:v>Overall</c:v>
+                    <c:v>F1</c:v>
+                  </c:pt>
+                  <c:pt idx="3">
+                    <c:v>Accuracy</c:v>
                   </c:pt>
                 </c:lvl>
               </c:multiLvlStrCache>
@@ -275,108 +285,28 @@
           </c:cat>
           <c:val>
             <c:numRef>
-              <c:f>Sheet1!$C$2:$C$4</c:f>
+              <c:f>Sheet1!$C$2:$C$5</c:f>
               <c:numCache>
                 <c:formatCode>General</c:formatCode>
-                <c:ptCount val="3"/>
+                <c:ptCount val="4"/>
                 <c:pt idx="0">
-                  <c:v>0.983</c:v>
+                  <c:v>98.16</c:v>
                 </c:pt>
                 <c:pt idx="1">
-                  <c:v>0.947</c:v>
+                  <c:v>97.78</c:v>
                 </c:pt>
                 <c:pt idx="2">
-                  <c:v>0.982</c:v>
+                  <c:v>97.97</c:v>
                 </c:pt>
-              </c:numCache>
-            </c:numRef>
-          </c:val>
-        </c:ser>
-        <c:ser>
-          <c:idx val="2"/>
-          <c:order val="2"/>
-          <c:tx>
-            <c:strRef>
-              <c:f>Sheet1!$D$1</c:f>
-              <c:strCache>
-                <c:ptCount val="1"/>
-                <c:pt idx="0">
-                  <c:v>Full model</c:v>
-                </c:pt>
-              </c:strCache>
-            </c:strRef>
-          </c:tx>
-          <c:spPr>
-            <a:solidFill>
-              <a:srgbClr val="1C7C7D"/>
-            </a:solidFill>
-            <a:effectLst/>
-          </c:spPr>
-          <c:invertIfNegative val="0"/>
-          <c:dLbls>
-            <c:numFmt formatCode="0.000" sourceLinked="0"/>
-            <c:txPr>
-              <a:bodyPr/>
-              <a:lstStyle/>
-              <a:p>
-                <a:pPr>
-                  <a:defRPr b="0" i="0" strike="noStrike" sz="900" u="none">
-                    <a:solidFill>
-                      <a:srgbClr val="1B2A38"/>
-                    </a:solidFill>
-                    <a:latin typeface="Arial"/>
-                  </a:defRPr>
-                </a:pPr>
-              </a:p>
-            </c:txPr>
-            <c:showLegendKey val="0"/>
-            <c:showVal val="1"/>
-            <c:showCatName val="0"/>
-            <c:showSerName val="0"/>
-            <c:showPercent val="0"/>
-            <c:showBubbleSize val="0"/>
-            <c:showLeaderLines val="0"/>
-          </c:dLbls>
-          <c:cat>
-            <c:multiLvlStrRef>
-              <c:f>Sheet1!$A$2:$A$4</c:f>
-              <c:multiLvlStrCache>
-                <c:ptCount val="3"/>
-                <c:lvl>
-                  <c:pt idx="0">
-                    <c:v>RandomPos</c:v>
-                  </c:pt>
-                  <c:pt idx="1">
-                    <c:v>ConstSpeed</c:v>
-                  </c:pt>
-                  <c:pt idx="2">
-                    <c:v>Overall</c:v>
-                  </c:pt>
-                </c:lvl>
-              </c:multiLvlStrCache>
-            </c:multiLvlStrRef>
-          </c:cat>
-          <c:val>
-            <c:numRef>
-              <c:f>Sheet1!$D$2:$D$4</c:f>
-              <c:numCache>
-                <c:formatCode>General</c:formatCode>
-                <c:ptCount val="3"/>
-                <c:pt idx="0">
-                  <c:v>0.987</c:v>
-                </c:pt>
-                <c:pt idx="1">
-                  <c:v>0.948</c:v>
-                </c:pt>
-                <c:pt idx="2">
-                  <c:v>0.982</c:v>
+                <c:pt idx="3">
+                  <c:v>98.74</c:v>
                 </c:pt>
               </c:numCache>
             </c:numRef>
           </c:val>
         </c:ser>
         <c:dLbls>
-          <c:numFmt formatCode="0.000" sourceLinked="0"/>
+          <c:numFmt formatCode="0.00" sourceLinked="0"/>
           <c:txPr>
             <a:bodyPr/>
             <a:lstStyle/>
@@ -450,8 +380,8 @@
         <c:axId val="2094734552"/>
         <c:scaling>
           <c:orientation val="minMax"/>
-          <c:max val="1"/>
-          <c:min val="0.9"/>
+          <c:max val="100"/>
+          <c:min val="95"/>
         </c:scaling>
         <c:delete val="0"/>
         <c:axPos val="l"/>
@@ -466,7 +396,7 @@
             </a:ln>
           </c:spPr>
         </c:majorGridlines>
-        <c:numFmt formatCode="0.00" sourceLinked="0"/>
+        <c:numFmt formatCode="0" sourceLinked="0"/>
         <c:majorTickMark val="out"/>
         <c:minorTickMark val="none"/>
         <c:tickLblPos val="nextTo"/>
@@ -497,421 +427,7 @@
         <c:crossAx val="2094734554"/>
         <c:crosses val="autoZero"/>
         <c:crossBetween val="between"/>
-        <c:majorUnit val="0.02"/>
-      </c:valAx>
-      <c:spPr>
-        <a:noFill/>
-        <a:ln>
-          <a:noFill/>
-        </a:ln>
-        <a:effectLst/>
-      </c:spPr>
-    </c:plotArea>
-    <c:legend>
-      <c:legendPos val="b"/>
-      <c:overlay val="0"/>
-      <c:txPr>
-        <a:bodyPr/>
-        <a:lstStyle/>
-        <a:p>
-          <a:pPr>
-            <a:defRPr sz="1100">
-              <a:solidFill>
-                <a:srgbClr val="1B2A38"/>
-              </a:solidFill>
-            </a:defRPr>
-          </a:pPr>
-          <a:endParaRPr lang="en-US"/>
-        </a:p>
-      </c:txPr>
-    </c:legend>
-    <c:plotVisOnly val="1"/>
-    <c:dispBlanksAs val="span"/>
-  </c:chart>
-  <c:spPr>
-    <a:noFill/>
-    <a:ln>
-      <a:noFill/>
-    </a:ln>
-    <a:effectLst/>
-  </c:spPr>
-  <c:externalData r:id="rId1">
-    <c:autoUpdate val="0"/>
-  </c:externalData>
-</c:chartSpace>
-</file>
-
-<file path=ppt/charts/chart2.xml><?xml version="1.0" encoding="utf-8"?>
-<c:chartSpace xmlns:c="http://schemas.openxmlformats.org/drawingml/2006/chart" xmlns:a="http://schemas.openxmlformats.org/drawingml/2006/main" xmlns:r="http://schemas.openxmlformats.org/officeDocument/2006/relationships">
-  <c:date1904 val="0"/>
-  <c:roundedCorners val="1"/>
-  <c:chart>
-    <c:autoTitleDeleted val="1"/>
-    <c:plotArea>
-      <c:layout/>
-      <c:barChart>
-        <c:barDir val="col"/>
-        <c:grouping val="clustered"/>
-        <c:varyColors val="0"/>
-        <c:ser>
-          <c:idx val="0"/>
-          <c:order val="0"/>
-          <c:tx>
-            <c:strRef>
-              <c:f>Sheet1!$B$1</c:f>
-              <c:strCache>
-                <c:ptCount val="1"/>
-                <c:pt idx="0">
-                  <c:v>Per-sender</c:v>
-                </c:pt>
-              </c:strCache>
-            </c:strRef>
-          </c:tx>
-          <c:spPr>
-            <a:solidFill>
-              <a:srgbClr val="9AA9B5"/>
-            </a:solidFill>
-            <a:effectLst/>
-          </c:spPr>
-          <c:invertIfNegative val="0"/>
-          <c:dLbls>
-            <c:numFmt formatCode="0.000" sourceLinked="0"/>
-            <c:txPr>
-              <a:bodyPr/>
-              <a:lstStyle/>
-              <a:p>
-                <a:pPr>
-                  <a:defRPr b="0" i="0" strike="noStrike" sz="900" u="none">
-                    <a:solidFill>
-                      <a:srgbClr val="1B2A38"/>
-                    </a:solidFill>
-                    <a:latin typeface="Arial"/>
-                  </a:defRPr>
-                </a:pPr>
-              </a:p>
-            </c:txPr>
-            <c:showLegendKey val="0"/>
-            <c:showVal val="1"/>
-            <c:showCatName val="0"/>
-            <c:showSerName val="0"/>
-            <c:showPercent val="0"/>
-            <c:showBubbleSize val="0"/>
-            <c:showLeaderLines val="0"/>
-          </c:dLbls>
-          <c:cat>
-            <c:multiLvlStrRef>
-              <c:f>Sheet1!$A$2:$A$5</c:f>
-              <c:multiLvlStrCache>
-                <c:ptCount val="4"/>
-                <c:lvl>
-                  <c:pt idx="0">
-                    <c:v>0-10%</c:v>
-                  </c:pt>
-                  <c:pt idx="1">
-                    <c:v>10-30%</c:v>
-                  </c:pt>
-                  <c:pt idx="2">
-                    <c:v>30-50%</c:v>
-                  </c:pt>
-                  <c:pt idx="3">
-                    <c:v>50-100%</c:v>
-                  </c:pt>
-                </c:lvl>
-              </c:multiLvlStrCache>
-            </c:multiLvlStrRef>
-          </c:cat>
-          <c:val>
-            <c:numRef>
-              <c:f>Sheet1!$B$2:$B$5</c:f>
-              <c:numCache>
-                <c:formatCode>General</c:formatCode>
-                <c:ptCount val="4"/>
-                <c:pt idx="0">
-                  <c:v>0.956</c:v>
-                </c:pt>
-                <c:pt idx="1">
-                  <c:v>0.966</c:v>
-                </c:pt>
-                <c:pt idx="2">
-                  <c:v>0.959</c:v>
-                </c:pt>
-                <c:pt idx="3">
-                  <c:v>0.953</c:v>
-                </c:pt>
-              </c:numCache>
-            </c:numRef>
-          </c:val>
-        </c:ser>
-        <c:ser>
-          <c:idx val="1"/>
-          <c:order val="1"/>
-          <c:tx>
-            <c:strRef>
-              <c:f>Sheet1!$C$1</c:f>
-              <c:strCache>
-                <c:ptCount val="1"/>
-                <c:pt idx="0">
-                  <c:v>Full model</c:v>
-                </c:pt>
-              </c:strCache>
-            </c:strRef>
-          </c:tx>
-          <c:spPr>
-            <a:solidFill>
-              <a:srgbClr val="1C7C7D"/>
-            </a:solidFill>
-            <a:effectLst/>
-          </c:spPr>
-          <c:invertIfNegative val="0"/>
-          <c:dLbls>
-            <c:numFmt formatCode="0.000" sourceLinked="0"/>
-            <c:txPr>
-              <a:bodyPr/>
-              <a:lstStyle/>
-              <a:p>
-                <a:pPr>
-                  <a:defRPr b="0" i="0" strike="noStrike" sz="900" u="none">
-                    <a:solidFill>
-                      <a:srgbClr val="1B2A38"/>
-                    </a:solidFill>
-                    <a:latin typeface="Arial"/>
-                  </a:defRPr>
-                </a:pPr>
-              </a:p>
-            </c:txPr>
-            <c:showLegendKey val="0"/>
-            <c:showVal val="1"/>
-            <c:showCatName val="0"/>
-            <c:showSerName val="0"/>
-            <c:showPercent val="0"/>
-            <c:showBubbleSize val="0"/>
-            <c:showLeaderLines val="0"/>
-          </c:dLbls>
-          <c:cat>
-            <c:multiLvlStrRef>
-              <c:f>Sheet1!$A$2:$A$5</c:f>
-              <c:multiLvlStrCache>
-                <c:ptCount val="4"/>
-                <c:lvl>
-                  <c:pt idx="0">
-                    <c:v>0-10%</c:v>
-                  </c:pt>
-                  <c:pt idx="1">
-                    <c:v>10-30%</c:v>
-                  </c:pt>
-                  <c:pt idx="2">
-                    <c:v>30-50%</c:v>
-                  </c:pt>
-                  <c:pt idx="3">
-                    <c:v>50-100%</c:v>
-                  </c:pt>
-                </c:lvl>
-              </c:multiLvlStrCache>
-            </c:multiLvlStrRef>
-          </c:cat>
-          <c:val>
-            <c:numRef>
-              <c:f>Sheet1!$C$2:$C$5</c:f>
-              <c:numCache>
-                <c:formatCode>General</c:formatCode>
-                <c:ptCount val="4"/>
-                <c:pt idx="0">
-                  <c:v>0.973</c:v>
-                </c:pt>
-                <c:pt idx="1">
-                  <c:v>0.981</c:v>
-                </c:pt>
-                <c:pt idx="2">
-                  <c:v>0.974</c:v>
-                </c:pt>
-                <c:pt idx="3">
-                  <c:v>0.971</c:v>
-                </c:pt>
-              </c:numCache>
-            </c:numRef>
-          </c:val>
-        </c:ser>
-        <c:dLbls>
-          <c:numFmt formatCode="0.000" sourceLinked="0"/>
-          <c:txPr>
-            <a:bodyPr/>
-            <a:lstStyle/>
-            <a:p>
-              <a:pPr>
-                <a:defRPr b="0" i="0" strike="noStrike" sz="900" u="none">
-                  <a:solidFill>
-                    <a:srgbClr val="1B2A38"/>
-                  </a:solidFill>
-                  <a:latin typeface="Arial"/>
-                </a:defRPr>
-              </a:pPr>
-            </a:p>
-          </c:txPr>
-          <c:showLegendKey val="0"/>
-          <c:showVal val="1"/>
-          <c:showCatName val="0"/>
-          <c:showSerName val="0"/>
-          <c:showPercent val="0"/>
-          <c:showBubbleSize val="0"/>
-          <c:showLeaderLines val="0"/>
-        </c:dLbls>
-        <c:gapWidth val="150"/>
-        <c:overlap val="0"/>
-        <c:axId val="2094734554"/>
-        <c:axId val="2094734552"/>
-        <c:axId val="2094734556"/>
-      </c:barChart>
-      <c:catAx>
-        <c:axId val="2094734554"/>
-        <c:scaling>
-          <c:orientation val="minMax"/>
-        </c:scaling>
-        <c:delete val="0"/>
-        <c:axPos val="b"/>
-        <c:title>
-          <c:tx>
-            <c:rich>
-              <a:bodyPr/>
-              <a:lstStyle/>
-              <a:p>
-                <a:pPr>
-                  <a:defRPr sz="1100" b="0" i="0" u="none" strike="noStrike">
-                    <a:solidFill>
-                      <a:srgbClr val="5B6B7A"/>
-                    </a:solidFill>
-                    <a:latin typeface="Arial"/>
-                  </a:defRPr>
-                </a:pPr>
-                <a:r>
-                  <a:rPr sz="1100" b="0" i="0" u="none" strike="noStrike">
-                    <a:solidFill>
-                      <a:srgbClr val="5B6B7A"/>
-                    </a:solidFill>
-                    <a:latin typeface="Arial"/>
-                  </a:rPr>
-                  <a:t>Share of a sender's neighbours that are malicious</a:t>
-                </a:r>
-              </a:p>
-            </c:rich>
-          </c:tx>
-          <c:layout/>
-          <c:overlay val="0"/>
-        </c:title>
-        <c:numFmt formatCode="General" sourceLinked="1"/>
-        <c:majorTickMark val="out"/>
-        <c:minorTickMark val="none"/>
-        <c:tickLblPos val="low"/>
-        <c:spPr>
-          <a:ln w="12700" cap="flat">
-            <a:solidFill>
-              <a:srgbClr val="888888"/>
-            </a:solidFill>
-            <a:prstDash val="solid"/>
-            <a:round/>
-          </a:ln>
-        </c:spPr>
-        <c:txPr>
-          <a:bodyPr/>
-          <a:lstStyle/>
-          <a:p>
-            <a:pPr>
-              <a:defRPr sz="1200" b="0" i="0" u="none" strike="noStrike">
-                <a:solidFill>
-                  <a:srgbClr val="1B2A38"/>
-                </a:solidFill>
-                <a:latin typeface="Arial"/>
-              </a:defRPr>
-            </a:pPr>
-            <a:endParaRPr lang="en-US"/>
-          </a:p>
-        </c:txPr>
-        <c:crossAx val="2094734552"/>
-        <c:crosses val="autoZero"/>
-        <c:auto val="1"/>
-        <c:lblAlgn val="ctr"/>
-        <c:noMultiLvlLbl val="1"/>
-      </c:catAx>
-      <c:valAx>
-        <c:axId val="2094734552"/>
-        <c:scaling>
-          <c:orientation val="minMax"/>
-          <c:max val="1"/>
-          <c:min val="0.9"/>
-        </c:scaling>
-        <c:delete val="0"/>
-        <c:axPos val="l"/>
-        <c:majorGridlines>
-          <c:spPr>
-            <a:ln w="6350" cap="flat">
-              <a:solidFill>
-                <a:srgbClr val="E3E8EC"/>
-              </a:solidFill>
-              <a:prstDash val="solid"/>
-              <a:round/>
-            </a:ln>
-          </c:spPr>
-        </c:majorGridlines>
-        <c:title>
-          <c:tx>
-            <c:rich>
-              <a:bodyPr/>
-              <a:lstStyle/>
-              <a:p>
-                <a:pPr>
-                  <a:defRPr sz="1100" b="0" i="0" u="none" strike="noStrike">
-                    <a:solidFill>
-                      <a:srgbClr val="5B6B7A"/>
-                    </a:solidFill>
-                    <a:latin typeface="Arial"/>
-                  </a:defRPr>
-                </a:pPr>
-                <a:r>
-                  <a:rPr sz="1100" b="0" i="0" u="none" strike="noStrike">
-                    <a:solidFill>
-                      <a:srgbClr val="5B6B7A"/>
-                    </a:solidFill>
-                    <a:latin typeface="Arial"/>
-                  </a:rPr>
-                  <a:t>Recall</a:t>
-                </a:r>
-              </a:p>
-            </c:rich>
-          </c:tx>
-          <c:layout/>
-          <c:overlay val="0"/>
-        </c:title>
-        <c:numFmt formatCode="0.00" sourceLinked="0"/>
-        <c:majorTickMark val="out"/>
-        <c:minorTickMark val="none"/>
-        <c:tickLblPos val="nextTo"/>
-        <c:spPr>
-          <a:ln w="12700" cap="flat">
-            <a:solidFill>
-              <a:srgbClr val="888888"/>
-            </a:solidFill>
-            <a:prstDash val="solid"/>
-            <a:round/>
-          </a:ln>
-        </c:spPr>
-        <c:txPr>
-          <a:bodyPr/>
-          <a:lstStyle/>
-          <a:p>
-            <a:pPr>
-              <a:defRPr sz="1100" b="0" i="0" u="none" strike="noStrike">
-                <a:solidFill>
-                  <a:srgbClr val="5B6B7A"/>
-                </a:solidFill>
-                <a:latin typeface="Arial"/>
-              </a:defRPr>
-            </a:pPr>
-            <a:endParaRPr lang="en-US"/>
-          </a:p>
-        </c:txPr>
-        <c:crossAx val="2094734554"/>
-        <c:crosses val="autoZero"/>
-        <c:crossBetween val="between"/>
-        <c:majorUnit val="0.02"/>
+        <c:majorUnit val="1"/>
       </c:valAx>
       <c:spPr>
         <a:noFill/>
@@ -1350,7 +866,7 @@
           <a:p>
             <a:r>
               <a:rPr lang="en-US" dirty="0"/>
-              <a:t>Status update. Real-data results exist for two attack types; extended metrics requested by the professor are still running.</a:t>
+              <a:t>Final update. All numbers are on a simulated benchmark, not real-world traffic. Paper: paper/main.pdf (IEEE conference, 6 pages, 18 references).</a:t>
             </a:r>
             <a:endParaRPr lang="en-US" dirty="0"/>
           </a:p>
@@ -1438,7 +954,7 @@
           <a:p>
             <a:r>
               <a:rPr lang="en-US" dirty="0"/>
-              <a:t>Per-sender baseline vs neighbourhood-aware model with spatial interaction; ablation without spatial interaction.</a:t>
+              <a:t>Per-sender view vs neighbourhood-aware view; neighbour attention is the part we test with an ablation.</a:t>
             </a:r>
             <a:endParaRPr lang="en-US" dirty="0"/>
           </a:p>
@@ -1614,7 +1130,7 @@
           <a:p>
             <a:r>
               <a:rPr lang="en-US" dirty="0"/>
-              <a:t>Gap overall is about 0.9 F1 points; RandomPos about 1.7 points. ConstSpeed is slightly worse with neighbours.</a:t>
+              <a:t>Both label schemes are shown on purpose; message labels match how the dataset marks lies, vehicle labels are the stricter view.</a:t>
             </a:r>
             <a:endParaRPr lang="en-US" dirty="0"/>
           </a:p>
@@ -1702,7 +1218,7 @@
           <a:p>
             <a:r>
               <a:rPr lang="en-US" dirty="0"/>
-              <a:t>Be upfront about the ConstSpeed dip and the limited attack coverage.</a:t>
+              <a:t>Be upfront: neighbour attention is a modest gain, and it depends on honest neighbours being the majority.</a:t>
             </a:r>
             <a:endParaRPr lang="en-US" dirty="0"/>
           </a:p>
@@ -1790,7 +1306,7 @@
           <a:p>
             <a:r>
               <a:rPr lang="en-US" dirty="0"/>
-              <a:t>Addresses professor point 1: precision, recall, F1, FPR and detection latency.</a:t>
+              <a:t>Latency counts from the first window that contains the attacker, per receiver.</a:t>
             </a:r>
             <a:endParaRPr lang="en-US" dirty="0"/>
           </a:p>
@@ -1878,7 +1394,7 @@
           <a:p>
             <a:r>
               <a:rPr lang="en-US" dirty="0"/>
-              <a:t>Addresses professor point 2. Recall by share of malicious neighbours; false-positive rate stays below 0.8% in every bucket.</a:t>
+              <a:t>Injected collusion on top of VeReMi; the dataset itself has no colluding attackers.</a:t>
             </a:r>
             <a:endParaRPr lang="en-US" dirty="0"/>
           </a:p>
@@ -1966,7 +1482,7 @@
           <a:p>
             <a:r>
               <a:rPr lang="en-US" dirty="0"/>
-              <a:t/>
+              <a:t>Report the comparison with its caveat; do not claim we beat the reference outright.</a:t>
             </a:r>
             <a:endParaRPr lang="en-US" dirty="0"/>
           </a:p>
@@ -1990,6 +1506,94 @@
             <a:fld id="{F7021451-1387-4CA6-816F-3879F97B5CBC}" type="slidenum">
               <a:rPr lang="en-US"/>
               <a:t>8</a:t>
+            </a:fld>
+            <a:endParaRPr lang="en-US"/>
+          </a:p>
+        </p:txBody>
+      </p:sp>
+    </p:spTree>
+    <p:extLst>
+      <p:ext uri="{BB962C8B-B14F-4D97-AF65-F5344CB8AC3E}">
+        <p14:creationId xmlns:p14="http://schemas.microsoft.com/office/powerpoint/2010/main" val="1024086991"/>
+      </p:ext>
+    </p:extLst>
+  </p:cSld>
+  <p:clrMapOvr>
+    <a:masterClrMapping/>
+  </p:clrMapOvr>
+</p:notes>
+</file>
+
+<file path=ppt/notesSlides/notesSlide9.xml><?xml version="1.0" encoding="utf-8"?>
+<p:notes xmlns:a="http://schemas.openxmlformats.org/drawingml/2006/main" xmlns:r="http://schemas.openxmlformats.org/officeDocument/2006/relationships" xmlns:p="http://schemas.openxmlformats.org/presentationml/2006/main">
+  <p:cSld>
+    <p:spTree>
+      <p:nvGrpSpPr>
+        <p:cNvPr id="1" name=""/>
+        <p:cNvGrpSpPr/>
+        <p:nvPr/>
+      </p:nvGrpSpPr>
+      <p:grpSpPr>
+        <a:xfrm>
+          <a:off x="0" y="0"/>
+          <a:ext cx="0" cy="0"/>
+          <a:chOff x="0" y="0"/>
+          <a:chExt cx="0" cy="0"/>
+        </a:xfrm>
+      </p:grpSpPr>
+      <p:sp>
+        <p:nvSpPr>
+          <p:cNvPr id="2" name="Slide Image Placeholder 1"/>
+          <p:cNvSpPr>
+            <a:spLocks noGrp="1" noRot="1" noChangeAspect="1"/>
+          </p:cNvSpPr>
+          <p:nvPr>
+            <p:ph type="sldImg"/>
+          </p:nvPr>
+        </p:nvSpPr>
+        <p:spPr/>
+      </p:sp>
+      <p:sp>
+        <p:nvSpPr>
+          <p:cNvPr id="3" name="Notes Placeholder 2"/>
+          <p:cNvSpPr>
+            <a:spLocks noGrp="1"/>
+          </p:cNvSpPr>
+          <p:nvPr>
+            <p:ph type="body" idx="1"/>
+          </p:nvPr>
+        </p:nvSpPr>
+        <p:spPr/>
+        <p:txBody>
+          <a:bodyPr/>
+          <a:lstStyle/>
+          <a:p>
+            <a:r>
+              <a:rPr lang="en-US" dirty="0"/>
+              <a:t/>
+            </a:r>
+            <a:endParaRPr lang="en-US" dirty="0"/>
+          </a:p>
+        </p:txBody>
+      </p:sp>
+      <p:sp>
+        <p:nvSpPr>
+          <p:cNvPr id="4" name="Slide Number Placeholder 3"/>
+          <p:cNvSpPr>
+            <a:spLocks noGrp="1"/>
+          </p:cNvSpPr>
+          <p:nvPr>
+            <p:ph type="sldNum" sz="quarter" idx="10"/>
+          </p:nvPr>
+        </p:nvSpPr>
+        <p:spPr/>
+        <p:txBody>
+          <a:bodyPr/>
+          <a:lstStyle/>
+          <a:p>
+            <a:fld id="{F7021451-1387-4CA6-816F-3879F97B5CBC}" type="slidenum">
+              <a:rPr lang="en-US"/>
+              <a:t>9</a:t>
             </a:fld>
             <a:endParaRPr lang="en-US"/>
           </a:p>
@@ -2347,7 +1951,7 @@
         </p:nvSpPr>
         <p:spPr>
           <a:xfrm>
-            <a:off x="640080" y="1188720"/>
+            <a:off x="640080" y="1097280"/>
             <a:ext cx="7863840" cy="1371600"/>
           </a:xfrm>
           <a:prstGeom prst="rect">
@@ -2364,7 +1968,7 @@
               <a:buNone/>
             </a:pPr>
             <a:r>
-              <a:rPr lang="en-US" sz="4000" b="1" dirty="0">
+              <a:rPr lang="en-US" sz="3800" b="1" dirty="0">
                 <a:solidFill>
                   <a:srgbClr val="FFFFFF"/>
                 </a:solidFill>
@@ -2372,9 +1976,9 @@
                 <a:ea typeface="Cambria" pitchFamily="34" charset="-122"/>
                 <a:cs typeface="Cambria" pitchFamily="34" charset="-120"/>
               </a:rPr>
-              <a:t>Neighbourhood-aware misbehavior detection for V2X</a:t>
+              <a:t>Neighbourhood-aware misbehaviour detection for V2X</a:t>
             </a:r>
-            <a:endParaRPr lang="en-US" sz="4000" dirty="0"/>
+            <a:endParaRPr lang="en-US" sz="3800" dirty="0"/>
           </a:p>
         </p:txBody>
       </p:sp>
@@ -2386,7 +1990,7 @@
         </p:nvSpPr>
         <p:spPr>
           <a:xfrm>
-            <a:off x="640080" y="2743200"/>
+            <a:off x="640080" y="2651760"/>
             <a:ext cx="7863840" cy="457200"/>
           </a:xfrm>
           <a:prstGeom prst="rect">
@@ -2411,7 +2015,7 @@
                 <a:ea typeface="Calibri" pitchFamily="34" charset="-122"/>
                 <a:cs typeface="Calibri" pitchFamily="34" charset="-120"/>
               </a:rPr>
-              <a:t>Work in progress: preliminary results and next steps</a:t>
+              <a:t>Final results on 14 attack types</a:t>
             </a:r>
             <a:endParaRPr lang="en-US" sz="2000" dirty="0"/>
           </a:p>
@@ -2425,7 +2029,7 @@
         </p:nvSpPr>
         <p:spPr>
           <a:xfrm>
-            <a:off x="640080" y="3291840"/>
+            <a:off x="640080" y="3200400"/>
             <a:ext cx="7863840" cy="365760"/>
           </a:xfrm>
           <a:prstGeom prst="rect">
@@ -2442,7 +2046,7 @@
               <a:buNone/>
             </a:pPr>
             <a:r>
-              <a:rPr lang="en-US" sz="1600" dirty="0">
+              <a:rPr lang="en-US" sz="1500" dirty="0">
                 <a:solidFill>
                   <a:srgbClr val="CADCFC"/>
                 </a:solidFill>
@@ -2450,9 +2054,9 @@
                 <a:ea typeface="Calibri" pitchFamily="34" charset="-122"/>
                 <a:cs typeface="Calibri" pitchFamily="34" charset="-120"/>
               </a:rPr>
-              <a:t>Evaluated on the public VeReMi Extension benchmark</a:t>
+              <a:t>Evaluated on the VeReMi Extension benchmark (simulated traffic, Zenodo 20090854)</a:t>
             </a:r>
-            <a:endParaRPr lang="en-US" sz="1600" dirty="0"/>
+            <a:endParaRPr lang="en-US" sz="1500" dirty="0"/>
           </a:p>
         </p:txBody>
       </p:sp>
@@ -2513,7 +2117,7 @@
               <a:buNone/>
             </a:pPr>
             <a:r>
-              <a:rPr lang="en-US" sz="3200" b="1" dirty="0">
+              <a:rPr lang="en-US" sz="3000" b="1" dirty="0">
                 <a:solidFill>
                   <a:srgbClr val="0B1F33"/>
                 </a:solidFill>
@@ -2523,7 +2127,7 @@
               </a:rPr>
               <a:t>The idea: judge a sender by its neighbours</a:t>
             </a:r>
-            <a:endParaRPr lang="en-US" sz="3200" dirty="0"/>
+            <a:endParaRPr lang="en-US" sz="3000" dirty="0"/>
           </a:p>
         </p:txBody>
       </p:sp>
@@ -2626,7 +2230,7 @@
                 <a:ea typeface="Calibri" pitchFamily="34" charset="-122"/>
                 <a:cs typeface="Calibri" pitchFamily="34" charset="-120"/>
               </a:rPr>
-              <a:t>Vehicles broadcast position, speed and heading. A misbehaving vehicle sends false data (wrong position or speed) that can mislead others, for example hide a car that is closing in.</a:t>
+              <a:t>Vehicles broadcast position, speed and heading. A misbehaving vehicle sends false data (wrong position, speed, a fake stop) that can mislead the cars around it.</a:t>
             </a:r>
             <a:endParaRPr lang="en-US" sz="1400" dirty="0"/>
           </a:p>
@@ -2731,7 +2335,7 @@
                 <a:ea typeface="Calibri" pitchFamily="34" charset="-122"/>
                 <a:cs typeface="Calibri" pitchFamily="34" charset="-120"/>
               </a:rPr>
-              <a:t>A transformer looks at the 16 nearest senders over a 10-second window, so it can spot a sender that disagrees with its surroundings. Baseline: judge each sender alone.</a:t>
+              <a:t>A small transformer looks at each sender over time and at the other senders nearby (neighbour attention), so it can spot a sender whose claims do not fit its surroundings.</a:t>
             </a:r>
             <a:endParaRPr lang="en-US" sz="1400" dirty="0"/>
           </a:p>
@@ -2794,7 +2398,7 @@
               <a:buNone/>
             </a:pPr>
             <a:r>
-              <a:rPr lang="en-US" sz="3200" b="1" dirty="0">
+              <a:rPr lang="en-US" sz="3000" b="1" dirty="0">
                 <a:solidFill>
                   <a:srgbClr val="0B1F33"/>
                 </a:solidFill>
@@ -2802,9 +2406,9 @@
                 <a:ea typeface="Cambria" pitchFamily="34" charset="-122"/>
                 <a:cs typeface="Cambria" pitchFamily="34" charset="-120"/>
               </a:rPr>
-              <a:t>What is done so far</a:t>
+              <a:t>What was built</a:t>
             </a:r>
-            <a:endParaRPr lang="en-US" sz="3200" dirty="0"/>
+            <a:endParaRPr lang="en-US" sz="3000" dirty="0"/>
           </a:p>
         </p:txBody>
       </p:sp>
@@ -2816,7 +2420,7 @@
         </p:nvSpPr>
         <p:spPr>
           <a:xfrm>
-            <a:off x="548640" y="1188720"/>
+            <a:off x="548640" y="1097280"/>
             <a:ext cx="548640" cy="548640"/>
           </a:xfrm>
           <a:prstGeom prst="ellipse">
@@ -2841,7 +2445,7 @@
         </p:nvSpPr>
         <p:spPr>
           <a:xfrm>
-            <a:off x="548640" y="1188720"/>
+            <a:off x="548640" y="1097280"/>
             <a:ext cx="548640" cy="548640"/>
           </a:xfrm>
           <a:prstGeom prst="rect">
@@ -2880,7 +2484,7 @@
         </p:nvSpPr>
         <p:spPr>
           <a:xfrm>
-            <a:off x="1325880" y="1170432"/>
+            <a:off x="1325880" y="1060704"/>
             <a:ext cx="7223760" cy="274320"/>
           </a:xfrm>
           <a:prstGeom prst="rect">
@@ -2897,7 +2501,7 @@
               <a:buNone/>
             </a:pPr>
             <a:r>
-              <a:rPr lang="en-US" sz="1800" b="1" dirty="0">
+              <a:rPr lang="en-US" sz="1700" b="1" dirty="0">
                 <a:solidFill>
                   <a:srgbClr val="0B1F33"/>
                 </a:solidFill>
@@ -2905,9 +2509,9 @@
                 <a:ea typeface="Cambria" pitchFamily="34" charset="-122"/>
                 <a:cs typeface="Cambria" pitchFamily="34" charset="-120"/>
               </a:rPr>
-              <a:t>Model</a:t>
+              <a:t>Data</a:t>
             </a:r>
-            <a:endParaRPr lang="en-US" sz="1800" dirty="0"/>
+            <a:endParaRPr lang="en-US" sz="1700" dirty="0"/>
           </a:p>
         </p:txBody>
       </p:sp>
@@ -2919,8 +2523,8 @@
         </p:nvSpPr>
         <p:spPr>
           <a:xfrm>
-            <a:off x="1325880" y="1463040"/>
-            <a:ext cx="7223760" cy="320040"/>
+            <a:off x="1325880" y="1353312"/>
+            <a:ext cx="7223760" cy="457200"/>
           </a:xfrm>
           <a:prstGeom prst="rect">
             <a:avLst/>
@@ -2929,14 +2533,14 @@
           <a:ln/>
         </p:spPr>
         <p:txBody>
-          <a:bodyPr wrap="square" lIns="0" tIns="0" rIns="0" bIns="0" rtlCol="0" anchor="ctr"/>
+          <a:bodyPr wrap="square" lIns="0" tIns="0" rIns="0" bIns="0" rtlCol="0" anchor="t"/>
           <a:lstStyle/>
           <a:p>
             <a:pPr indent="0" marL="0">
               <a:buNone/>
             </a:pPr>
             <a:r>
-              <a:rPr lang="en-US" sz="1400" dirty="0">
+              <a:rPr lang="en-US" sz="1300" dirty="0">
                 <a:solidFill>
                   <a:srgbClr val="5B6B7A"/>
                 </a:solidFill>
@@ -2944,9 +2548,9 @@
                 <a:ea typeface="Calibri" pitchFamily="34" charset="-122"/>
                 <a:cs typeface="Calibri" pitchFamily="34" charset="-120"/>
               </a:rPr>
-              <a:t>Transformer with temporal and spatial attention, plus ablations</a:t>
+              <a:t>VeReMi Extension: 14 of 19 attack types (no Sybil; RandomSpeedOffset archive excluded as mislabeled)</a:t>
             </a:r>
-            <a:endParaRPr lang="en-US" sz="1400" dirty="0"/>
+            <a:endParaRPr lang="en-US" sz="1300" dirty="0"/>
           </a:p>
         </p:txBody>
       </p:sp>
@@ -2958,7 +2562,7 @@
         </p:nvSpPr>
         <p:spPr>
           <a:xfrm>
-            <a:off x="548640" y="2057400"/>
+            <a:off x="548640" y="1965960"/>
             <a:ext cx="548640" cy="548640"/>
           </a:xfrm>
           <a:prstGeom prst="ellipse">
@@ -2983,7 +2587,7 @@
         </p:nvSpPr>
         <p:spPr>
           <a:xfrm>
-            <a:off x="548640" y="2057400"/>
+            <a:off x="548640" y="1965960"/>
             <a:ext cx="548640" cy="548640"/>
           </a:xfrm>
           <a:prstGeom prst="rect">
@@ -3022,7 +2626,7 @@
         </p:nvSpPr>
         <p:spPr>
           <a:xfrm>
-            <a:off x="1325880" y="2039112"/>
+            <a:off x="1325880" y="1929384"/>
             <a:ext cx="7223760" cy="274320"/>
           </a:xfrm>
           <a:prstGeom prst="rect">
@@ -3039,7 +2643,7 @@
               <a:buNone/>
             </a:pPr>
             <a:r>
-              <a:rPr lang="en-US" sz="1800" b="1" dirty="0">
+              <a:rPr lang="en-US" sz="1700" b="1" dirty="0">
                 <a:solidFill>
                   <a:srgbClr val="0B1F33"/>
                 </a:solidFill>
@@ -3047,9 +2651,9 @@
                 <a:ea typeface="Cambria" pitchFamily="34" charset="-122"/>
                 <a:cs typeface="Cambria" pitchFamily="34" charset="-120"/>
               </a:rPr>
-              <a:t>Data loader</a:t>
+              <a:t>Splits</a:t>
             </a:r>
-            <a:endParaRPr lang="en-US" sz="1800" dirty="0"/>
+            <a:endParaRPr lang="en-US" sz="1700" dirty="0"/>
           </a:p>
         </p:txBody>
       </p:sp>
@@ -3061,8 +2665,8 @@
         </p:nvSpPr>
         <p:spPr>
           <a:xfrm>
-            <a:off x="1325880" y="2331720"/>
-            <a:ext cx="7223760" cy="320040"/>
+            <a:off x="1325880" y="2221992"/>
+            <a:ext cx="7223760" cy="457200"/>
           </a:xfrm>
           <a:prstGeom prst="rect">
             <a:avLst/>
@@ -3071,14 +2675,14 @@
           <a:ln/>
         </p:spPr>
         <p:txBody>
-          <a:bodyPr wrap="square" lIns="0" tIns="0" rIns="0" bIns="0" rtlCol="0" anchor="ctr"/>
+          <a:bodyPr wrap="square" lIns="0" tIns="0" rIns="0" bIns="0" rtlCol="0" anchor="t"/>
           <a:lstStyle/>
           <a:p>
             <a:pPr indent="0" marL="0">
               <a:buNone/>
             </a:pPr>
             <a:r>
-              <a:rPr lang="en-US" sz="1400" dirty="0">
+              <a:rPr lang="en-US" sz="1300" dirty="0">
                 <a:solidFill>
                   <a:srgbClr val="5B6B7A"/>
                 </a:solidFill>
@@ -3086,9 +2690,9 @@
                 <a:ea typeface="Calibri" pitchFamily="34" charset="-122"/>
                 <a:cs typeface="Calibri" pitchFamily="34" charset="-120"/>
               </a:rPr>
-              <a:t>Fixed for the real VeReMi format: message types and labels from filenames</a:t>
+              <a:t>Train 109,823 / validation 29,547 / test 68,971 windows; 2 seeds</a:t>
             </a:r>
-            <a:endParaRPr lang="en-US" sz="1400" dirty="0"/>
+            <a:endParaRPr lang="en-US" sz="1300" dirty="0"/>
           </a:p>
         </p:txBody>
       </p:sp>
@@ -3100,7 +2704,7 @@
         </p:nvSpPr>
         <p:spPr>
           <a:xfrm>
-            <a:off x="548640" y="2926080"/>
+            <a:off x="548640" y="2834640"/>
             <a:ext cx="548640" cy="548640"/>
           </a:xfrm>
           <a:prstGeom prst="ellipse">
@@ -3125,7 +2729,7 @@
         </p:nvSpPr>
         <p:spPr>
           <a:xfrm>
-            <a:off x="548640" y="2926080"/>
+            <a:off x="548640" y="2834640"/>
             <a:ext cx="548640" cy="548640"/>
           </a:xfrm>
           <a:prstGeom prst="rect">
@@ -3164,7 +2768,7 @@
         </p:nvSpPr>
         <p:spPr>
           <a:xfrm>
-            <a:off x="1325880" y="2907792"/>
+            <a:off x="1325880" y="2798064"/>
             <a:ext cx="7223760" cy="274320"/>
           </a:xfrm>
           <a:prstGeom prst="rect">
@@ -3181,7 +2785,7 @@
               <a:buNone/>
             </a:pPr>
             <a:r>
-              <a:rPr lang="en-US" sz="1800" b="1" dirty="0">
+              <a:rPr lang="en-US" sz="1700" b="1" dirty="0">
                 <a:solidFill>
                   <a:srgbClr val="0B1F33"/>
                 </a:solidFill>
@@ -3189,9 +2793,9 @@
                 <a:ea typeface="Cambria" pitchFamily="34" charset="-122"/>
                 <a:cs typeface="Cambria" pitchFamily="34" charset="-120"/>
               </a:rPr>
-              <a:t>Benchmark data</a:t>
+              <a:t>Final model (v2)</a:t>
             </a:r>
-            <a:endParaRPr lang="en-US" sz="1800" dirty="0"/>
+            <a:endParaRPr lang="en-US" sz="1700" dirty="0"/>
           </a:p>
         </p:txBody>
       </p:sp>
@@ -3203,8 +2807,8 @@
         </p:nvSpPr>
         <p:spPr>
           <a:xfrm>
-            <a:off x="1325880" y="3200400"/>
-            <a:ext cx="7223760" cy="320040"/>
+            <a:off x="1325880" y="3090672"/>
+            <a:ext cx="7223760" cy="457200"/>
           </a:xfrm>
           <a:prstGeom prst="rect">
             <a:avLst/>
@@ -3213,14 +2817,14 @@
           <a:ln/>
         </p:spPr>
         <p:txBody>
-          <a:bodyPr wrap="square" lIns="0" tIns="0" rIns="0" bIns="0" rtlCol="0" anchor="ctr"/>
+          <a:bodyPr wrap="square" lIns="0" tIns="0" rIns="0" bIns="0" rtlCol="0" anchor="t"/>
           <a:lstStyle/>
           <a:p>
             <a:pPr indent="0" marL="0">
               <a:buNone/>
             </a:pPr>
             <a:r>
-              <a:rPr lang="en-US" sz="1400" dirty="0">
+              <a:rPr lang="en-US" sz="1300" dirty="0">
                 <a:solidFill>
                   <a:srgbClr val="5B6B7A"/>
                 </a:solidFill>
@@ -3228,9 +2832,9 @@
                 <a:ea typeface="Calibri" pitchFamily="34" charset="-122"/>
                 <a:cs typeface="Calibri" pitchFamily="34" charset="-120"/>
               </a:rPr>
-              <a:t>VeReMi Extension (simulated traffic) from Zenodo: RandomPos and ConstSpeed attacks</a:t>
+              <a:t>Transformer, 144k parameters, temporal + neighbour attention; 9 claim values + 10 plausibility checks per message</a:t>
             </a:r>
-            <a:endParaRPr lang="en-US" sz="1400" dirty="0"/>
+            <a:endParaRPr lang="en-US" sz="1300" dirty="0"/>
           </a:p>
         </p:txBody>
       </p:sp>
@@ -3242,7 +2846,7 @@
         </p:nvSpPr>
         <p:spPr>
           <a:xfrm>
-            <a:off x="548640" y="3794760"/>
+            <a:off x="548640" y="3703320"/>
             <a:ext cx="548640" cy="548640"/>
           </a:xfrm>
           <a:prstGeom prst="ellipse">
@@ -3267,7 +2871,7 @@
         </p:nvSpPr>
         <p:spPr>
           <a:xfrm>
-            <a:off x="548640" y="3794760"/>
+            <a:off x="548640" y="3703320"/>
             <a:ext cx="548640" cy="548640"/>
           </a:xfrm>
           <a:prstGeom prst="rect">
@@ -3306,7 +2910,7 @@
         </p:nvSpPr>
         <p:spPr>
           <a:xfrm>
-            <a:off x="1325880" y="3776472"/>
+            <a:off x="1325880" y="3666744"/>
             <a:ext cx="7223760" cy="274320"/>
           </a:xfrm>
           <a:prstGeom prst="rect">
@@ -3323,7 +2927,7 @@
               <a:buNone/>
             </a:pPr>
             <a:r>
-              <a:rPr lang="en-US" sz="1800" b="1" dirty="0">
+              <a:rPr lang="en-US" sz="1700" b="1" dirty="0">
                 <a:solidFill>
                   <a:srgbClr val="0B1F33"/>
                 </a:solidFill>
@@ -3331,9 +2935,9 @@
                 <a:ea typeface="Cambria" pitchFamily="34" charset="-122"/>
                 <a:cs typeface="Cambria" pitchFamily="34" charset="-120"/>
               </a:rPr>
-              <a:t>Experiments</a:t>
+              <a:t>Checks and training</a:t>
             </a:r>
-            <a:endParaRPr lang="en-US" sz="1800" dirty="0"/>
+            <a:endParaRPr lang="en-US" sz="1700" dirty="0"/>
           </a:p>
         </p:txBody>
       </p:sp>
@@ -3345,8 +2949,8 @@
         </p:nvSpPr>
         <p:spPr>
           <a:xfrm>
-            <a:off x="1325880" y="4069080"/>
-            <a:ext cx="7223760" cy="320040"/>
+            <a:off x="1325880" y="3959352"/>
+            <a:ext cx="7223760" cy="457200"/>
           </a:xfrm>
           <a:prstGeom prst="rect">
             <a:avLst/>
@@ -3355,14 +2959,14 @@
           <a:ln/>
         </p:spPr>
         <p:txBody>
-          <a:bodyPr wrap="square" lIns="0" tIns="0" rIns="0" bIns="0" rtlCol="0" anchor="ctr"/>
+          <a:bodyPr wrap="square" lIns="0" tIns="0" rIns="0" bIns="0" rtlCol="0" anchor="t"/>
           <a:lstStyle/>
           <a:p>
             <a:pPr indent="0" marL="0">
               <a:buNone/>
             </a:pPr>
             <a:r>
-              <a:rPr lang="en-US" sz="1400" dirty="0">
+              <a:rPr lang="en-US" sz="1300" dirty="0">
                 <a:solidFill>
                   <a:srgbClr val="5B6B7A"/>
                 </a:solidFill>
@@ -3370,9 +2974,9 @@
                 <a:ea typeface="Calibri" pitchFamily="34" charset="-122"/>
                 <a:cs typeface="Calibri" pitchFamily="34" charset="-120"/>
               </a:rPr>
-              <a:t>3 models x 3 seeds, train on first hour, test on later hour</a:t>
+              <a:t>Kinematics, road map learned from honest traffic, nearest other claim, self-repeat, copied trail; training adds injected lies (offset, fake stop); receiver-side memory</a:t>
             </a:r>
-            <a:endParaRPr lang="en-US" sz="1400" dirty="0"/>
+            <a:endParaRPr lang="en-US" sz="1300" dirty="0"/>
           </a:p>
         </p:txBody>
       </p:sp>
@@ -3433,7 +3037,7 @@
               <a:buNone/>
             </a:pPr>
             <a:r>
-              <a:rPr lang="en-US" sz="3200" b="1" dirty="0">
+              <a:rPr lang="en-US" sz="3000" b="1" dirty="0">
                 <a:solidFill>
                   <a:srgbClr val="0B1F33"/>
                 </a:solidFill>
@@ -3441,25 +3045,2805 @@
                 <a:ea typeface="Cambria" pitchFamily="34" charset="-122"/>
                 <a:cs typeface="Cambria" pitchFamily="34" charset="-120"/>
               </a:rPr>
-              <a:t>Preliminary results (F1)</a:t>
+              <a:t>Results on the test set (14 attacks)</a:t>
             </a:r>
-            <a:endParaRPr lang="en-US" sz="3200" dirty="0"/>
+            <a:endParaRPr lang="en-US" sz="3000" dirty="0"/>
           </a:p>
         </p:txBody>
       </p:sp>
       <p:graphicFrame>
         <p:nvGraphicFramePr>
-          <p:cNvPr id="3" name="Chart 0" descr=""/>
-          <p:cNvGraphicFramePr/>
-          <p:nvPr/>
+          <p:cNvPr id="5" name="Table 0"/>
+          <p:cNvGraphicFramePr>
+            <a:graphicFrameLocks noGrp="1"/>
+          </p:cNvGraphicFramePr>
+          <p:nvPr>
+            <p:extLst>
+              <p:ext uri="{D42A27DB-BD31-4B8C-83A1-F6EECF244321}">
+                <p14:modId xmlns:p14="http://schemas.microsoft.com/office/powerpoint/2010/main" val="1579011935"/>
+              </p:ext>
+            </p:extLst>
+          </p:nvPr>
         </p:nvGraphicFramePr>
         <p:xfrm>
-          <a:off x="457200" y="1051560"/>
-          <a:ext cx="5486400" cy="3566160"/>
+          <a:off x="548640" y="1097280"/>
+          <a:ext cx="8046720" cy="914400"/>
         </p:xfrm>
-        <a:graphic xmlns:a="http://schemas.openxmlformats.org/drawingml/2006/main">
-          <a:graphicData uri="http://schemas.openxmlformats.org/drawingml/2006/chart">
-            <c:chart xmlns:c="http://schemas.openxmlformats.org/drawingml/2006/chart" r:id="rId1"/>
+        <a:graphic>
+          <a:graphicData uri="http://schemas.openxmlformats.org/drawingml/2006/table">
+            <a:tbl>
+              <a:tblPr/>
+              <a:tblGrid>
+                <a:gridCol w="2103120"/>
+                <a:gridCol w="1463040"/>
+                <a:gridCol w="1097280"/>
+                <a:gridCol w="1097280"/>
+                <a:gridCol w="1188720"/>
+                <a:gridCol w="1097280"/>
+              </a:tblGrid>
+              <a:tr h="329184">
+                <a:tc>
+                  <a:txBody>
+                    <a:bodyPr/>
+                    <a:lstStyle/>
+                    <a:p>
+                      <a:pPr algn="ctr" indent="0" marL="0">
+                        <a:buNone/>
+                      </a:pPr>
+                      <a:r>
+                        <a:rPr lang="en-US" sz="1200" b="1" dirty="0">
+                          <a:solidFill>
+                            <a:srgbClr val="FFFFFF"/>
+                          </a:solidFill>
+                          <a:latin typeface="Calibri" pitchFamily="34" charset="0"/>
+                          <a:ea typeface="Calibri" pitchFamily="34" charset="-122"/>
+                          <a:cs typeface="Calibri" pitchFamily="34" charset="-120"/>
+                        </a:rPr>
+                        <a:t>Model</a:t>
+                      </a:r>
+                      <a:endParaRPr lang="en-US" sz="1200" dirty="0">
+                        <a:latin typeface="Calibri" charset="0"/>
+                        <a:ea typeface="Calibri" charset="0"/>
+                        <a:cs typeface="Calibri" charset="0"/>
+                      </a:endParaRPr>
+                    </a:p>
+                  </a:txBody>
+                  <a:tcPr marL="91440" marR="91440" marT="45720" marB="45720">
+                    <a:lnL w="9525" cap="flat" cmpd="sng" algn="ctr">
+                      <a:solidFill>
+                        <a:srgbClr val="D5DDE3"/>
+                      </a:solidFill>
+                      <a:prstDash val="solid"/>
+                      <a:round/>
+                      <a:headEnd type="none" w="med" len="med"/>
+                      <a:tailEnd type="none" w="med" len="med"/>
+                    </a:lnL>
+                    <a:lnR w="9525" cap="flat" cmpd="sng" algn="ctr">
+                      <a:solidFill>
+                        <a:srgbClr val="D5DDE3"/>
+                      </a:solidFill>
+                      <a:prstDash val="solid"/>
+                      <a:round/>
+                      <a:headEnd type="none" w="med" len="med"/>
+                      <a:tailEnd type="none" w="med" len="med"/>
+                    </a:lnR>
+                    <a:lnT w="9525" cap="flat" cmpd="sng" algn="ctr">
+                      <a:solidFill>
+                        <a:srgbClr val="D5DDE3"/>
+                      </a:solidFill>
+                      <a:prstDash val="solid"/>
+                      <a:round/>
+                      <a:headEnd type="none" w="med" len="med"/>
+                      <a:tailEnd type="none" w="med" len="med"/>
+                    </a:lnT>
+                    <a:lnB w="9525" cap="flat" cmpd="sng" algn="ctr">
+                      <a:solidFill>
+                        <a:srgbClr val="D5DDE3"/>
+                      </a:solidFill>
+                      <a:prstDash val="solid"/>
+                      <a:round/>
+                      <a:headEnd type="none" w="med" len="med"/>
+                      <a:tailEnd type="none" w="med" len="med"/>
+                    </a:lnB>
+                    <a:solidFill>
+                      <a:srgbClr val="0B1F33"/>
+                    </a:solidFill>
+                  </a:tcPr>
+                </a:tc>
+                <a:tc>
+                  <a:txBody>
+                    <a:bodyPr/>
+                    <a:lstStyle/>
+                    <a:p>
+                      <a:pPr algn="ctr" indent="0" marL="0">
+                        <a:buNone/>
+                      </a:pPr>
+                      <a:r>
+                        <a:rPr lang="en-US" sz="1200" b="1" dirty="0">
+                          <a:solidFill>
+                            <a:srgbClr val="FFFFFF"/>
+                          </a:solidFill>
+                          <a:latin typeface="Calibri" pitchFamily="34" charset="0"/>
+                          <a:ea typeface="Calibri" pitchFamily="34" charset="-122"/>
+                          <a:cs typeface="Calibri" pitchFamily="34" charset="-120"/>
+                        </a:rPr>
+                        <a:t>Labels</a:t>
+                      </a:r>
+                      <a:endParaRPr lang="en-US" sz="1200" dirty="0">
+                        <a:latin typeface="Calibri" charset="0"/>
+                        <a:ea typeface="Calibri" charset="0"/>
+                        <a:cs typeface="Calibri" charset="0"/>
+                      </a:endParaRPr>
+                    </a:p>
+                  </a:txBody>
+                  <a:tcPr marL="91440" marR="91440" marT="45720" marB="45720">
+                    <a:lnL w="9525" cap="flat" cmpd="sng" algn="ctr">
+                      <a:solidFill>
+                        <a:srgbClr val="D5DDE3"/>
+                      </a:solidFill>
+                      <a:prstDash val="solid"/>
+                      <a:round/>
+                      <a:headEnd type="none" w="med" len="med"/>
+                      <a:tailEnd type="none" w="med" len="med"/>
+                    </a:lnL>
+                    <a:lnR w="9525" cap="flat" cmpd="sng" algn="ctr">
+                      <a:solidFill>
+                        <a:srgbClr val="D5DDE3"/>
+                      </a:solidFill>
+                      <a:prstDash val="solid"/>
+                      <a:round/>
+                      <a:headEnd type="none" w="med" len="med"/>
+                      <a:tailEnd type="none" w="med" len="med"/>
+                    </a:lnR>
+                    <a:lnT w="9525" cap="flat" cmpd="sng" algn="ctr">
+                      <a:solidFill>
+                        <a:srgbClr val="D5DDE3"/>
+                      </a:solidFill>
+                      <a:prstDash val="solid"/>
+                      <a:round/>
+                      <a:headEnd type="none" w="med" len="med"/>
+                      <a:tailEnd type="none" w="med" len="med"/>
+                    </a:lnT>
+                    <a:lnB w="9525" cap="flat" cmpd="sng" algn="ctr">
+                      <a:solidFill>
+                        <a:srgbClr val="D5DDE3"/>
+                      </a:solidFill>
+                      <a:prstDash val="solid"/>
+                      <a:round/>
+                      <a:headEnd type="none" w="med" len="med"/>
+                      <a:tailEnd type="none" w="med" len="med"/>
+                    </a:lnB>
+                    <a:solidFill>
+                      <a:srgbClr val="0B1F33"/>
+                    </a:solidFill>
+                  </a:tcPr>
+                </a:tc>
+                <a:tc>
+                  <a:txBody>
+                    <a:bodyPr/>
+                    <a:lstStyle/>
+                    <a:p>
+                      <a:pPr algn="ctr" indent="0" marL="0">
+                        <a:buNone/>
+                      </a:pPr>
+                      <a:r>
+                        <a:rPr lang="en-US" sz="1200" b="1" dirty="0">
+                          <a:solidFill>
+                            <a:srgbClr val="FFFFFF"/>
+                          </a:solidFill>
+                          <a:latin typeface="Calibri" pitchFamily="34" charset="0"/>
+                          <a:ea typeface="Calibri" pitchFamily="34" charset="-122"/>
+                          <a:cs typeface="Calibri" pitchFamily="34" charset="-120"/>
+                        </a:rPr>
+                        <a:t>Precision</a:t>
+                      </a:r>
+                      <a:endParaRPr lang="en-US" sz="1200" dirty="0">
+                        <a:latin typeface="Calibri" charset="0"/>
+                        <a:ea typeface="Calibri" charset="0"/>
+                        <a:cs typeface="Calibri" charset="0"/>
+                      </a:endParaRPr>
+                    </a:p>
+                  </a:txBody>
+                  <a:tcPr marL="91440" marR="91440" marT="45720" marB="45720">
+                    <a:lnL w="9525" cap="flat" cmpd="sng" algn="ctr">
+                      <a:solidFill>
+                        <a:srgbClr val="D5DDE3"/>
+                      </a:solidFill>
+                      <a:prstDash val="solid"/>
+                      <a:round/>
+                      <a:headEnd type="none" w="med" len="med"/>
+                      <a:tailEnd type="none" w="med" len="med"/>
+                    </a:lnL>
+                    <a:lnR w="9525" cap="flat" cmpd="sng" algn="ctr">
+                      <a:solidFill>
+                        <a:srgbClr val="D5DDE3"/>
+                      </a:solidFill>
+                      <a:prstDash val="solid"/>
+                      <a:round/>
+                      <a:headEnd type="none" w="med" len="med"/>
+                      <a:tailEnd type="none" w="med" len="med"/>
+                    </a:lnR>
+                    <a:lnT w="9525" cap="flat" cmpd="sng" algn="ctr">
+                      <a:solidFill>
+                        <a:srgbClr val="D5DDE3"/>
+                      </a:solidFill>
+                      <a:prstDash val="solid"/>
+                      <a:round/>
+                      <a:headEnd type="none" w="med" len="med"/>
+                      <a:tailEnd type="none" w="med" len="med"/>
+                    </a:lnT>
+                    <a:lnB w="9525" cap="flat" cmpd="sng" algn="ctr">
+                      <a:solidFill>
+                        <a:srgbClr val="D5DDE3"/>
+                      </a:solidFill>
+                      <a:prstDash val="solid"/>
+                      <a:round/>
+                      <a:headEnd type="none" w="med" len="med"/>
+                      <a:tailEnd type="none" w="med" len="med"/>
+                    </a:lnB>
+                    <a:solidFill>
+                      <a:srgbClr val="0B1F33"/>
+                    </a:solidFill>
+                  </a:tcPr>
+                </a:tc>
+                <a:tc>
+                  <a:txBody>
+                    <a:bodyPr/>
+                    <a:lstStyle/>
+                    <a:p>
+                      <a:pPr algn="ctr" indent="0" marL="0">
+                        <a:buNone/>
+                      </a:pPr>
+                      <a:r>
+                        <a:rPr lang="en-US" sz="1200" b="1" dirty="0">
+                          <a:solidFill>
+                            <a:srgbClr val="FFFFFF"/>
+                          </a:solidFill>
+                          <a:latin typeface="Calibri" pitchFamily="34" charset="0"/>
+                          <a:ea typeface="Calibri" pitchFamily="34" charset="-122"/>
+                          <a:cs typeface="Calibri" pitchFamily="34" charset="-120"/>
+                        </a:rPr>
+                        <a:t>Recall</a:t>
+                      </a:r>
+                      <a:endParaRPr lang="en-US" sz="1200" dirty="0">
+                        <a:latin typeface="Calibri" charset="0"/>
+                        <a:ea typeface="Calibri" charset="0"/>
+                        <a:cs typeface="Calibri" charset="0"/>
+                      </a:endParaRPr>
+                    </a:p>
+                  </a:txBody>
+                  <a:tcPr marL="91440" marR="91440" marT="45720" marB="45720">
+                    <a:lnL w="9525" cap="flat" cmpd="sng" algn="ctr">
+                      <a:solidFill>
+                        <a:srgbClr val="D5DDE3"/>
+                      </a:solidFill>
+                      <a:prstDash val="solid"/>
+                      <a:round/>
+                      <a:headEnd type="none" w="med" len="med"/>
+                      <a:tailEnd type="none" w="med" len="med"/>
+                    </a:lnL>
+                    <a:lnR w="9525" cap="flat" cmpd="sng" algn="ctr">
+                      <a:solidFill>
+                        <a:srgbClr val="D5DDE3"/>
+                      </a:solidFill>
+                      <a:prstDash val="solid"/>
+                      <a:round/>
+                      <a:headEnd type="none" w="med" len="med"/>
+                      <a:tailEnd type="none" w="med" len="med"/>
+                    </a:lnR>
+                    <a:lnT w="9525" cap="flat" cmpd="sng" algn="ctr">
+                      <a:solidFill>
+                        <a:srgbClr val="D5DDE3"/>
+                      </a:solidFill>
+                      <a:prstDash val="solid"/>
+                      <a:round/>
+                      <a:headEnd type="none" w="med" len="med"/>
+                      <a:tailEnd type="none" w="med" len="med"/>
+                    </a:lnT>
+                    <a:lnB w="9525" cap="flat" cmpd="sng" algn="ctr">
+                      <a:solidFill>
+                        <a:srgbClr val="D5DDE3"/>
+                      </a:solidFill>
+                      <a:prstDash val="solid"/>
+                      <a:round/>
+                      <a:headEnd type="none" w="med" len="med"/>
+                      <a:tailEnd type="none" w="med" len="med"/>
+                    </a:lnB>
+                    <a:solidFill>
+                      <a:srgbClr val="0B1F33"/>
+                    </a:solidFill>
+                  </a:tcPr>
+                </a:tc>
+                <a:tc>
+                  <a:txBody>
+                    <a:bodyPr/>
+                    <a:lstStyle/>
+                    <a:p>
+                      <a:pPr algn="ctr" indent="0" marL="0">
+                        <a:buNone/>
+                      </a:pPr>
+                      <a:r>
+                        <a:rPr lang="en-US" sz="1200" b="1" dirty="0">
+                          <a:solidFill>
+                            <a:srgbClr val="FFFFFF"/>
+                          </a:solidFill>
+                          <a:latin typeface="Calibri" pitchFamily="34" charset="0"/>
+                          <a:ea typeface="Calibri" pitchFamily="34" charset="-122"/>
+                          <a:cs typeface="Calibri" pitchFamily="34" charset="-120"/>
+                        </a:rPr>
+                        <a:t>F1</a:t>
+                      </a:r>
+                      <a:endParaRPr lang="en-US" sz="1200" dirty="0">
+                        <a:latin typeface="Calibri" charset="0"/>
+                        <a:ea typeface="Calibri" charset="0"/>
+                        <a:cs typeface="Calibri" charset="0"/>
+                      </a:endParaRPr>
+                    </a:p>
+                  </a:txBody>
+                  <a:tcPr marL="91440" marR="91440" marT="45720" marB="45720">
+                    <a:lnL w="9525" cap="flat" cmpd="sng" algn="ctr">
+                      <a:solidFill>
+                        <a:srgbClr val="D5DDE3"/>
+                      </a:solidFill>
+                      <a:prstDash val="solid"/>
+                      <a:round/>
+                      <a:headEnd type="none" w="med" len="med"/>
+                      <a:tailEnd type="none" w="med" len="med"/>
+                    </a:lnL>
+                    <a:lnR w="9525" cap="flat" cmpd="sng" algn="ctr">
+                      <a:solidFill>
+                        <a:srgbClr val="D5DDE3"/>
+                      </a:solidFill>
+                      <a:prstDash val="solid"/>
+                      <a:round/>
+                      <a:headEnd type="none" w="med" len="med"/>
+                      <a:tailEnd type="none" w="med" len="med"/>
+                    </a:lnR>
+                    <a:lnT w="9525" cap="flat" cmpd="sng" algn="ctr">
+                      <a:solidFill>
+                        <a:srgbClr val="D5DDE3"/>
+                      </a:solidFill>
+                      <a:prstDash val="solid"/>
+                      <a:round/>
+                      <a:headEnd type="none" w="med" len="med"/>
+                      <a:tailEnd type="none" w="med" len="med"/>
+                    </a:lnT>
+                    <a:lnB w="9525" cap="flat" cmpd="sng" algn="ctr">
+                      <a:solidFill>
+                        <a:srgbClr val="D5DDE3"/>
+                      </a:solidFill>
+                      <a:prstDash val="solid"/>
+                      <a:round/>
+                      <a:headEnd type="none" w="med" len="med"/>
+                      <a:tailEnd type="none" w="med" len="med"/>
+                    </a:lnB>
+                    <a:solidFill>
+                      <a:srgbClr val="0B1F33"/>
+                    </a:solidFill>
+                  </a:tcPr>
+                </a:tc>
+                <a:tc>
+                  <a:txBody>
+                    <a:bodyPr/>
+                    <a:lstStyle/>
+                    <a:p>
+                      <a:pPr algn="ctr" indent="0" marL="0">
+                        <a:buNone/>
+                      </a:pPr>
+                      <a:r>
+                        <a:rPr lang="en-US" sz="1200" b="1" dirty="0">
+                          <a:solidFill>
+                            <a:srgbClr val="FFFFFF"/>
+                          </a:solidFill>
+                          <a:latin typeface="Calibri" pitchFamily="34" charset="0"/>
+                          <a:ea typeface="Calibri" pitchFamily="34" charset="-122"/>
+                          <a:cs typeface="Calibri" pitchFamily="34" charset="-120"/>
+                        </a:rPr>
+                        <a:t>Accuracy</a:t>
+                      </a:r>
+                      <a:endParaRPr lang="en-US" sz="1200" dirty="0">
+                        <a:latin typeface="Calibri" charset="0"/>
+                        <a:ea typeface="Calibri" charset="0"/>
+                        <a:cs typeface="Calibri" charset="0"/>
+                      </a:endParaRPr>
+                    </a:p>
+                  </a:txBody>
+                  <a:tcPr marL="91440" marR="91440" marT="45720" marB="45720">
+                    <a:lnL w="9525" cap="flat" cmpd="sng" algn="ctr">
+                      <a:solidFill>
+                        <a:srgbClr val="D5DDE3"/>
+                      </a:solidFill>
+                      <a:prstDash val="solid"/>
+                      <a:round/>
+                      <a:headEnd type="none" w="med" len="med"/>
+                      <a:tailEnd type="none" w="med" len="med"/>
+                    </a:lnL>
+                    <a:lnR w="9525" cap="flat" cmpd="sng" algn="ctr">
+                      <a:solidFill>
+                        <a:srgbClr val="D5DDE3"/>
+                      </a:solidFill>
+                      <a:prstDash val="solid"/>
+                      <a:round/>
+                      <a:headEnd type="none" w="med" len="med"/>
+                      <a:tailEnd type="none" w="med" len="med"/>
+                    </a:lnR>
+                    <a:lnT w="9525" cap="flat" cmpd="sng" algn="ctr">
+                      <a:solidFill>
+                        <a:srgbClr val="D5DDE3"/>
+                      </a:solidFill>
+                      <a:prstDash val="solid"/>
+                      <a:round/>
+                      <a:headEnd type="none" w="med" len="med"/>
+                      <a:tailEnd type="none" w="med" len="med"/>
+                    </a:lnT>
+                    <a:lnB w="9525" cap="flat" cmpd="sng" algn="ctr">
+                      <a:solidFill>
+                        <a:srgbClr val="D5DDE3"/>
+                      </a:solidFill>
+                      <a:prstDash val="solid"/>
+                      <a:round/>
+                      <a:headEnd type="none" w="med" len="med"/>
+                      <a:tailEnd type="none" w="med" len="med"/>
+                    </a:lnB>
+                    <a:solidFill>
+                      <a:srgbClr val="0B1F33"/>
+                    </a:solidFill>
+                  </a:tcPr>
+                </a:tc>
+              </a:tr>
+              <a:tr h="329184">
+                <a:tc>
+                  <a:txBody>
+                    <a:bodyPr/>
+                    <a:lstStyle/>
+                    <a:p>
+                      <a:pPr algn="l" indent="0" marL="0">
+                        <a:buNone/>
+                      </a:pPr>
+                      <a:r>
+                        <a:rPr lang="en-US" sz="1200" dirty="0">
+                          <a:solidFill>
+                            <a:srgbClr val="1B2A38"/>
+                          </a:solidFill>
+                          <a:latin typeface="Calibri" pitchFamily="34" charset="0"/>
+                          <a:ea typeface="Calibri" pitchFamily="34" charset="-122"/>
+                          <a:cs typeface="Calibri" pitchFamily="34" charset="-120"/>
+                        </a:rPr>
+                        <a:t>Speed-check rule</a:t>
+                      </a:r>
+                      <a:endParaRPr lang="en-US" sz="1200" dirty="0">
+                        <a:latin typeface="Calibri" charset="0"/>
+                        <a:ea typeface="Calibri" charset="0"/>
+                        <a:cs typeface="Calibri" charset="0"/>
+                      </a:endParaRPr>
+                    </a:p>
+                  </a:txBody>
+                  <a:tcPr marL="91440" marR="91440" marT="45720" marB="45720">
+                    <a:lnL w="9525" cap="flat" cmpd="sng" algn="ctr">
+                      <a:solidFill>
+                        <a:srgbClr val="D5DDE3"/>
+                      </a:solidFill>
+                      <a:prstDash val="solid"/>
+                      <a:round/>
+                      <a:headEnd type="none" w="med" len="med"/>
+                      <a:tailEnd type="none" w="med" len="med"/>
+                    </a:lnL>
+                    <a:lnR w="9525" cap="flat" cmpd="sng" algn="ctr">
+                      <a:solidFill>
+                        <a:srgbClr val="D5DDE3"/>
+                      </a:solidFill>
+                      <a:prstDash val="solid"/>
+                      <a:round/>
+                      <a:headEnd type="none" w="med" len="med"/>
+                      <a:tailEnd type="none" w="med" len="med"/>
+                    </a:lnR>
+                    <a:lnT w="9525" cap="flat" cmpd="sng" algn="ctr">
+                      <a:solidFill>
+                        <a:srgbClr val="D5DDE3"/>
+                      </a:solidFill>
+                      <a:prstDash val="solid"/>
+                      <a:round/>
+                      <a:headEnd type="none" w="med" len="med"/>
+                      <a:tailEnd type="none" w="med" len="med"/>
+                    </a:lnT>
+                    <a:lnB w="9525" cap="flat" cmpd="sng" algn="ctr">
+                      <a:solidFill>
+                        <a:srgbClr val="D5DDE3"/>
+                      </a:solidFill>
+                      <a:prstDash val="solid"/>
+                      <a:round/>
+                      <a:headEnd type="none" w="med" len="med"/>
+                      <a:tailEnd type="none" w="med" len="med"/>
+                    </a:lnB>
+                  </a:tcPr>
+                </a:tc>
+                <a:tc>
+                  <a:txBody>
+                    <a:bodyPr/>
+                    <a:lstStyle/>
+                    <a:p>
+                      <a:pPr algn="ctr" indent="0" marL="0">
+                        <a:buNone/>
+                      </a:pPr>
+                      <a:r>
+                        <a:rPr lang="en-US" sz="1200" dirty="0">
+                          <a:solidFill>
+                            <a:srgbClr val="1B2A38"/>
+                          </a:solidFill>
+                          <a:latin typeface="Calibri" pitchFamily="34" charset="0"/>
+                          <a:ea typeface="Calibri" pitchFamily="34" charset="-122"/>
+                          <a:cs typeface="Calibri" pitchFamily="34" charset="-120"/>
+                        </a:rPr>
+                        <a:t>vehicle / message</a:t>
+                      </a:r>
+                      <a:endParaRPr lang="en-US" sz="1200" dirty="0">
+                        <a:latin typeface="Calibri" charset="0"/>
+                        <a:ea typeface="Calibri" charset="0"/>
+                        <a:cs typeface="Calibri" charset="0"/>
+                      </a:endParaRPr>
+                    </a:p>
+                  </a:txBody>
+                  <a:tcPr marL="91440" marR="91440" marT="45720" marB="45720">
+                    <a:lnL w="9525" cap="flat" cmpd="sng" algn="ctr">
+                      <a:solidFill>
+                        <a:srgbClr val="D5DDE3"/>
+                      </a:solidFill>
+                      <a:prstDash val="solid"/>
+                      <a:round/>
+                      <a:headEnd type="none" w="med" len="med"/>
+                      <a:tailEnd type="none" w="med" len="med"/>
+                    </a:lnL>
+                    <a:lnR w="9525" cap="flat" cmpd="sng" algn="ctr">
+                      <a:solidFill>
+                        <a:srgbClr val="D5DDE3"/>
+                      </a:solidFill>
+                      <a:prstDash val="solid"/>
+                      <a:round/>
+                      <a:headEnd type="none" w="med" len="med"/>
+                      <a:tailEnd type="none" w="med" len="med"/>
+                    </a:lnR>
+                    <a:lnT w="9525" cap="flat" cmpd="sng" algn="ctr">
+                      <a:solidFill>
+                        <a:srgbClr val="D5DDE3"/>
+                      </a:solidFill>
+                      <a:prstDash val="solid"/>
+                      <a:round/>
+                      <a:headEnd type="none" w="med" len="med"/>
+                      <a:tailEnd type="none" w="med" len="med"/>
+                    </a:lnT>
+                    <a:lnB w="9525" cap="flat" cmpd="sng" algn="ctr">
+                      <a:solidFill>
+                        <a:srgbClr val="D5DDE3"/>
+                      </a:solidFill>
+                      <a:prstDash val="solid"/>
+                      <a:round/>
+                      <a:headEnd type="none" w="med" len="med"/>
+                      <a:tailEnd type="none" w="med" len="med"/>
+                    </a:lnB>
+                  </a:tcPr>
+                </a:tc>
+                <a:tc>
+                  <a:txBody>
+                    <a:bodyPr/>
+                    <a:lstStyle/>
+                    <a:p>
+                      <a:pPr algn="ctr" indent="0" marL="0">
+                        <a:buNone/>
+                      </a:pPr>
+                      <a:r>
+                        <a:rPr lang="en-US" sz="1200" dirty="0">
+                          <a:solidFill>
+                            <a:srgbClr val="1B2A38"/>
+                          </a:solidFill>
+                          <a:latin typeface="Calibri" pitchFamily="34" charset="0"/>
+                          <a:ea typeface="Calibri" pitchFamily="34" charset="-122"/>
+                          <a:cs typeface="Calibri" pitchFamily="34" charset="-120"/>
+                        </a:rPr>
+                        <a:t>-</a:t>
+                      </a:r>
+                      <a:endParaRPr lang="en-US" sz="1200" dirty="0">
+                        <a:latin typeface="Calibri" charset="0"/>
+                        <a:ea typeface="Calibri" charset="0"/>
+                        <a:cs typeface="Calibri" charset="0"/>
+                      </a:endParaRPr>
+                    </a:p>
+                  </a:txBody>
+                  <a:tcPr marL="91440" marR="91440" marT="45720" marB="45720">
+                    <a:lnL w="9525" cap="flat" cmpd="sng" algn="ctr">
+                      <a:solidFill>
+                        <a:srgbClr val="D5DDE3"/>
+                      </a:solidFill>
+                      <a:prstDash val="solid"/>
+                      <a:round/>
+                      <a:headEnd type="none" w="med" len="med"/>
+                      <a:tailEnd type="none" w="med" len="med"/>
+                    </a:lnL>
+                    <a:lnR w="9525" cap="flat" cmpd="sng" algn="ctr">
+                      <a:solidFill>
+                        <a:srgbClr val="D5DDE3"/>
+                      </a:solidFill>
+                      <a:prstDash val="solid"/>
+                      <a:round/>
+                      <a:headEnd type="none" w="med" len="med"/>
+                      <a:tailEnd type="none" w="med" len="med"/>
+                    </a:lnR>
+                    <a:lnT w="9525" cap="flat" cmpd="sng" algn="ctr">
+                      <a:solidFill>
+                        <a:srgbClr val="D5DDE3"/>
+                      </a:solidFill>
+                      <a:prstDash val="solid"/>
+                      <a:round/>
+                      <a:headEnd type="none" w="med" len="med"/>
+                      <a:tailEnd type="none" w="med" len="med"/>
+                    </a:lnT>
+                    <a:lnB w="9525" cap="flat" cmpd="sng" algn="ctr">
+                      <a:solidFill>
+                        <a:srgbClr val="D5DDE3"/>
+                      </a:solidFill>
+                      <a:prstDash val="solid"/>
+                      <a:round/>
+                      <a:headEnd type="none" w="med" len="med"/>
+                      <a:tailEnd type="none" w="med" len="med"/>
+                    </a:lnB>
+                  </a:tcPr>
+                </a:tc>
+                <a:tc>
+                  <a:txBody>
+                    <a:bodyPr/>
+                    <a:lstStyle/>
+                    <a:p>
+                      <a:pPr algn="ctr" indent="0" marL="0">
+                        <a:buNone/>
+                      </a:pPr>
+                      <a:r>
+                        <a:rPr lang="en-US" sz="1200" dirty="0">
+                          <a:solidFill>
+                            <a:srgbClr val="1B2A38"/>
+                          </a:solidFill>
+                          <a:latin typeface="Calibri" pitchFamily="34" charset="0"/>
+                          <a:ea typeface="Calibri" pitchFamily="34" charset="-122"/>
+                          <a:cs typeface="Calibri" pitchFamily="34" charset="-120"/>
+                        </a:rPr>
+                        <a:t>-</a:t>
+                      </a:r>
+                      <a:endParaRPr lang="en-US" sz="1200" dirty="0">
+                        <a:latin typeface="Calibri" charset="0"/>
+                        <a:ea typeface="Calibri" charset="0"/>
+                        <a:cs typeface="Calibri" charset="0"/>
+                      </a:endParaRPr>
+                    </a:p>
+                  </a:txBody>
+                  <a:tcPr marL="91440" marR="91440" marT="45720" marB="45720">
+                    <a:lnL w="9525" cap="flat" cmpd="sng" algn="ctr">
+                      <a:solidFill>
+                        <a:srgbClr val="D5DDE3"/>
+                      </a:solidFill>
+                      <a:prstDash val="solid"/>
+                      <a:round/>
+                      <a:headEnd type="none" w="med" len="med"/>
+                      <a:tailEnd type="none" w="med" len="med"/>
+                    </a:lnL>
+                    <a:lnR w="9525" cap="flat" cmpd="sng" algn="ctr">
+                      <a:solidFill>
+                        <a:srgbClr val="D5DDE3"/>
+                      </a:solidFill>
+                      <a:prstDash val="solid"/>
+                      <a:round/>
+                      <a:headEnd type="none" w="med" len="med"/>
+                      <a:tailEnd type="none" w="med" len="med"/>
+                    </a:lnR>
+                    <a:lnT w="9525" cap="flat" cmpd="sng" algn="ctr">
+                      <a:solidFill>
+                        <a:srgbClr val="D5DDE3"/>
+                      </a:solidFill>
+                      <a:prstDash val="solid"/>
+                      <a:round/>
+                      <a:headEnd type="none" w="med" len="med"/>
+                      <a:tailEnd type="none" w="med" len="med"/>
+                    </a:lnT>
+                    <a:lnB w="9525" cap="flat" cmpd="sng" algn="ctr">
+                      <a:solidFill>
+                        <a:srgbClr val="D5DDE3"/>
+                      </a:solidFill>
+                      <a:prstDash val="solid"/>
+                      <a:round/>
+                      <a:headEnd type="none" w="med" len="med"/>
+                      <a:tailEnd type="none" w="med" len="med"/>
+                    </a:lnB>
+                  </a:tcPr>
+                </a:tc>
+                <a:tc>
+                  <a:txBody>
+                    <a:bodyPr/>
+                    <a:lstStyle/>
+                    <a:p>
+                      <a:pPr algn="ctr" indent="0" marL="0">
+                        <a:buNone/>
+                      </a:pPr>
+                      <a:r>
+                        <a:rPr lang="en-US" sz="1200" dirty="0">
+                          <a:solidFill>
+                            <a:srgbClr val="1B2A38"/>
+                          </a:solidFill>
+                          <a:latin typeface="Calibri" pitchFamily="34" charset="0"/>
+                          <a:ea typeface="Calibri" pitchFamily="34" charset="-122"/>
+                          <a:cs typeface="Calibri" pitchFamily="34" charset="-120"/>
+                        </a:rPr>
+                        <a:t>78.9 / 80.0</a:t>
+                      </a:r>
+                      <a:endParaRPr lang="en-US" sz="1200" dirty="0">
+                        <a:latin typeface="Calibri" charset="0"/>
+                        <a:ea typeface="Calibri" charset="0"/>
+                        <a:cs typeface="Calibri" charset="0"/>
+                      </a:endParaRPr>
+                    </a:p>
+                  </a:txBody>
+                  <a:tcPr marL="91440" marR="91440" marT="45720" marB="45720">
+                    <a:lnL w="9525" cap="flat" cmpd="sng" algn="ctr">
+                      <a:solidFill>
+                        <a:srgbClr val="D5DDE3"/>
+                      </a:solidFill>
+                      <a:prstDash val="solid"/>
+                      <a:round/>
+                      <a:headEnd type="none" w="med" len="med"/>
+                      <a:tailEnd type="none" w="med" len="med"/>
+                    </a:lnL>
+                    <a:lnR w="9525" cap="flat" cmpd="sng" algn="ctr">
+                      <a:solidFill>
+                        <a:srgbClr val="D5DDE3"/>
+                      </a:solidFill>
+                      <a:prstDash val="solid"/>
+                      <a:round/>
+                      <a:headEnd type="none" w="med" len="med"/>
+                      <a:tailEnd type="none" w="med" len="med"/>
+                    </a:lnR>
+                    <a:lnT w="9525" cap="flat" cmpd="sng" algn="ctr">
+                      <a:solidFill>
+                        <a:srgbClr val="D5DDE3"/>
+                      </a:solidFill>
+                      <a:prstDash val="solid"/>
+                      <a:round/>
+                      <a:headEnd type="none" w="med" len="med"/>
+                      <a:tailEnd type="none" w="med" len="med"/>
+                    </a:lnT>
+                    <a:lnB w="9525" cap="flat" cmpd="sng" algn="ctr">
+                      <a:solidFill>
+                        <a:srgbClr val="D5DDE3"/>
+                      </a:solidFill>
+                      <a:prstDash val="solid"/>
+                      <a:round/>
+                      <a:headEnd type="none" w="med" len="med"/>
+                      <a:tailEnd type="none" w="med" len="med"/>
+                    </a:lnB>
+                  </a:tcPr>
+                </a:tc>
+                <a:tc>
+                  <a:txBody>
+                    <a:bodyPr/>
+                    <a:lstStyle/>
+                    <a:p>
+                      <a:pPr algn="ctr" indent="0" marL="0">
+                        <a:buNone/>
+                      </a:pPr>
+                      <a:r>
+                        <a:rPr lang="en-US" sz="1200" dirty="0">
+                          <a:solidFill>
+                            <a:srgbClr val="1B2A38"/>
+                          </a:solidFill>
+                          <a:latin typeface="Calibri" pitchFamily="34" charset="0"/>
+                          <a:ea typeface="Calibri" pitchFamily="34" charset="-122"/>
+                          <a:cs typeface="Calibri" pitchFamily="34" charset="-120"/>
+                        </a:rPr>
+                        <a:t>-</a:t>
+                      </a:r>
+                      <a:endParaRPr lang="en-US" sz="1200" dirty="0">
+                        <a:latin typeface="Calibri" charset="0"/>
+                        <a:ea typeface="Calibri" charset="0"/>
+                        <a:cs typeface="Calibri" charset="0"/>
+                      </a:endParaRPr>
+                    </a:p>
+                  </a:txBody>
+                  <a:tcPr marL="91440" marR="91440" marT="45720" marB="45720">
+                    <a:lnL w="9525" cap="flat" cmpd="sng" algn="ctr">
+                      <a:solidFill>
+                        <a:srgbClr val="D5DDE3"/>
+                      </a:solidFill>
+                      <a:prstDash val="solid"/>
+                      <a:round/>
+                      <a:headEnd type="none" w="med" len="med"/>
+                      <a:tailEnd type="none" w="med" len="med"/>
+                    </a:lnL>
+                    <a:lnR w="9525" cap="flat" cmpd="sng" algn="ctr">
+                      <a:solidFill>
+                        <a:srgbClr val="D5DDE3"/>
+                      </a:solidFill>
+                      <a:prstDash val="solid"/>
+                      <a:round/>
+                      <a:headEnd type="none" w="med" len="med"/>
+                      <a:tailEnd type="none" w="med" len="med"/>
+                    </a:lnR>
+                    <a:lnT w="9525" cap="flat" cmpd="sng" algn="ctr">
+                      <a:solidFill>
+                        <a:srgbClr val="D5DDE3"/>
+                      </a:solidFill>
+                      <a:prstDash val="solid"/>
+                      <a:round/>
+                      <a:headEnd type="none" w="med" len="med"/>
+                      <a:tailEnd type="none" w="med" len="med"/>
+                    </a:lnT>
+                    <a:lnB w="9525" cap="flat" cmpd="sng" algn="ctr">
+                      <a:solidFill>
+                        <a:srgbClr val="D5DDE3"/>
+                      </a:solidFill>
+                      <a:prstDash val="solid"/>
+                      <a:round/>
+                      <a:headEnd type="none" w="med" len="med"/>
+                      <a:tailEnd type="none" w="med" len="med"/>
+                    </a:lnB>
+                  </a:tcPr>
+                </a:tc>
+              </a:tr>
+              <a:tr h="329184">
+                <a:tc>
+                  <a:txBody>
+                    <a:bodyPr/>
+                    <a:lstStyle/>
+                    <a:p>
+                      <a:pPr algn="l" indent="0" marL="0">
+                        <a:buNone/>
+                      </a:pPr>
+                      <a:r>
+                        <a:rPr lang="en-US" sz="1200" dirty="0">
+                          <a:solidFill>
+                            <a:srgbClr val="1B2A38"/>
+                          </a:solidFill>
+                          <a:latin typeface="Calibri" pitchFamily="34" charset="0"/>
+                          <a:ea typeface="Calibri" pitchFamily="34" charset="-122"/>
+                          <a:cs typeface="Calibri" pitchFamily="34" charset="-120"/>
+                        </a:rPr>
+                        <a:t>First model (no checks)</a:t>
+                      </a:r>
+                      <a:endParaRPr lang="en-US" sz="1200" dirty="0">
+                        <a:latin typeface="Calibri" charset="0"/>
+                        <a:ea typeface="Calibri" charset="0"/>
+                        <a:cs typeface="Calibri" charset="0"/>
+                      </a:endParaRPr>
+                    </a:p>
+                  </a:txBody>
+                  <a:tcPr marL="91440" marR="91440" marT="45720" marB="45720">
+                    <a:lnL w="9525" cap="flat" cmpd="sng" algn="ctr">
+                      <a:solidFill>
+                        <a:srgbClr val="D5DDE3"/>
+                      </a:solidFill>
+                      <a:prstDash val="solid"/>
+                      <a:round/>
+                      <a:headEnd type="none" w="med" len="med"/>
+                      <a:tailEnd type="none" w="med" len="med"/>
+                    </a:lnL>
+                    <a:lnR w="9525" cap="flat" cmpd="sng" algn="ctr">
+                      <a:solidFill>
+                        <a:srgbClr val="D5DDE3"/>
+                      </a:solidFill>
+                      <a:prstDash val="solid"/>
+                      <a:round/>
+                      <a:headEnd type="none" w="med" len="med"/>
+                      <a:tailEnd type="none" w="med" len="med"/>
+                    </a:lnR>
+                    <a:lnT w="9525" cap="flat" cmpd="sng" algn="ctr">
+                      <a:solidFill>
+                        <a:srgbClr val="D5DDE3"/>
+                      </a:solidFill>
+                      <a:prstDash val="solid"/>
+                      <a:round/>
+                      <a:headEnd type="none" w="med" len="med"/>
+                      <a:tailEnd type="none" w="med" len="med"/>
+                    </a:lnT>
+                    <a:lnB w="9525" cap="flat" cmpd="sng" algn="ctr">
+                      <a:solidFill>
+                        <a:srgbClr val="D5DDE3"/>
+                      </a:solidFill>
+                      <a:prstDash val="solid"/>
+                      <a:round/>
+                      <a:headEnd type="none" w="med" len="med"/>
+                      <a:tailEnd type="none" w="med" len="med"/>
+                    </a:lnB>
+                  </a:tcPr>
+                </a:tc>
+                <a:tc>
+                  <a:txBody>
+                    <a:bodyPr/>
+                    <a:lstStyle/>
+                    <a:p>
+                      <a:pPr algn="ctr" indent="0" marL="0">
+                        <a:buNone/>
+                      </a:pPr>
+                      <a:r>
+                        <a:rPr lang="en-US" sz="1200" dirty="0">
+                          <a:solidFill>
+                            <a:srgbClr val="1B2A38"/>
+                          </a:solidFill>
+                          <a:latin typeface="Calibri" pitchFamily="34" charset="0"/>
+                          <a:ea typeface="Calibri" pitchFamily="34" charset="-122"/>
+                          <a:cs typeface="Calibri" pitchFamily="34" charset="-120"/>
+                        </a:rPr>
+                        <a:t>vehicle</a:t>
+                      </a:r>
+                      <a:endParaRPr lang="en-US" sz="1200" dirty="0">
+                        <a:latin typeface="Calibri" charset="0"/>
+                        <a:ea typeface="Calibri" charset="0"/>
+                        <a:cs typeface="Calibri" charset="0"/>
+                      </a:endParaRPr>
+                    </a:p>
+                  </a:txBody>
+                  <a:tcPr marL="91440" marR="91440" marT="45720" marB="45720">
+                    <a:lnL w="9525" cap="flat" cmpd="sng" algn="ctr">
+                      <a:solidFill>
+                        <a:srgbClr val="D5DDE3"/>
+                      </a:solidFill>
+                      <a:prstDash val="solid"/>
+                      <a:round/>
+                      <a:headEnd type="none" w="med" len="med"/>
+                      <a:tailEnd type="none" w="med" len="med"/>
+                    </a:lnL>
+                    <a:lnR w="9525" cap="flat" cmpd="sng" algn="ctr">
+                      <a:solidFill>
+                        <a:srgbClr val="D5DDE3"/>
+                      </a:solidFill>
+                      <a:prstDash val="solid"/>
+                      <a:round/>
+                      <a:headEnd type="none" w="med" len="med"/>
+                      <a:tailEnd type="none" w="med" len="med"/>
+                    </a:lnR>
+                    <a:lnT w="9525" cap="flat" cmpd="sng" algn="ctr">
+                      <a:solidFill>
+                        <a:srgbClr val="D5DDE3"/>
+                      </a:solidFill>
+                      <a:prstDash val="solid"/>
+                      <a:round/>
+                      <a:headEnd type="none" w="med" len="med"/>
+                      <a:tailEnd type="none" w="med" len="med"/>
+                    </a:lnT>
+                    <a:lnB w="9525" cap="flat" cmpd="sng" algn="ctr">
+                      <a:solidFill>
+                        <a:srgbClr val="D5DDE3"/>
+                      </a:solidFill>
+                      <a:prstDash val="solid"/>
+                      <a:round/>
+                      <a:headEnd type="none" w="med" len="med"/>
+                      <a:tailEnd type="none" w="med" len="med"/>
+                    </a:lnB>
+                  </a:tcPr>
+                </a:tc>
+                <a:tc>
+                  <a:txBody>
+                    <a:bodyPr/>
+                    <a:lstStyle/>
+                    <a:p>
+                      <a:pPr algn="ctr" indent="0" marL="0">
+                        <a:buNone/>
+                      </a:pPr>
+                      <a:r>
+                        <a:rPr lang="en-US" sz="1200" dirty="0">
+                          <a:solidFill>
+                            <a:srgbClr val="1B2A38"/>
+                          </a:solidFill>
+                          <a:latin typeface="Calibri" pitchFamily="34" charset="0"/>
+                          <a:ea typeface="Calibri" pitchFamily="34" charset="-122"/>
+                          <a:cs typeface="Calibri" pitchFamily="34" charset="-120"/>
+                        </a:rPr>
+                        <a:t>98.4</a:t>
+                      </a:r>
+                      <a:endParaRPr lang="en-US" sz="1200" dirty="0">
+                        <a:latin typeface="Calibri" charset="0"/>
+                        <a:ea typeface="Calibri" charset="0"/>
+                        <a:cs typeface="Calibri" charset="0"/>
+                      </a:endParaRPr>
+                    </a:p>
+                  </a:txBody>
+                  <a:tcPr marL="91440" marR="91440" marT="45720" marB="45720">
+                    <a:lnL w="9525" cap="flat" cmpd="sng" algn="ctr">
+                      <a:solidFill>
+                        <a:srgbClr val="D5DDE3"/>
+                      </a:solidFill>
+                      <a:prstDash val="solid"/>
+                      <a:round/>
+                      <a:headEnd type="none" w="med" len="med"/>
+                      <a:tailEnd type="none" w="med" len="med"/>
+                    </a:lnL>
+                    <a:lnR w="9525" cap="flat" cmpd="sng" algn="ctr">
+                      <a:solidFill>
+                        <a:srgbClr val="D5DDE3"/>
+                      </a:solidFill>
+                      <a:prstDash val="solid"/>
+                      <a:round/>
+                      <a:headEnd type="none" w="med" len="med"/>
+                      <a:tailEnd type="none" w="med" len="med"/>
+                    </a:lnR>
+                    <a:lnT w="9525" cap="flat" cmpd="sng" algn="ctr">
+                      <a:solidFill>
+                        <a:srgbClr val="D5DDE3"/>
+                      </a:solidFill>
+                      <a:prstDash val="solid"/>
+                      <a:round/>
+                      <a:headEnd type="none" w="med" len="med"/>
+                      <a:tailEnd type="none" w="med" len="med"/>
+                    </a:lnT>
+                    <a:lnB w="9525" cap="flat" cmpd="sng" algn="ctr">
+                      <a:solidFill>
+                        <a:srgbClr val="D5DDE3"/>
+                      </a:solidFill>
+                      <a:prstDash val="solid"/>
+                      <a:round/>
+                      <a:headEnd type="none" w="med" len="med"/>
+                      <a:tailEnd type="none" w="med" len="med"/>
+                    </a:lnB>
+                  </a:tcPr>
+                </a:tc>
+                <a:tc>
+                  <a:txBody>
+                    <a:bodyPr/>
+                    <a:lstStyle/>
+                    <a:p>
+                      <a:pPr algn="ctr" indent="0" marL="0">
+                        <a:buNone/>
+                      </a:pPr>
+                      <a:r>
+                        <a:rPr lang="en-US" sz="1200" dirty="0">
+                          <a:solidFill>
+                            <a:srgbClr val="1B2A38"/>
+                          </a:solidFill>
+                          <a:latin typeface="Calibri" pitchFamily="34" charset="0"/>
+                          <a:ea typeface="Calibri" pitchFamily="34" charset="-122"/>
+                          <a:cs typeface="Calibri" pitchFamily="34" charset="-120"/>
+                        </a:rPr>
+                        <a:t>91.6</a:t>
+                      </a:r>
+                      <a:endParaRPr lang="en-US" sz="1200" dirty="0">
+                        <a:latin typeface="Calibri" charset="0"/>
+                        <a:ea typeface="Calibri" charset="0"/>
+                        <a:cs typeface="Calibri" charset="0"/>
+                      </a:endParaRPr>
+                    </a:p>
+                  </a:txBody>
+                  <a:tcPr marL="91440" marR="91440" marT="45720" marB="45720">
+                    <a:lnL w="9525" cap="flat" cmpd="sng" algn="ctr">
+                      <a:solidFill>
+                        <a:srgbClr val="D5DDE3"/>
+                      </a:solidFill>
+                      <a:prstDash val="solid"/>
+                      <a:round/>
+                      <a:headEnd type="none" w="med" len="med"/>
+                      <a:tailEnd type="none" w="med" len="med"/>
+                    </a:lnL>
+                    <a:lnR w="9525" cap="flat" cmpd="sng" algn="ctr">
+                      <a:solidFill>
+                        <a:srgbClr val="D5DDE3"/>
+                      </a:solidFill>
+                      <a:prstDash val="solid"/>
+                      <a:round/>
+                      <a:headEnd type="none" w="med" len="med"/>
+                      <a:tailEnd type="none" w="med" len="med"/>
+                    </a:lnR>
+                    <a:lnT w="9525" cap="flat" cmpd="sng" algn="ctr">
+                      <a:solidFill>
+                        <a:srgbClr val="D5DDE3"/>
+                      </a:solidFill>
+                      <a:prstDash val="solid"/>
+                      <a:round/>
+                      <a:headEnd type="none" w="med" len="med"/>
+                      <a:tailEnd type="none" w="med" len="med"/>
+                    </a:lnT>
+                    <a:lnB w="9525" cap="flat" cmpd="sng" algn="ctr">
+                      <a:solidFill>
+                        <a:srgbClr val="D5DDE3"/>
+                      </a:solidFill>
+                      <a:prstDash val="solid"/>
+                      <a:round/>
+                      <a:headEnd type="none" w="med" len="med"/>
+                      <a:tailEnd type="none" w="med" len="med"/>
+                    </a:lnB>
+                  </a:tcPr>
+                </a:tc>
+                <a:tc>
+                  <a:txBody>
+                    <a:bodyPr/>
+                    <a:lstStyle/>
+                    <a:p>
+                      <a:pPr algn="ctr" indent="0" marL="0">
+                        <a:buNone/>
+                      </a:pPr>
+                      <a:r>
+                        <a:rPr lang="en-US" sz="1200" dirty="0">
+                          <a:solidFill>
+                            <a:srgbClr val="1B2A38"/>
+                          </a:solidFill>
+                          <a:latin typeface="Calibri" pitchFamily="34" charset="0"/>
+                          <a:ea typeface="Calibri" pitchFamily="34" charset="-122"/>
+                          <a:cs typeface="Calibri" pitchFamily="34" charset="-120"/>
+                        </a:rPr>
+                        <a:t>94.9</a:t>
+                      </a:r>
+                      <a:endParaRPr lang="en-US" sz="1200" dirty="0">
+                        <a:latin typeface="Calibri" charset="0"/>
+                        <a:ea typeface="Calibri" charset="0"/>
+                        <a:cs typeface="Calibri" charset="0"/>
+                      </a:endParaRPr>
+                    </a:p>
+                  </a:txBody>
+                  <a:tcPr marL="91440" marR="91440" marT="45720" marB="45720">
+                    <a:lnL w="9525" cap="flat" cmpd="sng" algn="ctr">
+                      <a:solidFill>
+                        <a:srgbClr val="D5DDE3"/>
+                      </a:solidFill>
+                      <a:prstDash val="solid"/>
+                      <a:round/>
+                      <a:headEnd type="none" w="med" len="med"/>
+                      <a:tailEnd type="none" w="med" len="med"/>
+                    </a:lnL>
+                    <a:lnR w="9525" cap="flat" cmpd="sng" algn="ctr">
+                      <a:solidFill>
+                        <a:srgbClr val="D5DDE3"/>
+                      </a:solidFill>
+                      <a:prstDash val="solid"/>
+                      <a:round/>
+                      <a:headEnd type="none" w="med" len="med"/>
+                      <a:tailEnd type="none" w="med" len="med"/>
+                    </a:lnR>
+                    <a:lnT w="9525" cap="flat" cmpd="sng" algn="ctr">
+                      <a:solidFill>
+                        <a:srgbClr val="D5DDE3"/>
+                      </a:solidFill>
+                      <a:prstDash val="solid"/>
+                      <a:round/>
+                      <a:headEnd type="none" w="med" len="med"/>
+                      <a:tailEnd type="none" w="med" len="med"/>
+                    </a:lnT>
+                    <a:lnB w="9525" cap="flat" cmpd="sng" algn="ctr">
+                      <a:solidFill>
+                        <a:srgbClr val="D5DDE3"/>
+                      </a:solidFill>
+                      <a:prstDash val="solid"/>
+                      <a:round/>
+                      <a:headEnd type="none" w="med" len="med"/>
+                      <a:tailEnd type="none" w="med" len="med"/>
+                    </a:lnB>
+                  </a:tcPr>
+                </a:tc>
+                <a:tc>
+                  <a:txBody>
+                    <a:bodyPr/>
+                    <a:lstStyle/>
+                    <a:p>
+                      <a:pPr algn="ctr" indent="0" marL="0">
+                        <a:buNone/>
+                      </a:pPr>
+                      <a:r>
+                        <a:rPr lang="en-US" sz="1200" dirty="0">
+                          <a:solidFill>
+                            <a:srgbClr val="1B2A38"/>
+                          </a:solidFill>
+                          <a:latin typeface="Calibri" pitchFamily="34" charset="0"/>
+                          <a:ea typeface="Calibri" pitchFamily="34" charset="-122"/>
+                          <a:cs typeface="Calibri" pitchFamily="34" charset="-120"/>
+                        </a:rPr>
+                        <a:t>96.9</a:t>
+                      </a:r>
+                      <a:endParaRPr lang="en-US" sz="1200" dirty="0">
+                        <a:latin typeface="Calibri" charset="0"/>
+                        <a:ea typeface="Calibri" charset="0"/>
+                        <a:cs typeface="Calibri" charset="0"/>
+                      </a:endParaRPr>
+                    </a:p>
+                  </a:txBody>
+                  <a:tcPr marL="91440" marR="91440" marT="45720" marB="45720">
+                    <a:lnL w="9525" cap="flat" cmpd="sng" algn="ctr">
+                      <a:solidFill>
+                        <a:srgbClr val="D5DDE3"/>
+                      </a:solidFill>
+                      <a:prstDash val="solid"/>
+                      <a:round/>
+                      <a:headEnd type="none" w="med" len="med"/>
+                      <a:tailEnd type="none" w="med" len="med"/>
+                    </a:lnL>
+                    <a:lnR w="9525" cap="flat" cmpd="sng" algn="ctr">
+                      <a:solidFill>
+                        <a:srgbClr val="D5DDE3"/>
+                      </a:solidFill>
+                      <a:prstDash val="solid"/>
+                      <a:round/>
+                      <a:headEnd type="none" w="med" len="med"/>
+                      <a:tailEnd type="none" w="med" len="med"/>
+                    </a:lnR>
+                    <a:lnT w="9525" cap="flat" cmpd="sng" algn="ctr">
+                      <a:solidFill>
+                        <a:srgbClr val="D5DDE3"/>
+                      </a:solidFill>
+                      <a:prstDash val="solid"/>
+                      <a:round/>
+                      <a:headEnd type="none" w="med" len="med"/>
+                      <a:tailEnd type="none" w="med" len="med"/>
+                    </a:lnT>
+                    <a:lnB w="9525" cap="flat" cmpd="sng" algn="ctr">
+                      <a:solidFill>
+                        <a:srgbClr val="D5DDE3"/>
+                      </a:solidFill>
+                      <a:prstDash val="solid"/>
+                      <a:round/>
+                      <a:headEnd type="none" w="med" len="med"/>
+                      <a:tailEnd type="none" w="med" len="med"/>
+                    </a:lnB>
+                  </a:tcPr>
+                </a:tc>
+              </a:tr>
+              <a:tr h="329184">
+                <a:tc>
+                  <a:txBody>
+                    <a:bodyPr/>
+                    <a:lstStyle/>
+                    <a:p>
+                      <a:pPr algn="l" indent="0" marL="0">
+                        <a:buNone/>
+                      </a:pPr>
+                      <a:r>
+                        <a:rPr lang="en-US" sz="1200" dirty="0">
+                          <a:solidFill>
+                            <a:srgbClr val="1B2A38"/>
+                          </a:solidFill>
+                          <a:latin typeface="Calibri" pitchFamily="34" charset="0"/>
+                          <a:ea typeface="Calibri" pitchFamily="34" charset="-122"/>
+                          <a:cs typeface="Calibri" pitchFamily="34" charset="-120"/>
+                        </a:rPr>
+                        <a:t>v2</a:t>
+                      </a:r>
+                      <a:endParaRPr lang="en-US" sz="1200" dirty="0">
+                        <a:latin typeface="Calibri" charset="0"/>
+                        <a:ea typeface="Calibri" charset="0"/>
+                        <a:cs typeface="Calibri" charset="0"/>
+                      </a:endParaRPr>
+                    </a:p>
+                  </a:txBody>
+                  <a:tcPr marL="91440" marR="91440" marT="45720" marB="45720">
+                    <a:lnL w="9525" cap="flat" cmpd="sng" algn="ctr">
+                      <a:solidFill>
+                        <a:srgbClr val="D5DDE3"/>
+                      </a:solidFill>
+                      <a:prstDash val="solid"/>
+                      <a:round/>
+                      <a:headEnd type="none" w="med" len="med"/>
+                      <a:tailEnd type="none" w="med" len="med"/>
+                    </a:lnL>
+                    <a:lnR w="9525" cap="flat" cmpd="sng" algn="ctr">
+                      <a:solidFill>
+                        <a:srgbClr val="D5DDE3"/>
+                      </a:solidFill>
+                      <a:prstDash val="solid"/>
+                      <a:round/>
+                      <a:headEnd type="none" w="med" len="med"/>
+                      <a:tailEnd type="none" w="med" len="med"/>
+                    </a:lnR>
+                    <a:lnT w="9525" cap="flat" cmpd="sng" algn="ctr">
+                      <a:solidFill>
+                        <a:srgbClr val="D5DDE3"/>
+                      </a:solidFill>
+                      <a:prstDash val="solid"/>
+                      <a:round/>
+                      <a:headEnd type="none" w="med" len="med"/>
+                      <a:tailEnd type="none" w="med" len="med"/>
+                    </a:lnT>
+                    <a:lnB w="9525" cap="flat" cmpd="sng" algn="ctr">
+                      <a:solidFill>
+                        <a:srgbClr val="D5DDE3"/>
+                      </a:solidFill>
+                      <a:prstDash val="solid"/>
+                      <a:round/>
+                      <a:headEnd type="none" w="med" len="med"/>
+                      <a:tailEnd type="none" w="med" len="med"/>
+                    </a:lnB>
+                  </a:tcPr>
+                </a:tc>
+                <a:tc>
+                  <a:txBody>
+                    <a:bodyPr/>
+                    <a:lstStyle/>
+                    <a:p>
+                      <a:pPr algn="ctr" indent="0" marL="0">
+                        <a:buNone/>
+                      </a:pPr>
+                      <a:r>
+                        <a:rPr lang="en-US" sz="1200" dirty="0">
+                          <a:solidFill>
+                            <a:srgbClr val="1B2A38"/>
+                          </a:solidFill>
+                          <a:latin typeface="Calibri" pitchFamily="34" charset="0"/>
+                          <a:ea typeface="Calibri" pitchFamily="34" charset="-122"/>
+                          <a:cs typeface="Calibri" pitchFamily="34" charset="-120"/>
+                        </a:rPr>
+                        <a:t>vehicle</a:t>
+                      </a:r>
+                      <a:endParaRPr lang="en-US" sz="1200" dirty="0">
+                        <a:latin typeface="Calibri" charset="0"/>
+                        <a:ea typeface="Calibri" charset="0"/>
+                        <a:cs typeface="Calibri" charset="0"/>
+                      </a:endParaRPr>
+                    </a:p>
+                  </a:txBody>
+                  <a:tcPr marL="91440" marR="91440" marT="45720" marB="45720">
+                    <a:lnL w="9525" cap="flat" cmpd="sng" algn="ctr">
+                      <a:solidFill>
+                        <a:srgbClr val="D5DDE3"/>
+                      </a:solidFill>
+                      <a:prstDash val="solid"/>
+                      <a:round/>
+                      <a:headEnd type="none" w="med" len="med"/>
+                      <a:tailEnd type="none" w="med" len="med"/>
+                    </a:lnL>
+                    <a:lnR w="9525" cap="flat" cmpd="sng" algn="ctr">
+                      <a:solidFill>
+                        <a:srgbClr val="D5DDE3"/>
+                      </a:solidFill>
+                      <a:prstDash val="solid"/>
+                      <a:round/>
+                      <a:headEnd type="none" w="med" len="med"/>
+                      <a:tailEnd type="none" w="med" len="med"/>
+                    </a:lnR>
+                    <a:lnT w="9525" cap="flat" cmpd="sng" algn="ctr">
+                      <a:solidFill>
+                        <a:srgbClr val="D5DDE3"/>
+                      </a:solidFill>
+                      <a:prstDash val="solid"/>
+                      <a:round/>
+                      <a:headEnd type="none" w="med" len="med"/>
+                      <a:tailEnd type="none" w="med" len="med"/>
+                    </a:lnT>
+                    <a:lnB w="9525" cap="flat" cmpd="sng" algn="ctr">
+                      <a:solidFill>
+                        <a:srgbClr val="D5DDE3"/>
+                      </a:solidFill>
+                      <a:prstDash val="solid"/>
+                      <a:round/>
+                      <a:headEnd type="none" w="med" len="med"/>
+                      <a:tailEnd type="none" w="med" len="med"/>
+                    </a:lnB>
+                  </a:tcPr>
+                </a:tc>
+                <a:tc>
+                  <a:txBody>
+                    <a:bodyPr/>
+                    <a:lstStyle/>
+                    <a:p>
+                      <a:pPr algn="ctr" indent="0" marL="0">
+                        <a:buNone/>
+                      </a:pPr>
+                      <a:r>
+                        <a:rPr lang="en-US" sz="1200" dirty="0">
+                          <a:solidFill>
+                            <a:srgbClr val="1B2A38"/>
+                          </a:solidFill>
+                          <a:latin typeface="Calibri" pitchFamily="34" charset="0"/>
+                          <a:ea typeface="Calibri" pitchFamily="34" charset="-122"/>
+                          <a:cs typeface="Calibri" pitchFamily="34" charset="-120"/>
+                        </a:rPr>
+                        <a:t>98.65</a:t>
+                      </a:r>
+                      <a:endParaRPr lang="en-US" sz="1200" dirty="0">
+                        <a:latin typeface="Calibri" charset="0"/>
+                        <a:ea typeface="Calibri" charset="0"/>
+                        <a:cs typeface="Calibri" charset="0"/>
+                      </a:endParaRPr>
+                    </a:p>
+                  </a:txBody>
+                  <a:tcPr marL="91440" marR="91440" marT="45720" marB="45720">
+                    <a:lnL w="9525" cap="flat" cmpd="sng" algn="ctr">
+                      <a:solidFill>
+                        <a:srgbClr val="D5DDE3"/>
+                      </a:solidFill>
+                      <a:prstDash val="solid"/>
+                      <a:round/>
+                      <a:headEnd type="none" w="med" len="med"/>
+                      <a:tailEnd type="none" w="med" len="med"/>
+                    </a:lnL>
+                    <a:lnR w="9525" cap="flat" cmpd="sng" algn="ctr">
+                      <a:solidFill>
+                        <a:srgbClr val="D5DDE3"/>
+                      </a:solidFill>
+                      <a:prstDash val="solid"/>
+                      <a:round/>
+                      <a:headEnd type="none" w="med" len="med"/>
+                      <a:tailEnd type="none" w="med" len="med"/>
+                    </a:lnR>
+                    <a:lnT w="9525" cap="flat" cmpd="sng" algn="ctr">
+                      <a:solidFill>
+                        <a:srgbClr val="D5DDE3"/>
+                      </a:solidFill>
+                      <a:prstDash val="solid"/>
+                      <a:round/>
+                      <a:headEnd type="none" w="med" len="med"/>
+                      <a:tailEnd type="none" w="med" len="med"/>
+                    </a:lnT>
+                    <a:lnB w="9525" cap="flat" cmpd="sng" algn="ctr">
+                      <a:solidFill>
+                        <a:srgbClr val="D5DDE3"/>
+                      </a:solidFill>
+                      <a:prstDash val="solid"/>
+                      <a:round/>
+                      <a:headEnd type="none" w="med" len="med"/>
+                      <a:tailEnd type="none" w="med" len="med"/>
+                    </a:lnB>
+                  </a:tcPr>
+                </a:tc>
+                <a:tc>
+                  <a:txBody>
+                    <a:bodyPr/>
+                    <a:lstStyle/>
+                    <a:p>
+                      <a:pPr algn="ctr" indent="0" marL="0">
+                        <a:buNone/>
+                      </a:pPr>
+                      <a:r>
+                        <a:rPr lang="en-US" sz="1200" dirty="0">
+                          <a:solidFill>
+                            <a:srgbClr val="1B2A38"/>
+                          </a:solidFill>
+                          <a:latin typeface="Calibri" pitchFamily="34" charset="0"/>
+                          <a:ea typeface="Calibri" pitchFamily="34" charset="-122"/>
+                          <a:cs typeface="Calibri" pitchFamily="34" charset="-120"/>
+                        </a:rPr>
+                        <a:t>95.41</a:t>
+                      </a:r>
+                      <a:endParaRPr lang="en-US" sz="1200" dirty="0">
+                        <a:latin typeface="Calibri" charset="0"/>
+                        <a:ea typeface="Calibri" charset="0"/>
+                        <a:cs typeface="Calibri" charset="0"/>
+                      </a:endParaRPr>
+                    </a:p>
+                  </a:txBody>
+                  <a:tcPr marL="91440" marR="91440" marT="45720" marB="45720">
+                    <a:lnL w="9525" cap="flat" cmpd="sng" algn="ctr">
+                      <a:solidFill>
+                        <a:srgbClr val="D5DDE3"/>
+                      </a:solidFill>
+                      <a:prstDash val="solid"/>
+                      <a:round/>
+                      <a:headEnd type="none" w="med" len="med"/>
+                      <a:tailEnd type="none" w="med" len="med"/>
+                    </a:lnL>
+                    <a:lnR w="9525" cap="flat" cmpd="sng" algn="ctr">
+                      <a:solidFill>
+                        <a:srgbClr val="D5DDE3"/>
+                      </a:solidFill>
+                      <a:prstDash val="solid"/>
+                      <a:round/>
+                      <a:headEnd type="none" w="med" len="med"/>
+                      <a:tailEnd type="none" w="med" len="med"/>
+                    </a:lnR>
+                    <a:lnT w="9525" cap="flat" cmpd="sng" algn="ctr">
+                      <a:solidFill>
+                        <a:srgbClr val="D5DDE3"/>
+                      </a:solidFill>
+                      <a:prstDash val="solid"/>
+                      <a:round/>
+                      <a:headEnd type="none" w="med" len="med"/>
+                      <a:tailEnd type="none" w="med" len="med"/>
+                    </a:lnT>
+                    <a:lnB w="9525" cap="flat" cmpd="sng" algn="ctr">
+                      <a:solidFill>
+                        <a:srgbClr val="D5DDE3"/>
+                      </a:solidFill>
+                      <a:prstDash val="solid"/>
+                      <a:round/>
+                      <a:headEnd type="none" w="med" len="med"/>
+                      <a:tailEnd type="none" w="med" len="med"/>
+                    </a:lnB>
+                  </a:tcPr>
+                </a:tc>
+                <a:tc>
+                  <a:txBody>
+                    <a:bodyPr/>
+                    <a:lstStyle/>
+                    <a:p>
+                      <a:pPr algn="ctr" indent="0" marL="0">
+                        <a:buNone/>
+                      </a:pPr>
+                      <a:r>
+                        <a:rPr lang="en-US" sz="1200" dirty="0">
+                          <a:solidFill>
+                            <a:srgbClr val="1B2A38"/>
+                          </a:solidFill>
+                          <a:latin typeface="Calibri" pitchFamily="34" charset="0"/>
+                          <a:ea typeface="Calibri" pitchFamily="34" charset="-122"/>
+                          <a:cs typeface="Calibri" pitchFamily="34" charset="-120"/>
+                        </a:rPr>
+                        <a:t>97.01</a:t>
+                      </a:r>
+                      <a:endParaRPr lang="en-US" sz="1200" dirty="0">
+                        <a:latin typeface="Calibri" charset="0"/>
+                        <a:ea typeface="Calibri" charset="0"/>
+                        <a:cs typeface="Calibri" charset="0"/>
+                      </a:endParaRPr>
+                    </a:p>
+                  </a:txBody>
+                  <a:tcPr marL="91440" marR="91440" marT="45720" marB="45720">
+                    <a:lnL w="9525" cap="flat" cmpd="sng" algn="ctr">
+                      <a:solidFill>
+                        <a:srgbClr val="D5DDE3"/>
+                      </a:solidFill>
+                      <a:prstDash val="solid"/>
+                      <a:round/>
+                      <a:headEnd type="none" w="med" len="med"/>
+                      <a:tailEnd type="none" w="med" len="med"/>
+                    </a:lnL>
+                    <a:lnR w="9525" cap="flat" cmpd="sng" algn="ctr">
+                      <a:solidFill>
+                        <a:srgbClr val="D5DDE3"/>
+                      </a:solidFill>
+                      <a:prstDash val="solid"/>
+                      <a:round/>
+                      <a:headEnd type="none" w="med" len="med"/>
+                      <a:tailEnd type="none" w="med" len="med"/>
+                    </a:lnR>
+                    <a:lnT w="9525" cap="flat" cmpd="sng" algn="ctr">
+                      <a:solidFill>
+                        <a:srgbClr val="D5DDE3"/>
+                      </a:solidFill>
+                      <a:prstDash val="solid"/>
+                      <a:round/>
+                      <a:headEnd type="none" w="med" len="med"/>
+                      <a:tailEnd type="none" w="med" len="med"/>
+                    </a:lnT>
+                    <a:lnB w="9525" cap="flat" cmpd="sng" algn="ctr">
+                      <a:solidFill>
+                        <a:srgbClr val="D5DDE3"/>
+                      </a:solidFill>
+                      <a:prstDash val="solid"/>
+                      <a:round/>
+                      <a:headEnd type="none" w="med" len="med"/>
+                      <a:tailEnd type="none" w="med" len="med"/>
+                    </a:lnB>
+                  </a:tcPr>
+                </a:tc>
+                <a:tc>
+                  <a:txBody>
+                    <a:bodyPr/>
+                    <a:lstStyle/>
+                    <a:p>
+                      <a:pPr algn="ctr" indent="0" marL="0">
+                        <a:buNone/>
+                      </a:pPr>
+                      <a:r>
+                        <a:rPr lang="en-US" sz="1200" dirty="0">
+                          <a:solidFill>
+                            <a:srgbClr val="1B2A38"/>
+                          </a:solidFill>
+                          <a:latin typeface="Calibri" pitchFamily="34" charset="0"/>
+                          <a:ea typeface="Calibri" pitchFamily="34" charset="-122"/>
+                          <a:cs typeface="Calibri" pitchFamily="34" charset="-120"/>
+                        </a:rPr>
+                        <a:t>98.14</a:t>
+                      </a:r>
+                      <a:endParaRPr lang="en-US" sz="1200" dirty="0">
+                        <a:latin typeface="Calibri" charset="0"/>
+                        <a:ea typeface="Calibri" charset="0"/>
+                        <a:cs typeface="Calibri" charset="0"/>
+                      </a:endParaRPr>
+                    </a:p>
+                  </a:txBody>
+                  <a:tcPr marL="91440" marR="91440" marT="45720" marB="45720">
+                    <a:lnL w="9525" cap="flat" cmpd="sng" algn="ctr">
+                      <a:solidFill>
+                        <a:srgbClr val="D5DDE3"/>
+                      </a:solidFill>
+                      <a:prstDash val="solid"/>
+                      <a:round/>
+                      <a:headEnd type="none" w="med" len="med"/>
+                      <a:tailEnd type="none" w="med" len="med"/>
+                    </a:lnL>
+                    <a:lnR w="9525" cap="flat" cmpd="sng" algn="ctr">
+                      <a:solidFill>
+                        <a:srgbClr val="D5DDE3"/>
+                      </a:solidFill>
+                      <a:prstDash val="solid"/>
+                      <a:round/>
+                      <a:headEnd type="none" w="med" len="med"/>
+                      <a:tailEnd type="none" w="med" len="med"/>
+                    </a:lnR>
+                    <a:lnT w="9525" cap="flat" cmpd="sng" algn="ctr">
+                      <a:solidFill>
+                        <a:srgbClr val="D5DDE3"/>
+                      </a:solidFill>
+                      <a:prstDash val="solid"/>
+                      <a:round/>
+                      <a:headEnd type="none" w="med" len="med"/>
+                      <a:tailEnd type="none" w="med" len="med"/>
+                    </a:lnT>
+                    <a:lnB w="9525" cap="flat" cmpd="sng" algn="ctr">
+                      <a:solidFill>
+                        <a:srgbClr val="D5DDE3"/>
+                      </a:solidFill>
+                      <a:prstDash val="solid"/>
+                      <a:round/>
+                      <a:headEnd type="none" w="med" len="med"/>
+                      <a:tailEnd type="none" w="med" len="med"/>
+                    </a:lnB>
+                  </a:tcPr>
+                </a:tc>
+              </a:tr>
+              <a:tr h="329184">
+                <a:tc>
+                  <a:txBody>
+                    <a:bodyPr/>
+                    <a:lstStyle/>
+                    <a:p>
+                      <a:pPr algn="l" indent="0" marL="0">
+                        <a:buNone/>
+                      </a:pPr>
+                      <a:r>
+                        <a:rPr lang="en-US" sz="1200" dirty="0">
+                          <a:solidFill>
+                            <a:srgbClr val="1B2A38"/>
+                          </a:solidFill>
+                          <a:latin typeface="Calibri" pitchFamily="34" charset="0"/>
+                          <a:ea typeface="Calibri" pitchFamily="34" charset="-122"/>
+                          <a:cs typeface="Calibri" pitchFamily="34" charset="-120"/>
+                        </a:rPr>
+                        <a:t>v2 + memory</a:t>
+                      </a:r>
+                      <a:endParaRPr lang="en-US" sz="1200" dirty="0">
+                        <a:latin typeface="Calibri" charset="0"/>
+                        <a:ea typeface="Calibri" charset="0"/>
+                        <a:cs typeface="Calibri" charset="0"/>
+                      </a:endParaRPr>
+                    </a:p>
+                  </a:txBody>
+                  <a:tcPr marL="91440" marR="91440" marT="45720" marB="45720">
+                    <a:lnL w="9525" cap="flat" cmpd="sng" algn="ctr">
+                      <a:solidFill>
+                        <a:srgbClr val="D5DDE3"/>
+                      </a:solidFill>
+                      <a:prstDash val="solid"/>
+                      <a:round/>
+                      <a:headEnd type="none" w="med" len="med"/>
+                      <a:tailEnd type="none" w="med" len="med"/>
+                    </a:lnL>
+                    <a:lnR w="9525" cap="flat" cmpd="sng" algn="ctr">
+                      <a:solidFill>
+                        <a:srgbClr val="D5DDE3"/>
+                      </a:solidFill>
+                      <a:prstDash val="solid"/>
+                      <a:round/>
+                      <a:headEnd type="none" w="med" len="med"/>
+                      <a:tailEnd type="none" w="med" len="med"/>
+                    </a:lnR>
+                    <a:lnT w="9525" cap="flat" cmpd="sng" algn="ctr">
+                      <a:solidFill>
+                        <a:srgbClr val="D5DDE3"/>
+                      </a:solidFill>
+                      <a:prstDash val="solid"/>
+                      <a:round/>
+                      <a:headEnd type="none" w="med" len="med"/>
+                      <a:tailEnd type="none" w="med" len="med"/>
+                    </a:lnT>
+                    <a:lnB w="9525" cap="flat" cmpd="sng" algn="ctr">
+                      <a:solidFill>
+                        <a:srgbClr val="D5DDE3"/>
+                      </a:solidFill>
+                      <a:prstDash val="solid"/>
+                      <a:round/>
+                      <a:headEnd type="none" w="med" len="med"/>
+                      <a:tailEnd type="none" w="med" len="med"/>
+                    </a:lnB>
+                  </a:tcPr>
+                </a:tc>
+                <a:tc>
+                  <a:txBody>
+                    <a:bodyPr/>
+                    <a:lstStyle/>
+                    <a:p>
+                      <a:pPr algn="ctr" indent="0" marL="0">
+                        <a:buNone/>
+                      </a:pPr>
+                      <a:r>
+                        <a:rPr lang="en-US" sz="1200" dirty="0">
+                          <a:solidFill>
+                            <a:srgbClr val="1B2A38"/>
+                          </a:solidFill>
+                          <a:latin typeface="Calibri" pitchFamily="34" charset="0"/>
+                          <a:ea typeface="Calibri" pitchFamily="34" charset="-122"/>
+                          <a:cs typeface="Calibri" pitchFamily="34" charset="-120"/>
+                        </a:rPr>
+                        <a:t>vehicle</a:t>
+                      </a:r>
+                      <a:endParaRPr lang="en-US" sz="1200" dirty="0">
+                        <a:latin typeface="Calibri" charset="0"/>
+                        <a:ea typeface="Calibri" charset="0"/>
+                        <a:cs typeface="Calibri" charset="0"/>
+                      </a:endParaRPr>
+                    </a:p>
+                  </a:txBody>
+                  <a:tcPr marL="91440" marR="91440" marT="45720" marB="45720">
+                    <a:lnL w="9525" cap="flat" cmpd="sng" algn="ctr">
+                      <a:solidFill>
+                        <a:srgbClr val="D5DDE3"/>
+                      </a:solidFill>
+                      <a:prstDash val="solid"/>
+                      <a:round/>
+                      <a:headEnd type="none" w="med" len="med"/>
+                      <a:tailEnd type="none" w="med" len="med"/>
+                    </a:lnL>
+                    <a:lnR w="9525" cap="flat" cmpd="sng" algn="ctr">
+                      <a:solidFill>
+                        <a:srgbClr val="D5DDE3"/>
+                      </a:solidFill>
+                      <a:prstDash val="solid"/>
+                      <a:round/>
+                      <a:headEnd type="none" w="med" len="med"/>
+                      <a:tailEnd type="none" w="med" len="med"/>
+                    </a:lnR>
+                    <a:lnT w="9525" cap="flat" cmpd="sng" algn="ctr">
+                      <a:solidFill>
+                        <a:srgbClr val="D5DDE3"/>
+                      </a:solidFill>
+                      <a:prstDash val="solid"/>
+                      <a:round/>
+                      <a:headEnd type="none" w="med" len="med"/>
+                      <a:tailEnd type="none" w="med" len="med"/>
+                    </a:lnT>
+                    <a:lnB w="9525" cap="flat" cmpd="sng" algn="ctr">
+                      <a:solidFill>
+                        <a:srgbClr val="D5DDE3"/>
+                      </a:solidFill>
+                      <a:prstDash val="solid"/>
+                      <a:round/>
+                      <a:headEnd type="none" w="med" len="med"/>
+                      <a:tailEnd type="none" w="med" len="med"/>
+                    </a:lnB>
+                  </a:tcPr>
+                </a:tc>
+                <a:tc>
+                  <a:txBody>
+                    <a:bodyPr/>
+                    <a:lstStyle/>
+                    <a:p>
+                      <a:pPr algn="ctr" indent="0" marL="0">
+                        <a:buNone/>
+                      </a:pPr>
+                      <a:r>
+                        <a:rPr lang="en-US" sz="1200" dirty="0">
+                          <a:solidFill>
+                            <a:srgbClr val="1B2A38"/>
+                          </a:solidFill>
+                          <a:latin typeface="Calibri" pitchFamily="34" charset="0"/>
+                          <a:ea typeface="Calibri" pitchFamily="34" charset="-122"/>
+                          <a:cs typeface="Calibri" pitchFamily="34" charset="-120"/>
+                        </a:rPr>
+                        <a:t>-</a:t>
+                      </a:r>
+                      <a:endParaRPr lang="en-US" sz="1200" dirty="0">
+                        <a:latin typeface="Calibri" charset="0"/>
+                        <a:ea typeface="Calibri" charset="0"/>
+                        <a:cs typeface="Calibri" charset="0"/>
+                      </a:endParaRPr>
+                    </a:p>
+                  </a:txBody>
+                  <a:tcPr marL="91440" marR="91440" marT="45720" marB="45720">
+                    <a:lnL w="9525" cap="flat" cmpd="sng" algn="ctr">
+                      <a:solidFill>
+                        <a:srgbClr val="D5DDE3"/>
+                      </a:solidFill>
+                      <a:prstDash val="solid"/>
+                      <a:round/>
+                      <a:headEnd type="none" w="med" len="med"/>
+                      <a:tailEnd type="none" w="med" len="med"/>
+                    </a:lnL>
+                    <a:lnR w="9525" cap="flat" cmpd="sng" algn="ctr">
+                      <a:solidFill>
+                        <a:srgbClr val="D5DDE3"/>
+                      </a:solidFill>
+                      <a:prstDash val="solid"/>
+                      <a:round/>
+                      <a:headEnd type="none" w="med" len="med"/>
+                      <a:tailEnd type="none" w="med" len="med"/>
+                    </a:lnR>
+                    <a:lnT w="9525" cap="flat" cmpd="sng" algn="ctr">
+                      <a:solidFill>
+                        <a:srgbClr val="D5DDE3"/>
+                      </a:solidFill>
+                      <a:prstDash val="solid"/>
+                      <a:round/>
+                      <a:headEnd type="none" w="med" len="med"/>
+                      <a:tailEnd type="none" w="med" len="med"/>
+                    </a:lnT>
+                    <a:lnB w="9525" cap="flat" cmpd="sng" algn="ctr">
+                      <a:solidFill>
+                        <a:srgbClr val="D5DDE3"/>
+                      </a:solidFill>
+                      <a:prstDash val="solid"/>
+                      <a:round/>
+                      <a:headEnd type="none" w="med" len="med"/>
+                      <a:tailEnd type="none" w="med" len="med"/>
+                    </a:lnB>
+                  </a:tcPr>
+                </a:tc>
+                <a:tc>
+                  <a:txBody>
+                    <a:bodyPr/>
+                    <a:lstStyle/>
+                    <a:p>
+                      <a:pPr algn="ctr" indent="0" marL="0">
+                        <a:buNone/>
+                      </a:pPr>
+                      <a:r>
+                        <a:rPr lang="en-US" sz="1200" dirty="0">
+                          <a:solidFill>
+                            <a:srgbClr val="1B2A38"/>
+                          </a:solidFill>
+                          <a:latin typeface="Calibri" pitchFamily="34" charset="0"/>
+                          <a:ea typeface="Calibri" pitchFamily="34" charset="-122"/>
+                          <a:cs typeface="Calibri" pitchFamily="34" charset="-120"/>
+                        </a:rPr>
+                        <a:t>96.09</a:t>
+                      </a:r>
+                      <a:endParaRPr lang="en-US" sz="1200" dirty="0">
+                        <a:latin typeface="Calibri" charset="0"/>
+                        <a:ea typeface="Calibri" charset="0"/>
+                        <a:cs typeface="Calibri" charset="0"/>
+                      </a:endParaRPr>
+                    </a:p>
+                  </a:txBody>
+                  <a:tcPr marL="91440" marR="91440" marT="45720" marB="45720">
+                    <a:lnL w="9525" cap="flat" cmpd="sng" algn="ctr">
+                      <a:solidFill>
+                        <a:srgbClr val="D5DDE3"/>
+                      </a:solidFill>
+                      <a:prstDash val="solid"/>
+                      <a:round/>
+                      <a:headEnd type="none" w="med" len="med"/>
+                      <a:tailEnd type="none" w="med" len="med"/>
+                    </a:lnL>
+                    <a:lnR w="9525" cap="flat" cmpd="sng" algn="ctr">
+                      <a:solidFill>
+                        <a:srgbClr val="D5DDE3"/>
+                      </a:solidFill>
+                      <a:prstDash val="solid"/>
+                      <a:round/>
+                      <a:headEnd type="none" w="med" len="med"/>
+                      <a:tailEnd type="none" w="med" len="med"/>
+                    </a:lnR>
+                    <a:lnT w="9525" cap="flat" cmpd="sng" algn="ctr">
+                      <a:solidFill>
+                        <a:srgbClr val="D5DDE3"/>
+                      </a:solidFill>
+                      <a:prstDash val="solid"/>
+                      <a:round/>
+                      <a:headEnd type="none" w="med" len="med"/>
+                      <a:tailEnd type="none" w="med" len="med"/>
+                    </a:lnT>
+                    <a:lnB w="9525" cap="flat" cmpd="sng" algn="ctr">
+                      <a:solidFill>
+                        <a:srgbClr val="D5DDE3"/>
+                      </a:solidFill>
+                      <a:prstDash val="solid"/>
+                      <a:round/>
+                      <a:headEnd type="none" w="med" len="med"/>
+                      <a:tailEnd type="none" w="med" len="med"/>
+                    </a:lnB>
+                  </a:tcPr>
+                </a:tc>
+                <a:tc>
+                  <a:txBody>
+                    <a:bodyPr/>
+                    <a:lstStyle/>
+                    <a:p>
+                      <a:pPr algn="ctr" indent="0" marL="0">
+                        <a:buNone/>
+                      </a:pPr>
+                      <a:r>
+                        <a:rPr lang="en-US" sz="1200" dirty="0">
+                          <a:solidFill>
+                            <a:srgbClr val="1B2A38"/>
+                          </a:solidFill>
+                          <a:latin typeface="Calibri" pitchFamily="34" charset="0"/>
+                          <a:ea typeface="Calibri" pitchFamily="34" charset="-122"/>
+                          <a:cs typeface="Calibri" pitchFamily="34" charset="-120"/>
+                        </a:rPr>
+                        <a:t>97.12</a:t>
+                      </a:r>
+                      <a:endParaRPr lang="en-US" sz="1200" dirty="0">
+                        <a:latin typeface="Calibri" charset="0"/>
+                        <a:ea typeface="Calibri" charset="0"/>
+                        <a:cs typeface="Calibri" charset="0"/>
+                      </a:endParaRPr>
+                    </a:p>
+                  </a:txBody>
+                  <a:tcPr marL="91440" marR="91440" marT="45720" marB="45720">
+                    <a:lnL w="9525" cap="flat" cmpd="sng" algn="ctr">
+                      <a:solidFill>
+                        <a:srgbClr val="D5DDE3"/>
+                      </a:solidFill>
+                      <a:prstDash val="solid"/>
+                      <a:round/>
+                      <a:headEnd type="none" w="med" len="med"/>
+                      <a:tailEnd type="none" w="med" len="med"/>
+                    </a:lnL>
+                    <a:lnR w="9525" cap="flat" cmpd="sng" algn="ctr">
+                      <a:solidFill>
+                        <a:srgbClr val="D5DDE3"/>
+                      </a:solidFill>
+                      <a:prstDash val="solid"/>
+                      <a:round/>
+                      <a:headEnd type="none" w="med" len="med"/>
+                      <a:tailEnd type="none" w="med" len="med"/>
+                    </a:lnR>
+                    <a:lnT w="9525" cap="flat" cmpd="sng" algn="ctr">
+                      <a:solidFill>
+                        <a:srgbClr val="D5DDE3"/>
+                      </a:solidFill>
+                      <a:prstDash val="solid"/>
+                      <a:round/>
+                      <a:headEnd type="none" w="med" len="med"/>
+                      <a:tailEnd type="none" w="med" len="med"/>
+                    </a:lnT>
+                    <a:lnB w="9525" cap="flat" cmpd="sng" algn="ctr">
+                      <a:solidFill>
+                        <a:srgbClr val="D5DDE3"/>
+                      </a:solidFill>
+                      <a:prstDash val="solid"/>
+                      <a:round/>
+                      <a:headEnd type="none" w="med" len="med"/>
+                      <a:tailEnd type="none" w="med" len="med"/>
+                    </a:lnB>
+                  </a:tcPr>
+                </a:tc>
+                <a:tc>
+                  <a:txBody>
+                    <a:bodyPr/>
+                    <a:lstStyle/>
+                    <a:p>
+                      <a:pPr algn="ctr" indent="0" marL="0">
+                        <a:buNone/>
+                      </a:pPr>
+                      <a:r>
+                        <a:rPr lang="en-US" sz="1200" dirty="0">
+                          <a:solidFill>
+                            <a:srgbClr val="1B2A38"/>
+                          </a:solidFill>
+                          <a:latin typeface="Calibri" pitchFamily="34" charset="0"/>
+                          <a:ea typeface="Calibri" pitchFamily="34" charset="-122"/>
+                          <a:cs typeface="Calibri" pitchFamily="34" charset="-120"/>
+                        </a:rPr>
+                        <a:t>98.20</a:t>
+                      </a:r>
+                      <a:endParaRPr lang="en-US" sz="1200" dirty="0">
+                        <a:latin typeface="Calibri" charset="0"/>
+                        <a:ea typeface="Calibri" charset="0"/>
+                        <a:cs typeface="Calibri" charset="0"/>
+                      </a:endParaRPr>
+                    </a:p>
+                  </a:txBody>
+                  <a:tcPr marL="91440" marR="91440" marT="45720" marB="45720">
+                    <a:lnL w="9525" cap="flat" cmpd="sng" algn="ctr">
+                      <a:solidFill>
+                        <a:srgbClr val="D5DDE3"/>
+                      </a:solidFill>
+                      <a:prstDash val="solid"/>
+                      <a:round/>
+                      <a:headEnd type="none" w="med" len="med"/>
+                      <a:tailEnd type="none" w="med" len="med"/>
+                    </a:lnL>
+                    <a:lnR w="9525" cap="flat" cmpd="sng" algn="ctr">
+                      <a:solidFill>
+                        <a:srgbClr val="D5DDE3"/>
+                      </a:solidFill>
+                      <a:prstDash val="solid"/>
+                      <a:round/>
+                      <a:headEnd type="none" w="med" len="med"/>
+                      <a:tailEnd type="none" w="med" len="med"/>
+                    </a:lnR>
+                    <a:lnT w="9525" cap="flat" cmpd="sng" algn="ctr">
+                      <a:solidFill>
+                        <a:srgbClr val="D5DDE3"/>
+                      </a:solidFill>
+                      <a:prstDash val="solid"/>
+                      <a:round/>
+                      <a:headEnd type="none" w="med" len="med"/>
+                      <a:tailEnd type="none" w="med" len="med"/>
+                    </a:lnT>
+                    <a:lnB w="9525" cap="flat" cmpd="sng" algn="ctr">
+                      <a:solidFill>
+                        <a:srgbClr val="D5DDE3"/>
+                      </a:solidFill>
+                      <a:prstDash val="solid"/>
+                      <a:round/>
+                      <a:headEnd type="none" w="med" len="med"/>
+                      <a:tailEnd type="none" w="med" len="med"/>
+                    </a:lnB>
+                  </a:tcPr>
+                </a:tc>
+              </a:tr>
+              <a:tr h="329184">
+                <a:tc>
+                  <a:txBody>
+                    <a:bodyPr/>
+                    <a:lstStyle/>
+                    <a:p>
+                      <a:pPr algn="l" indent="0" marL="0">
+                        <a:buNone/>
+                      </a:pPr>
+                      <a:r>
+                        <a:rPr lang="en-US" sz="1200" b="1" dirty="0">
+                          <a:solidFill>
+                            <a:srgbClr val="1B2A38"/>
+                          </a:solidFill>
+                          <a:latin typeface="Calibri" pitchFamily="34" charset="0"/>
+                          <a:ea typeface="Calibri" pitchFamily="34" charset="-122"/>
+                          <a:cs typeface="Calibri" pitchFamily="34" charset="-120"/>
+                        </a:rPr>
+                        <a:t>v2</a:t>
+                      </a:r>
+                      <a:endParaRPr lang="en-US" sz="1200" dirty="0">
+                        <a:latin typeface="Calibri" charset="0"/>
+                        <a:ea typeface="Calibri" charset="0"/>
+                        <a:cs typeface="Calibri" charset="0"/>
+                      </a:endParaRPr>
+                    </a:p>
+                  </a:txBody>
+                  <a:tcPr marL="91440" marR="91440" marT="45720" marB="45720">
+                    <a:lnL w="9525" cap="flat" cmpd="sng" algn="ctr">
+                      <a:solidFill>
+                        <a:srgbClr val="D5DDE3"/>
+                      </a:solidFill>
+                      <a:prstDash val="solid"/>
+                      <a:round/>
+                      <a:headEnd type="none" w="med" len="med"/>
+                      <a:tailEnd type="none" w="med" len="med"/>
+                    </a:lnL>
+                    <a:lnR w="9525" cap="flat" cmpd="sng" algn="ctr">
+                      <a:solidFill>
+                        <a:srgbClr val="D5DDE3"/>
+                      </a:solidFill>
+                      <a:prstDash val="solid"/>
+                      <a:round/>
+                      <a:headEnd type="none" w="med" len="med"/>
+                      <a:tailEnd type="none" w="med" len="med"/>
+                    </a:lnR>
+                    <a:lnT w="9525" cap="flat" cmpd="sng" algn="ctr">
+                      <a:solidFill>
+                        <a:srgbClr val="D5DDE3"/>
+                      </a:solidFill>
+                      <a:prstDash val="solid"/>
+                      <a:round/>
+                      <a:headEnd type="none" w="med" len="med"/>
+                      <a:tailEnd type="none" w="med" len="med"/>
+                    </a:lnT>
+                    <a:lnB w="9525" cap="flat" cmpd="sng" algn="ctr">
+                      <a:solidFill>
+                        <a:srgbClr val="D5DDE3"/>
+                      </a:solidFill>
+                      <a:prstDash val="solid"/>
+                      <a:round/>
+                      <a:headEnd type="none" w="med" len="med"/>
+                      <a:tailEnd type="none" w="med" len="med"/>
+                    </a:lnB>
+                  </a:tcPr>
+                </a:tc>
+                <a:tc>
+                  <a:txBody>
+                    <a:bodyPr/>
+                    <a:lstStyle/>
+                    <a:p>
+                      <a:pPr algn="ctr" indent="0" marL="0">
+                        <a:buNone/>
+                      </a:pPr>
+                      <a:r>
+                        <a:rPr lang="en-US" sz="1200" b="1" dirty="0">
+                          <a:solidFill>
+                            <a:srgbClr val="1B2A38"/>
+                          </a:solidFill>
+                          <a:latin typeface="Calibri" pitchFamily="34" charset="0"/>
+                          <a:ea typeface="Calibri" pitchFamily="34" charset="-122"/>
+                          <a:cs typeface="Calibri" pitchFamily="34" charset="-120"/>
+                        </a:rPr>
+                        <a:t>message</a:t>
+                      </a:r>
+                      <a:endParaRPr lang="en-US" sz="1200" dirty="0">
+                        <a:latin typeface="Calibri" charset="0"/>
+                        <a:ea typeface="Calibri" charset="0"/>
+                        <a:cs typeface="Calibri" charset="0"/>
+                      </a:endParaRPr>
+                    </a:p>
+                  </a:txBody>
+                  <a:tcPr marL="91440" marR="91440" marT="45720" marB="45720">
+                    <a:lnL w="9525" cap="flat" cmpd="sng" algn="ctr">
+                      <a:solidFill>
+                        <a:srgbClr val="D5DDE3"/>
+                      </a:solidFill>
+                      <a:prstDash val="solid"/>
+                      <a:round/>
+                      <a:headEnd type="none" w="med" len="med"/>
+                      <a:tailEnd type="none" w="med" len="med"/>
+                    </a:lnL>
+                    <a:lnR w="9525" cap="flat" cmpd="sng" algn="ctr">
+                      <a:solidFill>
+                        <a:srgbClr val="D5DDE3"/>
+                      </a:solidFill>
+                      <a:prstDash val="solid"/>
+                      <a:round/>
+                      <a:headEnd type="none" w="med" len="med"/>
+                      <a:tailEnd type="none" w="med" len="med"/>
+                    </a:lnR>
+                    <a:lnT w="9525" cap="flat" cmpd="sng" algn="ctr">
+                      <a:solidFill>
+                        <a:srgbClr val="D5DDE3"/>
+                      </a:solidFill>
+                      <a:prstDash val="solid"/>
+                      <a:round/>
+                      <a:headEnd type="none" w="med" len="med"/>
+                      <a:tailEnd type="none" w="med" len="med"/>
+                    </a:lnT>
+                    <a:lnB w="9525" cap="flat" cmpd="sng" algn="ctr">
+                      <a:solidFill>
+                        <a:srgbClr val="D5DDE3"/>
+                      </a:solidFill>
+                      <a:prstDash val="solid"/>
+                      <a:round/>
+                      <a:headEnd type="none" w="med" len="med"/>
+                      <a:tailEnd type="none" w="med" len="med"/>
+                    </a:lnB>
+                  </a:tcPr>
+                </a:tc>
+                <a:tc>
+                  <a:txBody>
+                    <a:bodyPr/>
+                    <a:lstStyle/>
+                    <a:p>
+                      <a:pPr algn="ctr" indent="0" marL="0">
+                        <a:buNone/>
+                      </a:pPr>
+                      <a:r>
+                        <a:rPr lang="en-US" sz="1200" b="1" dirty="0">
+                          <a:solidFill>
+                            <a:srgbClr val="1B2A38"/>
+                          </a:solidFill>
+                          <a:latin typeface="Calibri" pitchFamily="34" charset="0"/>
+                          <a:ea typeface="Calibri" pitchFamily="34" charset="-122"/>
+                          <a:cs typeface="Calibri" pitchFamily="34" charset="-120"/>
+                        </a:rPr>
+                        <a:t>98.65</a:t>
+                      </a:r>
+                      <a:endParaRPr lang="en-US" sz="1200" dirty="0">
+                        <a:latin typeface="Calibri" charset="0"/>
+                        <a:ea typeface="Calibri" charset="0"/>
+                        <a:cs typeface="Calibri" charset="0"/>
+                      </a:endParaRPr>
+                    </a:p>
+                  </a:txBody>
+                  <a:tcPr marL="91440" marR="91440" marT="45720" marB="45720">
+                    <a:lnL w="9525" cap="flat" cmpd="sng" algn="ctr">
+                      <a:solidFill>
+                        <a:srgbClr val="D5DDE3"/>
+                      </a:solidFill>
+                      <a:prstDash val="solid"/>
+                      <a:round/>
+                      <a:headEnd type="none" w="med" len="med"/>
+                      <a:tailEnd type="none" w="med" len="med"/>
+                    </a:lnL>
+                    <a:lnR w="9525" cap="flat" cmpd="sng" algn="ctr">
+                      <a:solidFill>
+                        <a:srgbClr val="D5DDE3"/>
+                      </a:solidFill>
+                      <a:prstDash val="solid"/>
+                      <a:round/>
+                      <a:headEnd type="none" w="med" len="med"/>
+                      <a:tailEnd type="none" w="med" len="med"/>
+                    </a:lnR>
+                    <a:lnT w="9525" cap="flat" cmpd="sng" algn="ctr">
+                      <a:solidFill>
+                        <a:srgbClr val="D5DDE3"/>
+                      </a:solidFill>
+                      <a:prstDash val="solid"/>
+                      <a:round/>
+                      <a:headEnd type="none" w="med" len="med"/>
+                      <a:tailEnd type="none" w="med" len="med"/>
+                    </a:lnT>
+                    <a:lnB w="9525" cap="flat" cmpd="sng" algn="ctr">
+                      <a:solidFill>
+                        <a:srgbClr val="D5DDE3"/>
+                      </a:solidFill>
+                      <a:prstDash val="solid"/>
+                      <a:round/>
+                      <a:headEnd type="none" w="med" len="med"/>
+                      <a:tailEnd type="none" w="med" len="med"/>
+                    </a:lnB>
+                  </a:tcPr>
+                </a:tc>
+                <a:tc>
+                  <a:txBody>
+                    <a:bodyPr/>
+                    <a:lstStyle/>
+                    <a:p>
+                      <a:pPr algn="ctr" indent="0" marL="0">
+                        <a:buNone/>
+                      </a:pPr>
+                      <a:r>
+                        <a:rPr lang="en-US" sz="1200" b="1" dirty="0">
+                          <a:solidFill>
+                            <a:srgbClr val="1B2A38"/>
+                          </a:solidFill>
+                          <a:latin typeface="Calibri" pitchFamily="34" charset="0"/>
+                          <a:ea typeface="Calibri" pitchFamily="34" charset="-122"/>
+                          <a:cs typeface="Calibri" pitchFamily="34" charset="-120"/>
+                        </a:rPr>
+                        <a:t>97.12</a:t>
+                      </a:r>
+                      <a:endParaRPr lang="en-US" sz="1200" dirty="0">
+                        <a:latin typeface="Calibri" charset="0"/>
+                        <a:ea typeface="Calibri" charset="0"/>
+                        <a:cs typeface="Calibri" charset="0"/>
+                      </a:endParaRPr>
+                    </a:p>
+                  </a:txBody>
+                  <a:tcPr marL="91440" marR="91440" marT="45720" marB="45720">
+                    <a:lnL w="9525" cap="flat" cmpd="sng" algn="ctr">
+                      <a:solidFill>
+                        <a:srgbClr val="D5DDE3"/>
+                      </a:solidFill>
+                      <a:prstDash val="solid"/>
+                      <a:round/>
+                      <a:headEnd type="none" w="med" len="med"/>
+                      <a:tailEnd type="none" w="med" len="med"/>
+                    </a:lnL>
+                    <a:lnR w="9525" cap="flat" cmpd="sng" algn="ctr">
+                      <a:solidFill>
+                        <a:srgbClr val="D5DDE3"/>
+                      </a:solidFill>
+                      <a:prstDash val="solid"/>
+                      <a:round/>
+                      <a:headEnd type="none" w="med" len="med"/>
+                      <a:tailEnd type="none" w="med" len="med"/>
+                    </a:lnR>
+                    <a:lnT w="9525" cap="flat" cmpd="sng" algn="ctr">
+                      <a:solidFill>
+                        <a:srgbClr val="D5DDE3"/>
+                      </a:solidFill>
+                      <a:prstDash val="solid"/>
+                      <a:round/>
+                      <a:headEnd type="none" w="med" len="med"/>
+                      <a:tailEnd type="none" w="med" len="med"/>
+                    </a:lnT>
+                    <a:lnB w="9525" cap="flat" cmpd="sng" algn="ctr">
+                      <a:solidFill>
+                        <a:srgbClr val="D5DDE3"/>
+                      </a:solidFill>
+                      <a:prstDash val="solid"/>
+                      <a:round/>
+                      <a:headEnd type="none" w="med" len="med"/>
+                      <a:tailEnd type="none" w="med" len="med"/>
+                    </a:lnB>
+                  </a:tcPr>
+                </a:tc>
+                <a:tc>
+                  <a:txBody>
+                    <a:bodyPr/>
+                    <a:lstStyle/>
+                    <a:p>
+                      <a:pPr algn="ctr" indent="0" marL="0">
+                        <a:buNone/>
+                      </a:pPr>
+                      <a:r>
+                        <a:rPr lang="en-US" sz="1200" b="1" dirty="0">
+                          <a:solidFill>
+                            <a:srgbClr val="1B2A38"/>
+                          </a:solidFill>
+                          <a:latin typeface="Calibri" pitchFamily="34" charset="0"/>
+                          <a:ea typeface="Calibri" pitchFamily="34" charset="-122"/>
+                          <a:cs typeface="Calibri" pitchFamily="34" charset="-120"/>
+                        </a:rPr>
+                        <a:t>97.88</a:t>
+                      </a:r>
+                      <a:endParaRPr lang="en-US" sz="1200" dirty="0">
+                        <a:latin typeface="Calibri" charset="0"/>
+                        <a:ea typeface="Calibri" charset="0"/>
+                        <a:cs typeface="Calibri" charset="0"/>
+                      </a:endParaRPr>
+                    </a:p>
+                  </a:txBody>
+                  <a:tcPr marL="91440" marR="91440" marT="45720" marB="45720">
+                    <a:lnL w="9525" cap="flat" cmpd="sng" algn="ctr">
+                      <a:solidFill>
+                        <a:srgbClr val="D5DDE3"/>
+                      </a:solidFill>
+                      <a:prstDash val="solid"/>
+                      <a:round/>
+                      <a:headEnd type="none" w="med" len="med"/>
+                      <a:tailEnd type="none" w="med" len="med"/>
+                    </a:lnL>
+                    <a:lnR w="9525" cap="flat" cmpd="sng" algn="ctr">
+                      <a:solidFill>
+                        <a:srgbClr val="D5DDE3"/>
+                      </a:solidFill>
+                      <a:prstDash val="solid"/>
+                      <a:round/>
+                      <a:headEnd type="none" w="med" len="med"/>
+                      <a:tailEnd type="none" w="med" len="med"/>
+                    </a:lnR>
+                    <a:lnT w="9525" cap="flat" cmpd="sng" algn="ctr">
+                      <a:solidFill>
+                        <a:srgbClr val="D5DDE3"/>
+                      </a:solidFill>
+                      <a:prstDash val="solid"/>
+                      <a:round/>
+                      <a:headEnd type="none" w="med" len="med"/>
+                      <a:tailEnd type="none" w="med" len="med"/>
+                    </a:lnT>
+                    <a:lnB w="9525" cap="flat" cmpd="sng" algn="ctr">
+                      <a:solidFill>
+                        <a:srgbClr val="D5DDE3"/>
+                      </a:solidFill>
+                      <a:prstDash val="solid"/>
+                      <a:round/>
+                      <a:headEnd type="none" w="med" len="med"/>
+                      <a:tailEnd type="none" w="med" len="med"/>
+                    </a:lnB>
+                  </a:tcPr>
+                </a:tc>
+                <a:tc>
+                  <a:txBody>
+                    <a:bodyPr/>
+                    <a:lstStyle/>
+                    <a:p>
+                      <a:pPr algn="ctr" indent="0" marL="0">
+                        <a:buNone/>
+                      </a:pPr>
+                      <a:r>
+                        <a:rPr lang="en-US" sz="1200" b="1" dirty="0">
+                          <a:solidFill>
+                            <a:srgbClr val="1B2A38"/>
+                          </a:solidFill>
+                          <a:latin typeface="Calibri" pitchFamily="34" charset="0"/>
+                          <a:ea typeface="Calibri" pitchFamily="34" charset="-122"/>
+                          <a:cs typeface="Calibri" pitchFamily="34" charset="-120"/>
+                        </a:rPr>
+                        <a:t>98.69</a:t>
+                      </a:r>
+                      <a:endParaRPr lang="en-US" sz="1200" dirty="0">
+                        <a:latin typeface="Calibri" charset="0"/>
+                        <a:ea typeface="Calibri" charset="0"/>
+                        <a:cs typeface="Calibri" charset="0"/>
+                      </a:endParaRPr>
+                    </a:p>
+                  </a:txBody>
+                  <a:tcPr marL="91440" marR="91440" marT="45720" marB="45720">
+                    <a:lnL w="9525" cap="flat" cmpd="sng" algn="ctr">
+                      <a:solidFill>
+                        <a:srgbClr val="D5DDE3"/>
+                      </a:solidFill>
+                      <a:prstDash val="solid"/>
+                      <a:round/>
+                      <a:headEnd type="none" w="med" len="med"/>
+                      <a:tailEnd type="none" w="med" len="med"/>
+                    </a:lnL>
+                    <a:lnR w="9525" cap="flat" cmpd="sng" algn="ctr">
+                      <a:solidFill>
+                        <a:srgbClr val="D5DDE3"/>
+                      </a:solidFill>
+                      <a:prstDash val="solid"/>
+                      <a:round/>
+                      <a:headEnd type="none" w="med" len="med"/>
+                      <a:tailEnd type="none" w="med" len="med"/>
+                    </a:lnR>
+                    <a:lnT w="9525" cap="flat" cmpd="sng" algn="ctr">
+                      <a:solidFill>
+                        <a:srgbClr val="D5DDE3"/>
+                      </a:solidFill>
+                      <a:prstDash val="solid"/>
+                      <a:round/>
+                      <a:headEnd type="none" w="med" len="med"/>
+                      <a:tailEnd type="none" w="med" len="med"/>
+                    </a:lnT>
+                    <a:lnB w="9525" cap="flat" cmpd="sng" algn="ctr">
+                      <a:solidFill>
+                        <a:srgbClr val="D5DDE3"/>
+                      </a:solidFill>
+                      <a:prstDash val="solid"/>
+                      <a:round/>
+                      <a:headEnd type="none" w="med" len="med"/>
+                      <a:tailEnd type="none" w="med" len="med"/>
+                    </a:lnB>
+                  </a:tcPr>
+                </a:tc>
+              </a:tr>
+              <a:tr h="329184">
+                <a:tc>
+                  <a:txBody>
+                    <a:bodyPr/>
+                    <a:lstStyle/>
+                    <a:p>
+                      <a:pPr algn="l" indent="0" marL="0">
+                        <a:buNone/>
+                      </a:pPr>
+                      <a:r>
+                        <a:rPr lang="en-US" sz="1200" b="1" dirty="0">
+                          <a:solidFill>
+                            <a:srgbClr val="1B2A38"/>
+                          </a:solidFill>
+                          <a:latin typeface="Calibri" pitchFamily="34" charset="0"/>
+                          <a:ea typeface="Calibri" pitchFamily="34" charset="-122"/>
+                          <a:cs typeface="Calibri" pitchFamily="34" charset="-120"/>
+                        </a:rPr>
+                        <a:t>v2 + memory</a:t>
+                      </a:r>
+                      <a:endParaRPr lang="en-US" sz="1200" dirty="0">
+                        <a:latin typeface="Calibri" charset="0"/>
+                        <a:ea typeface="Calibri" charset="0"/>
+                        <a:cs typeface="Calibri" charset="0"/>
+                      </a:endParaRPr>
+                    </a:p>
+                  </a:txBody>
+                  <a:tcPr marL="91440" marR="91440" marT="45720" marB="45720">
+                    <a:lnL w="9525" cap="flat" cmpd="sng" algn="ctr">
+                      <a:solidFill>
+                        <a:srgbClr val="D5DDE3"/>
+                      </a:solidFill>
+                      <a:prstDash val="solid"/>
+                      <a:round/>
+                      <a:headEnd type="none" w="med" len="med"/>
+                      <a:tailEnd type="none" w="med" len="med"/>
+                    </a:lnL>
+                    <a:lnR w="9525" cap="flat" cmpd="sng" algn="ctr">
+                      <a:solidFill>
+                        <a:srgbClr val="D5DDE3"/>
+                      </a:solidFill>
+                      <a:prstDash val="solid"/>
+                      <a:round/>
+                      <a:headEnd type="none" w="med" len="med"/>
+                      <a:tailEnd type="none" w="med" len="med"/>
+                    </a:lnR>
+                    <a:lnT w="9525" cap="flat" cmpd="sng" algn="ctr">
+                      <a:solidFill>
+                        <a:srgbClr val="D5DDE3"/>
+                      </a:solidFill>
+                      <a:prstDash val="solid"/>
+                      <a:round/>
+                      <a:headEnd type="none" w="med" len="med"/>
+                      <a:tailEnd type="none" w="med" len="med"/>
+                    </a:lnT>
+                    <a:lnB w="9525" cap="flat" cmpd="sng" algn="ctr">
+                      <a:solidFill>
+                        <a:srgbClr val="D5DDE3"/>
+                      </a:solidFill>
+                      <a:prstDash val="solid"/>
+                      <a:round/>
+                      <a:headEnd type="none" w="med" len="med"/>
+                      <a:tailEnd type="none" w="med" len="med"/>
+                    </a:lnB>
+                  </a:tcPr>
+                </a:tc>
+                <a:tc>
+                  <a:txBody>
+                    <a:bodyPr/>
+                    <a:lstStyle/>
+                    <a:p>
+                      <a:pPr algn="ctr" indent="0" marL="0">
+                        <a:buNone/>
+                      </a:pPr>
+                      <a:r>
+                        <a:rPr lang="en-US" sz="1200" b="1" dirty="0">
+                          <a:solidFill>
+                            <a:srgbClr val="1B2A38"/>
+                          </a:solidFill>
+                          <a:latin typeface="Calibri" pitchFamily="34" charset="0"/>
+                          <a:ea typeface="Calibri" pitchFamily="34" charset="-122"/>
+                          <a:cs typeface="Calibri" pitchFamily="34" charset="-120"/>
+                        </a:rPr>
+                        <a:t>message</a:t>
+                      </a:r>
+                      <a:endParaRPr lang="en-US" sz="1200" dirty="0">
+                        <a:latin typeface="Calibri" charset="0"/>
+                        <a:ea typeface="Calibri" charset="0"/>
+                        <a:cs typeface="Calibri" charset="0"/>
+                      </a:endParaRPr>
+                    </a:p>
+                  </a:txBody>
+                  <a:tcPr marL="91440" marR="91440" marT="45720" marB="45720">
+                    <a:lnL w="9525" cap="flat" cmpd="sng" algn="ctr">
+                      <a:solidFill>
+                        <a:srgbClr val="D5DDE3"/>
+                      </a:solidFill>
+                      <a:prstDash val="solid"/>
+                      <a:round/>
+                      <a:headEnd type="none" w="med" len="med"/>
+                      <a:tailEnd type="none" w="med" len="med"/>
+                    </a:lnL>
+                    <a:lnR w="9525" cap="flat" cmpd="sng" algn="ctr">
+                      <a:solidFill>
+                        <a:srgbClr val="D5DDE3"/>
+                      </a:solidFill>
+                      <a:prstDash val="solid"/>
+                      <a:round/>
+                      <a:headEnd type="none" w="med" len="med"/>
+                      <a:tailEnd type="none" w="med" len="med"/>
+                    </a:lnR>
+                    <a:lnT w="9525" cap="flat" cmpd="sng" algn="ctr">
+                      <a:solidFill>
+                        <a:srgbClr val="D5DDE3"/>
+                      </a:solidFill>
+                      <a:prstDash val="solid"/>
+                      <a:round/>
+                      <a:headEnd type="none" w="med" len="med"/>
+                      <a:tailEnd type="none" w="med" len="med"/>
+                    </a:lnT>
+                    <a:lnB w="9525" cap="flat" cmpd="sng" algn="ctr">
+                      <a:solidFill>
+                        <a:srgbClr val="D5DDE3"/>
+                      </a:solidFill>
+                      <a:prstDash val="solid"/>
+                      <a:round/>
+                      <a:headEnd type="none" w="med" len="med"/>
+                      <a:tailEnd type="none" w="med" len="med"/>
+                    </a:lnB>
+                  </a:tcPr>
+                </a:tc>
+                <a:tc>
+                  <a:txBody>
+                    <a:bodyPr/>
+                    <a:lstStyle/>
+                    <a:p>
+                      <a:pPr algn="ctr" indent="0" marL="0">
+                        <a:buNone/>
+                      </a:pPr>
+                      <a:r>
+                        <a:rPr lang="en-US" sz="1200" b="1" dirty="0">
+                          <a:solidFill>
+                            <a:srgbClr val="1B2A38"/>
+                          </a:solidFill>
+                          <a:latin typeface="Calibri" pitchFamily="34" charset="0"/>
+                          <a:ea typeface="Calibri" pitchFamily="34" charset="-122"/>
+                          <a:cs typeface="Calibri" pitchFamily="34" charset="-120"/>
+                        </a:rPr>
+                        <a:t>98.16</a:t>
+                      </a:r>
+                      <a:endParaRPr lang="en-US" sz="1200" dirty="0">
+                        <a:latin typeface="Calibri" charset="0"/>
+                        <a:ea typeface="Calibri" charset="0"/>
+                        <a:cs typeface="Calibri" charset="0"/>
+                      </a:endParaRPr>
+                    </a:p>
+                  </a:txBody>
+                  <a:tcPr marL="91440" marR="91440" marT="45720" marB="45720">
+                    <a:lnL w="9525" cap="flat" cmpd="sng" algn="ctr">
+                      <a:solidFill>
+                        <a:srgbClr val="D5DDE3"/>
+                      </a:solidFill>
+                      <a:prstDash val="solid"/>
+                      <a:round/>
+                      <a:headEnd type="none" w="med" len="med"/>
+                      <a:tailEnd type="none" w="med" len="med"/>
+                    </a:lnL>
+                    <a:lnR w="9525" cap="flat" cmpd="sng" algn="ctr">
+                      <a:solidFill>
+                        <a:srgbClr val="D5DDE3"/>
+                      </a:solidFill>
+                      <a:prstDash val="solid"/>
+                      <a:round/>
+                      <a:headEnd type="none" w="med" len="med"/>
+                      <a:tailEnd type="none" w="med" len="med"/>
+                    </a:lnR>
+                    <a:lnT w="9525" cap="flat" cmpd="sng" algn="ctr">
+                      <a:solidFill>
+                        <a:srgbClr val="D5DDE3"/>
+                      </a:solidFill>
+                      <a:prstDash val="solid"/>
+                      <a:round/>
+                      <a:headEnd type="none" w="med" len="med"/>
+                      <a:tailEnd type="none" w="med" len="med"/>
+                    </a:lnT>
+                    <a:lnB w="9525" cap="flat" cmpd="sng" algn="ctr">
+                      <a:solidFill>
+                        <a:srgbClr val="D5DDE3"/>
+                      </a:solidFill>
+                      <a:prstDash val="solid"/>
+                      <a:round/>
+                      <a:headEnd type="none" w="med" len="med"/>
+                      <a:tailEnd type="none" w="med" len="med"/>
+                    </a:lnB>
+                  </a:tcPr>
+                </a:tc>
+                <a:tc>
+                  <a:txBody>
+                    <a:bodyPr/>
+                    <a:lstStyle/>
+                    <a:p>
+                      <a:pPr algn="ctr" indent="0" marL="0">
+                        <a:buNone/>
+                      </a:pPr>
+                      <a:r>
+                        <a:rPr lang="en-US" sz="1200" b="1" dirty="0">
+                          <a:solidFill>
+                            <a:srgbClr val="1B2A38"/>
+                          </a:solidFill>
+                          <a:latin typeface="Calibri" pitchFamily="34" charset="0"/>
+                          <a:ea typeface="Calibri" pitchFamily="34" charset="-122"/>
+                          <a:cs typeface="Calibri" pitchFamily="34" charset="-120"/>
+                        </a:rPr>
+                        <a:t>97.78</a:t>
+                      </a:r>
+                      <a:endParaRPr lang="en-US" sz="1200" dirty="0">
+                        <a:latin typeface="Calibri" charset="0"/>
+                        <a:ea typeface="Calibri" charset="0"/>
+                        <a:cs typeface="Calibri" charset="0"/>
+                      </a:endParaRPr>
+                    </a:p>
+                  </a:txBody>
+                  <a:tcPr marL="91440" marR="91440" marT="45720" marB="45720">
+                    <a:lnL w="9525" cap="flat" cmpd="sng" algn="ctr">
+                      <a:solidFill>
+                        <a:srgbClr val="D5DDE3"/>
+                      </a:solidFill>
+                      <a:prstDash val="solid"/>
+                      <a:round/>
+                      <a:headEnd type="none" w="med" len="med"/>
+                      <a:tailEnd type="none" w="med" len="med"/>
+                    </a:lnL>
+                    <a:lnR w="9525" cap="flat" cmpd="sng" algn="ctr">
+                      <a:solidFill>
+                        <a:srgbClr val="D5DDE3"/>
+                      </a:solidFill>
+                      <a:prstDash val="solid"/>
+                      <a:round/>
+                      <a:headEnd type="none" w="med" len="med"/>
+                      <a:tailEnd type="none" w="med" len="med"/>
+                    </a:lnR>
+                    <a:lnT w="9525" cap="flat" cmpd="sng" algn="ctr">
+                      <a:solidFill>
+                        <a:srgbClr val="D5DDE3"/>
+                      </a:solidFill>
+                      <a:prstDash val="solid"/>
+                      <a:round/>
+                      <a:headEnd type="none" w="med" len="med"/>
+                      <a:tailEnd type="none" w="med" len="med"/>
+                    </a:lnT>
+                    <a:lnB w="9525" cap="flat" cmpd="sng" algn="ctr">
+                      <a:solidFill>
+                        <a:srgbClr val="D5DDE3"/>
+                      </a:solidFill>
+                      <a:prstDash val="solid"/>
+                      <a:round/>
+                      <a:headEnd type="none" w="med" len="med"/>
+                      <a:tailEnd type="none" w="med" len="med"/>
+                    </a:lnB>
+                  </a:tcPr>
+                </a:tc>
+                <a:tc>
+                  <a:txBody>
+                    <a:bodyPr/>
+                    <a:lstStyle/>
+                    <a:p>
+                      <a:pPr algn="ctr" indent="0" marL="0">
+                        <a:buNone/>
+                      </a:pPr>
+                      <a:r>
+                        <a:rPr lang="en-US" sz="1200" b="1" dirty="0">
+                          <a:solidFill>
+                            <a:srgbClr val="1B2A38"/>
+                          </a:solidFill>
+                          <a:latin typeface="Calibri" pitchFamily="34" charset="0"/>
+                          <a:ea typeface="Calibri" pitchFamily="34" charset="-122"/>
+                          <a:cs typeface="Calibri" pitchFamily="34" charset="-120"/>
+                        </a:rPr>
+                        <a:t>97.97</a:t>
+                      </a:r>
+                      <a:endParaRPr lang="en-US" sz="1200" dirty="0">
+                        <a:latin typeface="Calibri" charset="0"/>
+                        <a:ea typeface="Calibri" charset="0"/>
+                        <a:cs typeface="Calibri" charset="0"/>
+                      </a:endParaRPr>
+                    </a:p>
+                  </a:txBody>
+                  <a:tcPr marL="91440" marR="91440" marT="45720" marB="45720">
+                    <a:lnL w="9525" cap="flat" cmpd="sng" algn="ctr">
+                      <a:solidFill>
+                        <a:srgbClr val="D5DDE3"/>
+                      </a:solidFill>
+                      <a:prstDash val="solid"/>
+                      <a:round/>
+                      <a:headEnd type="none" w="med" len="med"/>
+                      <a:tailEnd type="none" w="med" len="med"/>
+                    </a:lnL>
+                    <a:lnR w="9525" cap="flat" cmpd="sng" algn="ctr">
+                      <a:solidFill>
+                        <a:srgbClr val="D5DDE3"/>
+                      </a:solidFill>
+                      <a:prstDash val="solid"/>
+                      <a:round/>
+                      <a:headEnd type="none" w="med" len="med"/>
+                      <a:tailEnd type="none" w="med" len="med"/>
+                    </a:lnR>
+                    <a:lnT w="9525" cap="flat" cmpd="sng" algn="ctr">
+                      <a:solidFill>
+                        <a:srgbClr val="D5DDE3"/>
+                      </a:solidFill>
+                      <a:prstDash val="solid"/>
+                      <a:round/>
+                      <a:headEnd type="none" w="med" len="med"/>
+                      <a:tailEnd type="none" w="med" len="med"/>
+                    </a:lnT>
+                    <a:lnB w="9525" cap="flat" cmpd="sng" algn="ctr">
+                      <a:solidFill>
+                        <a:srgbClr val="D5DDE3"/>
+                      </a:solidFill>
+                      <a:prstDash val="solid"/>
+                      <a:round/>
+                      <a:headEnd type="none" w="med" len="med"/>
+                      <a:tailEnd type="none" w="med" len="med"/>
+                    </a:lnB>
+                  </a:tcPr>
+                </a:tc>
+                <a:tc>
+                  <a:txBody>
+                    <a:bodyPr/>
+                    <a:lstStyle/>
+                    <a:p>
+                      <a:pPr algn="ctr" indent="0" marL="0">
+                        <a:buNone/>
+                      </a:pPr>
+                      <a:r>
+                        <a:rPr lang="en-US" sz="1200" b="1" dirty="0">
+                          <a:solidFill>
+                            <a:srgbClr val="1B2A38"/>
+                          </a:solidFill>
+                          <a:latin typeface="Calibri" pitchFamily="34" charset="0"/>
+                          <a:ea typeface="Calibri" pitchFamily="34" charset="-122"/>
+                          <a:cs typeface="Calibri" pitchFamily="34" charset="-120"/>
+                        </a:rPr>
+                        <a:t>98.74</a:t>
+                      </a:r>
+                      <a:endParaRPr lang="en-US" sz="1200" dirty="0">
+                        <a:latin typeface="Calibri" charset="0"/>
+                        <a:ea typeface="Calibri" charset="0"/>
+                        <a:cs typeface="Calibri" charset="0"/>
+                      </a:endParaRPr>
+                    </a:p>
+                  </a:txBody>
+                  <a:tcPr marL="91440" marR="91440" marT="45720" marB="45720">
+                    <a:lnL w="9525" cap="flat" cmpd="sng" algn="ctr">
+                      <a:solidFill>
+                        <a:srgbClr val="D5DDE3"/>
+                      </a:solidFill>
+                      <a:prstDash val="solid"/>
+                      <a:round/>
+                      <a:headEnd type="none" w="med" len="med"/>
+                      <a:tailEnd type="none" w="med" len="med"/>
+                    </a:lnL>
+                    <a:lnR w="9525" cap="flat" cmpd="sng" algn="ctr">
+                      <a:solidFill>
+                        <a:srgbClr val="D5DDE3"/>
+                      </a:solidFill>
+                      <a:prstDash val="solid"/>
+                      <a:round/>
+                      <a:headEnd type="none" w="med" len="med"/>
+                      <a:tailEnd type="none" w="med" len="med"/>
+                    </a:lnR>
+                    <a:lnT w="9525" cap="flat" cmpd="sng" algn="ctr">
+                      <a:solidFill>
+                        <a:srgbClr val="D5DDE3"/>
+                      </a:solidFill>
+                      <a:prstDash val="solid"/>
+                      <a:round/>
+                      <a:headEnd type="none" w="med" len="med"/>
+                      <a:tailEnd type="none" w="med" len="med"/>
+                    </a:lnT>
+                    <a:lnB w="9525" cap="flat" cmpd="sng" algn="ctr">
+                      <a:solidFill>
+                        <a:srgbClr val="D5DDE3"/>
+                      </a:solidFill>
+                      <a:prstDash val="solid"/>
+                      <a:round/>
+                      <a:headEnd type="none" w="med" len="med"/>
+                      <a:tailEnd type="none" w="med" len="med"/>
+                    </a:lnB>
+                  </a:tcPr>
+                </a:tc>
+              </a:tr>
+            </a:tbl>
           </a:graphicData>
         </a:graphic>
       </p:graphicFrame>
@@ -3471,8 +5855,8 @@
         </p:nvSpPr>
         <p:spPr>
           <a:xfrm>
-            <a:off x="6217920" y="1188720"/>
-            <a:ext cx="2468880" cy="731520"/>
+            <a:off x="548640" y="3566160"/>
+            <a:ext cx="8046720" cy="320040"/>
           </a:xfrm>
           <a:prstGeom prst="rect">
             <a:avLst/>
@@ -3488,17 +5872,17 @@
               <a:buNone/>
             </a:pPr>
             <a:r>
-              <a:rPr lang="en-US" sz="5400" b="1" dirty="0">
+              <a:rPr lang="en-US" sz="1400" b="1" dirty="0">
                 <a:solidFill>
                   <a:srgbClr val="1C7C7D"/>
                 </a:solidFill>
-                <a:latin typeface="Cambria" pitchFamily="34" charset="0"/>
-                <a:ea typeface="Cambria" pitchFamily="34" charset="-122"/>
-                <a:cs typeface="Cambria" pitchFamily="34" charset="-120"/>
+                <a:latin typeface="Calibri" pitchFamily="34" charset="0"/>
+                <a:ea typeface="Calibri" pitchFamily="34" charset="-122"/>
+                <a:cs typeface="Calibri" pitchFamily="34" charset="-120"/>
               </a:rPr>
-              <a:t>0.982</a:t>
+              <a:t>False-positive rate: v2 0.60% (first model 0.7%)</a:t>
             </a:r>
-            <a:endParaRPr lang="en-US" sz="5400" dirty="0"/>
+            <a:endParaRPr lang="en-US" sz="1400" dirty="0"/>
           </a:p>
         </p:txBody>
       </p:sp>
@@ -3510,8 +5894,47 @@
         </p:nvSpPr>
         <p:spPr>
           <a:xfrm>
-            <a:off x="6217920" y="1920240"/>
-            <a:ext cx="2468880" cy="548640"/>
+            <a:off x="548640" y="3886200"/>
+            <a:ext cx="8046720" cy="594360"/>
+          </a:xfrm>
+          <a:prstGeom prst="rect">
+            <a:avLst/>
+          </a:prstGeom>
+          <a:noFill/>
+          <a:ln/>
+        </p:spPr>
+        <p:txBody>
+          <a:bodyPr wrap="square" lIns="0" tIns="0" rIns="0" bIns="0" rtlCol="0" anchor="t"/>
+          <a:lstStyle/>
+          <a:p>
+            <a:pPr indent="0" marL="0">
+              <a:buNone/>
+            </a:pPr>
+            <a:r>
+              <a:rPr lang="en-US" sz="1200" dirty="0">
+                <a:solidFill>
+                  <a:srgbClr val="1B2A38"/>
+                </a:solidFill>
+                <a:latin typeface="Calibri" pitchFamily="34" charset="0"/>
+                <a:ea typeface="Calibri" pitchFamily="34" charset="-122"/>
+                <a:cs typeface="Calibri" pitchFamily="34" charset="-120"/>
+              </a:rPr>
+              <a:t>Message labels count an attacker only in windows where it sent a falsified message (dataset ground truth). Vehicle labels count every window of an attacker vehicle, including its honest-looking ones, so recall is lower.</a:t>
+            </a:r>
+            <a:endParaRPr lang="en-US" sz="1200" dirty="0"/>
+          </a:p>
+        </p:txBody>
+      </p:sp>
+      <p:sp>
+        <p:nvSpPr>
+          <p:cNvPr id="6" name="Text 3"/>
+          <p:cNvSpPr txBox="1"/>
+          <p:nvPr/>
+        </p:nvSpPr>
+        <p:spPr>
+          <a:xfrm>
+            <a:off x="548640" y="4526280"/>
+            <a:ext cx="8046720" cy="365760"/>
           </a:xfrm>
           <a:prstGeom prst="rect">
             <a:avLst/>
@@ -3527,46 +5950,7 @@
               <a:buNone/>
             </a:pPr>
             <a:r>
-              <a:rPr lang="en-US" sz="1400" dirty="0">
-                <a:solidFill>
-                  <a:srgbClr val="1B2A38"/>
-                </a:solidFill>
-                <a:latin typeface="Calibri" pitchFamily="34" charset="0"/>
-                <a:ea typeface="Calibri" pitchFamily="34" charset="-122"/>
-                <a:cs typeface="Calibri" pitchFamily="34" charset="-120"/>
-              </a:rPr>
-              <a:t>overall F1, full model (baseline 0.973)</a:t>
-            </a:r>
-            <a:endParaRPr lang="en-US" sz="1400" dirty="0"/>
-          </a:p>
-        </p:txBody>
-      </p:sp>
-      <p:sp>
-        <p:nvSpPr>
-          <p:cNvPr id="6" name="Text 3"/>
-          <p:cNvSpPr txBox="1"/>
-          <p:nvPr/>
-        </p:nvSpPr>
-        <p:spPr>
-          <a:xfrm>
-            <a:off x="6217920" y="2743200"/>
-            <a:ext cx="2468880" cy="822960"/>
-          </a:xfrm>
-          <a:prstGeom prst="rect">
-            <a:avLst/>
-          </a:prstGeom>
-          <a:noFill/>
-          <a:ln/>
-        </p:spPr>
-        <p:txBody>
-          <a:bodyPr wrap="square" lIns="0" tIns="0" rIns="0" bIns="0" rtlCol="0" anchor="ctr"/>
-          <a:lstStyle/>
-          <a:p>
-            <a:pPr indent="0" marL="0">
-              <a:buNone/>
-            </a:pPr>
-            <a:r>
-              <a:rPr lang="en-US" sz="1200" dirty="0">
+              <a:rPr lang="en-US" sz="1050" i="1" dirty="0">
                 <a:solidFill>
                   <a:srgbClr val="5B6B7A"/>
                 </a:solidFill>
@@ -3574,9 +5958,9 @@
                 <a:ea typeface="Calibri" pitchFamily="34" charset="-122"/>
                 <a:cs typeface="Calibri" pitchFamily="34" charset="-120"/>
               </a:rPr>
-              <a:t>AUC about 0.997 for all models. Mean of 3 seeds; std 0.001 to 0.004.</a:t>
+              <a:t>All values in %. Mean of 2 seeds. '-' = not reported for that row.</a:t>
             </a:r>
-            <a:endParaRPr lang="en-US" sz="1200" dirty="0"/>
+            <a:endParaRPr lang="en-US" sz="1050" dirty="0"/>
           </a:p>
         </p:txBody>
       </p:sp>
@@ -3637,7 +6021,7 @@
               <a:buNone/>
             </a:pPr>
             <a:r>
-              <a:rPr lang="en-US" sz="3200" b="1" dirty="0">
+              <a:rPr lang="en-US" sz="3000" b="1" dirty="0">
                 <a:solidFill>
                   <a:srgbClr val="0B1F33"/>
                 </a:solidFill>
@@ -3645,9 +6029,9 @@
                 <a:ea typeface="Cambria" pitchFamily="34" charset="-122"/>
                 <a:cs typeface="Cambria" pitchFamily="34" charset="-120"/>
               </a:rPr>
-              <a:t>What the results say</a:t>
+              <a:t>What neighbour attention adds</a:t>
             </a:r>
-            <a:endParaRPr lang="en-US" sz="3200" dirty="0"/>
+            <a:endParaRPr lang="en-US" sz="3000" dirty="0"/>
           </a:p>
         </p:txBody>
       </p:sp>
@@ -3659,8 +6043,8 @@
         </p:nvSpPr>
         <p:spPr>
           <a:xfrm>
-            <a:off x="548640" y="1188720"/>
-            <a:ext cx="2560320" cy="3108960"/>
+            <a:off x="548640" y="1143000"/>
+            <a:ext cx="2560320" cy="3200400"/>
           </a:xfrm>
           <a:prstGeom prst="roundRect">
             <a:avLst>
@@ -3686,7 +6070,7 @@
         </p:nvSpPr>
         <p:spPr>
           <a:xfrm>
-            <a:off x="731520" y="1325880"/>
+            <a:off x="731520" y="1280160"/>
             <a:ext cx="2194560" cy="365760"/>
           </a:xfrm>
           <a:prstGeom prst="rect">
@@ -3711,7 +6095,7 @@
                 <a:ea typeface="Cambria" pitchFamily="34" charset="-122"/>
                 <a:cs typeface="Cambria" pitchFamily="34" charset="-120"/>
               </a:rPr>
-              <a:t>Neighbours help</a:t>
+              <a:t>Small but real</a:t>
             </a:r>
             <a:endParaRPr lang="en-US" sz="1600" dirty="0"/>
           </a:p>
@@ -3725,8 +6109,8 @@
         </p:nvSpPr>
         <p:spPr>
           <a:xfrm>
-            <a:off x="731520" y="1737360"/>
-            <a:ext cx="2194560" cy="2423160"/>
+            <a:off x="731520" y="1691640"/>
+            <a:ext cx="2194560" cy="2514600"/>
           </a:xfrm>
           <a:prstGeom prst="rect">
             <a:avLst/>
@@ -3750,7 +6134,7 @@
                 <a:ea typeface="Calibri" pitchFamily="34" charset="-122"/>
                 <a:cs typeface="Calibri" pitchFamily="34" charset="-120"/>
               </a:rPr>
-              <a:t>Overall F1 +0.9 points; RandomPos +1.7 points over the per-sender baseline.</a:t>
+              <a:t>+0.3 F1 points (95% CI about [0.2, 0.4]). Significant on 8-10 of the 14 attacks.</a:t>
             </a:r>
             <a:endParaRPr lang="en-US" sz="1400" dirty="0"/>
           </a:p>
@@ -3764,8 +6148,8 @@
         </p:nvSpPr>
         <p:spPr>
           <a:xfrm>
-            <a:off x="3291840" y="1188720"/>
-            <a:ext cx="2560320" cy="3108960"/>
+            <a:off x="3291840" y="1143000"/>
+            <a:ext cx="2560320" cy="3200400"/>
           </a:xfrm>
           <a:prstGeom prst="roundRect">
             <a:avLst>
@@ -3791,7 +6175,7 @@
         </p:nvSpPr>
         <p:spPr>
           <a:xfrm>
-            <a:off x="3474720" y="1325880"/>
+            <a:off x="3474720" y="1280160"/>
             <a:ext cx="2194560" cy="365760"/>
           </a:xfrm>
           <a:prstGeom prst="rect">
@@ -3816,7 +6200,7 @@
                 <a:ea typeface="Cambria" pitchFamily="34" charset="-122"/>
                 <a:cs typeface="Cambria" pitchFamily="34" charset="-120"/>
               </a:rPr>
-              <a:t>Spatial adds little</a:t>
+              <a:t>Fewer false alarms</a:t>
             </a:r>
             <a:endParaRPr lang="en-US" sz="1600" dirty="0"/>
           </a:p>
@@ -3830,8 +6214,8 @@
         </p:nvSpPr>
         <p:spPr>
           <a:xfrm>
-            <a:off x="3474720" y="1737360"/>
-            <a:ext cx="2194560" cy="2423160"/>
+            <a:off x="3474720" y="1691640"/>
+            <a:ext cx="2194560" cy="2514600"/>
           </a:xfrm>
           <a:prstGeom prst="rect">
             <a:avLst/>
@@ -3855,7 +6239,7 @@
                 <a:ea typeface="Calibri" pitchFamily="34" charset="-122"/>
                 <a:cs typeface="Calibri" pitchFamily="34" charset="-120"/>
               </a:rPr>
-              <a:t>Full model ties the no-spatial variant overall (0.982). It helps only on RandomPos.</a:t>
+              <a:t>False-positive rate drops from 0.90% to 0.60% with neighbour attention.</a:t>
             </a:r>
             <a:endParaRPr lang="en-US" sz="1400" dirty="0"/>
           </a:p>
@@ -3869,8 +6253,8 @@
         </p:nvSpPr>
         <p:spPr>
           <a:xfrm>
-            <a:off x="6035040" y="1188720"/>
-            <a:ext cx="2560320" cy="3108960"/>
+            <a:off x="6035040" y="1143000"/>
+            <a:ext cx="2560320" cy="3200400"/>
           </a:xfrm>
           <a:prstGeom prst="roundRect">
             <a:avLst>
@@ -3896,7 +6280,7 @@
         </p:nvSpPr>
         <p:spPr>
           <a:xfrm>
-            <a:off x="6217920" y="1325880"/>
+            <a:off x="6217920" y="1280160"/>
             <a:ext cx="2194560" cy="365760"/>
           </a:xfrm>
           <a:prstGeom prst="rect">
@@ -3921,7 +6305,7 @@
                 <a:ea typeface="Cambria" pitchFamily="34" charset="-122"/>
                 <a:cs typeface="Cambria" pitchFamily="34" charset="-120"/>
               </a:rPr>
-              <a:t>ConstSpeed is worse</a:t>
+              <a:t>Fails with attacker majority</a:t>
             </a:r>
             <a:endParaRPr lang="en-US" sz="1600" dirty="0"/>
           </a:p>
@@ -3935,8 +6319,8 @@
         </p:nvSpPr>
         <p:spPr>
           <a:xfrm>
-            <a:off x="6217920" y="1737360"/>
-            <a:ext cx="2194560" cy="2423160"/>
+            <a:off x="6217920" y="1691640"/>
+            <a:ext cx="2194560" cy="2514600"/>
           </a:xfrm>
           <a:prstGeom prst="rect">
             <a:avLst/>
@@ -3960,7 +6344,7 @@
                 <a:ea typeface="Calibri" pitchFamily="34" charset="-122"/>
                 <a:cs typeface="Calibri" pitchFamily="34" charset="-120"/>
               </a:rPr>
-              <a:t>0.948 vs 0.960 for the baseline. We report this negative result.</a:t>
+              <a:t>When attackers are most of a sender's neighbours the gain shrinks and turns negative (-0.004 within-attack). First model: +0.071 down to -0.023.</a:t>
             </a:r>
             <a:endParaRPr lang="en-US" sz="1400" dirty="0"/>
           </a:p>
@@ -4023,7 +6407,7 @@
               <a:buNone/>
             </a:pPr>
             <a:r>
-              <a:rPr lang="en-US" sz="3200" b="1" dirty="0">
+              <a:rPr lang="en-US" sz="3000" b="1" dirty="0">
                 <a:solidFill>
                   <a:srgbClr val="0B1F33"/>
                 </a:solidFill>
@@ -4031,1051 +6415,49 @@
                 <a:ea typeface="Cambria" pitchFamily="34" charset="-122"/>
                 <a:cs typeface="Cambria" pitchFamily="34" charset="-120"/>
               </a:rPr>
-              <a:t>Preliminary: full metrics and latency</a:t>
+              <a:t>How fast attackers are flagged (v2)</a:t>
             </a:r>
-            <a:endParaRPr lang="en-US" sz="3200" dirty="0"/>
+            <a:endParaRPr lang="en-US" sz="3000" dirty="0"/>
           </a:p>
         </p:txBody>
       </p:sp>
-      <p:graphicFrame>
-        <p:nvGraphicFramePr>
-          <p:cNvPr id="7" name="Table 0"/>
-          <p:cNvGraphicFramePr>
-            <a:graphicFrameLocks noGrp="1"/>
-          </p:cNvGraphicFramePr>
-          <p:nvPr>
-            <p:extLst>
-              <p:ext uri="{D42A27DB-BD31-4B8C-83A1-F6EECF244321}">
-                <p14:modId xmlns:p14="http://schemas.microsoft.com/office/powerpoint/2010/main" val="1579011935"/>
-              </p:ext>
-            </p:extLst>
-          </p:nvPr>
-        </p:nvGraphicFramePr>
-        <p:xfrm>
-          <a:off x="548640" y="1188720"/>
-          <a:ext cx="8046720" cy="914400"/>
-        </p:xfrm>
-        <a:graphic>
-          <a:graphicData uri="http://schemas.openxmlformats.org/drawingml/2006/table">
-            <a:tbl>
-              <a:tblPr/>
-              <a:tblGrid>
-                <a:gridCol w="2194560"/>
-                <a:gridCol w="1463040"/>
-                <a:gridCol w="1463040"/>
-                <a:gridCol w="1463040"/>
-                <a:gridCol w="1463040"/>
-              </a:tblGrid>
-              <a:tr h="384048">
-                <a:tc>
-                  <a:txBody>
-                    <a:bodyPr/>
-                    <a:lstStyle/>
-                    <a:p>
-                      <a:pPr algn="ctr" indent="0" marL="0">
-                        <a:buNone/>
-                      </a:pPr>
-                      <a:r>
-                        <a:rPr lang="en-US" sz="1300" b="1" dirty="0">
-                          <a:solidFill>
-                            <a:srgbClr val="FFFFFF"/>
-                          </a:solidFill>
-                          <a:latin typeface="Calibri" pitchFamily="34" charset="0"/>
-                          <a:ea typeface="Calibri" pitchFamily="34" charset="-122"/>
-                          <a:cs typeface="Calibri" pitchFamily="34" charset="-120"/>
-                        </a:rPr>
-                        <a:t>Model</a:t>
-                      </a:r>
-                      <a:endParaRPr lang="en-US" sz="1300" dirty="0">
-                        <a:latin typeface="Calibri" charset="0"/>
-                        <a:ea typeface="Calibri" charset="0"/>
-                        <a:cs typeface="Calibri" charset="0"/>
-                      </a:endParaRPr>
-                    </a:p>
-                  </a:txBody>
-                  <a:tcPr marL="91440" marR="91440" marT="45720" marB="45720">
-                    <a:lnL w="9525" cap="flat" cmpd="sng" algn="ctr">
-                      <a:solidFill>
-                        <a:srgbClr val="D5DDE3"/>
-                      </a:solidFill>
-                      <a:prstDash val="solid"/>
-                      <a:round/>
-                      <a:headEnd type="none" w="med" len="med"/>
-                      <a:tailEnd type="none" w="med" len="med"/>
-                    </a:lnL>
-                    <a:lnR w="9525" cap="flat" cmpd="sng" algn="ctr">
-                      <a:solidFill>
-                        <a:srgbClr val="D5DDE3"/>
-                      </a:solidFill>
-                      <a:prstDash val="solid"/>
-                      <a:round/>
-                      <a:headEnd type="none" w="med" len="med"/>
-                      <a:tailEnd type="none" w="med" len="med"/>
-                    </a:lnR>
-                    <a:lnT w="9525" cap="flat" cmpd="sng" algn="ctr">
-                      <a:solidFill>
-                        <a:srgbClr val="D5DDE3"/>
-                      </a:solidFill>
-                      <a:prstDash val="solid"/>
-                      <a:round/>
-                      <a:headEnd type="none" w="med" len="med"/>
-                      <a:tailEnd type="none" w="med" len="med"/>
-                    </a:lnT>
-                    <a:lnB w="9525" cap="flat" cmpd="sng" algn="ctr">
-                      <a:solidFill>
-                        <a:srgbClr val="D5DDE3"/>
-                      </a:solidFill>
-                      <a:prstDash val="solid"/>
-                      <a:round/>
-                      <a:headEnd type="none" w="med" len="med"/>
-                      <a:tailEnd type="none" w="med" len="med"/>
-                    </a:lnB>
-                    <a:solidFill>
-                      <a:srgbClr val="0B1F33"/>
-                    </a:solidFill>
-                  </a:tcPr>
-                </a:tc>
-                <a:tc>
-                  <a:txBody>
-                    <a:bodyPr/>
-                    <a:lstStyle/>
-                    <a:p>
-                      <a:pPr algn="ctr" indent="0" marL="0">
-                        <a:buNone/>
-                      </a:pPr>
-                      <a:r>
-                        <a:rPr lang="en-US" sz="1300" b="1" dirty="0">
-                          <a:solidFill>
-                            <a:srgbClr val="FFFFFF"/>
-                          </a:solidFill>
-                          <a:latin typeface="Calibri" pitchFamily="34" charset="0"/>
-                          <a:ea typeface="Calibri" pitchFamily="34" charset="-122"/>
-                          <a:cs typeface="Calibri" pitchFamily="34" charset="-120"/>
-                        </a:rPr>
-                        <a:t>Precision</a:t>
-                      </a:r>
-                      <a:endParaRPr lang="en-US" sz="1300" dirty="0">
-                        <a:latin typeface="Calibri" charset="0"/>
-                        <a:ea typeface="Calibri" charset="0"/>
-                        <a:cs typeface="Calibri" charset="0"/>
-                      </a:endParaRPr>
-                    </a:p>
-                  </a:txBody>
-                  <a:tcPr marL="91440" marR="91440" marT="45720" marB="45720">
-                    <a:lnL w="9525" cap="flat" cmpd="sng" algn="ctr">
-                      <a:solidFill>
-                        <a:srgbClr val="D5DDE3"/>
-                      </a:solidFill>
-                      <a:prstDash val="solid"/>
-                      <a:round/>
-                      <a:headEnd type="none" w="med" len="med"/>
-                      <a:tailEnd type="none" w="med" len="med"/>
-                    </a:lnL>
-                    <a:lnR w="9525" cap="flat" cmpd="sng" algn="ctr">
-                      <a:solidFill>
-                        <a:srgbClr val="D5DDE3"/>
-                      </a:solidFill>
-                      <a:prstDash val="solid"/>
-                      <a:round/>
-                      <a:headEnd type="none" w="med" len="med"/>
-                      <a:tailEnd type="none" w="med" len="med"/>
-                    </a:lnR>
-                    <a:lnT w="9525" cap="flat" cmpd="sng" algn="ctr">
-                      <a:solidFill>
-                        <a:srgbClr val="D5DDE3"/>
-                      </a:solidFill>
-                      <a:prstDash val="solid"/>
-                      <a:round/>
-                      <a:headEnd type="none" w="med" len="med"/>
-                      <a:tailEnd type="none" w="med" len="med"/>
-                    </a:lnT>
-                    <a:lnB w="9525" cap="flat" cmpd="sng" algn="ctr">
-                      <a:solidFill>
-                        <a:srgbClr val="D5DDE3"/>
-                      </a:solidFill>
-                      <a:prstDash val="solid"/>
-                      <a:round/>
-                      <a:headEnd type="none" w="med" len="med"/>
-                      <a:tailEnd type="none" w="med" len="med"/>
-                    </a:lnB>
-                    <a:solidFill>
-                      <a:srgbClr val="0B1F33"/>
-                    </a:solidFill>
-                  </a:tcPr>
-                </a:tc>
-                <a:tc>
-                  <a:txBody>
-                    <a:bodyPr/>
-                    <a:lstStyle/>
-                    <a:p>
-                      <a:pPr algn="ctr" indent="0" marL="0">
-                        <a:buNone/>
-                      </a:pPr>
-                      <a:r>
-                        <a:rPr lang="en-US" sz="1300" b="1" dirty="0">
-                          <a:solidFill>
-                            <a:srgbClr val="FFFFFF"/>
-                          </a:solidFill>
-                          <a:latin typeface="Calibri" pitchFamily="34" charset="0"/>
-                          <a:ea typeface="Calibri" pitchFamily="34" charset="-122"/>
-                          <a:cs typeface="Calibri" pitchFamily="34" charset="-120"/>
-                        </a:rPr>
-                        <a:t>Recall</a:t>
-                      </a:r>
-                      <a:endParaRPr lang="en-US" sz="1300" dirty="0">
-                        <a:latin typeface="Calibri" charset="0"/>
-                        <a:ea typeface="Calibri" charset="0"/>
-                        <a:cs typeface="Calibri" charset="0"/>
-                      </a:endParaRPr>
-                    </a:p>
-                  </a:txBody>
-                  <a:tcPr marL="91440" marR="91440" marT="45720" marB="45720">
-                    <a:lnL w="9525" cap="flat" cmpd="sng" algn="ctr">
-                      <a:solidFill>
-                        <a:srgbClr val="D5DDE3"/>
-                      </a:solidFill>
-                      <a:prstDash val="solid"/>
-                      <a:round/>
-                      <a:headEnd type="none" w="med" len="med"/>
-                      <a:tailEnd type="none" w="med" len="med"/>
-                    </a:lnL>
-                    <a:lnR w="9525" cap="flat" cmpd="sng" algn="ctr">
-                      <a:solidFill>
-                        <a:srgbClr val="D5DDE3"/>
-                      </a:solidFill>
-                      <a:prstDash val="solid"/>
-                      <a:round/>
-                      <a:headEnd type="none" w="med" len="med"/>
-                      <a:tailEnd type="none" w="med" len="med"/>
-                    </a:lnR>
-                    <a:lnT w="9525" cap="flat" cmpd="sng" algn="ctr">
-                      <a:solidFill>
-                        <a:srgbClr val="D5DDE3"/>
-                      </a:solidFill>
-                      <a:prstDash val="solid"/>
-                      <a:round/>
-                      <a:headEnd type="none" w="med" len="med"/>
-                      <a:tailEnd type="none" w="med" len="med"/>
-                    </a:lnT>
-                    <a:lnB w="9525" cap="flat" cmpd="sng" algn="ctr">
-                      <a:solidFill>
-                        <a:srgbClr val="D5DDE3"/>
-                      </a:solidFill>
-                      <a:prstDash val="solid"/>
-                      <a:round/>
-                      <a:headEnd type="none" w="med" len="med"/>
-                      <a:tailEnd type="none" w="med" len="med"/>
-                    </a:lnB>
-                    <a:solidFill>
-                      <a:srgbClr val="0B1F33"/>
-                    </a:solidFill>
-                  </a:tcPr>
-                </a:tc>
-                <a:tc>
-                  <a:txBody>
-                    <a:bodyPr/>
-                    <a:lstStyle/>
-                    <a:p>
-                      <a:pPr algn="ctr" indent="0" marL="0">
-                        <a:buNone/>
-                      </a:pPr>
-                      <a:r>
-                        <a:rPr lang="en-US" sz="1300" b="1" dirty="0">
-                          <a:solidFill>
-                            <a:srgbClr val="FFFFFF"/>
-                          </a:solidFill>
-                          <a:latin typeface="Calibri" pitchFamily="34" charset="0"/>
-                          <a:ea typeface="Calibri" pitchFamily="34" charset="-122"/>
-                          <a:cs typeface="Calibri" pitchFamily="34" charset="-120"/>
-                        </a:rPr>
-                        <a:t>F1</a:t>
-                      </a:r>
-                      <a:endParaRPr lang="en-US" sz="1300" dirty="0">
-                        <a:latin typeface="Calibri" charset="0"/>
-                        <a:ea typeface="Calibri" charset="0"/>
-                        <a:cs typeface="Calibri" charset="0"/>
-                      </a:endParaRPr>
-                    </a:p>
-                  </a:txBody>
-                  <a:tcPr marL="91440" marR="91440" marT="45720" marB="45720">
-                    <a:lnL w="9525" cap="flat" cmpd="sng" algn="ctr">
-                      <a:solidFill>
-                        <a:srgbClr val="D5DDE3"/>
-                      </a:solidFill>
-                      <a:prstDash val="solid"/>
-                      <a:round/>
-                      <a:headEnd type="none" w="med" len="med"/>
-                      <a:tailEnd type="none" w="med" len="med"/>
-                    </a:lnL>
-                    <a:lnR w="9525" cap="flat" cmpd="sng" algn="ctr">
-                      <a:solidFill>
-                        <a:srgbClr val="D5DDE3"/>
-                      </a:solidFill>
-                      <a:prstDash val="solid"/>
-                      <a:round/>
-                      <a:headEnd type="none" w="med" len="med"/>
-                      <a:tailEnd type="none" w="med" len="med"/>
-                    </a:lnR>
-                    <a:lnT w="9525" cap="flat" cmpd="sng" algn="ctr">
-                      <a:solidFill>
-                        <a:srgbClr val="D5DDE3"/>
-                      </a:solidFill>
-                      <a:prstDash val="solid"/>
-                      <a:round/>
-                      <a:headEnd type="none" w="med" len="med"/>
-                      <a:tailEnd type="none" w="med" len="med"/>
-                    </a:lnT>
-                    <a:lnB w="9525" cap="flat" cmpd="sng" algn="ctr">
-                      <a:solidFill>
-                        <a:srgbClr val="D5DDE3"/>
-                      </a:solidFill>
-                      <a:prstDash val="solid"/>
-                      <a:round/>
-                      <a:headEnd type="none" w="med" len="med"/>
-                      <a:tailEnd type="none" w="med" len="med"/>
-                    </a:lnB>
-                    <a:solidFill>
-                      <a:srgbClr val="0B1F33"/>
-                    </a:solidFill>
-                  </a:tcPr>
-                </a:tc>
-                <a:tc>
-                  <a:txBody>
-                    <a:bodyPr/>
-                    <a:lstStyle/>
-                    <a:p>
-                      <a:pPr algn="ctr" indent="0" marL="0">
-                        <a:buNone/>
-                      </a:pPr>
-                      <a:r>
-                        <a:rPr lang="en-US" sz="1300" b="1" dirty="0">
-                          <a:solidFill>
-                            <a:srgbClr val="FFFFFF"/>
-                          </a:solidFill>
-                          <a:latin typeface="Calibri" pitchFamily="34" charset="0"/>
-                          <a:ea typeface="Calibri" pitchFamily="34" charset="-122"/>
-                          <a:cs typeface="Calibri" pitchFamily="34" charset="-120"/>
-                        </a:rPr>
-                        <a:t>False-pos. rate</a:t>
-                      </a:r>
-                      <a:endParaRPr lang="en-US" sz="1300" dirty="0">
-                        <a:latin typeface="Calibri" charset="0"/>
-                        <a:ea typeface="Calibri" charset="0"/>
-                        <a:cs typeface="Calibri" charset="0"/>
-                      </a:endParaRPr>
-                    </a:p>
-                  </a:txBody>
-                  <a:tcPr marL="91440" marR="91440" marT="45720" marB="45720">
-                    <a:lnL w="9525" cap="flat" cmpd="sng" algn="ctr">
-                      <a:solidFill>
-                        <a:srgbClr val="D5DDE3"/>
-                      </a:solidFill>
-                      <a:prstDash val="solid"/>
-                      <a:round/>
-                      <a:headEnd type="none" w="med" len="med"/>
-                      <a:tailEnd type="none" w="med" len="med"/>
-                    </a:lnL>
-                    <a:lnR w="9525" cap="flat" cmpd="sng" algn="ctr">
-                      <a:solidFill>
-                        <a:srgbClr val="D5DDE3"/>
-                      </a:solidFill>
-                      <a:prstDash val="solid"/>
-                      <a:round/>
-                      <a:headEnd type="none" w="med" len="med"/>
-                      <a:tailEnd type="none" w="med" len="med"/>
-                    </a:lnR>
-                    <a:lnT w="9525" cap="flat" cmpd="sng" algn="ctr">
-                      <a:solidFill>
-                        <a:srgbClr val="D5DDE3"/>
-                      </a:solidFill>
-                      <a:prstDash val="solid"/>
-                      <a:round/>
-                      <a:headEnd type="none" w="med" len="med"/>
-                      <a:tailEnd type="none" w="med" len="med"/>
-                    </a:lnT>
-                    <a:lnB w="9525" cap="flat" cmpd="sng" algn="ctr">
-                      <a:solidFill>
-                        <a:srgbClr val="D5DDE3"/>
-                      </a:solidFill>
-                      <a:prstDash val="solid"/>
-                      <a:round/>
-                      <a:headEnd type="none" w="med" len="med"/>
-                      <a:tailEnd type="none" w="med" len="med"/>
-                    </a:lnB>
-                    <a:solidFill>
-                      <a:srgbClr val="0B1F33"/>
-                    </a:solidFill>
-                  </a:tcPr>
-                </a:tc>
-              </a:tr>
-              <a:tr h="384048">
-                <a:tc>
-                  <a:txBody>
-                    <a:bodyPr/>
-                    <a:lstStyle/>
-                    <a:p>
-                      <a:pPr algn="l" indent="0" marL="0">
-                        <a:buNone/>
-                      </a:pPr>
-                      <a:r>
-                        <a:rPr lang="en-US" sz="1300" dirty="0">
-                          <a:solidFill>
-                            <a:srgbClr val="1B2A38"/>
-                          </a:solidFill>
-                          <a:latin typeface="Calibri" pitchFamily="34" charset="0"/>
-                          <a:ea typeface="Calibri" pitchFamily="34" charset="-122"/>
-                          <a:cs typeface="Calibri" pitchFamily="34" charset="-120"/>
-                        </a:rPr>
-                        <a:t>Per-sender</a:t>
-                      </a:r>
-                      <a:endParaRPr lang="en-US" sz="1300" dirty="0">
-                        <a:latin typeface="Calibri" charset="0"/>
-                        <a:ea typeface="Calibri" charset="0"/>
-                        <a:cs typeface="Calibri" charset="0"/>
-                      </a:endParaRPr>
-                    </a:p>
-                  </a:txBody>
-                  <a:tcPr marL="91440" marR="91440" marT="45720" marB="45720">
-                    <a:lnL w="9525" cap="flat" cmpd="sng" algn="ctr">
-                      <a:solidFill>
-                        <a:srgbClr val="D5DDE3"/>
-                      </a:solidFill>
-                      <a:prstDash val="solid"/>
-                      <a:round/>
-                      <a:headEnd type="none" w="med" len="med"/>
-                      <a:tailEnd type="none" w="med" len="med"/>
-                    </a:lnL>
-                    <a:lnR w="9525" cap="flat" cmpd="sng" algn="ctr">
-                      <a:solidFill>
-                        <a:srgbClr val="D5DDE3"/>
-                      </a:solidFill>
-                      <a:prstDash val="solid"/>
-                      <a:round/>
-                      <a:headEnd type="none" w="med" len="med"/>
-                      <a:tailEnd type="none" w="med" len="med"/>
-                    </a:lnR>
-                    <a:lnT w="9525" cap="flat" cmpd="sng" algn="ctr">
-                      <a:solidFill>
-                        <a:srgbClr val="D5DDE3"/>
-                      </a:solidFill>
-                      <a:prstDash val="solid"/>
-                      <a:round/>
-                      <a:headEnd type="none" w="med" len="med"/>
-                      <a:tailEnd type="none" w="med" len="med"/>
-                    </a:lnT>
-                    <a:lnB w="9525" cap="flat" cmpd="sng" algn="ctr">
-                      <a:solidFill>
-                        <a:srgbClr val="D5DDE3"/>
-                      </a:solidFill>
-                      <a:prstDash val="solid"/>
-                      <a:round/>
-                      <a:headEnd type="none" w="med" len="med"/>
-                      <a:tailEnd type="none" w="med" len="med"/>
-                    </a:lnB>
-                  </a:tcPr>
-                </a:tc>
-                <a:tc>
-                  <a:txBody>
-                    <a:bodyPr/>
-                    <a:lstStyle/>
-                    <a:p>
-                      <a:pPr algn="ctr" indent="0" marL="0">
-                        <a:buNone/>
-                      </a:pPr>
-                      <a:r>
-                        <a:rPr lang="en-US" sz="1300" dirty="0">
-                          <a:solidFill>
-                            <a:srgbClr val="1B2A38"/>
-                          </a:solidFill>
-                          <a:latin typeface="Calibri" pitchFamily="34" charset="0"/>
-                          <a:ea typeface="Calibri" pitchFamily="34" charset="-122"/>
-                          <a:cs typeface="Calibri" pitchFamily="34" charset="-120"/>
-                        </a:rPr>
-                        <a:t>0.987</a:t>
-                      </a:r>
-                      <a:endParaRPr lang="en-US" sz="1300" dirty="0">
-                        <a:latin typeface="Calibri" charset="0"/>
-                        <a:ea typeface="Calibri" charset="0"/>
-                        <a:cs typeface="Calibri" charset="0"/>
-                      </a:endParaRPr>
-                    </a:p>
-                  </a:txBody>
-                  <a:tcPr marL="91440" marR="91440" marT="45720" marB="45720">
-                    <a:lnL w="9525" cap="flat" cmpd="sng" algn="ctr">
-                      <a:solidFill>
-                        <a:srgbClr val="D5DDE3"/>
-                      </a:solidFill>
-                      <a:prstDash val="solid"/>
-                      <a:round/>
-                      <a:headEnd type="none" w="med" len="med"/>
-                      <a:tailEnd type="none" w="med" len="med"/>
-                    </a:lnL>
-                    <a:lnR w="9525" cap="flat" cmpd="sng" algn="ctr">
-                      <a:solidFill>
-                        <a:srgbClr val="D5DDE3"/>
-                      </a:solidFill>
-                      <a:prstDash val="solid"/>
-                      <a:round/>
-                      <a:headEnd type="none" w="med" len="med"/>
-                      <a:tailEnd type="none" w="med" len="med"/>
-                    </a:lnR>
-                    <a:lnT w="9525" cap="flat" cmpd="sng" algn="ctr">
-                      <a:solidFill>
-                        <a:srgbClr val="D5DDE3"/>
-                      </a:solidFill>
-                      <a:prstDash val="solid"/>
-                      <a:round/>
-                      <a:headEnd type="none" w="med" len="med"/>
-                      <a:tailEnd type="none" w="med" len="med"/>
-                    </a:lnT>
-                    <a:lnB w="9525" cap="flat" cmpd="sng" algn="ctr">
-                      <a:solidFill>
-                        <a:srgbClr val="D5DDE3"/>
-                      </a:solidFill>
-                      <a:prstDash val="solid"/>
-                      <a:round/>
-                      <a:headEnd type="none" w="med" len="med"/>
-                      <a:tailEnd type="none" w="med" len="med"/>
-                    </a:lnB>
-                  </a:tcPr>
-                </a:tc>
-                <a:tc>
-                  <a:txBody>
-                    <a:bodyPr/>
-                    <a:lstStyle/>
-                    <a:p>
-                      <a:pPr algn="ctr" indent="0" marL="0">
-                        <a:buNone/>
-                      </a:pPr>
-                      <a:r>
-                        <a:rPr lang="en-US" sz="1300" dirty="0">
-                          <a:solidFill>
-                            <a:srgbClr val="1B2A38"/>
-                          </a:solidFill>
-                          <a:latin typeface="Calibri" pitchFamily="34" charset="0"/>
-                          <a:ea typeface="Calibri" pitchFamily="34" charset="-122"/>
-                          <a:cs typeface="Calibri" pitchFamily="34" charset="-120"/>
-                        </a:rPr>
-                        <a:t>0.959</a:t>
-                      </a:r>
-                      <a:endParaRPr lang="en-US" sz="1300" dirty="0">
-                        <a:latin typeface="Calibri" charset="0"/>
-                        <a:ea typeface="Calibri" charset="0"/>
-                        <a:cs typeface="Calibri" charset="0"/>
-                      </a:endParaRPr>
-                    </a:p>
-                  </a:txBody>
-                  <a:tcPr marL="91440" marR="91440" marT="45720" marB="45720">
-                    <a:lnL w="9525" cap="flat" cmpd="sng" algn="ctr">
-                      <a:solidFill>
-                        <a:srgbClr val="D5DDE3"/>
-                      </a:solidFill>
-                      <a:prstDash val="solid"/>
-                      <a:round/>
-                      <a:headEnd type="none" w="med" len="med"/>
-                      <a:tailEnd type="none" w="med" len="med"/>
-                    </a:lnL>
-                    <a:lnR w="9525" cap="flat" cmpd="sng" algn="ctr">
-                      <a:solidFill>
-                        <a:srgbClr val="D5DDE3"/>
-                      </a:solidFill>
-                      <a:prstDash val="solid"/>
-                      <a:round/>
-                      <a:headEnd type="none" w="med" len="med"/>
-                      <a:tailEnd type="none" w="med" len="med"/>
-                    </a:lnR>
-                    <a:lnT w="9525" cap="flat" cmpd="sng" algn="ctr">
-                      <a:solidFill>
-                        <a:srgbClr val="D5DDE3"/>
-                      </a:solidFill>
-                      <a:prstDash val="solid"/>
-                      <a:round/>
-                      <a:headEnd type="none" w="med" len="med"/>
-                      <a:tailEnd type="none" w="med" len="med"/>
-                    </a:lnT>
-                    <a:lnB w="9525" cap="flat" cmpd="sng" algn="ctr">
-                      <a:solidFill>
-                        <a:srgbClr val="D5DDE3"/>
-                      </a:solidFill>
-                      <a:prstDash val="solid"/>
-                      <a:round/>
-                      <a:headEnd type="none" w="med" len="med"/>
-                      <a:tailEnd type="none" w="med" len="med"/>
-                    </a:lnB>
-                  </a:tcPr>
-                </a:tc>
-                <a:tc>
-                  <a:txBody>
-                    <a:bodyPr/>
-                    <a:lstStyle/>
-                    <a:p>
-                      <a:pPr algn="ctr" indent="0" marL="0">
-                        <a:buNone/>
-                      </a:pPr>
-                      <a:r>
-                        <a:rPr lang="en-US" sz="1300" dirty="0">
-                          <a:solidFill>
-                            <a:srgbClr val="1B2A38"/>
-                          </a:solidFill>
-                          <a:latin typeface="Calibri" pitchFamily="34" charset="0"/>
-                          <a:ea typeface="Calibri" pitchFamily="34" charset="-122"/>
-                          <a:cs typeface="Calibri" pitchFamily="34" charset="-120"/>
-                        </a:rPr>
-                        <a:t>0.973</a:t>
-                      </a:r>
-                      <a:endParaRPr lang="en-US" sz="1300" dirty="0">
-                        <a:latin typeface="Calibri" charset="0"/>
-                        <a:ea typeface="Calibri" charset="0"/>
-                        <a:cs typeface="Calibri" charset="0"/>
-                      </a:endParaRPr>
-                    </a:p>
-                  </a:txBody>
-                  <a:tcPr marL="91440" marR="91440" marT="45720" marB="45720">
-                    <a:lnL w="9525" cap="flat" cmpd="sng" algn="ctr">
-                      <a:solidFill>
-                        <a:srgbClr val="D5DDE3"/>
-                      </a:solidFill>
-                      <a:prstDash val="solid"/>
-                      <a:round/>
-                      <a:headEnd type="none" w="med" len="med"/>
-                      <a:tailEnd type="none" w="med" len="med"/>
-                    </a:lnL>
-                    <a:lnR w="9525" cap="flat" cmpd="sng" algn="ctr">
-                      <a:solidFill>
-                        <a:srgbClr val="D5DDE3"/>
-                      </a:solidFill>
-                      <a:prstDash val="solid"/>
-                      <a:round/>
-                      <a:headEnd type="none" w="med" len="med"/>
-                      <a:tailEnd type="none" w="med" len="med"/>
-                    </a:lnR>
-                    <a:lnT w="9525" cap="flat" cmpd="sng" algn="ctr">
-                      <a:solidFill>
-                        <a:srgbClr val="D5DDE3"/>
-                      </a:solidFill>
-                      <a:prstDash val="solid"/>
-                      <a:round/>
-                      <a:headEnd type="none" w="med" len="med"/>
-                      <a:tailEnd type="none" w="med" len="med"/>
-                    </a:lnT>
-                    <a:lnB w="9525" cap="flat" cmpd="sng" algn="ctr">
-                      <a:solidFill>
-                        <a:srgbClr val="D5DDE3"/>
-                      </a:solidFill>
-                      <a:prstDash val="solid"/>
-                      <a:round/>
-                      <a:headEnd type="none" w="med" len="med"/>
-                      <a:tailEnd type="none" w="med" len="med"/>
-                    </a:lnB>
-                  </a:tcPr>
-                </a:tc>
-                <a:tc>
-                  <a:txBody>
-                    <a:bodyPr/>
-                    <a:lstStyle/>
-                    <a:p>
-                      <a:pPr algn="ctr" indent="0" marL="0">
-                        <a:buNone/>
-                      </a:pPr>
-                      <a:r>
-                        <a:rPr lang="en-US" sz="1300" dirty="0">
-                          <a:solidFill>
-                            <a:srgbClr val="1B2A38"/>
-                          </a:solidFill>
-                          <a:latin typeface="Calibri" pitchFamily="34" charset="0"/>
-                          <a:ea typeface="Calibri" pitchFamily="34" charset="-122"/>
-                          <a:cs typeface="Calibri" pitchFamily="34" charset="-120"/>
-                        </a:rPr>
-                        <a:t>0.5%</a:t>
-                      </a:r>
-                      <a:endParaRPr lang="en-US" sz="1300" dirty="0">
-                        <a:latin typeface="Calibri" charset="0"/>
-                        <a:ea typeface="Calibri" charset="0"/>
-                        <a:cs typeface="Calibri" charset="0"/>
-                      </a:endParaRPr>
-                    </a:p>
-                  </a:txBody>
-                  <a:tcPr marL="91440" marR="91440" marT="45720" marB="45720">
-                    <a:lnL w="9525" cap="flat" cmpd="sng" algn="ctr">
-                      <a:solidFill>
-                        <a:srgbClr val="D5DDE3"/>
-                      </a:solidFill>
-                      <a:prstDash val="solid"/>
-                      <a:round/>
-                      <a:headEnd type="none" w="med" len="med"/>
-                      <a:tailEnd type="none" w="med" len="med"/>
-                    </a:lnL>
-                    <a:lnR w="9525" cap="flat" cmpd="sng" algn="ctr">
-                      <a:solidFill>
-                        <a:srgbClr val="D5DDE3"/>
-                      </a:solidFill>
-                      <a:prstDash val="solid"/>
-                      <a:round/>
-                      <a:headEnd type="none" w="med" len="med"/>
-                      <a:tailEnd type="none" w="med" len="med"/>
-                    </a:lnR>
-                    <a:lnT w="9525" cap="flat" cmpd="sng" algn="ctr">
-                      <a:solidFill>
-                        <a:srgbClr val="D5DDE3"/>
-                      </a:solidFill>
-                      <a:prstDash val="solid"/>
-                      <a:round/>
-                      <a:headEnd type="none" w="med" len="med"/>
-                      <a:tailEnd type="none" w="med" len="med"/>
-                    </a:lnT>
-                    <a:lnB w="9525" cap="flat" cmpd="sng" algn="ctr">
-                      <a:solidFill>
-                        <a:srgbClr val="D5DDE3"/>
-                      </a:solidFill>
-                      <a:prstDash val="solid"/>
-                      <a:round/>
-                      <a:headEnd type="none" w="med" len="med"/>
-                      <a:tailEnd type="none" w="med" len="med"/>
-                    </a:lnB>
-                  </a:tcPr>
-                </a:tc>
-              </a:tr>
-              <a:tr h="384048">
-                <a:tc>
-                  <a:txBody>
-                    <a:bodyPr/>
-                    <a:lstStyle/>
-                    <a:p>
-                      <a:pPr algn="l" indent="0" marL="0">
-                        <a:buNone/>
-                      </a:pPr>
-                      <a:r>
-                        <a:rPr lang="en-US" sz="1300" dirty="0">
-                          <a:solidFill>
-                            <a:srgbClr val="1B2A38"/>
-                          </a:solidFill>
-                          <a:latin typeface="Calibri" pitchFamily="34" charset="0"/>
-                          <a:ea typeface="Calibri" pitchFamily="34" charset="-122"/>
-                          <a:cs typeface="Calibri" pitchFamily="34" charset="-120"/>
-                        </a:rPr>
-                        <a:t>Full model</a:t>
-                      </a:r>
-                      <a:endParaRPr lang="en-US" sz="1300" dirty="0">
-                        <a:latin typeface="Calibri" charset="0"/>
-                        <a:ea typeface="Calibri" charset="0"/>
-                        <a:cs typeface="Calibri" charset="0"/>
-                      </a:endParaRPr>
-                    </a:p>
-                  </a:txBody>
-                  <a:tcPr marL="91440" marR="91440" marT="45720" marB="45720">
-                    <a:lnL w="9525" cap="flat" cmpd="sng" algn="ctr">
-                      <a:solidFill>
-                        <a:srgbClr val="D5DDE3"/>
-                      </a:solidFill>
-                      <a:prstDash val="solid"/>
-                      <a:round/>
-                      <a:headEnd type="none" w="med" len="med"/>
-                      <a:tailEnd type="none" w="med" len="med"/>
-                    </a:lnL>
-                    <a:lnR w="9525" cap="flat" cmpd="sng" algn="ctr">
-                      <a:solidFill>
-                        <a:srgbClr val="D5DDE3"/>
-                      </a:solidFill>
-                      <a:prstDash val="solid"/>
-                      <a:round/>
-                      <a:headEnd type="none" w="med" len="med"/>
-                      <a:tailEnd type="none" w="med" len="med"/>
-                    </a:lnR>
-                    <a:lnT w="9525" cap="flat" cmpd="sng" algn="ctr">
-                      <a:solidFill>
-                        <a:srgbClr val="D5DDE3"/>
-                      </a:solidFill>
-                      <a:prstDash val="solid"/>
-                      <a:round/>
-                      <a:headEnd type="none" w="med" len="med"/>
-                      <a:tailEnd type="none" w="med" len="med"/>
-                    </a:lnT>
-                    <a:lnB w="9525" cap="flat" cmpd="sng" algn="ctr">
-                      <a:solidFill>
-                        <a:srgbClr val="D5DDE3"/>
-                      </a:solidFill>
-                      <a:prstDash val="solid"/>
-                      <a:round/>
-                      <a:headEnd type="none" w="med" len="med"/>
-                      <a:tailEnd type="none" w="med" len="med"/>
-                    </a:lnB>
-                  </a:tcPr>
-                </a:tc>
-                <a:tc>
-                  <a:txBody>
-                    <a:bodyPr/>
-                    <a:lstStyle/>
-                    <a:p>
-                      <a:pPr algn="ctr" indent="0" marL="0">
-                        <a:buNone/>
-                      </a:pPr>
-                      <a:r>
-                        <a:rPr lang="en-US" sz="1300" b="1" dirty="0">
-                          <a:solidFill>
-                            <a:srgbClr val="1B2A38"/>
-                          </a:solidFill>
-                          <a:latin typeface="Calibri" pitchFamily="34" charset="0"/>
-                          <a:ea typeface="Calibri" pitchFamily="34" charset="-122"/>
-                          <a:cs typeface="Calibri" pitchFamily="34" charset="-120"/>
-                        </a:rPr>
-                        <a:t>0.989</a:t>
-                      </a:r>
-                      <a:endParaRPr lang="en-US" sz="1300" dirty="0">
-                        <a:latin typeface="Calibri" charset="0"/>
-                        <a:ea typeface="Calibri" charset="0"/>
-                        <a:cs typeface="Calibri" charset="0"/>
-                      </a:endParaRPr>
-                    </a:p>
-                  </a:txBody>
-                  <a:tcPr marL="91440" marR="91440" marT="45720" marB="45720">
-                    <a:lnL w="9525" cap="flat" cmpd="sng" algn="ctr">
-                      <a:solidFill>
-                        <a:srgbClr val="D5DDE3"/>
-                      </a:solidFill>
-                      <a:prstDash val="solid"/>
-                      <a:round/>
-                      <a:headEnd type="none" w="med" len="med"/>
-                      <a:tailEnd type="none" w="med" len="med"/>
-                    </a:lnL>
-                    <a:lnR w="9525" cap="flat" cmpd="sng" algn="ctr">
-                      <a:solidFill>
-                        <a:srgbClr val="D5DDE3"/>
-                      </a:solidFill>
-                      <a:prstDash val="solid"/>
-                      <a:round/>
-                      <a:headEnd type="none" w="med" len="med"/>
-                      <a:tailEnd type="none" w="med" len="med"/>
-                    </a:lnR>
-                    <a:lnT w="9525" cap="flat" cmpd="sng" algn="ctr">
-                      <a:solidFill>
-                        <a:srgbClr val="D5DDE3"/>
-                      </a:solidFill>
-                      <a:prstDash val="solid"/>
-                      <a:round/>
-                      <a:headEnd type="none" w="med" len="med"/>
-                      <a:tailEnd type="none" w="med" len="med"/>
-                    </a:lnT>
-                    <a:lnB w="9525" cap="flat" cmpd="sng" algn="ctr">
-                      <a:solidFill>
-                        <a:srgbClr val="D5DDE3"/>
-                      </a:solidFill>
-                      <a:prstDash val="solid"/>
-                      <a:round/>
-                      <a:headEnd type="none" w="med" len="med"/>
-                      <a:tailEnd type="none" w="med" len="med"/>
-                    </a:lnB>
-                  </a:tcPr>
-                </a:tc>
-                <a:tc>
-                  <a:txBody>
-                    <a:bodyPr/>
-                    <a:lstStyle/>
-                    <a:p>
-                      <a:pPr algn="ctr" indent="0" marL="0">
-                        <a:buNone/>
-                      </a:pPr>
-                      <a:r>
-                        <a:rPr lang="en-US" sz="1300" b="1" dirty="0">
-                          <a:solidFill>
-                            <a:srgbClr val="1B2A38"/>
-                          </a:solidFill>
-                          <a:latin typeface="Calibri" pitchFamily="34" charset="0"/>
-                          <a:ea typeface="Calibri" pitchFamily="34" charset="-122"/>
-                          <a:cs typeface="Calibri" pitchFamily="34" charset="-120"/>
-                        </a:rPr>
-                        <a:t>0.975</a:t>
-                      </a:r>
-                      <a:endParaRPr lang="en-US" sz="1300" dirty="0">
-                        <a:latin typeface="Calibri" charset="0"/>
-                        <a:ea typeface="Calibri" charset="0"/>
-                        <a:cs typeface="Calibri" charset="0"/>
-                      </a:endParaRPr>
-                    </a:p>
-                  </a:txBody>
-                  <a:tcPr marL="91440" marR="91440" marT="45720" marB="45720">
-                    <a:lnL w="9525" cap="flat" cmpd="sng" algn="ctr">
-                      <a:solidFill>
-                        <a:srgbClr val="D5DDE3"/>
-                      </a:solidFill>
-                      <a:prstDash val="solid"/>
-                      <a:round/>
-                      <a:headEnd type="none" w="med" len="med"/>
-                      <a:tailEnd type="none" w="med" len="med"/>
-                    </a:lnL>
-                    <a:lnR w="9525" cap="flat" cmpd="sng" algn="ctr">
-                      <a:solidFill>
-                        <a:srgbClr val="D5DDE3"/>
-                      </a:solidFill>
-                      <a:prstDash val="solid"/>
-                      <a:round/>
-                      <a:headEnd type="none" w="med" len="med"/>
-                      <a:tailEnd type="none" w="med" len="med"/>
-                    </a:lnR>
-                    <a:lnT w="9525" cap="flat" cmpd="sng" algn="ctr">
-                      <a:solidFill>
-                        <a:srgbClr val="D5DDE3"/>
-                      </a:solidFill>
-                      <a:prstDash val="solid"/>
-                      <a:round/>
-                      <a:headEnd type="none" w="med" len="med"/>
-                      <a:tailEnd type="none" w="med" len="med"/>
-                    </a:lnT>
-                    <a:lnB w="9525" cap="flat" cmpd="sng" algn="ctr">
-                      <a:solidFill>
-                        <a:srgbClr val="D5DDE3"/>
-                      </a:solidFill>
-                      <a:prstDash val="solid"/>
-                      <a:round/>
-                      <a:headEnd type="none" w="med" len="med"/>
-                      <a:tailEnd type="none" w="med" len="med"/>
-                    </a:lnB>
-                  </a:tcPr>
-                </a:tc>
-                <a:tc>
-                  <a:txBody>
-                    <a:bodyPr/>
-                    <a:lstStyle/>
-                    <a:p>
-                      <a:pPr algn="ctr" indent="0" marL="0">
-                        <a:buNone/>
-                      </a:pPr>
-                      <a:r>
-                        <a:rPr lang="en-US" sz="1300" b="1" dirty="0">
-                          <a:solidFill>
-                            <a:srgbClr val="1B2A38"/>
-                          </a:solidFill>
-                          <a:latin typeface="Calibri" pitchFamily="34" charset="0"/>
-                          <a:ea typeface="Calibri" pitchFamily="34" charset="-122"/>
-                          <a:cs typeface="Calibri" pitchFamily="34" charset="-120"/>
-                        </a:rPr>
-                        <a:t>0.982</a:t>
-                      </a:r>
-                      <a:endParaRPr lang="en-US" sz="1300" dirty="0">
-                        <a:latin typeface="Calibri" charset="0"/>
-                        <a:ea typeface="Calibri" charset="0"/>
-                        <a:cs typeface="Calibri" charset="0"/>
-                      </a:endParaRPr>
-                    </a:p>
-                  </a:txBody>
-                  <a:tcPr marL="91440" marR="91440" marT="45720" marB="45720">
-                    <a:lnL w="9525" cap="flat" cmpd="sng" algn="ctr">
-                      <a:solidFill>
-                        <a:srgbClr val="D5DDE3"/>
-                      </a:solidFill>
-                      <a:prstDash val="solid"/>
-                      <a:round/>
-                      <a:headEnd type="none" w="med" len="med"/>
-                      <a:tailEnd type="none" w="med" len="med"/>
-                    </a:lnL>
-                    <a:lnR w="9525" cap="flat" cmpd="sng" algn="ctr">
-                      <a:solidFill>
-                        <a:srgbClr val="D5DDE3"/>
-                      </a:solidFill>
-                      <a:prstDash val="solid"/>
-                      <a:round/>
-                      <a:headEnd type="none" w="med" len="med"/>
-                      <a:tailEnd type="none" w="med" len="med"/>
-                    </a:lnR>
-                    <a:lnT w="9525" cap="flat" cmpd="sng" algn="ctr">
-                      <a:solidFill>
-                        <a:srgbClr val="D5DDE3"/>
-                      </a:solidFill>
-                      <a:prstDash val="solid"/>
-                      <a:round/>
-                      <a:headEnd type="none" w="med" len="med"/>
-                      <a:tailEnd type="none" w="med" len="med"/>
-                    </a:lnT>
-                    <a:lnB w="9525" cap="flat" cmpd="sng" algn="ctr">
-                      <a:solidFill>
-                        <a:srgbClr val="D5DDE3"/>
-                      </a:solidFill>
-                      <a:prstDash val="solid"/>
-                      <a:round/>
-                      <a:headEnd type="none" w="med" len="med"/>
-                      <a:tailEnd type="none" w="med" len="med"/>
-                    </a:lnB>
-                  </a:tcPr>
-                </a:tc>
-                <a:tc>
-                  <a:txBody>
-                    <a:bodyPr/>
-                    <a:lstStyle/>
-                    <a:p>
-                      <a:pPr algn="ctr" indent="0" marL="0">
-                        <a:buNone/>
-                      </a:pPr>
-                      <a:r>
-                        <a:rPr lang="en-US" sz="1300" b="1" dirty="0">
-                          <a:solidFill>
-                            <a:srgbClr val="1B2A38"/>
-                          </a:solidFill>
-                          <a:latin typeface="Calibri" pitchFamily="34" charset="0"/>
-                          <a:ea typeface="Calibri" pitchFamily="34" charset="-122"/>
-                          <a:cs typeface="Calibri" pitchFamily="34" charset="-120"/>
-                        </a:rPr>
-                        <a:t>0.5%</a:t>
-                      </a:r>
-                      <a:endParaRPr lang="en-US" sz="1300" dirty="0">
-                        <a:latin typeface="Calibri" charset="0"/>
-                        <a:ea typeface="Calibri" charset="0"/>
-                        <a:cs typeface="Calibri" charset="0"/>
-                      </a:endParaRPr>
-                    </a:p>
-                  </a:txBody>
-                  <a:tcPr marL="91440" marR="91440" marT="45720" marB="45720">
-                    <a:lnL w="9525" cap="flat" cmpd="sng" algn="ctr">
-                      <a:solidFill>
-                        <a:srgbClr val="D5DDE3"/>
-                      </a:solidFill>
-                      <a:prstDash val="solid"/>
-                      <a:round/>
-                      <a:headEnd type="none" w="med" len="med"/>
-                      <a:tailEnd type="none" w="med" len="med"/>
-                    </a:lnL>
-                    <a:lnR w="9525" cap="flat" cmpd="sng" algn="ctr">
-                      <a:solidFill>
-                        <a:srgbClr val="D5DDE3"/>
-                      </a:solidFill>
-                      <a:prstDash val="solid"/>
-                      <a:round/>
-                      <a:headEnd type="none" w="med" len="med"/>
-                      <a:tailEnd type="none" w="med" len="med"/>
-                    </a:lnR>
-                    <a:lnT w="9525" cap="flat" cmpd="sng" algn="ctr">
-                      <a:solidFill>
-                        <a:srgbClr val="D5DDE3"/>
-                      </a:solidFill>
-                      <a:prstDash val="solid"/>
-                      <a:round/>
-                      <a:headEnd type="none" w="med" len="med"/>
-                      <a:tailEnd type="none" w="med" len="med"/>
-                    </a:lnT>
-                    <a:lnB w="9525" cap="flat" cmpd="sng" algn="ctr">
-                      <a:solidFill>
-                        <a:srgbClr val="D5DDE3"/>
-                      </a:solidFill>
-                      <a:prstDash val="solid"/>
-                      <a:round/>
-                      <a:headEnd type="none" w="med" len="med"/>
-                      <a:tailEnd type="none" w="med" len="med"/>
-                    </a:lnB>
-                  </a:tcPr>
-                </a:tc>
-              </a:tr>
-            </a:tbl>
-          </a:graphicData>
-        </a:graphic>
-      </p:graphicFrame>
-      <p:sp>
-        <p:nvSpPr>
-          <p:cNvPr id="4" name="Text 1"/>
+      <p:sp>
+        <p:nvSpPr>
+          <p:cNvPr id="3" name="card"/>
+          <p:cNvSpPr/>
+          <p:nvPr/>
+        </p:nvSpPr>
+        <p:spPr>
+          <a:xfrm>
+            <a:off x="548640" y="1280160"/>
+            <a:ext cx="2560320" cy="2194560"/>
+          </a:xfrm>
+          <a:prstGeom prst="roundRect">
+            <a:avLst>
+              <a:gd name="adj" fmla="val 3333"/>
+            </a:avLst>
+          </a:prstGeom>
+          <a:solidFill>
+            <a:srgbClr val="EAF2F3"/>
+          </a:solidFill>
+          <a:ln w="12700">
+            <a:solidFill>
+              <a:srgbClr val="EAF2F3"/>
+            </a:solidFill>
+            <a:prstDash val="solid"/>
+          </a:ln>
+        </p:spPr>
+      </p:sp>
+      <p:sp>
+        <p:nvSpPr>
+          <p:cNvPr id="4" name="Text 2"/>
           <p:cNvSpPr txBox="1"/>
           <p:nvPr/>
         </p:nvSpPr>
         <p:spPr>
           <a:xfrm>
-            <a:off x="548640" y="2606040"/>
-            <a:ext cx="8046720" cy="320040"/>
+            <a:off x="731520" y="1554480"/>
+            <a:ext cx="2194560" cy="822960"/>
           </a:xfrm>
           <a:prstGeom prst="rect">
             <a:avLst/>
@@ -5091,30 +6473,96 @@
               <a:buNone/>
             </a:pPr>
             <a:r>
-              <a:rPr lang="en-US" sz="1800" b="1" dirty="0">
+              <a:rPr lang="en-US" sz="4400" b="1" dirty="0">
                 <a:solidFill>
-                  <a:srgbClr val="1C7C7D"/>
+                  <a:srgbClr val="0B1F33"/>
                 </a:solidFill>
                 <a:latin typeface="Cambria" pitchFamily="34" charset="0"/>
                 <a:ea typeface="Cambria" pitchFamily="34" charset="-122"/>
                 <a:cs typeface="Cambria" pitchFamily="34" charset="-120"/>
               </a:rPr>
-              <a:t>Detection latency</a:t>
+              <a:t>0.9 s</a:t>
             </a:r>
-            <a:endParaRPr lang="en-US" sz="1800" dirty="0"/>
+            <a:endParaRPr lang="en-US" sz="4400" dirty="0"/>
           </a:p>
         </p:txBody>
       </p:sp>
       <p:sp>
         <p:nvSpPr>
-          <p:cNvPr id="5" name="Text 2"/>
+          <p:cNvPr id="5" name="Text 3"/>
           <p:cNvSpPr txBox="1"/>
           <p:nvPr/>
         </p:nvSpPr>
         <p:spPr>
           <a:xfrm>
-            <a:off x="548640" y="2971800"/>
-            <a:ext cx="2560320" cy="640080"/>
+            <a:off x="731520" y="2468880"/>
+            <a:ext cx="2194560" cy="731520"/>
+          </a:xfrm>
+          <a:prstGeom prst="rect">
+            <a:avLst/>
+          </a:prstGeom>
+          <a:noFill/>
+          <a:ln/>
+        </p:spPr>
+        <p:txBody>
+          <a:bodyPr wrap="square" lIns="0" tIns="0" rIns="0" bIns="0" rtlCol="0" anchor="t"/>
+          <a:lstStyle/>
+          <a:p>
+            <a:pPr indent="0" marL="0">
+              <a:buNone/>
+            </a:pPr>
+            <a:r>
+              <a:rPr lang="en-US" sz="1400" dirty="0">
+                <a:solidFill>
+                  <a:srgbClr val="1B2A38"/>
+                </a:solidFill>
+                <a:latin typeface="Calibri" pitchFamily="34" charset="0"/>
+                <a:ea typeface="Calibri" pitchFamily="34" charset="-122"/>
+                <a:cs typeface="Calibri" pitchFamily="34" charset="-120"/>
+              </a:rPr>
+              <a:t>mean time to first alarm</a:t>
+            </a:r>
+            <a:endParaRPr lang="en-US" sz="1400" dirty="0"/>
+          </a:p>
+        </p:txBody>
+      </p:sp>
+      <p:sp>
+        <p:nvSpPr>
+          <p:cNvPr id="6" name="card"/>
+          <p:cNvSpPr/>
+          <p:nvPr/>
+        </p:nvSpPr>
+        <p:spPr>
+          <a:xfrm>
+            <a:off x="3291840" y="1280160"/>
+            <a:ext cx="2560320" cy="2194560"/>
+          </a:xfrm>
+          <a:prstGeom prst="roundRect">
+            <a:avLst>
+              <a:gd name="adj" fmla="val 3333"/>
+            </a:avLst>
+          </a:prstGeom>
+          <a:solidFill>
+            <a:srgbClr val="EAF2F3"/>
+          </a:solidFill>
+          <a:ln w="12700">
+            <a:solidFill>
+              <a:srgbClr val="EAF2F3"/>
+            </a:solidFill>
+            <a:prstDash val="solid"/>
+          </a:ln>
+        </p:spPr>
+      </p:sp>
+      <p:sp>
+        <p:nvSpPr>
+          <p:cNvPr id="7" name="Text 5"/>
+          <p:cNvSpPr txBox="1"/>
+          <p:nvPr/>
+        </p:nvSpPr>
+        <p:spPr>
+          <a:xfrm>
+            <a:off x="3474720" y="1554480"/>
+            <a:ext cx="2194560" cy="822960"/>
           </a:xfrm>
           <a:prstGeom prst="rect">
             <a:avLst/>
@@ -5130,7 +6578,7 @@
               <a:buNone/>
             </a:pPr>
             <a:r>
-              <a:rPr lang="en-US" sz="3600" b="1" dirty="0">
+              <a:rPr lang="en-US" sz="4400" b="1" dirty="0">
                 <a:solidFill>
                   <a:srgbClr val="0B1F33"/>
                 </a:solidFill>
@@ -5138,22 +6586,22 @@
                 <a:ea typeface="Cambria" pitchFamily="34" charset="-122"/>
                 <a:cs typeface="Cambria" pitchFamily="34" charset="-120"/>
               </a:rPr>
-              <a:t>0.15 s</a:t>
+              <a:t>0 s</a:t>
             </a:r>
-            <a:endParaRPr lang="en-US" sz="3600" dirty="0"/>
+            <a:endParaRPr lang="en-US" sz="4400" dirty="0"/>
           </a:p>
         </p:txBody>
       </p:sp>
       <p:sp>
         <p:nvSpPr>
-          <p:cNvPr id="6" name="Text 3"/>
+          <p:cNvPr id="8" name="Text 6"/>
           <p:cNvSpPr txBox="1"/>
           <p:nvPr/>
         </p:nvSpPr>
         <p:spPr>
           <a:xfrm>
-            <a:off x="548640" y="3611880"/>
-            <a:ext cx="2468880" cy="640080"/>
+            <a:off x="3474720" y="2468880"/>
+            <a:ext cx="2194560" cy="731520"/>
           </a:xfrm>
           <a:prstGeom prst="rect">
             <a:avLst/>
@@ -5169,7 +6617,7 @@
               <a:buNone/>
             </a:pPr>
             <a:r>
-              <a:rPr lang="en-US" sz="1200" dirty="0">
+              <a:rPr lang="en-US" sz="1400" dirty="0">
                 <a:solidFill>
                   <a:srgbClr val="1B2A38"/>
                 </a:solidFill>
@@ -5177,22 +6625,49 @@
                 <a:ea typeface="Calibri" pitchFamily="34" charset="-122"/>
                 <a:cs typeface="Calibri" pitchFamily="34" charset="-120"/>
               </a:rPr>
-              <a:t>mean time to first alarm, full model (baseline 0.70 s)</a:t>
+              <a:t>median time to first alarm</a:t>
             </a:r>
-            <a:endParaRPr lang="en-US" sz="1200" dirty="0"/>
+            <a:endParaRPr lang="en-US" sz="1400" dirty="0"/>
           </a:p>
         </p:txBody>
       </p:sp>
       <p:sp>
         <p:nvSpPr>
-          <p:cNvPr id="7" name="Text 4"/>
+          <p:cNvPr id="9" name="card"/>
+          <p:cNvSpPr/>
+          <p:nvPr/>
+        </p:nvSpPr>
+        <p:spPr>
+          <a:xfrm>
+            <a:off x="6035040" y="1280160"/>
+            <a:ext cx="2560320" cy="2194560"/>
+          </a:xfrm>
+          <a:prstGeom prst="roundRect">
+            <a:avLst>
+              <a:gd name="adj" fmla="val 3333"/>
+            </a:avLst>
+          </a:prstGeom>
+          <a:solidFill>
+            <a:srgbClr val="EAF2F3"/>
+          </a:solidFill>
+          <a:ln w="12700">
+            <a:solidFill>
+              <a:srgbClr val="EAF2F3"/>
+            </a:solidFill>
+            <a:prstDash val="solid"/>
+          </a:ln>
+        </p:spPr>
+      </p:sp>
+      <p:sp>
+        <p:nvSpPr>
+          <p:cNvPr id="10" name="Text 8"/>
           <p:cNvSpPr txBox="1"/>
           <p:nvPr/>
         </p:nvSpPr>
         <p:spPr>
           <a:xfrm>
-            <a:off x="3291840" y="2971800"/>
-            <a:ext cx="2560320" cy="640080"/>
+            <a:off x="6217920" y="1554480"/>
+            <a:ext cx="2194560" cy="822960"/>
           </a:xfrm>
           <a:prstGeom prst="rect">
             <a:avLst/>
@@ -5208,7 +6683,7 @@
               <a:buNone/>
             </a:pPr>
             <a:r>
-              <a:rPr lang="en-US" sz="3600" b="1" dirty="0">
+              <a:rPr lang="en-US" sz="4400" b="1" dirty="0">
                 <a:solidFill>
                   <a:srgbClr val="0B1F33"/>
                 </a:solidFill>
@@ -5216,22 +6691,22 @@
                 <a:ea typeface="Cambria" pitchFamily="34" charset="-122"/>
                 <a:cs typeface="Cambria" pitchFamily="34" charset="-120"/>
               </a:rPr>
-              <a:t>99%</a:t>
+              <a:t>96%</a:t>
             </a:r>
-            <a:endParaRPr lang="en-US" sz="3600" dirty="0"/>
+            <a:endParaRPr lang="en-US" sz="4400" dirty="0"/>
           </a:p>
         </p:txBody>
       </p:sp>
       <p:sp>
         <p:nvSpPr>
-          <p:cNvPr id="8" name="Text 5"/>
+          <p:cNvPr id="11" name="Text 9"/>
           <p:cNvSpPr txBox="1"/>
           <p:nvPr/>
         </p:nvSpPr>
         <p:spPr>
           <a:xfrm>
-            <a:off x="3291840" y="3611880"/>
-            <a:ext cx="2468880" cy="640080"/>
+            <a:off x="6217920" y="2468880"/>
+            <a:ext cx="2194560" cy="731520"/>
           </a:xfrm>
           <a:prstGeom prst="rect">
             <a:avLst/>
@@ -5247,7 +6722,7 @@
               <a:buNone/>
             </a:pPr>
             <a:r>
-              <a:rPr lang="en-US" sz="1200" dirty="0">
+              <a:rPr lang="en-US" sz="1400" dirty="0">
                 <a:solidFill>
                   <a:srgbClr val="1B2A38"/>
                 </a:solidFill>
@@ -5255,61 +6730,22 @@
                 <a:ea typeface="Calibri" pitchFamily="34" charset="-122"/>
                 <a:cs typeface="Calibri" pitchFamily="34" charset="-120"/>
               </a:rPr>
-              <a:t>of malicious sender-receiver pairs eventually flagged (baseline 96%)</a:t>
+              <a:t>of attacker-receiver pairs flagged</a:t>
             </a:r>
-            <a:endParaRPr lang="en-US" sz="1200" dirty="0"/>
+            <a:endParaRPr lang="en-US" sz="1400" dirty="0"/>
           </a:p>
         </p:txBody>
       </p:sp>
       <p:sp>
         <p:nvSpPr>
-          <p:cNvPr id="9" name="Text 6"/>
+          <p:cNvPr id="12" name="Text 10"/>
           <p:cNvSpPr txBox="1"/>
           <p:nvPr/>
         </p:nvSpPr>
         <p:spPr>
           <a:xfrm>
-            <a:off x="6035040" y="2971800"/>
-            <a:ext cx="2560320" cy="640080"/>
-          </a:xfrm>
-          <a:prstGeom prst="rect">
-            <a:avLst/>
-          </a:prstGeom>
-          <a:noFill/>
-          <a:ln/>
-        </p:spPr>
-        <p:txBody>
-          <a:bodyPr wrap="square" lIns="0" tIns="0" rIns="0" bIns="0" rtlCol="0" anchor="ctr"/>
-          <a:lstStyle/>
-          <a:p>
-            <a:pPr indent="0" marL="0">
-              <a:buNone/>
-            </a:pPr>
-            <a:r>
-              <a:rPr lang="en-US" sz="3600" b="1" dirty="0">
-                <a:solidFill>
-                  <a:srgbClr val="0B1F33"/>
-                </a:solidFill>
-                <a:latin typeface="Cambria" pitchFamily="34" charset="0"/>
-                <a:ea typeface="Cambria" pitchFamily="34" charset="-122"/>
-                <a:cs typeface="Cambria" pitchFamily="34" charset="-120"/>
-              </a:rPr>
-              <a:t>0 s</a:t>
-            </a:r>
-            <a:endParaRPr lang="en-US" sz="3600" dirty="0"/>
-          </a:p>
-        </p:txBody>
-      </p:sp>
-      <p:sp>
-        <p:nvSpPr>
-          <p:cNvPr id="10" name="Text 7"/>
-          <p:cNvSpPr txBox="1"/>
-          <p:nvPr/>
-        </p:nvSpPr>
-        <p:spPr>
-          <a:xfrm>
-            <a:off x="6035040" y="3611880"/>
-            <a:ext cx="2468880" cy="640080"/>
+            <a:off x="548640" y="3749040"/>
+            <a:ext cx="8046720" cy="548640"/>
           </a:xfrm>
           <a:prstGeom prst="rect">
             <a:avLst/>
@@ -5325,7 +6761,7 @@
               <a:buNone/>
             </a:pPr>
             <a:r>
-              <a:rPr lang="en-US" sz="1200" dirty="0">
+              <a:rPr lang="en-US" sz="1400" dirty="0">
                 <a:solidFill>
                   <a:srgbClr val="1B2A38"/>
                 </a:solidFill>
@@ -5333,48 +6769,9 @@
                 <a:ea typeface="Calibri" pitchFamily="34" charset="-122"/>
                 <a:cs typeface="Calibri" pitchFamily="34" charset="-120"/>
               </a:rPr>
-              <a:t>90th percentile for the full model (baseline 3 s)</a:t>
+              <a:t>Most attackers are caught in the first window they appear in; a few take longer and pull the mean up.</a:t>
             </a:r>
-            <a:endParaRPr lang="en-US" sz="1200" dirty="0"/>
-          </a:p>
-        </p:txBody>
-      </p:sp>
-      <p:sp>
-        <p:nvSpPr>
-          <p:cNvPr id="11" name="Text 8"/>
-          <p:cNvSpPr txBox="1"/>
-          <p:nvPr/>
-        </p:nvSpPr>
-        <p:spPr>
-          <a:xfrm>
-            <a:off x="548640" y="4389120"/>
-            <a:ext cx="8046720" cy="365760"/>
-          </a:xfrm>
-          <a:prstGeom prst="rect">
-            <a:avLst/>
-          </a:prstGeom>
-          <a:noFill/>
-          <a:ln/>
-        </p:spPr>
-        <p:txBody>
-          <a:bodyPr wrap="square" lIns="0" tIns="0" rIns="0" bIns="0" rtlCol="0" anchor="ctr"/>
-          <a:lstStyle/>
-          <a:p>
-            <a:pPr indent="0" marL="0">
-              <a:buNone/>
-            </a:pPr>
-            <a:r>
-              <a:rPr lang="en-US" sz="1100" i="1" dirty="0">
-                <a:solidFill>
-                  <a:srgbClr val="5B6B7A"/>
-                </a:solidFill>
-                <a:latin typeface="Calibri" pitchFamily="34" charset="0"/>
-                <a:ea typeface="Calibri" pitchFamily="34" charset="-122"/>
-                <a:cs typeface="Calibri" pitchFamily="34" charset="-120"/>
-              </a:rPr>
-              <a:t>Latency counts from the first window that contains the sender; each window needs about 10 s of history. Mean of 3 seeds.</a:t>
-            </a:r>
-            <a:endParaRPr lang="en-US" sz="1100" dirty="0"/>
+            <a:endParaRPr lang="en-US" sz="1400" dirty="0"/>
           </a:p>
         </p:txBody>
       </p:sp>
@@ -5435,7 +6832,7 @@
               <a:buNone/>
             </a:pPr>
             <a:r>
-              <a:rPr lang="en-US" sz="3200" b="1" dirty="0">
+              <a:rPr lang="en-US" sz="3000" b="1" dirty="0">
                 <a:solidFill>
                   <a:srgbClr val="0B1F33"/>
                 </a:solidFill>
@@ -5443,9 +6840,1380 @@
                 <a:ea typeface="Cambria" pitchFamily="34" charset="-122"/>
                 <a:cs typeface="Cambria" pitchFamily="34" charset="-120"/>
               </a:rPr>
-              <a:t>When neighbours are malicious too</a:t>
+              <a:t>Stress test: colluding attackers</a:t>
             </a:r>
-            <a:endParaRPr lang="en-US" sz="3200" dirty="0"/>
+            <a:endParaRPr lang="en-US" sz="3000" dirty="0"/>
+          </a:p>
+        </p:txBody>
+      </p:sp>
+      <p:graphicFrame>
+        <p:nvGraphicFramePr>
+          <p:cNvPr id="8" name="Table 0"/>
+          <p:cNvGraphicFramePr>
+            <a:graphicFrameLocks noGrp="1"/>
+          </p:cNvGraphicFramePr>
+          <p:nvPr>
+            <p:extLst>
+              <p:ext uri="{D42A27DB-BD31-4B8C-83A1-F6EECF244321}">
+                <p14:modId xmlns:p14="http://schemas.microsoft.com/office/powerpoint/2010/main" val="1579011935"/>
+              </p:ext>
+            </p:extLst>
+          </p:nvPr>
+        </p:nvGraphicFramePr>
+        <p:xfrm>
+          <a:off x="548640" y="1097280"/>
+          <a:ext cx="8046720" cy="914400"/>
+        </p:xfrm>
+        <a:graphic>
+          <a:graphicData uri="http://schemas.openxmlformats.org/drawingml/2006/table">
+            <a:tbl>
+              <a:tblPr/>
+              <a:tblGrid>
+                <a:gridCol w="4023360"/>
+                <a:gridCol w="2011680"/>
+                <a:gridCol w="2011680"/>
+              </a:tblGrid>
+              <a:tr h="365760">
+                <a:tc>
+                  <a:txBody>
+                    <a:bodyPr/>
+                    <a:lstStyle/>
+                    <a:p>
+                      <a:pPr algn="ctr" indent="0" marL="0">
+                        <a:buNone/>
+                      </a:pPr>
+                      <a:r>
+                        <a:rPr lang="en-US" sz="1200" b="1" dirty="0">
+                          <a:solidFill>
+                            <a:srgbClr val="FFFFFF"/>
+                          </a:solidFill>
+                          <a:latin typeface="Calibri" pitchFamily="34" charset="0"/>
+                          <a:ea typeface="Calibri" pitchFamily="34" charset="-122"/>
+                          <a:cs typeface="Calibri" pitchFamily="34" charset="-120"/>
+                        </a:rPr>
+                        <a:t>Consistent lie (colluders)</a:t>
+                      </a:r>
+                      <a:endParaRPr lang="en-US" sz="1200" dirty="0">
+                        <a:latin typeface="Calibri" charset="0"/>
+                        <a:ea typeface="Calibri" charset="0"/>
+                        <a:cs typeface="Calibri" charset="0"/>
+                      </a:endParaRPr>
+                    </a:p>
+                  </a:txBody>
+                  <a:tcPr marL="91440" marR="91440" marT="45720" marB="45720">
+                    <a:lnL w="9525" cap="flat" cmpd="sng" algn="ctr">
+                      <a:solidFill>
+                        <a:srgbClr val="D5DDE3"/>
+                      </a:solidFill>
+                      <a:prstDash val="solid"/>
+                      <a:round/>
+                      <a:headEnd type="none" w="med" len="med"/>
+                      <a:tailEnd type="none" w="med" len="med"/>
+                    </a:lnL>
+                    <a:lnR w="9525" cap="flat" cmpd="sng" algn="ctr">
+                      <a:solidFill>
+                        <a:srgbClr val="D5DDE3"/>
+                      </a:solidFill>
+                      <a:prstDash val="solid"/>
+                      <a:round/>
+                      <a:headEnd type="none" w="med" len="med"/>
+                      <a:tailEnd type="none" w="med" len="med"/>
+                    </a:lnR>
+                    <a:lnT w="9525" cap="flat" cmpd="sng" algn="ctr">
+                      <a:solidFill>
+                        <a:srgbClr val="D5DDE3"/>
+                      </a:solidFill>
+                      <a:prstDash val="solid"/>
+                      <a:round/>
+                      <a:headEnd type="none" w="med" len="med"/>
+                      <a:tailEnd type="none" w="med" len="med"/>
+                    </a:lnT>
+                    <a:lnB w="9525" cap="flat" cmpd="sng" algn="ctr">
+                      <a:solidFill>
+                        <a:srgbClr val="D5DDE3"/>
+                      </a:solidFill>
+                      <a:prstDash val="solid"/>
+                      <a:round/>
+                      <a:headEnd type="none" w="med" len="med"/>
+                      <a:tailEnd type="none" w="med" len="med"/>
+                    </a:lnB>
+                    <a:solidFill>
+                      <a:srgbClr val="0B1F33"/>
+                    </a:solidFill>
+                  </a:tcPr>
+                </a:tc>
+                <a:tc>
+                  <a:txBody>
+                    <a:bodyPr/>
+                    <a:lstStyle/>
+                    <a:p>
+                      <a:pPr algn="ctr" indent="0" marL="0">
+                        <a:buNone/>
+                      </a:pPr>
+                      <a:r>
+                        <a:rPr lang="en-US" sz="1200" b="1" dirty="0">
+                          <a:solidFill>
+                            <a:srgbClr val="FFFFFF"/>
+                          </a:solidFill>
+                          <a:latin typeface="Calibri" pitchFamily="34" charset="0"/>
+                          <a:ea typeface="Calibri" pitchFamily="34" charset="-122"/>
+                          <a:cs typeface="Calibri" pitchFamily="34" charset="-120"/>
+                        </a:rPr>
+                        <a:t>First model</a:t>
+                      </a:r>
+                      <a:endParaRPr lang="en-US" sz="1200" dirty="0">
+                        <a:latin typeface="Calibri" charset="0"/>
+                        <a:ea typeface="Calibri" charset="0"/>
+                        <a:cs typeface="Calibri" charset="0"/>
+                      </a:endParaRPr>
+                    </a:p>
+                  </a:txBody>
+                  <a:tcPr marL="91440" marR="91440" marT="45720" marB="45720">
+                    <a:lnL w="9525" cap="flat" cmpd="sng" algn="ctr">
+                      <a:solidFill>
+                        <a:srgbClr val="D5DDE3"/>
+                      </a:solidFill>
+                      <a:prstDash val="solid"/>
+                      <a:round/>
+                      <a:headEnd type="none" w="med" len="med"/>
+                      <a:tailEnd type="none" w="med" len="med"/>
+                    </a:lnL>
+                    <a:lnR w="9525" cap="flat" cmpd="sng" algn="ctr">
+                      <a:solidFill>
+                        <a:srgbClr val="D5DDE3"/>
+                      </a:solidFill>
+                      <a:prstDash val="solid"/>
+                      <a:round/>
+                      <a:headEnd type="none" w="med" len="med"/>
+                      <a:tailEnd type="none" w="med" len="med"/>
+                    </a:lnR>
+                    <a:lnT w="9525" cap="flat" cmpd="sng" algn="ctr">
+                      <a:solidFill>
+                        <a:srgbClr val="D5DDE3"/>
+                      </a:solidFill>
+                      <a:prstDash val="solid"/>
+                      <a:round/>
+                      <a:headEnd type="none" w="med" len="med"/>
+                      <a:tailEnd type="none" w="med" len="med"/>
+                    </a:lnT>
+                    <a:lnB w="9525" cap="flat" cmpd="sng" algn="ctr">
+                      <a:solidFill>
+                        <a:srgbClr val="D5DDE3"/>
+                      </a:solidFill>
+                      <a:prstDash val="solid"/>
+                      <a:round/>
+                      <a:headEnd type="none" w="med" len="med"/>
+                      <a:tailEnd type="none" w="med" len="med"/>
+                    </a:lnB>
+                    <a:solidFill>
+                      <a:srgbClr val="0B1F33"/>
+                    </a:solidFill>
+                  </a:tcPr>
+                </a:tc>
+                <a:tc>
+                  <a:txBody>
+                    <a:bodyPr/>
+                    <a:lstStyle/>
+                    <a:p>
+                      <a:pPr algn="ctr" indent="0" marL="0">
+                        <a:buNone/>
+                      </a:pPr>
+                      <a:r>
+                        <a:rPr lang="en-US" sz="1200" b="1" dirty="0">
+                          <a:solidFill>
+                            <a:srgbClr val="FFFFFF"/>
+                          </a:solidFill>
+                          <a:latin typeface="Calibri" pitchFamily="34" charset="0"/>
+                          <a:ea typeface="Calibri" pitchFamily="34" charset="-122"/>
+                          <a:cs typeface="Calibri" pitchFamily="34" charset="-120"/>
+                        </a:rPr>
+                        <a:t>v2</a:t>
+                      </a:r>
+                      <a:endParaRPr lang="en-US" sz="1200" dirty="0">
+                        <a:latin typeface="Calibri" charset="0"/>
+                        <a:ea typeface="Calibri" charset="0"/>
+                        <a:cs typeface="Calibri" charset="0"/>
+                      </a:endParaRPr>
+                    </a:p>
+                  </a:txBody>
+                  <a:tcPr marL="91440" marR="91440" marT="45720" marB="45720">
+                    <a:lnL w="9525" cap="flat" cmpd="sng" algn="ctr">
+                      <a:solidFill>
+                        <a:srgbClr val="D5DDE3"/>
+                      </a:solidFill>
+                      <a:prstDash val="solid"/>
+                      <a:round/>
+                      <a:headEnd type="none" w="med" len="med"/>
+                      <a:tailEnd type="none" w="med" len="med"/>
+                    </a:lnL>
+                    <a:lnR w="9525" cap="flat" cmpd="sng" algn="ctr">
+                      <a:solidFill>
+                        <a:srgbClr val="D5DDE3"/>
+                      </a:solidFill>
+                      <a:prstDash val="solid"/>
+                      <a:round/>
+                      <a:headEnd type="none" w="med" len="med"/>
+                      <a:tailEnd type="none" w="med" len="med"/>
+                    </a:lnR>
+                    <a:lnT w="9525" cap="flat" cmpd="sng" algn="ctr">
+                      <a:solidFill>
+                        <a:srgbClr val="D5DDE3"/>
+                      </a:solidFill>
+                      <a:prstDash val="solid"/>
+                      <a:round/>
+                      <a:headEnd type="none" w="med" len="med"/>
+                      <a:tailEnd type="none" w="med" len="med"/>
+                    </a:lnT>
+                    <a:lnB w="9525" cap="flat" cmpd="sng" algn="ctr">
+                      <a:solidFill>
+                        <a:srgbClr val="D5DDE3"/>
+                      </a:solidFill>
+                      <a:prstDash val="solid"/>
+                      <a:round/>
+                      <a:headEnd type="none" w="med" len="med"/>
+                      <a:tailEnd type="none" w="med" len="med"/>
+                    </a:lnB>
+                    <a:solidFill>
+                      <a:srgbClr val="0B1F33"/>
+                    </a:solidFill>
+                  </a:tcPr>
+                </a:tc>
+              </a:tr>
+              <a:tr h="365760">
+                <a:tc>
+                  <a:txBody>
+                    <a:bodyPr/>
+                    <a:lstStyle/>
+                    <a:p>
+                      <a:pPr algn="l" indent="0" marL="0">
+                        <a:buNone/>
+                      </a:pPr>
+                      <a:r>
+                        <a:rPr lang="en-US" sz="1200" dirty="0">
+                          <a:solidFill>
+                            <a:srgbClr val="1B2A38"/>
+                          </a:solidFill>
+                          <a:latin typeface="Calibri" pitchFamily="34" charset="0"/>
+                          <a:ea typeface="Calibri" pitchFamily="34" charset="-122"/>
+                          <a:cs typeface="Calibri" pitchFamily="34" charset="-120"/>
+                        </a:rPr>
+                        <a:t>50 m position offset</a:t>
+                      </a:r>
+                      <a:endParaRPr lang="en-US" sz="1200" dirty="0">
+                        <a:latin typeface="Calibri" charset="0"/>
+                        <a:ea typeface="Calibri" charset="0"/>
+                        <a:cs typeface="Calibri" charset="0"/>
+                      </a:endParaRPr>
+                    </a:p>
+                  </a:txBody>
+                  <a:tcPr marL="91440" marR="91440" marT="45720" marB="45720">
+                    <a:lnL w="9525" cap="flat" cmpd="sng" algn="ctr">
+                      <a:solidFill>
+                        <a:srgbClr val="D5DDE3"/>
+                      </a:solidFill>
+                      <a:prstDash val="solid"/>
+                      <a:round/>
+                      <a:headEnd type="none" w="med" len="med"/>
+                      <a:tailEnd type="none" w="med" len="med"/>
+                    </a:lnL>
+                    <a:lnR w="9525" cap="flat" cmpd="sng" algn="ctr">
+                      <a:solidFill>
+                        <a:srgbClr val="D5DDE3"/>
+                      </a:solidFill>
+                      <a:prstDash val="solid"/>
+                      <a:round/>
+                      <a:headEnd type="none" w="med" len="med"/>
+                      <a:tailEnd type="none" w="med" len="med"/>
+                    </a:lnR>
+                    <a:lnT w="9525" cap="flat" cmpd="sng" algn="ctr">
+                      <a:solidFill>
+                        <a:srgbClr val="D5DDE3"/>
+                      </a:solidFill>
+                      <a:prstDash val="solid"/>
+                      <a:round/>
+                      <a:headEnd type="none" w="med" len="med"/>
+                      <a:tailEnd type="none" w="med" len="med"/>
+                    </a:lnT>
+                    <a:lnB w="9525" cap="flat" cmpd="sng" algn="ctr">
+                      <a:solidFill>
+                        <a:srgbClr val="D5DDE3"/>
+                      </a:solidFill>
+                      <a:prstDash val="solid"/>
+                      <a:round/>
+                      <a:headEnd type="none" w="med" len="med"/>
+                      <a:tailEnd type="none" w="med" len="med"/>
+                    </a:lnB>
+                  </a:tcPr>
+                </a:tc>
+                <a:tc>
+                  <a:txBody>
+                    <a:bodyPr/>
+                    <a:lstStyle/>
+                    <a:p>
+                      <a:pPr algn="ctr" indent="0" marL="0">
+                        <a:buNone/>
+                      </a:pPr>
+                      <a:r>
+                        <a:rPr lang="en-US" sz="1200" dirty="0">
+                          <a:solidFill>
+                            <a:srgbClr val="1B2A38"/>
+                          </a:solidFill>
+                          <a:latin typeface="Calibri" pitchFamily="34" charset="0"/>
+                          <a:ea typeface="Calibri" pitchFamily="34" charset="-122"/>
+                          <a:cs typeface="Calibri" pitchFamily="34" charset="-120"/>
+                        </a:rPr>
+                        <a:t>&lt;= 0.04</a:t>
+                      </a:r>
+                      <a:endParaRPr lang="en-US" sz="1200" dirty="0">
+                        <a:latin typeface="Calibri" charset="0"/>
+                        <a:ea typeface="Calibri" charset="0"/>
+                        <a:cs typeface="Calibri" charset="0"/>
+                      </a:endParaRPr>
+                    </a:p>
+                  </a:txBody>
+                  <a:tcPr marL="91440" marR="91440" marT="45720" marB="45720">
+                    <a:lnL w="9525" cap="flat" cmpd="sng" algn="ctr">
+                      <a:solidFill>
+                        <a:srgbClr val="D5DDE3"/>
+                      </a:solidFill>
+                      <a:prstDash val="solid"/>
+                      <a:round/>
+                      <a:headEnd type="none" w="med" len="med"/>
+                      <a:tailEnd type="none" w="med" len="med"/>
+                    </a:lnL>
+                    <a:lnR w="9525" cap="flat" cmpd="sng" algn="ctr">
+                      <a:solidFill>
+                        <a:srgbClr val="D5DDE3"/>
+                      </a:solidFill>
+                      <a:prstDash val="solid"/>
+                      <a:round/>
+                      <a:headEnd type="none" w="med" len="med"/>
+                      <a:tailEnd type="none" w="med" len="med"/>
+                    </a:lnR>
+                    <a:lnT w="9525" cap="flat" cmpd="sng" algn="ctr">
+                      <a:solidFill>
+                        <a:srgbClr val="D5DDE3"/>
+                      </a:solidFill>
+                      <a:prstDash val="solid"/>
+                      <a:round/>
+                      <a:headEnd type="none" w="med" len="med"/>
+                      <a:tailEnd type="none" w="med" len="med"/>
+                    </a:lnT>
+                    <a:lnB w="9525" cap="flat" cmpd="sng" algn="ctr">
+                      <a:solidFill>
+                        <a:srgbClr val="D5DDE3"/>
+                      </a:solidFill>
+                      <a:prstDash val="solid"/>
+                      <a:round/>
+                      <a:headEnd type="none" w="med" len="med"/>
+                      <a:tailEnd type="none" w="med" len="med"/>
+                    </a:lnB>
+                  </a:tcPr>
+                </a:tc>
+                <a:tc>
+                  <a:txBody>
+                    <a:bodyPr/>
+                    <a:lstStyle/>
+                    <a:p>
+                      <a:pPr algn="ctr" indent="0" marL="0">
+                        <a:buNone/>
+                      </a:pPr>
+                      <a:r>
+                        <a:rPr lang="en-US" sz="1200" b="1" dirty="0">
+                          <a:solidFill>
+                            <a:srgbClr val="1B2A38"/>
+                          </a:solidFill>
+                          <a:latin typeface="Calibri" pitchFamily="34" charset="0"/>
+                          <a:ea typeface="Calibri" pitchFamily="34" charset="-122"/>
+                          <a:cs typeface="Calibri" pitchFamily="34" charset="-120"/>
+                        </a:rPr>
+                        <a:t>0.83-0.86</a:t>
+                      </a:r>
+                      <a:endParaRPr lang="en-US" sz="1200" dirty="0">
+                        <a:latin typeface="Calibri" charset="0"/>
+                        <a:ea typeface="Calibri" charset="0"/>
+                        <a:cs typeface="Calibri" charset="0"/>
+                      </a:endParaRPr>
+                    </a:p>
+                  </a:txBody>
+                  <a:tcPr marL="91440" marR="91440" marT="45720" marB="45720">
+                    <a:lnL w="9525" cap="flat" cmpd="sng" algn="ctr">
+                      <a:solidFill>
+                        <a:srgbClr val="D5DDE3"/>
+                      </a:solidFill>
+                      <a:prstDash val="solid"/>
+                      <a:round/>
+                      <a:headEnd type="none" w="med" len="med"/>
+                      <a:tailEnd type="none" w="med" len="med"/>
+                    </a:lnL>
+                    <a:lnR w="9525" cap="flat" cmpd="sng" algn="ctr">
+                      <a:solidFill>
+                        <a:srgbClr val="D5DDE3"/>
+                      </a:solidFill>
+                      <a:prstDash val="solid"/>
+                      <a:round/>
+                      <a:headEnd type="none" w="med" len="med"/>
+                      <a:tailEnd type="none" w="med" len="med"/>
+                    </a:lnR>
+                    <a:lnT w="9525" cap="flat" cmpd="sng" algn="ctr">
+                      <a:solidFill>
+                        <a:srgbClr val="D5DDE3"/>
+                      </a:solidFill>
+                      <a:prstDash val="solid"/>
+                      <a:round/>
+                      <a:headEnd type="none" w="med" len="med"/>
+                      <a:tailEnd type="none" w="med" len="med"/>
+                    </a:lnT>
+                    <a:lnB w="9525" cap="flat" cmpd="sng" algn="ctr">
+                      <a:solidFill>
+                        <a:srgbClr val="D5DDE3"/>
+                      </a:solidFill>
+                      <a:prstDash val="solid"/>
+                      <a:round/>
+                      <a:headEnd type="none" w="med" len="med"/>
+                      <a:tailEnd type="none" w="med" len="med"/>
+                    </a:lnB>
+                  </a:tcPr>
+                </a:tc>
+              </a:tr>
+              <a:tr h="365760">
+                <a:tc>
+                  <a:txBody>
+                    <a:bodyPr/>
+                    <a:lstStyle/>
+                    <a:p>
+                      <a:pPr algn="l" indent="0" marL="0">
+                        <a:buNone/>
+                      </a:pPr>
+                      <a:r>
+                        <a:rPr lang="en-US" sz="1200" dirty="0">
+                          <a:solidFill>
+                            <a:srgbClr val="1B2A38"/>
+                          </a:solidFill>
+                          <a:latin typeface="Calibri" pitchFamily="34" charset="0"/>
+                          <a:ea typeface="Calibri" pitchFamily="34" charset="-122"/>
+                          <a:cs typeface="Calibri" pitchFamily="34" charset="-120"/>
+                        </a:rPr>
+                        <a:t>Fake stop</a:t>
+                      </a:r>
+                      <a:endParaRPr lang="en-US" sz="1200" dirty="0">
+                        <a:latin typeface="Calibri" charset="0"/>
+                        <a:ea typeface="Calibri" charset="0"/>
+                        <a:cs typeface="Calibri" charset="0"/>
+                      </a:endParaRPr>
+                    </a:p>
+                  </a:txBody>
+                  <a:tcPr marL="91440" marR="91440" marT="45720" marB="45720">
+                    <a:lnL w="9525" cap="flat" cmpd="sng" algn="ctr">
+                      <a:solidFill>
+                        <a:srgbClr val="D5DDE3"/>
+                      </a:solidFill>
+                      <a:prstDash val="solid"/>
+                      <a:round/>
+                      <a:headEnd type="none" w="med" len="med"/>
+                      <a:tailEnd type="none" w="med" len="med"/>
+                    </a:lnL>
+                    <a:lnR w="9525" cap="flat" cmpd="sng" algn="ctr">
+                      <a:solidFill>
+                        <a:srgbClr val="D5DDE3"/>
+                      </a:solidFill>
+                      <a:prstDash val="solid"/>
+                      <a:round/>
+                      <a:headEnd type="none" w="med" len="med"/>
+                      <a:tailEnd type="none" w="med" len="med"/>
+                    </a:lnR>
+                    <a:lnT w="9525" cap="flat" cmpd="sng" algn="ctr">
+                      <a:solidFill>
+                        <a:srgbClr val="D5DDE3"/>
+                      </a:solidFill>
+                      <a:prstDash val="solid"/>
+                      <a:round/>
+                      <a:headEnd type="none" w="med" len="med"/>
+                      <a:tailEnd type="none" w="med" len="med"/>
+                    </a:lnT>
+                    <a:lnB w="9525" cap="flat" cmpd="sng" algn="ctr">
+                      <a:solidFill>
+                        <a:srgbClr val="D5DDE3"/>
+                      </a:solidFill>
+                      <a:prstDash val="solid"/>
+                      <a:round/>
+                      <a:headEnd type="none" w="med" len="med"/>
+                      <a:tailEnd type="none" w="med" len="med"/>
+                    </a:lnB>
+                  </a:tcPr>
+                </a:tc>
+                <a:tc>
+                  <a:txBody>
+                    <a:bodyPr/>
+                    <a:lstStyle/>
+                    <a:p>
+                      <a:pPr algn="ctr" indent="0" marL="0">
+                        <a:buNone/>
+                      </a:pPr>
+                      <a:r>
+                        <a:rPr lang="en-US" sz="1200" dirty="0">
+                          <a:solidFill>
+                            <a:srgbClr val="1B2A38"/>
+                          </a:solidFill>
+                          <a:latin typeface="Calibri" pitchFamily="34" charset="0"/>
+                          <a:ea typeface="Calibri" pitchFamily="34" charset="-122"/>
+                          <a:cs typeface="Calibri" pitchFamily="34" charset="-120"/>
+                        </a:rPr>
+                        <a:t>&lt;= 0.04</a:t>
+                      </a:r>
+                      <a:endParaRPr lang="en-US" sz="1200" dirty="0">
+                        <a:latin typeface="Calibri" charset="0"/>
+                        <a:ea typeface="Calibri" charset="0"/>
+                        <a:cs typeface="Calibri" charset="0"/>
+                      </a:endParaRPr>
+                    </a:p>
+                  </a:txBody>
+                  <a:tcPr marL="91440" marR="91440" marT="45720" marB="45720">
+                    <a:lnL w="9525" cap="flat" cmpd="sng" algn="ctr">
+                      <a:solidFill>
+                        <a:srgbClr val="D5DDE3"/>
+                      </a:solidFill>
+                      <a:prstDash val="solid"/>
+                      <a:round/>
+                      <a:headEnd type="none" w="med" len="med"/>
+                      <a:tailEnd type="none" w="med" len="med"/>
+                    </a:lnL>
+                    <a:lnR w="9525" cap="flat" cmpd="sng" algn="ctr">
+                      <a:solidFill>
+                        <a:srgbClr val="D5DDE3"/>
+                      </a:solidFill>
+                      <a:prstDash val="solid"/>
+                      <a:round/>
+                      <a:headEnd type="none" w="med" len="med"/>
+                      <a:tailEnd type="none" w="med" len="med"/>
+                    </a:lnR>
+                    <a:lnT w="9525" cap="flat" cmpd="sng" algn="ctr">
+                      <a:solidFill>
+                        <a:srgbClr val="D5DDE3"/>
+                      </a:solidFill>
+                      <a:prstDash val="solid"/>
+                      <a:round/>
+                      <a:headEnd type="none" w="med" len="med"/>
+                      <a:tailEnd type="none" w="med" len="med"/>
+                    </a:lnT>
+                    <a:lnB w="9525" cap="flat" cmpd="sng" algn="ctr">
+                      <a:solidFill>
+                        <a:srgbClr val="D5DDE3"/>
+                      </a:solidFill>
+                      <a:prstDash val="solid"/>
+                      <a:round/>
+                      <a:headEnd type="none" w="med" len="med"/>
+                      <a:tailEnd type="none" w="med" len="med"/>
+                    </a:lnB>
+                  </a:tcPr>
+                </a:tc>
+                <a:tc>
+                  <a:txBody>
+                    <a:bodyPr/>
+                    <a:lstStyle/>
+                    <a:p>
+                      <a:pPr algn="ctr" indent="0" marL="0">
+                        <a:buNone/>
+                      </a:pPr>
+                      <a:r>
+                        <a:rPr lang="en-US" sz="1200" b="1" dirty="0">
+                          <a:solidFill>
+                            <a:srgbClr val="1B2A38"/>
+                          </a:solidFill>
+                          <a:latin typeface="Calibri" pitchFamily="34" charset="0"/>
+                          <a:ea typeface="Calibri" pitchFamily="34" charset="-122"/>
+                          <a:cs typeface="Calibri" pitchFamily="34" charset="-120"/>
+                        </a:rPr>
+                        <a:t>about 0.70</a:t>
+                      </a:r>
+                      <a:endParaRPr lang="en-US" sz="1200" dirty="0">
+                        <a:latin typeface="Calibri" charset="0"/>
+                        <a:ea typeface="Calibri" charset="0"/>
+                        <a:cs typeface="Calibri" charset="0"/>
+                      </a:endParaRPr>
+                    </a:p>
+                  </a:txBody>
+                  <a:tcPr marL="91440" marR="91440" marT="45720" marB="45720">
+                    <a:lnL w="9525" cap="flat" cmpd="sng" algn="ctr">
+                      <a:solidFill>
+                        <a:srgbClr val="D5DDE3"/>
+                      </a:solidFill>
+                      <a:prstDash val="solid"/>
+                      <a:round/>
+                      <a:headEnd type="none" w="med" len="med"/>
+                      <a:tailEnd type="none" w="med" len="med"/>
+                    </a:lnL>
+                    <a:lnR w="9525" cap="flat" cmpd="sng" algn="ctr">
+                      <a:solidFill>
+                        <a:srgbClr val="D5DDE3"/>
+                      </a:solidFill>
+                      <a:prstDash val="solid"/>
+                      <a:round/>
+                      <a:headEnd type="none" w="med" len="med"/>
+                      <a:tailEnd type="none" w="med" len="med"/>
+                    </a:lnR>
+                    <a:lnT w="9525" cap="flat" cmpd="sng" algn="ctr">
+                      <a:solidFill>
+                        <a:srgbClr val="D5DDE3"/>
+                      </a:solidFill>
+                      <a:prstDash val="solid"/>
+                      <a:round/>
+                      <a:headEnd type="none" w="med" len="med"/>
+                      <a:tailEnd type="none" w="med" len="med"/>
+                    </a:lnT>
+                    <a:lnB w="9525" cap="flat" cmpd="sng" algn="ctr">
+                      <a:solidFill>
+                        <a:srgbClr val="D5DDE3"/>
+                      </a:solidFill>
+                      <a:prstDash val="solid"/>
+                      <a:round/>
+                      <a:headEnd type="none" w="med" len="med"/>
+                      <a:tailEnd type="none" w="med" len="med"/>
+                    </a:lnB>
+                  </a:tcPr>
+                </a:tc>
+              </a:tr>
+              <a:tr h="365760">
+                <a:tc>
+                  <a:txBody>
+                    <a:bodyPr/>
+                    <a:lstStyle/>
+                    <a:p>
+                      <a:pPr algn="l" indent="0" marL="0">
+                        <a:buNone/>
+                      </a:pPr>
+                      <a:r>
+                        <a:rPr lang="en-US" sz="1200" dirty="0">
+                          <a:solidFill>
+                            <a:srgbClr val="1B2A38"/>
+                          </a:solidFill>
+                          <a:latin typeface="Calibri" pitchFamily="34" charset="0"/>
+                          <a:ea typeface="Calibri" pitchFamily="34" charset="-122"/>
+                          <a:cs typeface="Calibri" pitchFamily="34" charset="-120"/>
+                        </a:rPr>
+                        <a:t>Spoofed convoy (never seen in training)</a:t>
+                      </a:r>
+                      <a:endParaRPr lang="en-US" sz="1200" dirty="0">
+                        <a:latin typeface="Calibri" charset="0"/>
+                        <a:ea typeface="Calibri" charset="0"/>
+                        <a:cs typeface="Calibri" charset="0"/>
+                      </a:endParaRPr>
+                    </a:p>
+                  </a:txBody>
+                  <a:tcPr marL="91440" marR="91440" marT="45720" marB="45720">
+                    <a:lnL w="9525" cap="flat" cmpd="sng" algn="ctr">
+                      <a:solidFill>
+                        <a:srgbClr val="D5DDE3"/>
+                      </a:solidFill>
+                      <a:prstDash val="solid"/>
+                      <a:round/>
+                      <a:headEnd type="none" w="med" len="med"/>
+                      <a:tailEnd type="none" w="med" len="med"/>
+                    </a:lnL>
+                    <a:lnR w="9525" cap="flat" cmpd="sng" algn="ctr">
+                      <a:solidFill>
+                        <a:srgbClr val="D5DDE3"/>
+                      </a:solidFill>
+                      <a:prstDash val="solid"/>
+                      <a:round/>
+                      <a:headEnd type="none" w="med" len="med"/>
+                      <a:tailEnd type="none" w="med" len="med"/>
+                    </a:lnR>
+                    <a:lnT w="9525" cap="flat" cmpd="sng" algn="ctr">
+                      <a:solidFill>
+                        <a:srgbClr val="D5DDE3"/>
+                      </a:solidFill>
+                      <a:prstDash val="solid"/>
+                      <a:round/>
+                      <a:headEnd type="none" w="med" len="med"/>
+                      <a:tailEnd type="none" w="med" len="med"/>
+                    </a:lnT>
+                    <a:lnB w="9525" cap="flat" cmpd="sng" algn="ctr">
+                      <a:solidFill>
+                        <a:srgbClr val="D5DDE3"/>
+                      </a:solidFill>
+                      <a:prstDash val="solid"/>
+                      <a:round/>
+                      <a:headEnd type="none" w="med" len="med"/>
+                      <a:tailEnd type="none" w="med" len="med"/>
+                    </a:lnB>
+                  </a:tcPr>
+                </a:tc>
+                <a:tc>
+                  <a:txBody>
+                    <a:bodyPr/>
+                    <a:lstStyle/>
+                    <a:p>
+                      <a:pPr algn="ctr" indent="0" marL="0">
+                        <a:buNone/>
+                      </a:pPr>
+                      <a:r>
+                        <a:rPr lang="en-US" sz="1200" dirty="0">
+                          <a:solidFill>
+                            <a:srgbClr val="1B2A38"/>
+                          </a:solidFill>
+                          <a:latin typeface="Calibri" pitchFamily="34" charset="0"/>
+                          <a:ea typeface="Calibri" pitchFamily="34" charset="-122"/>
+                          <a:cs typeface="Calibri" pitchFamily="34" charset="-120"/>
+                        </a:rPr>
+                        <a:t>&lt;= 0.04</a:t>
+                      </a:r>
+                      <a:endParaRPr lang="en-US" sz="1200" dirty="0">
+                        <a:latin typeface="Calibri" charset="0"/>
+                        <a:ea typeface="Calibri" charset="0"/>
+                        <a:cs typeface="Calibri" charset="0"/>
+                      </a:endParaRPr>
+                    </a:p>
+                  </a:txBody>
+                  <a:tcPr marL="91440" marR="91440" marT="45720" marB="45720">
+                    <a:lnL w="9525" cap="flat" cmpd="sng" algn="ctr">
+                      <a:solidFill>
+                        <a:srgbClr val="D5DDE3"/>
+                      </a:solidFill>
+                      <a:prstDash val="solid"/>
+                      <a:round/>
+                      <a:headEnd type="none" w="med" len="med"/>
+                      <a:tailEnd type="none" w="med" len="med"/>
+                    </a:lnL>
+                    <a:lnR w="9525" cap="flat" cmpd="sng" algn="ctr">
+                      <a:solidFill>
+                        <a:srgbClr val="D5DDE3"/>
+                      </a:solidFill>
+                      <a:prstDash val="solid"/>
+                      <a:round/>
+                      <a:headEnd type="none" w="med" len="med"/>
+                      <a:tailEnd type="none" w="med" len="med"/>
+                    </a:lnR>
+                    <a:lnT w="9525" cap="flat" cmpd="sng" algn="ctr">
+                      <a:solidFill>
+                        <a:srgbClr val="D5DDE3"/>
+                      </a:solidFill>
+                      <a:prstDash val="solid"/>
+                      <a:round/>
+                      <a:headEnd type="none" w="med" len="med"/>
+                      <a:tailEnd type="none" w="med" len="med"/>
+                    </a:lnT>
+                    <a:lnB w="9525" cap="flat" cmpd="sng" algn="ctr">
+                      <a:solidFill>
+                        <a:srgbClr val="D5DDE3"/>
+                      </a:solidFill>
+                      <a:prstDash val="solid"/>
+                      <a:round/>
+                      <a:headEnd type="none" w="med" len="med"/>
+                      <a:tailEnd type="none" w="med" len="med"/>
+                    </a:lnB>
+                  </a:tcPr>
+                </a:tc>
+                <a:tc>
+                  <a:txBody>
+                    <a:bodyPr/>
+                    <a:lstStyle/>
+                    <a:p>
+                      <a:pPr algn="ctr" indent="0" marL="0">
+                        <a:buNone/>
+                      </a:pPr>
+                      <a:r>
+                        <a:rPr lang="en-US" sz="1200" b="1" dirty="0">
+                          <a:solidFill>
+                            <a:srgbClr val="1B2A38"/>
+                          </a:solidFill>
+                          <a:latin typeface="Calibri" pitchFamily="34" charset="0"/>
+                          <a:ea typeface="Calibri" pitchFamily="34" charset="-122"/>
+                          <a:cs typeface="Calibri" pitchFamily="34" charset="-120"/>
+                        </a:rPr>
+                        <a:t>0.87-0.90</a:t>
+                      </a:r>
+                      <a:endParaRPr lang="en-US" sz="1200" dirty="0">
+                        <a:latin typeface="Calibri" charset="0"/>
+                        <a:ea typeface="Calibri" charset="0"/>
+                        <a:cs typeface="Calibri" charset="0"/>
+                      </a:endParaRPr>
+                    </a:p>
+                  </a:txBody>
+                  <a:tcPr marL="91440" marR="91440" marT="45720" marB="45720">
+                    <a:lnL w="9525" cap="flat" cmpd="sng" algn="ctr">
+                      <a:solidFill>
+                        <a:srgbClr val="D5DDE3"/>
+                      </a:solidFill>
+                      <a:prstDash val="solid"/>
+                      <a:round/>
+                      <a:headEnd type="none" w="med" len="med"/>
+                      <a:tailEnd type="none" w="med" len="med"/>
+                    </a:lnL>
+                    <a:lnR w="9525" cap="flat" cmpd="sng" algn="ctr">
+                      <a:solidFill>
+                        <a:srgbClr val="D5DDE3"/>
+                      </a:solidFill>
+                      <a:prstDash val="solid"/>
+                      <a:round/>
+                      <a:headEnd type="none" w="med" len="med"/>
+                      <a:tailEnd type="none" w="med" len="med"/>
+                    </a:lnR>
+                    <a:lnT w="9525" cap="flat" cmpd="sng" algn="ctr">
+                      <a:solidFill>
+                        <a:srgbClr val="D5DDE3"/>
+                      </a:solidFill>
+                      <a:prstDash val="solid"/>
+                      <a:round/>
+                      <a:headEnd type="none" w="med" len="med"/>
+                      <a:tailEnd type="none" w="med" len="med"/>
+                    </a:lnT>
+                    <a:lnB w="9525" cap="flat" cmpd="sng" algn="ctr">
+                      <a:solidFill>
+                        <a:srgbClr val="D5DDE3"/>
+                      </a:solidFill>
+                      <a:prstDash val="solid"/>
+                      <a:round/>
+                      <a:headEnd type="none" w="med" len="med"/>
+                      <a:tailEnd type="none" w="med" len="med"/>
+                    </a:lnB>
+                  </a:tcPr>
+                </a:tc>
+              </a:tr>
+              <a:tr h="365760">
+                <a:tc>
+                  <a:txBody>
+                    <a:bodyPr/>
+                    <a:lstStyle/>
+                    <a:p>
+                      <a:pPr algn="l" indent="0" marL="0">
+                        <a:buNone/>
+                      </a:pPr>
+                      <a:r>
+                        <a:rPr lang="en-US" sz="1200" dirty="0">
+                          <a:solidFill>
+                            <a:srgbClr val="1B2A38"/>
+                          </a:solidFill>
+                          <a:latin typeface="Calibri" pitchFamily="34" charset="0"/>
+                          <a:ea typeface="Calibri" pitchFamily="34" charset="-122"/>
+                          <a:cs typeface="Calibri" pitchFamily="34" charset="-120"/>
+                        </a:rPr>
+                        <a:t>Offset along the road (map-aware)</a:t>
+                      </a:r>
+                      <a:endParaRPr lang="en-US" sz="1200" dirty="0">
+                        <a:latin typeface="Calibri" charset="0"/>
+                        <a:ea typeface="Calibri" charset="0"/>
+                        <a:cs typeface="Calibri" charset="0"/>
+                      </a:endParaRPr>
+                    </a:p>
+                  </a:txBody>
+                  <a:tcPr marL="91440" marR="91440" marT="45720" marB="45720">
+                    <a:lnL w="9525" cap="flat" cmpd="sng" algn="ctr">
+                      <a:solidFill>
+                        <a:srgbClr val="D5DDE3"/>
+                      </a:solidFill>
+                      <a:prstDash val="solid"/>
+                      <a:round/>
+                      <a:headEnd type="none" w="med" len="med"/>
+                      <a:tailEnd type="none" w="med" len="med"/>
+                    </a:lnL>
+                    <a:lnR w="9525" cap="flat" cmpd="sng" algn="ctr">
+                      <a:solidFill>
+                        <a:srgbClr val="D5DDE3"/>
+                      </a:solidFill>
+                      <a:prstDash val="solid"/>
+                      <a:round/>
+                      <a:headEnd type="none" w="med" len="med"/>
+                      <a:tailEnd type="none" w="med" len="med"/>
+                    </a:lnR>
+                    <a:lnT w="9525" cap="flat" cmpd="sng" algn="ctr">
+                      <a:solidFill>
+                        <a:srgbClr val="D5DDE3"/>
+                      </a:solidFill>
+                      <a:prstDash val="solid"/>
+                      <a:round/>
+                      <a:headEnd type="none" w="med" len="med"/>
+                      <a:tailEnd type="none" w="med" len="med"/>
+                    </a:lnT>
+                    <a:lnB w="9525" cap="flat" cmpd="sng" algn="ctr">
+                      <a:solidFill>
+                        <a:srgbClr val="D5DDE3"/>
+                      </a:solidFill>
+                      <a:prstDash val="solid"/>
+                      <a:round/>
+                      <a:headEnd type="none" w="med" len="med"/>
+                      <a:tailEnd type="none" w="med" len="med"/>
+                    </a:lnB>
+                  </a:tcPr>
+                </a:tc>
+                <a:tc>
+                  <a:txBody>
+                    <a:bodyPr/>
+                    <a:lstStyle/>
+                    <a:p>
+                      <a:pPr algn="ctr" indent="0" marL="0">
+                        <a:buNone/>
+                      </a:pPr>
+                      <a:r>
+                        <a:rPr lang="en-US" sz="1200" dirty="0">
+                          <a:solidFill>
+                            <a:srgbClr val="1B2A38"/>
+                          </a:solidFill>
+                          <a:latin typeface="Calibri" pitchFamily="34" charset="0"/>
+                          <a:ea typeface="Calibri" pitchFamily="34" charset="-122"/>
+                          <a:cs typeface="Calibri" pitchFamily="34" charset="-120"/>
+                        </a:rPr>
+                        <a:t>&lt;= 0.04</a:t>
+                      </a:r>
+                      <a:endParaRPr lang="en-US" sz="1200" dirty="0">
+                        <a:latin typeface="Calibri" charset="0"/>
+                        <a:ea typeface="Calibri" charset="0"/>
+                        <a:cs typeface="Calibri" charset="0"/>
+                      </a:endParaRPr>
+                    </a:p>
+                  </a:txBody>
+                  <a:tcPr marL="91440" marR="91440" marT="45720" marB="45720">
+                    <a:lnL w="9525" cap="flat" cmpd="sng" algn="ctr">
+                      <a:solidFill>
+                        <a:srgbClr val="D5DDE3"/>
+                      </a:solidFill>
+                      <a:prstDash val="solid"/>
+                      <a:round/>
+                      <a:headEnd type="none" w="med" len="med"/>
+                      <a:tailEnd type="none" w="med" len="med"/>
+                    </a:lnL>
+                    <a:lnR w="9525" cap="flat" cmpd="sng" algn="ctr">
+                      <a:solidFill>
+                        <a:srgbClr val="D5DDE3"/>
+                      </a:solidFill>
+                      <a:prstDash val="solid"/>
+                      <a:round/>
+                      <a:headEnd type="none" w="med" len="med"/>
+                      <a:tailEnd type="none" w="med" len="med"/>
+                    </a:lnR>
+                    <a:lnT w="9525" cap="flat" cmpd="sng" algn="ctr">
+                      <a:solidFill>
+                        <a:srgbClr val="D5DDE3"/>
+                      </a:solidFill>
+                      <a:prstDash val="solid"/>
+                      <a:round/>
+                      <a:headEnd type="none" w="med" len="med"/>
+                      <a:tailEnd type="none" w="med" len="med"/>
+                    </a:lnT>
+                    <a:lnB w="9525" cap="flat" cmpd="sng" algn="ctr">
+                      <a:solidFill>
+                        <a:srgbClr val="D5DDE3"/>
+                      </a:solidFill>
+                      <a:prstDash val="solid"/>
+                      <a:round/>
+                      <a:headEnd type="none" w="med" len="med"/>
+                      <a:tailEnd type="none" w="med" len="med"/>
+                    </a:lnB>
+                  </a:tcPr>
+                </a:tc>
+                <a:tc>
+                  <a:txBody>
+                    <a:bodyPr/>
+                    <a:lstStyle/>
+                    <a:p>
+                      <a:pPr algn="ctr" indent="0" marL="0">
+                        <a:buNone/>
+                      </a:pPr>
+                      <a:r>
+                        <a:rPr lang="en-US" sz="1200" dirty="0">
+                          <a:solidFill>
+                            <a:srgbClr val="1B2A38"/>
+                          </a:solidFill>
+                          <a:latin typeface="Calibri" pitchFamily="34" charset="0"/>
+                          <a:ea typeface="Calibri" pitchFamily="34" charset="-122"/>
+                          <a:cs typeface="Calibri" pitchFamily="34" charset="-120"/>
+                        </a:rPr>
+                        <a:t>0.23-0.25</a:t>
+                      </a:r>
+                      <a:endParaRPr lang="en-US" sz="1200" dirty="0">
+                        <a:latin typeface="Calibri" charset="0"/>
+                        <a:ea typeface="Calibri" charset="0"/>
+                        <a:cs typeface="Calibri" charset="0"/>
+                      </a:endParaRPr>
+                    </a:p>
+                  </a:txBody>
+                  <a:tcPr marL="91440" marR="91440" marT="45720" marB="45720">
+                    <a:lnL w="9525" cap="flat" cmpd="sng" algn="ctr">
+                      <a:solidFill>
+                        <a:srgbClr val="D5DDE3"/>
+                      </a:solidFill>
+                      <a:prstDash val="solid"/>
+                      <a:round/>
+                      <a:headEnd type="none" w="med" len="med"/>
+                      <a:tailEnd type="none" w="med" len="med"/>
+                    </a:lnL>
+                    <a:lnR w="9525" cap="flat" cmpd="sng" algn="ctr">
+                      <a:solidFill>
+                        <a:srgbClr val="D5DDE3"/>
+                      </a:solidFill>
+                      <a:prstDash val="solid"/>
+                      <a:round/>
+                      <a:headEnd type="none" w="med" len="med"/>
+                      <a:tailEnd type="none" w="med" len="med"/>
+                    </a:lnR>
+                    <a:lnT w="9525" cap="flat" cmpd="sng" algn="ctr">
+                      <a:solidFill>
+                        <a:srgbClr val="D5DDE3"/>
+                      </a:solidFill>
+                      <a:prstDash val="solid"/>
+                      <a:round/>
+                      <a:headEnd type="none" w="med" len="med"/>
+                      <a:tailEnd type="none" w="med" len="med"/>
+                    </a:lnT>
+                    <a:lnB w="9525" cap="flat" cmpd="sng" algn="ctr">
+                      <a:solidFill>
+                        <a:srgbClr val="D5DDE3"/>
+                      </a:solidFill>
+                      <a:prstDash val="solid"/>
+                      <a:round/>
+                      <a:headEnd type="none" w="med" len="med"/>
+                      <a:tailEnd type="none" w="med" len="med"/>
+                    </a:lnB>
+                  </a:tcPr>
+                </a:tc>
+              </a:tr>
+              <a:tr h="365760">
+                <a:tc>
+                  <a:txBody>
+                    <a:bodyPr/>
+                    <a:lstStyle/>
+                    <a:p>
+                      <a:pPr algn="l" indent="0" marL="0">
+                        <a:buNone/>
+                      </a:pPr>
+                      <a:r>
+                        <a:rPr lang="en-US" sz="1200" dirty="0">
+                          <a:solidFill>
+                            <a:srgbClr val="1B2A38"/>
+                          </a:solidFill>
+                          <a:latin typeface="Calibri" pitchFamily="34" charset="0"/>
+                          <a:ea typeface="Calibri" pitchFamily="34" charset="-122"/>
+                          <a:cs typeface="Calibri" pitchFamily="34" charset="-120"/>
+                        </a:rPr>
+                        <a:t>Convoy on own road (map-aware)</a:t>
+                      </a:r>
+                      <a:endParaRPr lang="en-US" sz="1200" dirty="0">
+                        <a:latin typeface="Calibri" charset="0"/>
+                        <a:ea typeface="Calibri" charset="0"/>
+                        <a:cs typeface="Calibri" charset="0"/>
+                      </a:endParaRPr>
+                    </a:p>
+                  </a:txBody>
+                  <a:tcPr marL="91440" marR="91440" marT="45720" marB="45720">
+                    <a:lnL w="9525" cap="flat" cmpd="sng" algn="ctr">
+                      <a:solidFill>
+                        <a:srgbClr val="D5DDE3"/>
+                      </a:solidFill>
+                      <a:prstDash val="solid"/>
+                      <a:round/>
+                      <a:headEnd type="none" w="med" len="med"/>
+                      <a:tailEnd type="none" w="med" len="med"/>
+                    </a:lnL>
+                    <a:lnR w="9525" cap="flat" cmpd="sng" algn="ctr">
+                      <a:solidFill>
+                        <a:srgbClr val="D5DDE3"/>
+                      </a:solidFill>
+                      <a:prstDash val="solid"/>
+                      <a:round/>
+                      <a:headEnd type="none" w="med" len="med"/>
+                      <a:tailEnd type="none" w="med" len="med"/>
+                    </a:lnR>
+                    <a:lnT w="9525" cap="flat" cmpd="sng" algn="ctr">
+                      <a:solidFill>
+                        <a:srgbClr val="D5DDE3"/>
+                      </a:solidFill>
+                      <a:prstDash val="solid"/>
+                      <a:round/>
+                      <a:headEnd type="none" w="med" len="med"/>
+                      <a:tailEnd type="none" w="med" len="med"/>
+                    </a:lnT>
+                    <a:lnB w="9525" cap="flat" cmpd="sng" algn="ctr">
+                      <a:solidFill>
+                        <a:srgbClr val="D5DDE3"/>
+                      </a:solidFill>
+                      <a:prstDash val="solid"/>
+                      <a:round/>
+                      <a:headEnd type="none" w="med" len="med"/>
+                      <a:tailEnd type="none" w="med" len="med"/>
+                    </a:lnB>
+                  </a:tcPr>
+                </a:tc>
+                <a:tc>
+                  <a:txBody>
+                    <a:bodyPr/>
+                    <a:lstStyle/>
+                    <a:p>
+                      <a:pPr algn="ctr" indent="0" marL="0">
+                        <a:buNone/>
+                      </a:pPr>
+                      <a:r>
+                        <a:rPr lang="en-US" sz="1200" dirty="0">
+                          <a:solidFill>
+                            <a:srgbClr val="1B2A38"/>
+                          </a:solidFill>
+                          <a:latin typeface="Calibri" pitchFamily="34" charset="0"/>
+                          <a:ea typeface="Calibri" pitchFamily="34" charset="-122"/>
+                          <a:cs typeface="Calibri" pitchFamily="34" charset="-120"/>
+                        </a:rPr>
+                        <a:t>&lt;= 0.04</a:t>
+                      </a:r>
+                      <a:endParaRPr lang="en-US" sz="1200" dirty="0">
+                        <a:latin typeface="Calibri" charset="0"/>
+                        <a:ea typeface="Calibri" charset="0"/>
+                        <a:cs typeface="Calibri" charset="0"/>
+                      </a:endParaRPr>
+                    </a:p>
+                  </a:txBody>
+                  <a:tcPr marL="91440" marR="91440" marT="45720" marB="45720">
+                    <a:lnL w="9525" cap="flat" cmpd="sng" algn="ctr">
+                      <a:solidFill>
+                        <a:srgbClr val="D5DDE3"/>
+                      </a:solidFill>
+                      <a:prstDash val="solid"/>
+                      <a:round/>
+                      <a:headEnd type="none" w="med" len="med"/>
+                      <a:tailEnd type="none" w="med" len="med"/>
+                    </a:lnL>
+                    <a:lnR w="9525" cap="flat" cmpd="sng" algn="ctr">
+                      <a:solidFill>
+                        <a:srgbClr val="D5DDE3"/>
+                      </a:solidFill>
+                      <a:prstDash val="solid"/>
+                      <a:round/>
+                      <a:headEnd type="none" w="med" len="med"/>
+                      <a:tailEnd type="none" w="med" len="med"/>
+                    </a:lnR>
+                    <a:lnT w="9525" cap="flat" cmpd="sng" algn="ctr">
+                      <a:solidFill>
+                        <a:srgbClr val="D5DDE3"/>
+                      </a:solidFill>
+                      <a:prstDash val="solid"/>
+                      <a:round/>
+                      <a:headEnd type="none" w="med" len="med"/>
+                      <a:tailEnd type="none" w="med" len="med"/>
+                    </a:lnT>
+                    <a:lnB w="9525" cap="flat" cmpd="sng" algn="ctr">
+                      <a:solidFill>
+                        <a:srgbClr val="D5DDE3"/>
+                      </a:solidFill>
+                      <a:prstDash val="solid"/>
+                      <a:round/>
+                      <a:headEnd type="none" w="med" len="med"/>
+                      <a:tailEnd type="none" w="med" len="med"/>
+                    </a:lnB>
+                  </a:tcPr>
+                </a:tc>
+                <a:tc>
+                  <a:txBody>
+                    <a:bodyPr/>
+                    <a:lstStyle/>
+                    <a:p>
+                      <a:pPr algn="ctr" indent="0" marL="0">
+                        <a:buNone/>
+                      </a:pPr>
+                      <a:r>
+                        <a:rPr lang="en-US" sz="1200" dirty="0">
+                          <a:solidFill>
+                            <a:srgbClr val="1B2A38"/>
+                          </a:solidFill>
+                          <a:latin typeface="Calibri" pitchFamily="34" charset="0"/>
+                          <a:ea typeface="Calibri" pitchFamily="34" charset="-122"/>
+                          <a:cs typeface="Calibri" pitchFamily="34" charset="-120"/>
+                        </a:rPr>
+                        <a:t>0.36-0.48</a:t>
+                      </a:r>
+                      <a:endParaRPr lang="en-US" sz="1200" dirty="0">
+                        <a:latin typeface="Calibri" charset="0"/>
+                        <a:ea typeface="Calibri" charset="0"/>
+                        <a:cs typeface="Calibri" charset="0"/>
+                      </a:endParaRPr>
+                    </a:p>
+                  </a:txBody>
+                  <a:tcPr marL="91440" marR="91440" marT="45720" marB="45720">
+                    <a:lnL w="9525" cap="flat" cmpd="sng" algn="ctr">
+                      <a:solidFill>
+                        <a:srgbClr val="D5DDE3"/>
+                      </a:solidFill>
+                      <a:prstDash val="solid"/>
+                      <a:round/>
+                      <a:headEnd type="none" w="med" len="med"/>
+                      <a:tailEnd type="none" w="med" len="med"/>
+                    </a:lnL>
+                    <a:lnR w="9525" cap="flat" cmpd="sng" algn="ctr">
+                      <a:solidFill>
+                        <a:srgbClr val="D5DDE3"/>
+                      </a:solidFill>
+                      <a:prstDash val="solid"/>
+                      <a:round/>
+                      <a:headEnd type="none" w="med" len="med"/>
+                      <a:tailEnd type="none" w="med" len="med"/>
+                    </a:lnR>
+                    <a:lnT w="9525" cap="flat" cmpd="sng" algn="ctr">
+                      <a:solidFill>
+                        <a:srgbClr val="D5DDE3"/>
+                      </a:solidFill>
+                      <a:prstDash val="solid"/>
+                      <a:round/>
+                      <a:headEnd type="none" w="med" len="med"/>
+                      <a:tailEnd type="none" w="med" len="med"/>
+                    </a:lnT>
+                    <a:lnB w="9525" cap="flat" cmpd="sng" algn="ctr">
+                      <a:solidFill>
+                        <a:srgbClr val="D5DDE3"/>
+                      </a:solidFill>
+                      <a:prstDash val="solid"/>
+                      <a:round/>
+                      <a:headEnd type="none" w="med" len="med"/>
+                      <a:tailEnd type="none" w="med" len="med"/>
+                    </a:lnB>
+                  </a:tcPr>
+                </a:tc>
+              </a:tr>
+            </a:tbl>
+          </a:graphicData>
+        </a:graphic>
+      </p:graphicFrame>
+      <p:sp>
+        <p:nvSpPr>
+          <p:cNvPr id="4" name="Text 1"/>
+          <p:cNvSpPr txBox="1"/>
+          <p:nvPr/>
+        </p:nvSpPr>
+        <p:spPr>
+          <a:xfrm>
+            <a:off x="548640" y="3429000"/>
+            <a:ext cx="8046720" cy="548640"/>
+          </a:xfrm>
+          <a:prstGeom prst="rect">
+            <a:avLst/>
+          </a:prstGeom>
+          <a:noFill/>
+          <a:ln/>
+        </p:spPr>
+        <p:txBody>
+          <a:bodyPr wrap="square" lIns="0" tIns="0" rIns="0" bIns="0" rtlCol="0" anchor="t"/>
+          <a:lstStyle/>
+          <a:p>
+            <a:pPr indent="0" marL="0">
+              <a:buNone/>
+            </a:pPr>
+            <a:r>
+              <a:rPr lang="en-US" sz="1300" dirty="0">
+                <a:solidFill>
+                  <a:srgbClr val="1B2A38"/>
+                </a:solidFill>
+                <a:latin typeface="Calibri" pitchFamily="34" charset="0"/>
+                <a:ea typeface="Calibri" pitchFamily="34" charset="-122"/>
+                <a:cs typeface="Calibri" pitchFamily="34" charset="-120"/>
+              </a:rPr>
+              <a:t>Colluder recall at a matched 1% false-positive rate. Coordinated convoys also raised the first model's honest false-positive rate from 0.9% to 3.0%.</a:t>
+            </a:r>
+            <a:endParaRPr lang="en-US" sz="1300" dirty="0"/>
+          </a:p>
+        </p:txBody>
+      </p:sp>
+      <p:sp>
+        <p:nvSpPr>
+          <p:cNvPr id="5" name="Text 2"/>
+          <p:cNvSpPr txBox="1"/>
+          <p:nvPr/>
+        </p:nvSpPr>
+        <p:spPr>
+          <a:xfrm>
+            <a:off x="548640" y="3977640"/>
+            <a:ext cx="8046720" cy="548640"/>
+          </a:xfrm>
+          <a:prstGeom prst="rect">
+            <a:avLst/>
+          </a:prstGeom>
+          <a:noFill/>
+          <a:ln/>
+        </p:spPr>
+        <p:txBody>
+          <a:bodyPr wrap="square" lIns="0" tIns="0" rIns="0" bIns="0" rtlCol="0" anchor="t"/>
+          <a:lstStyle/>
+          <a:p>
+            <a:pPr indent="0" marL="0">
+              <a:buNone/>
+            </a:pPr>
+            <a:r>
+              <a:rPr lang="en-US" sz="1300" b="1" dirty="0">
+                <a:solidFill>
+                  <a:srgbClr val="C0392B"/>
+                </a:solidFill>
+                <a:latin typeface="Calibri" pitchFamily="34" charset="0"/>
+                <a:ea typeface="Calibri" pitchFamily="34" charset="-122"/>
+                <a:cs typeface="Calibri" pitchFamily="34" charset="-120"/>
+              </a:rPr>
+              <a:t>Lies that stay on the road map are still hard: they need an independent signal (signal strength, sensors, roadside units).</a:t>
+            </a:r>
+            <a:endParaRPr lang="en-US" sz="1300" dirty="0"/>
+          </a:p>
+        </p:txBody>
+      </p:sp>
+    </p:spTree>
+  </p:cSld>
+  <p:clrMapOvr>
+    <a:masterClrMapping/>
+  </p:clrMapOvr>
+</p:sld>
+</file>
+
+<file path=ppt/slides/slide8.xml><?xml version="1.0" encoding="utf-8"?>
+<p:sld xmlns:a="http://schemas.openxmlformats.org/drawingml/2006/main" xmlns:r="http://schemas.openxmlformats.org/officeDocument/2006/relationships" xmlns:p="http://schemas.openxmlformats.org/presentationml/2006/main">
+  <p:cSld name="Slide 8">
+    <p:bg>
+      <p:bgPr>
+        <a:solidFill>
+          <a:srgbClr val="FFFFFF"/>
+        </a:solidFill>
+      </p:bgPr>
+    </p:bg>
+    <p:spTree>
+      <p:nvGrpSpPr>
+        <p:cNvPr id="1" name=""/>
+        <p:cNvGrpSpPr/>
+        <p:nvPr/>
+      </p:nvGrpSpPr>
+      <p:grpSpPr>
+        <a:xfrm>
+          <a:off x="0" y="0"/>
+          <a:ext cx="0" cy="0"/>
+          <a:chOff x="0" y="0"/>
+          <a:chExt cx="0" cy="0"/>
+        </a:xfrm>
+      </p:grpSpPr>
+      <p:sp>
+        <p:nvSpPr>
+          <p:cNvPr id="2" name="Text 0"/>
+          <p:cNvSpPr txBox="1"/>
+          <p:nvPr/>
+        </p:nvSpPr>
+        <p:spPr>
+          <a:xfrm>
+            <a:off x="548640" y="320040"/>
+            <a:ext cx="8046720" cy="640080"/>
+          </a:xfrm>
+          <a:prstGeom prst="rect">
+            <a:avLst/>
+          </a:prstGeom>
+          <a:noFill/>
+          <a:ln/>
+        </p:spPr>
+        <p:txBody>
+          <a:bodyPr wrap="square" lIns="0" tIns="0" rIns="0" bIns="0" rtlCol="0" anchor="ctr"/>
+          <a:lstStyle/>
+          <a:p>
+            <a:pPr indent="0" marL="0">
+              <a:buNone/>
+            </a:pPr>
+            <a:r>
+              <a:rPr lang="en-US" sz="3000" b="1" dirty="0">
+                <a:solidFill>
+                  <a:srgbClr val="0B1F33"/>
+                </a:solidFill>
+                <a:latin typeface="Cambria" pitchFamily="34" charset="0"/>
+                <a:ea typeface="Cambria" pitchFamily="34" charset="-122"/>
+                <a:cs typeface="Cambria" pitchFamily="34" charset="-120"/>
+              </a:rPr>
+              <a:t>Against the reference paper</a:t>
+            </a:r>
+            <a:endParaRPr lang="en-US" sz="3000" dirty="0"/>
           </a:p>
         </p:txBody>
       </p:sp>
@@ -5473,8 +8241,8 @@
         </p:nvSpPr>
         <p:spPr>
           <a:xfrm>
-            <a:off x="6035040" y="1188720"/>
-            <a:ext cx="2651760" cy="1737360"/>
+            <a:off x="6035040" y="1097280"/>
+            <a:ext cx="2651760" cy="1371600"/>
           </a:xfrm>
           <a:prstGeom prst="rect">
             <a:avLst/>
@@ -5490,7 +8258,7 @@
               <a:buNone/>
             </a:pPr>
             <a:r>
-              <a:rPr lang="en-US" sz="1400" dirty="0">
+              <a:rPr lang="en-US" sz="1200" dirty="0">
                 <a:solidFill>
                   <a:srgbClr val="1B2A38"/>
                 </a:solidFill>
@@ -5498,9 +8266,9 @@
                 <a:ea typeface="Calibri" pitchFamily="34" charset="-122"/>
                 <a:cs typeface="Calibri" pitchFamily="34" charset="-120"/>
               </a:rPr>
-              <a:t>Recall barely moves, and false alarms do not rise, even when over half of the neighbours are attackers (0.971 vs 0.973 for the cleanest case).</a:t>
+              <a:t>Abdel Hakeem &amp; Kim, IEEE T-ITS 26(8), 2025 (survey), Table XIII: 97.37% for VeReMi, one number for accuracy, precision, recall and F1.</a:t>
             </a:r>
-            <a:endParaRPr lang="en-US" sz="1400" dirty="0"/>
+            <a:endParaRPr lang="en-US" sz="1200" dirty="0"/>
           </a:p>
         </p:txBody>
       </p:sp>
@@ -5512,8 +8280,8 @@
         </p:nvSpPr>
         <p:spPr>
           <a:xfrm>
-            <a:off x="6035040" y="3108960"/>
-            <a:ext cx="2651760" cy="1280160"/>
+            <a:off x="6035040" y="2560320"/>
+            <a:ext cx="2651760" cy="1828800"/>
           </a:xfrm>
           <a:prstGeom prst="rect">
             <a:avLst/>
@@ -5531,13 +8299,13 @@
             <a:r>
               <a:rPr lang="en-US" sz="1200" i="1" dirty="0">
                 <a:solidFill>
-                  <a:srgbClr val="5B6B7A"/>
+                  <a:srgbClr val="C0392B"/>
                 </a:solidFill>
                 <a:latin typeface="Calibri" pitchFamily="34" charset="0"/>
                 <a:ea typeface="Calibri" pitchFamily="34" charset="-122"/>
                 <a:cs typeface="Calibri" pitchFamily="34" charset="-120"/>
               </a:rPr>
-              <a:t>Caveat: attackers here act independently (about 30%). Colluding attackers, and crash intent, are not modelled in VeReMi.</a:t>
+              <a:t>Not like-for-like: that figure is on the original VeReMi (5 attacks) and its source is not cited. Under vehicle labels our recall (96.09) and F1 (97.12) are below it.</a:t>
             </a:r>
             <a:endParaRPr lang="en-US" sz="1200" dirty="0"/>
           </a:p>
@@ -5551,9 +8319,9 @@
 </p:sld>
 </file>
 
-<file path=ppt/slides/slide8.xml><?xml version="1.0" encoding="utf-8"?>
+<file path=ppt/slides/slide9.xml><?xml version="1.0" encoding="utf-8"?>
 <p:sld xmlns:a="http://schemas.openxmlformats.org/drawingml/2006/main" xmlns:r="http://schemas.openxmlformats.org/officeDocument/2006/relationships" xmlns:p="http://schemas.openxmlformats.org/presentationml/2006/main">
-  <p:cSld name="Slide 8">
+  <p:cSld name="Slide 9">
     <p:bg>
       <p:bgPr>
         <a:solidFill>
@@ -5600,7 +8368,7 @@
               <a:buNone/>
             </a:pPr>
             <a:r>
-              <a:rPr lang="en-US" sz="3200" b="1" dirty="0">
+              <a:rPr lang="en-US" sz="3000" b="1" dirty="0">
                 <a:solidFill>
                   <a:srgbClr val="FFFFFF"/>
                 </a:solidFill>
@@ -5608,9 +8376,9 @@
                 <a:ea typeface="Cambria" pitchFamily="34" charset="-122"/>
                 <a:cs typeface="Cambria" pitchFamily="34" charset="-120"/>
               </a:rPr>
-              <a:t>What is left</a:t>
+              <a:t>Open items and next steps</a:t>
             </a:r>
-            <a:endParaRPr lang="en-US" sz="3200" dirty="0"/>
+            <a:endParaRPr lang="en-US" sz="3000" dirty="0"/>
           </a:p>
         </p:txBody>
       </p:sp>
@@ -5623,7 +8391,7 @@
         <p:spPr>
           <a:xfrm>
             <a:off x="548640" y="1188720"/>
-            <a:ext cx="8046720" cy="3108960"/>
+            <a:ext cx="8046720" cy="3291840"/>
           </a:xfrm>
           <a:prstGeom prst="rect">
             <a:avLst/>
@@ -5651,7 +8419,7 @@
                 <a:ea typeface="Calibri" pitchFamily="34" charset="-122"/>
                 <a:cs typeface="Calibri" pitchFamily="34" charset="-120"/>
               </a:rPr>
-              <a:t>Add more attack types: position offsets, DoS, Sybil (2 of about 20 so far)</a:t>
+              <a:t>Sybil attacks (not covered yet)</a:t>
             </a:r>
             <a:endParaRPr lang="en-US" sz="1800" dirty="0"/>
           </a:p>
@@ -5672,7 +8440,7 @@
                 <a:ea typeface="Calibri" pitchFamily="34" charset="-122"/>
                 <a:cs typeface="Calibri" pitchFamily="34" charset="-120"/>
               </a:rPr>
-              <a:t>Rerun domain-transfer experiment on the benchmark</a:t>
+              <a:t>Check on original VeReMi and VeReMi NextGen</a:t>
             </a:r>
             <a:endParaRPr lang="en-US" sz="1800" dirty="0"/>
           </a:p>
@@ -5693,7 +8461,7 @@
                 <a:ea typeface="Calibri" pitchFamily="34" charset="-122"/>
                 <a:cs typeface="Calibri" pitchFamily="34" charset="-120"/>
               </a:rPr>
-              <a:t>Test colluding attackers and the spoofed-approach (crash) scenario</a:t>
+              <a:t>Run v2 on dense traffic; add a 3rd seed</a:t>
             </a:r>
             <a:endParaRPr lang="en-US" sz="1800" dirty="0"/>
           </a:p>
@@ -5714,7 +8482,28 @@
                 <a:ea typeface="Calibri" pitchFamily="34" charset="-122"/>
                 <a:cs typeface="Calibri" pitchFamily="34" charset="-120"/>
               </a:rPr>
-              <a:t>Update paper text and tables to the real results</a:t>
+              <a:t>On-road consistent lies need an independent signal: signal strength, on-board sensors, roadside units</a:t>
+            </a:r>
+            <a:endParaRPr lang="en-US" sz="1800" dirty="0"/>
+          </a:p>
+          <a:p>
+            <a:pPr marL="342900" indent="-342900">
+              <a:spcAft>
+                <a:spcPts val="1000"/>
+              </a:spcAft>
+              <a:buSzPct val="100000"/>
+              <a:buChar char="•"/>
+            </a:pPr>
+            <a:r>
+              <a:rPr lang="en-US" sz="1800" dirty="0">
+                <a:solidFill>
+                  <a:srgbClr val="FFFFFF"/>
+                </a:solidFill>
+                <a:latin typeface="Calibri" pitchFamily="34" charset="0"/>
+                <a:ea typeface="Calibri" pitchFamily="34" charset="-122"/>
+                <a:cs typeface="Calibri" pitchFamily="34" charset="-120"/>
+              </a:rPr>
+              <a:t>Paper done: paper/main.pdf, IEEE conference format, 6 pages, 18 references</a:t>
             </a:r>
             <a:endParaRPr lang="en-US" sz="1800" dirty="0"/>
           </a:p>

--- a/presentation/progress_update.pptx
+++ b/presentation/progress_update.pptx
@@ -14,9 +14,10 @@
     <p:sldId id="262" r:id="rId8"/>
     <p:sldId id="263" r:id="rId9"/>
     <p:sldId id="264" r:id="rId10"/>
+    <p:sldId id="265" r:id="rId11"/>
   </p:sldIdLst>
   <p:notesMasterIdLst>
-    <p:notesMasterId r:id="rId11"/>
+    <p:notesMasterId r:id="rId12"/>
   </p:notesMasterIdLst>
   <p:sldSz cx="9144000" cy="5143500"/>
   <p:notesSz cx="5143500" cy="9144000"/>
@@ -908,6 +909,94 @@
 </p:notes>
 </file>
 
+<file path=ppt/notesSlides/notesSlide10.xml><?xml version="1.0" encoding="utf-8"?>
+<p:notes xmlns:a="http://schemas.openxmlformats.org/drawingml/2006/main" xmlns:r="http://schemas.openxmlformats.org/officeDocument/2006/relationships" xmlns:p="http://schemas.openxmlformats.org/presentationml/2006/main">
+  <p:cSld>
+    <p:spTree>
+      <p:nvGrpSpPr>
+        <p:cNvPr id="1" name=""/>
+        <p:cNvGrpSpPr/>
+        <p:nvPr/>
+      </p:nvGrpSpPr>
+      <p:grpSpPr>
+        <a:xfrm>
+          <a:off x="0" y="0"/>
+          <a:ext cx="0" cy="0"/>
+          <a:chOff x="0" y="0"/>
+          <a:chExt cx="0" cy="0"/>
+        </a:xfrm>
+      </p:grpSpPr>
+      <p:sp>
+        <p:nvSpPr>
+          <p:cNvPr id="2" name="Slide Image Placeholder 1"/>
+          <p:cNvSpPr>
+            <a:spLocks noGrp="1" noRot="1" noChangeAspect="1"/>
+          </p:cNvSpPr>
+          <p:nvPr>
+            <p:ph type="sldImg"/>
+          </p:nvPr>
+        </p:nvSpPr>
+        <p:spPr/>
+      </p:sp>
+      <p:sp>
+        <p:nvSpPr>
+          <p:cNvPr id="3" name="Notes Placeholder 2"/>
+          <p:cNvSpPr>
+            <a:spLocks noGrp="1"/>
+          </p:cNvSpPr>
+          <p:nvPr>
+            <p:ph type="body" idx="1"/>
+          </p:nvPr>
+        </p:nvSpPr>
+        <p:spPr/>
+        <p:txBody>
+          <a:bodyPr/>
+          <a:lstStyle/>
+          <a:p>
+            <a:r>
+              <a:rPr lang="en-US" dirty="0"/>
+              <a:t/>
+            </a:r>
+            <a:endParaRPr lang="en-US" dirty="0"/>
+          </a:p>
+        </p:txBody>
+      </p:sp>
+      <p:sp>
+        <p:nvSpPr>
+          <p:cNvPr id="4" name="Slide Number Placeholder 3"/>
+          <p:cNvSpPr>
+            <a:spLocks noGrp="1"/>
+          </p:cNvSpPr>
+          <p:nvPr>
+            <p:ph type="sldNum" sz="quarter" idx="10"/>
+          </p:nvPr>
+        </p:nvSpPr>
+        <p:spPr/>
+        <p:txBody>
+          <a:bodyPr/>
+          <a:lstStyle/>
+          <a:p>
+            <a:fld id="{F7021451-1387-4CA6-816F-3879F97B5CBC}" type="slidenum">
+              <a:rPr lang="en-US"/>
+              <a:t>10</a:t>
+            </a:fld>
+            <a:endParaRPr lang="en-US"/>
+          </a:p>
+        </p:txBody>
+      </p:sp>
+    </p:spTree>
+    <p:extLst>
+      <p:ext uri="{BB962C8B-B14F-4D97-AF65-F5344CB8AC3E}">
+        <p14:creationId xmlns:p14="http://schemas.microsoft.com/office/powerpoint/2010/main" val="1024086991"/>
+      </p:ext>
+    </p:extLst>
+  </p:cSld>
+  <p:clrMapOvr>
+    <a:masterClrMapping/>
+  </p:clrMapOvr>
+</p:notes>
+</file>
+
 <file path=ppt/notesSlides/notesSlide2.xml><?xml version="1.0" encoding="utf-8"?>
 <p:notes xmlns:a="http://schemas.openxmlformats.org/drawingml/2006/main" xmlns:r="http://schemas.openxmlformats.org/officeDocument/2006/relationships" xmlns:p="http://schemas.openxmlformats.org/presentationml/2006/main">
   <p:cSld>
@@ -1482,7 +1571,7 @@
           <a:p>
             <a:r>
               <a:rPr lang="en-US" dirty="0"/>
-              <a:t>Report the comparison with its caveat; do not claim we beat the reference outright.</a:t>
+              <a:t>Report the comparison with its caveat; do not claim we beat the reference outright. This chart is the 14-attack system; on 18 attacks (with Sybil) all four numbers are below 97.37, see next slide.</a:t>
             </a:r>
             <a:endParaRPr lang="en-US" dirty="0"/>
           </a:p>
@@ -1570,7 +1659,7 @@
           <a:p>
             <a:r>
               <a:rPr lang="en-US" dirty="0"/>
-              <a:t/>
+              <a:t>The 14-attack results are unchanged. Sybil makes the task harder: fake identities are separate senders. On the 14 original attack runs this model's FPR is 1.6% (vs 0.6% for the 14-attack model) because it lowers its threshold to catch ghosts. A bigger model alone and receiver memory did not help.</a:t>
             </a:r>
             <a:endParaRPr lang="en-US" dirty="0"/>
           </a:p>
@@ -2015,7 +2104,7 @@
                 <a:ea typeface="Calibri" pitchFamily="34" charset="-122"/>
                 <a:cs typeface="Calibri" pitchFamily="34" charset="-120"/>
               </a:rPr>
-              <a:t>Final results on 14 attack types</a:t>
+              <a:t>Final results on 14 attack types, extended to 18 with Sybil</a:t>
             </a:r>
             <a:endParaRPr lang="en-US" sz="2000" dirty="0"/>
           </a:p>
@@ -2057,6 +2146,204 @@
               <a:t>Evaluated on the VeReMi Extension benchmark (simulated traffic, Zenodo 20090854)</a:t>
             </a:r>
             <a:endParaRPr lang="en-US" sz="1500" dirty="0"/>
+          </a:p>
+        </p:txBody>
+      </p:sp>
+    </p:spTree>
+  </p:cSld>
+  <p:clrMapOvr>
+    <a:masterClrMapping/>
+  </p:clrMapOvr>
+</p:sld>
+</file>
+
+<file path=ppt/slides/slide10.xml><?xml version="1.0" encoding="utf-8"?>
+<p:sld xmlns:a="http://schemas.openxmlformats.org/drawingml/2006/main" xmlns:r="http://schemas.openxmlformats.org/officeDocument/2006/relationships" xmlns:p="http://schemas.openxmlformats.org/presentationml/2006/main">
+  <p:cSld name="Slide 10">
+    <p:bg>
+      <p:bgPr>
+        <a:solidFill>
+          <a:srgbClr val="0B1F33"/>
+        </a:solidFill>
+      </p:bgPr>
+    </p:bg>
+    <p:spTree>
+      <p:nvGrpSpPr>
+        <p:cNvPr id="1" name=""/>
+        <p:cNvGrpSpPr/>
+        <p:nvPr/>
+      </p:nvGrpSpPr>
+      <p:grpSpPr>
+        <a:xfrm>
+          <a:off x="0" y="0"/>
+          <a:ext cx="0" cy="0"/>
+          <a:chOff x="0" y="0"/>
+          <a:chExt cx="0" cy="0"/>
+        </a:xfrm>
+      </p:grpSpPr>
+      <p:sp>
+        <p:nvSpPr>
+          <p:cNvPr id="2" name="Text 0"/>
+          <p:cNvSpPr txBox="1"/>
+          <p:nvPr/>
+        </p:nvSpPr>
+        <p:spPr>
+          <a:xfrm>
+            <a:off x="548640" y="320040"/>
+            <a:ext cx="8046720" cy="640080"/>
+          </a:xfrm>
+          <a:prstGeom prst="rect">
+            <a:avLst/>
+          </a:prstGeom>
+          <a:noFill/>
+          <a:ln/>
+        </p:spPr>
+        <p:txBody>
+          <a:bodyPr wrap="square" lIns="0" tIns="0" rIns="0" bIns="0" rtlCol="0" anchor="ctr"/>
+          <a:lstStyle/>
+          <a:p>
+            <a:pPr indent="0" marL="0">
+              <a:buNone/>
+            </a:pPr>
+            <a:r>
+              <a:rPr lang="en-US" sz="3000" b="1" dirty="0">
+                <a:solidFill>
+                  <a:srgbClr val="FFFFFF"/>
+                </a:solidFill>
+                <a:latin typeface="Cambria" pitchFamily="34" charset="0"/>
+                <a:ea typeface="Cambria" pitchFamily="34" charset="-122"/>
+                <a:cs typeface="Cambria" pitchFamily="34" charset="-120"/>
+              </a:rPr>
+              <a:t>Open items and next steps</a:t>
+            </a:r>
+            <a:endParaRPr lang="en-US" sz="3000" dirty="0"/>
+          </a:p>
+        </p:txBody>
+      </p:sp>
+      <p:sp>
+        <p:nvSpPr>
+          <p:cNvPr id="3" name="Text 1"/>
+          <p:cNvSpPr txBox="1"/>
+          <p:nvPr/>
+        </p:nvSpPr>
+        <p:spPr>
+          <a:xfrm>
+            <a:off x="548640" y="1188720"/>
+            <a:ext cx="8046720" cy="3291840"/>
+          </a:xfrm>
+          <a:prstGeom prst="rect">
+            <a:avLst/>
+          </a:prstGeom>
+          <a:noFill/>
+          <a:ln/>
+        </p:spPr>
+        <p:txBody>
+          <a:bodyPr wrap="square" lIns="0" tIns="0" rIns="0" bIns="0" rtlCol="0" anchor="t"/>
+          <a:lstStyle/>
+          <a:p>
+            <a:pPr marL="342900" indent="-342900">
+              <a:spcAft>
+                <a:spcPts val="1000"/>
+              </a:spcAft>
+              <a:buSzPct val="100000"/>
+              <a:buChar char="•"/>
+            </a:pPr>
+            <a:r>
+              <a:rPr lang="en-US" sz="1800" dirty="0">
+                <a:solidFill>
+                  <a:srgbClr val="FFFFFF"/>
+                </a:solidFill>
+                <a:latin typeface="Calibri" pitchFamily="34" charset="0"/>
+                <a:ea typeface="Calibri" pitchFamily="34" charset="-122"/>
+                <a:cs typeface="Calibri" pitchFamily="34" charset="-120"/>
+              </a:rPr>
+              <a:t>GridSybil ghosts that look honest on every content check (recall 0.823)</a:t>
+            </a:r>
+            <a:endParaRPr lang="en-US" sz="1800" dirty="0"/>
+          </a:p>
+          <a:p>
+            <a:pPr marL="342900" indent="-342900">
+              <a:spcAft>
+                <a:spcPts val="1000"/>
+              </a:spcAft>
+              <a:buSzPct val="100000"/>
+              <a:buChar char="•"/>
+            </a:pPr>
+            <a:r>
+              <a:rPr lang="en-US" sz="1800" dirty="0">
+                <a:solidFill>
+                  <a:srgbClr val="FFFFFF"/>
+                </a:solidFill>
+                <a:latin typeface="Calibri" pitchFamily="34" charset="0"/>
+                <a:ea typeface="Calibri" pitchFamily="34" charset="-122"/>
+                <a:cs typeface="Calibri" pitchFamily="34" charset="-120"/>
+              </a:rPr>
+              <a:t>Check on original VeReMi and VeReMi NextGen</a:t>
+            </a:r>
+            <a:endParaRPr lang="en-US" sz="1800" dirty="0"/>
+          </a:p>
+          <a:p>
+            <a:pPr marL="342900" indent="-342900">
+              <a:spcAft>
+                <a:spcPts val="1000"/>
+              </a:spcAft>
+              <a:buSzPct val="100000"/>
+              <a:buChar char="•"/>
+            </a:pPr>
+            <a:r>
+              <a:rPr lang="en-US" sz="1800" dirty="0">
+                <a:solidFill>
+                  <a:srgbClr val="FFFFFF"/>
+                </a:solidFill>
+                <a:latin typeface="Calibri" pitchFamily="34" charset="0"/>
+                <a:ea typeface="Calibri" pitchFamily="34" charset="-122"/>
+                <a:cs typeface="Calibri" pitchFamily="34" charset="-120"/>
+              </a:rPr>
+              <a:t>Run v2 on dense traffic; add a 3rd seed</a:t>
+            </a:r>
+            <a:endParaRPr lang="en-US" sz="1800" dirty="0"/>
+          </a:p>
+          <a:p>
+            <a:pPr marL="342900" indent="-342900">
+              <a:spcAft>
+                <a:spcPts val="1000"/>
+              </a:spcAft>
+              <a:buSzPct val="100000"/>
+              <a:buChar char="•"/>
+            </a:pPr>
+            <a:r>
+              <a:rPr lang="en-US" sz="1800" dirty="0">
+                <a:solidFill>
+                  <a:srgbClr val="FFFFFF"/>
+                </a:solidFill>
+                <a:latin typeface="Calibri" pitchFamily="34" charset="0"/>
+                <a:ea typeface="Calibri" pitchFamily="34" charset="-122"/>
+                <a:cs typeface="Calibri" pitchFamily="34" charset="-120"/>
+              </a:rPr>
+              <a:t>On-road consistent lies need an independent signal: signal strength, on-board sensors, roadside units</a:t>
+            </a:r>
+            <a:endParaRPr lang="en-US" sz="1800" dirty="0"/>
+          </a:p>
+          <a:p>
+            <a:pPr marL="342900" indent="-342900">
+              <a:spcAft>
+                <a:spcPts val="1000"/>
+              </a:spcAft>
+              <a:buSzPct val="100000"/>
+              <a:buChar char="•"/>
+            </a:pPr>
+            <a:r>
+              <a:rPr lang="en-US" sz="1800" dirty="0">
+                <a:solidFill>
+                  <a:srgbClr val="FFFFFF"/>
+                </a:solidFill>
+                <a:latin typeface="Calibri" pitchFamily="34" charset="0"/>
+                <a:ea typeface="Calibri" pitchFamily="34" charset="-122"/>
+                <a:cs typeface="Calibri" pitchFamily="34" charset="-120"/>
+              </a:rPr>
+              <a:t>Paper done: paper/main.pdf, IEEE conference format, 6 pages, 18 references</a:t>
+            </a:r>
+            <a:endParaRPr lang="en-US" sz="1800" dirty="0"/>
           </a:p>
         </p:txBody>
       </p:sp>
@@ -2548,7 +2835,7 @@
                 <a:ea typeface="Calibri" pitchFamily="34" charset="-122"/>
                 <a:cs typeface="Calibri" pitchFamily="34" charset="-120"/>
               </a:rPr>
-              <a:t>VeReMi Extension: 14 of 19 attack types (no Sybil; RandomSpeedOffset archive excluded as mislabeled)</a:t>
+              <a:t>VeReMi Extension: 14 of 19 attack types for the main results; extended to 18 of 19 with the four Sybil attacks (RandomSpeedOffset archive excluded as mislabeled)</a:t>
             </a:r>
             <a:endParaRPr lang="en-US" sz="1300" dirty="0"/>
           </a:p>
@@ -8325,7 +8612,7 @@
     <p:bg>
       <p:bgPr>
         <a:solidFill>
-          <a:srgbClr val="0B1F33"/>
+          <a:srgbClr val="FFFFFF"/>
         </a:solidFill>
       </p:bgPr>
     </p:bg>
@@ -8370,28 +8657,2080 @@
             <a:r>
               <a:rPr lang="en-US" sz="3000" b="1" dirty="0">
                 <a:solidFill>
-                  <a:srgbClr val="FFFFFF"/>
+                  <a:srgbClr val="0B1F33"/>
                 </a:solidFill>
                 <a:latin typeface="Cambria" pitchFamily="34" charset="0"/>
                 <a:ea typeface="Cambria" pitchFamily="34" charset="-122"/>
                 <a:cs typeface="Cambria" pitchFamily="34" charset="-120"/>
               </a:rPr>
-              <a:t>Open items and next steps</a:t>
+              <a:t>Extension: 18 attacks, including Sybil</a:t>
             </a:r>
             <a:endParaRPr lang="en-US" sz="3000" dirty="0"/>
           </a:p>
         </p:txBody>
       </p:sp>
+      <p:graphicFrame>
+        <p:nvGraphicFramePr>
+          <p:cNvPr id="10" name="Table 0"/>
+          <p:cNvGraphicFramePr>
+            <a:graphicFrameLocks noGrp="1"/>
+          </p:cNvGraphicFramePr>
+          <p:nvPr>
+            <p:extLst>
+              <p:ext uri="{D42A27DB-BD31-4B8C-83A1-F6EECF244321}">
+                <p14:modId xmlns:p14="http://schemas.microsoft.com/office/powerpoint/2010/main" val="1579011935"/>
+              </p:ext>
+            </p:extLst>
+          </p:nvPr>
+        </p:nvGraphicFramePr>
+        <p:xfrm>
+          <a:off x="548640" y="1051560"/>
+          <a:ext cx="5120640" cy="914400"/>
+        </p:xfrm>
+        <a:graphic>
+          <a:graphicData uri="http://schemas.openxmlformats.org/drawingml/2006/table">
+            <a:tbl>
+              <a:tblPr/>
+              <a:tblGrid>
+                <a:gridCol w="2194560"/>
+                <a:gridCol w="731520"/>
+                <a:gridCol w="731520"/>
+                <a:gridCol w="731520"/>
+                <a:gridCol w="731520"/>
+              </a:tblGrid>
+              <a:tr h="310896">
+                <a:tc>
+                  <a:txBody>
+                    <a:bodyPr/>
+                    <a:lstStyle/>
+                    <a:p>
+                      <a:pPr algn="ctr" indent="0" marL="0">
+                        <a:buNone/>
+                      </a:pPr>
+                      <a:r>
+                        <a:rPr lang="en-US" sz="1200" b="1" dirty="0">
+                          <a:solidFill>
+                            <a:srgbClr val="FFFFFF"/>
+                          </a:solidFill>
+                          <a:latin typeface="Calibri" pitchFamily="34" charset="0"/>
+                          <a:ea typeface="Calibri" pitchFamily="34" charset="-122"/>
+                          <a:cs typeface="Calibri" pitchFamily="34" charset="-120"/>
+                        </a:rPr>
+                        <a:t>18 attacks, 88,695 test windows</a:t>
+                      </a:r>
+                      <a:endParaRPr lang="en-US" sz="1200" dirty="0">
+                        <a:latin typeface="Calibri" charset="0"/>
+                        <a:ea typeface="Calibri" charset="0"/>
+                        <a:cs typeface="Calibri" charset="0"/>
+                      </a:endParaRPr>
+                    </a:p>
+                  </a:txBody>
+                  <a:tcPr marL="91440" marR="91440" marT="45720" marB="45720">
+                    <a:lnL w="9525" cap="flat" cmpd="sng" algn="ctr">
+                      <a:solidFill>
+                        <a:srgbClr val="D5DDE3"/>
+                      </a:solidFill>
+                      <a:prstDash val="solid"/>
+                      <a:round/>
+                      <a:headEnd type="none" w="med" len="med"/>
+                      <a:tailEnd type="none" w="med" len="med"/>
+                    </a:lnL>
+                    <a:lnR w="9525" cap="flat" cmpd="sng" algn="ctr">
+                      <a:solidFill>
+                        <a:srgbClr val="D5DDE3"/>
+                      </a:solidFill>
+                      <a:prstDash val="solid"/>
+                      <a:round/>
+                      <a:headEnd type="none" w="med" len="med"/>
+                      <a:tailEnd type="none" w="med" len="med"/>
+                    </a:lnR>
+                    <a:lnT w="9525" cap="flat" cmpd="sng" algn="ctr">
+                      <a:solidFill>
+                        <a:srgbClr val="D5DDE3"/>
+                      </a:solidFill>
+                      <a:prstDash val="solid"/>
+                      <a:round/>
+                      <a:headEnd type="none" w="med" len="med"/>
+                      <a:tailEnd type="none" w="med" len="med"/>
+                    </a:lnT>
+                    <a:lnB w="9525" cap="flat" cmpd="sng" algn="ctr">
+                      <a:solidFill>
+                        <a:srgbClr val="D5DDE3"/>
+                      </a:solidFill>
+                      <a:prstDash val="solid"/>
+                      <a:round/>
+                      <a:headEnd type="none" w="med" len="med"/>
+                      <a:tailEnd type="none" w="med" len="med"/>
+                    </a:lnB>
+                    <a:solidFill>
+                      <a:srgbClr val="0B1F33"/>
+                    </a:solidFill>
+                  </a:tcPr>
+                </a:tc>
+                <a:tc>
+                  <a:txBody>
+                    <a:bodyPr/>
+                    <a:lstStyle/>
+                    <a:p>
+                      <a:pPr algn="ctr" indent="0" marL="0">
+                        <a:buNone/>
+                      </a:pPr>
+                      <a:r>
+                        <a:rPr lang="en-US" sz="1200" b="1" dirty="0">
+                          <a:solidFill>
+                            <a:srgbClr val="FFFFFF"/>
+                          </a:solidFill>
+                          <a:latin typeface="Calibri" pitchFamily="34" charset="0"/>
+                          <a:ea typeface="Calibri" pitchFamily="34" charset="-122"/>
+                          <a:cs typeface="Calibri" pitchFamily="34" charset="-120"/>
+                        </a:rPr>
+                        <a:t>Precision</a:t>
+                      </a:r>
+                      <a:endParaRPr lang="en-US" sz="1200" dirty="0">
+                        <a:latin typeface="Calibri" charset="0"/>
+                        <a:ea typeface="Calibri" charset="0"/>
+                        <a:cs typeface="Calibri" charset="0"/>
+                      </a:endParaRPr>
+                    </a:p>
+                  </a:txBody>
+                  <a:tcPr marL="91440" marR="91440" marT="45720" marB="45720">
+                    <a:lnL w="9525" cap="flat" cmpd="sng" algn="ctr">
+                      <a:solidFill>
+                        <a:srgbClr val="D5DDE3"/>
+                      </a:solidFill>
+                      <a:prstDash val="solid"/>
+                      <a:round/>
+                      <a:headEnd type="none" w="med" len="med"/>
+                      <a:tailEnd type="none" w="med" len="med"/>
+                    </a:lnL>
+                    <a:lnR w="9525" cap="flat" cmpd="sng" algn="ctr">
+                      <a:solidFill>
+                        <a:srgbClr val="D5DDE3"/>
+                      </a:solidFill>
+                      <a:prstDash val="solid"/>
+                      <a:round/>
+                      <a:headEnd type="none" w="med" len="med"/>
+                      <a:tailEnd type="none" w="med" len="med"/>
+                    </a:lnR>
+                    <a:lnT w="9525" cap="flat" cmpd="sng" algn="ctr">
+                      <a:solidFill>
+                        <a:srgbClr val="D5DDE3"/>
+                      </a:solidFill>
+                      <a:prstDash val="solid"/>
+                      <a:round/>
+                      <a:headEnd type="none" w="med" len="med"/>
+                      <a:tailEnd type="none" w="med" len="med"/>
+                    </a:lnT>
+                    <a:lnB w="9525" cap="flat" cmpd="sng" algn="ctr">
+                      <a:solidFill>
+                        <a:srgbClr val="D5DDE3"/>
+                      </a:solidFill>
+                      <a:prstDash val="solid"/>
+                      <a:round/>
+                      <a:headEnd type="none" w="med" len="med"/>
+                      <a:tailEnd type="none" w="med" len="med"/>
+                    </a:lnB>
+                    <a:solidFill>
+                      <a:srgbClr val="0B1F33"/>
+                    </a:solidFill>
+                  </a:tcPr>
+                </a:tc>
+                <a:tc>
+                  <a:txBody>
+                    <a:bodyPr/>
+                    <a:lstStyle/>
+                    <a:p>
+                      <a:pPr algn="ctr" indent="0" marL="0">
+                        <a:buNone/>
+                      </a:pPr>
+                      <a:r>
+                        <a:rPr lang="en-US" sz="1200" b="1" dirty="0">
+                          <a:solidFill>
+                            <a:srgbClr val="FFFFFF"/>
+                          </a:solidFill>
+                          <a:latin typeface="Calibri" pitchFamily="34" charset="0"/>
+                          <a:ea typeface="Calibri" pitchFamily="34" charset="-122"/>
+                          <a:cs typeface="Calibri" pitchFamily="34" charset="-120"/>
+                        </a:rPr>
+                        <a:t>Recall</a:t>
+                      </a:r>
+                      <a:endParaRPr lang="en-US" sz="1200" dirty="0">
+                        <a:latin typeface="Calibri" charset="0"/>
+                        <a:ea typeface="Calibri" charset="0"/>
+                        <a:cs typeface="Calibri" charset="0"/>
+                      </a:endParaRPr>
+                    </a:p>
+                  </a:txBody>
+                  <a:tcPr marL="91440" marR="91440" marT="45720" marB="45720">
+                    <a:lnL w="9525" cap="flat" cmpd="sng" algn="ctr">
+                      <a:solidFill>
+                        <a:srgbClr val="D5DDE3"/>
+                      </a:solidFill>
+                      <a:prstDash val="solid"/>
+                      <a:round/>
+                      <a:headEnd type="none" w="med" len="med"/>
+                      <a:tailEnd type="none" w="med" len="med"/>
+                    </a:lnL>
+                    <a:lnR w="9525" cap="flat" cmpd="sng" algn="ctr">
+                      <a:solidFill>
+                        <a:srgbClr val="D5DDE3"/>
+                      </a:solidFill>
+                      <a:prstDash val="solid"/>
+                      <a:round/>
+                      <a:headEnd type="none" w="med" len="med"/>
+                      <a:tailEnd type="none" w="med" len="med"/>
+                    </a:lnR>
+                    <a:lnT w="9525" cap="flat" cmpd="sng" algn="ctr">
+                      <a:solidFill>
+                        <a:srgbClr val="D5DDE3"/>
+                      </a:solidFill>
+                      <a:prstDash val="solid"/>
+                      <a:round/>
+                      <a:headEnd type="none" w="med" len="med"/>
+                      <a:tailEnd type="none" w="med" len="med"/>
+                    </a:lnT>
+                    <a:lnB w="9525" cap="flat" cmpd="sng" algn="ctr">
+                      <a:solidFill>
+                        <a:srgbClr val="D5DDE3"/>
+                      </a:solidFill>
+                      <a:prstDash val="solid"/>
+                      <a:round/>
+                      <a:headEnd type="none" w="med" len="med"/>
+                      <a:tailEnd type="none" w="med" len="med"/>
+                    </a:lnB>
+                    <a:solidFill>
+                      <a:srgbClr val="0B1F33"/>
+                    </a:solidFill>
+                  </a:tcPr>
+                </a:tc>
+                <a:tc>
+                  <a:txBody>
+                    <a:bodyPr/>
+                    <a:lstStyle/>
+                    <a:p>
+                      <a:pPr algn="ctr" indent="0" marL="0">
+                        <a:buNone/>
+                      </a:pPr>
+                      <a:r>
+                        <a:rPr lang="en-US" sz="1200" b="1" dirty="0">
+                          <a:solidFill>
+                            <a:srgbClr val="FFFFFF"/>
+                          </a:solidFill>
+                          <a:latin typeface="Calibri" pitchFamily="34" charset="0"/>
+                          <a:ea typeface="Calibri" pitchFamily="34" charset="-122"/>
+                          <a:cs typeface="Calibri" pitchFamily="34" charset="-120"/>
+                        </a:rPr>
+                        <a:t>F1</a:t>
+                      </a:r>
+                      <a:endParaRPr lang="en-US" sz="1200" dirty="0">
+                        <a:latin typeface="Calibri" charset="0"/>
+                        <a:ea typeface="Calibri" charset="0"/>
+                        <a:cs typeface="Calibri" charset="0"/>
+                      </a:endParaRPr>
+                    </a:p>
+                  </a:txBody>
+                  <a:tcPr marL="91440" marR="91440" marT="45720" marB="45720">
+                    <a:lnL w="9525" cap="flat" cmpd="sng" algn="ctr">
+                      <a:solidFill>
+                        <a:srgbClr val="D5DDE3"/>
+                      </a:solidFill>
+                      <a:prstDash val="solid"/>
+                      <a:round/>
+                      <a:headEnd type="none" w="med" len="med"/>
+                      <a:tailEnd type="none" w="med" len="med"/>
+                    </a:lnL>
+                    <a:lnR w="9525" cap="flat" cmpd="sng" algn="ctr">
+                      <a:solidFill>
+                        <a:srgbClr val="D5DDE3"/>
+                      </a:solidFill>
+                      <a:prstDash val="solid"/>
+                      <a:round/>
+                      <a:headEnd type="none" w="med" len="med"/>
+                      <a:tailEnd type="none" w="med" len="med"/>
+                    </a:lnR>
+                    <a:lnT w="9525" cap="flat" cmpd="sng" algn="ctr">
+                      <a:solidFill>
+                        <a:srgbClr val="D5DDE3"/>
+                      </a:solidFill>
+                      <a:prstDash val="solid"/>
+                      <a:round/>
+                      <a:headEnd type="none" w="med" len="med"/>
+                      <a:tailEnd type="none" w="med" len="med"/>
+                    </a:lnT>
+                    <a:lnB w="9525" cap="flat" cmpd="sng" algn="ctr">
+                      <a:solidFill>
+                        <a:srgbClr val="D5DDE3"/>
+                      </a:solidFill>
+                      <a:prstDash val="solid"/>
+                      <a:round/>
+                      <a:headEnd type="none" w="med" len="med"/>
+                      <a:tailEnd type="none" w="med" len="med"/>
+                    </a:lnB>
+                    <a:solidFill>
+                      <a:srgbClr val="0B1F33"/>
+                    </a:solidFill>
+                  </a:tcPr>
+                </a:tc>
+                <a:tc>
+                  <a:txBody>
+                    <a:bodyPr/>
+                    <a:lstStyle/>
+                    <a:p>
+                      <a:pPr algn="ctr" indent="0" marL="0">
+                        <a:buNone/>
+                      </a:pPr>
+                      <a:r>
+                        <a:rPr lang="en-US" sz="1200" b="1" dirty="0">
+                          <a:solidFill>
+                            <a:srgbClr val="FFFFFF"/>
+                          </a:solidFill>
+                          <a:latin typeface="Calibri" pitchFamily="34" charset="0"/>
+                          <a:ea typeface="Calibri" pitchFamily="34" charset="-122"/>
+                          <a:cs typeface="Calibri" pitchFamily="34" charset="-120"/>
+                        </a:rPr>
+                        <a:t>Accuracy</a:t>
+                      </a:r>
+                      <a:endParaRPr lang="en-US" sz="1200" dirty="0">
+                        <a:latin typeface="Calibri" charset="0"/>
+                        <a:ea typeface="Calibri" charset="0"/>
+                        <a:cs typeface="Calibri" charset="0"/>
+                      </a:endParaRPr>
+                    </a:p>
+                  </a:txBody>
+                  <a:tcPr marL="91440" marR="91440" marT="45720" marB="45720">
+                    <a:lnL w="9525" cap="flat" cmpd="sng" algn="ctr">
+                      <a:solidFill>
+                        <a:srgbClr val="D5DDE3"/>
+                      </a:solidFill>
+                      <a:prstDash val="solid"/>
+                      <a:round/>
+                      <a:headEnd type="none" w="med" len="med"/>
+                      <a:tailEnd type="none" w="med" len="med"/>
+                    </a:lnL>
+                    <a:lnR w="9525" cap="flat" cmpd="sng" algn="ctr">
+                      <a:solidFill>
+                        <a:srgbClr val="D5DDE3"/>
+                      </a:solidFill>
+                      <a:prstDash val="solid"/>
+                      <a:round/>
+                      <a:headEnd type="none" w="med" len="med"/>
+                      <a:tailEnd type="none" w="med" len="med"/>
+                    </a:lnR>
+                    <a:lnT w="9525" cap="flat" cmpd="sng" algn="ctr">
+                      <a:solidFill>
+                        <a:srgbClr val="D5DDE3"/>
+                      </a:solidFill>
+                      <a:prstDash val="solid"/>
+                      <a:round/>
+                      <a:headEnd type="none" w="med" len="med"/>
+                      <a:tailEnd type="none" w="med" len="med"/>
+                    </a:lnT>
+                    <a:lnB w="9525" cap="flat" cmpd="sng" algn="ctr">
+                      <a:solidFill>
+                        <a:srgbClr val="D5DDE3"/>
+                      </a:solidFill>
+                      <a:prstDash val="solid"/>
+                      <a:round/>
+                      <a:headEnd type="none" w="med" len="med"/>
+                      <a:tailEnd type="none" w="med" len="med"/>
+                    </a:lnB>
+                    <a:solidFill>
+                      <a:srgbClr val="0B1F33"/>
+                    </a:solidFill>
+                  </a:tcPr>
+                </a:tc>
+              </a:tr>
+              <a:tr h="310896">
+                <a:tc>
+                  <a:txBody>
+                    <a:bodyPr/>
+                    <a:lstStyle/>
+                    <a:p>
+                      <a:pPr algn="l" indent="0" marL="0">
+                        <a:buNone/>
+                      </a:pPr>
+                      <a:r>
+                        <a:rPr lang="en-US" sz="1200" b="1" dirty="0">
+                          <a:solidFill>
+                            <a:srgbClr val="1B2A38"/>
+                          </a:solidFill>
+                          <a:latin typeface="Calibri" pitchFamily="34" charset="0"/>
+                          <a:ea typeface="Calibri" pitchFamily="34" charset="-122"/>
+                          <a:cs typeface="Calibri" pitchFamily="34" charset="-120"/>
+                        </a:rPr>
+                        <a:t>Ours, message labels</a:t>
+                      </a:r>
+                      <a:endParaRPr lang="en-US" sz="1200" dirty="0">
+                        <a:latin typeface="Calibri" charset="0"/>
+                        <a:ea typeface="Calibri" charset="0"/>
+                        <a:cs typeface="Calibri" charset="0"/>
+                      </a:endParaRPr>
+                    </a:p>
+                  </a:txBody>
+                  <a:tcPr marL="91440" marR="91440" marT="45720" marB="45720">
+                    <a:lnL w="9525" cap="flat" cmpd="sng" algn="ctr">
+                      <a:solidFill>
+                        <a:srgbClr val="D5DDE3"/>
+                      </a:solidFill>
+                      <a:prstDash val="solid"/>
+                      <a:round/>
+                      <a:headEnd type="none" w="med" len="med"/>
+                      <a:tailEnd type="none" w="med" len="med"/>
+                    </a:lnL>
+                    <a:lnR w="9525" cap="flat" cmpd="sng" algn="ctr">
+                      <a:solidFill>
+                        <a:srgbClr val="D5DDE3"/>
+                      </a:solidFill>
+                      <a:prstDash val="solid"/>
+                      <a:round/>
+                      <a:headEnd type="none" w="med" len="med"/>
+                      <a:tailEnd type="none" w="med" len="med"/>
+                    </a:lnR>
+                    <a:lnT w="9525" cap="flat" cmpd="sng" algn="ctr">
+                      <a:solidFill>
+                        <a:srgbClr val="D5DDE3"/>
+                      </a:solidFill>
+                      <a:prstDash val="solid"/>
+                      <a:round/>
+                      <a:headEnd type="none" w="med" len="med"/>
+                      <a:tailEnd type="none" w="med" len="med"/>
+                    </a:lnT>
+                    <a:lnB w="9525" cap="flat" cmpd="sng" algn="ctr">
+                      <a:solidFill>
+                        <a:srgbClr val="D5DDE3"/>
+                      </a:solidFill>
+                      <a:prstDash val="solid"/>
+                      <a:round/>
+                      <a:headEnd type="none" w="med" len="med"/>
+                      <a:tailEnd type="none" w="med" len="med"/>
+                    </a:lnB>
+                  </a:tcPr>
+                </a:tc>
+                <a:tc>
+                  <a:txBody>
+                    <a:bodyPr/>
+                    <a:lstStyle/>
+                    <a:p>
+                      <a:pPr algn="ctr" indent="0" marL="0">
+                        <a:buNone/>
+                      </a:pPr>
+                      <a:r>
+                        <a:rPr lang="en-US" sz="1200" b="1" dirty="0">
+                          <a:solidFill>
+                            <a:srgbClr val="1B2A38"/>
+                          </a:solidFill>
+                          <a:latin typeface="Calibri" pitchFamily="34" charset="0"/>
+                          <a:ea typeface="Calibri" pitchFamily="34" charset="-122"/>
+                          <a:cs typeface="Calibri" pitchFamily="34" charset="-120"/>
+                        </a:rPr>
+                        <a:t>96.30</a:t>
+                      </a:r>
+                      <a:endParaRPr lang="en-US" sz="1200" dirty="0">
+                        <a:latin typeface="Calibri" charset="0"/>
+                        <a:ea typeface="Calibri" charset="0"/>
+                        <a:cs typeface="Calibri" charset="0"/>
+                      </a:endParaRPr>
+                    </a:p>
+                  </a:txBody>
+                  <a:tcPr marL="91440" marR="91440" marT="45720" marB="45720">
+                    <a:lnL w="9525" cap="flat" cmpd="sng" algn="ctr">
+                      <a:solidFill>
+                        <a:srgbClr val="D5DDE3"/>
+                      </a:solidFill>
+                      <a:prstDash val="solid"/>
+                      <a:round/>
+                      <a:headEnd type="none" w="med" len="med"/>
+                      <a:tailEnd type="none" w="med" len="med"/>
+                    </a:lnL>
+                    <a:lnR w="9525" cap="flat" cmpd="sng" algn="ctr">
+                      <a:solidFill>
+                        <a:srgbClr val="D5DDE3"/>
+                      </a:solidFill>
+                      <a:prstDash val="solid"/>
+                      <a:round/>
+                      <a:headEnd type="none" w="med" len="med"/>
+                      <a:tailEnd type="none" w="med" len="med"/>
+                    </a:lnR>
+                    <a:lnT w="9525" cap="flat" cmpd="sng" algn="ctr">
+                      <a:solidFill>
+                        <a:srgbClr val="D5DDE3"/>
+                      </a:solidFill>
+                      <a:prstDash val="solid"/>
+                      <a:round/>
+                      <a:headEnd type="none" w="med" len="med"/>
+                      <a:tailEnd type="none" w="med" len="med"/>
+                    </a:lnT>
+                    <a:lnB w="9525" cap="flat" cmpd="sng" algn="ctr">
+                      <a:solidFill>
+                        <a:srgbClr val="D5DDE3"/>
+                      </a:solidFill>
+                      <a:prstDash val="solid"/>
+                      <a:round/>
+                      <a:headEnd type="none" w="med" len="med"/>
+                      <a:tailEnd type="none" w="med" len="med"/>
+                    </a:lnB>
+                  </a:tcPr>
+                </a:tc>
+                <a:tc>
+                  <a:txBody>
+                    <a:bodyPr/>
+                    <a:lstStyle/>
+                    <a:p>
+                      <a:pPr algn="ctr" indent="0" marL="0">
+                        <a:buNone/>
+                      </a:pPr>
+                      <a:r>
+                        <a:rPr lang="en-US" sz="1200" b="1" dirty="0">
+                          <a:solidFill>
+                            <a:srgbClr val="1B2A38"/>
+                          </a:solidFill>
+                          <a:latin typeface="Calibri" pitchFamily="34" charset="0"/>
+                          <a:ea typeface="Calibri" pitchFamily="34" charset="-122"/>
+                          <a:cs typeface="Calibri" pitchFamily="34" charset="-120"/>
+                        </a:rPr>
+                        <a:t>95.46</a:t>
+                      </a:r>
+                      <a:endParaRPr lang="en-US" sz="1200" dirty="0">
+                        <a:latin typeface="Calibri" charset="0"/>
+                        <a:ea typeface="Calibri" charset="0"/>
+                        <a:cs typeface="Calibri" charset="0"/>
+                      </a:endParaRPr>
+                    </a:p>
+                  </a:txBody>
+                  <a:tcPr marL="91440" marR="91440" marT="45720" marB="45720">
+                    <a:lnL w="9525" cap="flat" cmpd="sng" algn="ctr">
+                      <a:solidFill>
+                        <a:srgbClr val="D5DDE3"/>
+                      </a:solidFill>
+                      <a:prstDash val="solid"/>
+                      <a:round/>
+                      <a:headEnd type="none" w="med" len="med"/>
+                      <a:tailEnd type="none" w="med" len="med"/>
+                    </a:lnL>
+                    <a:lnR w="9525" cap="flat" cmpd="sng" algn="ctr">
+                      <a:solidFill>
+                        <a:srgbClr val="D5DDE3"/>
+                      </a:solidFill>
+                      <a:prstDash val="solid"/>
+                      <a:round/>
+                      <a:headEnd type="none" w="med" len="med"/>
+                      <a:tailEnd type="none" w="med" len="med"/>
+                    </a:lnR>
+                    <a:lnT w="9525" cap="flat" cmpd="sng" algn="ctr">
+                      <a:solidFill>
+                        <a:srgbClr val="D5DDE3"/>
+                      </a:solidFill>
+                      <a:prstDash val="solid"/>
+                      <a:round/>
+                      <a:headEnd type="none" w="med" len="med"/>
+                      <a:tailEnd type="none" w="med" len="med"/>
+                    </a:lnT>
+                    <a:lnB w="9525" cap="flat" cmpd="sng" algn="ctr">
+                      <a:solidFill>
+                        <a:srgbClr val="D5DDE3"/>
+                      </a:solidFill>
+                      <a:prstDash val="solid"/>
+                      <a:round/>
+                      <a:headEnd type="none" w="med" len="med"/>
+                      <a:tailEnd type="none" w="med" len="med"/>
+                    </a:lnB>
+                  </a:tcPr>
+                </a:tc>
+                <a:tc>
+                  <a:txBody>
+                    <a:bodyPr/>
+                    <a:lstStyle/>
+                    <a:p>
+                      <a:pPr algn="ctr" indent="0" marL="0">
+                        <a:buNone/>
+                      </a:pPr>
+                      <a:r>
+                        <a:rPr lang="en-US" sz="1200" b="1" dirty="0">
+                          <a:solidFill>
+                            <a:srgbClr val="1B2A38"/>
+                          </a:solidFill>
+                          <a:latin typeface="Calibri" pitchFamily="34" charset="0"/>
+                          <a:ea typeface="Calibri" pitchFamily="34" charset="-122"/>
+                          <a:cs typeface="Calibri" pitchFamily="34" charset="-120"/>
+                        </a:rPr>
+                        <a:t>95.88</a:t>
+                      </a:r>
+                      <a:endParaRPr lang="en-US" sz="1200" dirty="0">
+                        <a:latin typeface="Calibri" charset="0"/>
+                        <a:ea typeface="Calibri" charset="0"/>
+                        <a:cs typeface="Calibri" charset="0"/>
+                      </a:endParaRPr>
+                    </a:p>
+                  </a:txBody>
+                  <a:tcPr marL="91440" marR="91440" marT="45720" marB="45720">
+                    <a:lnL w="9525" cap="flat" cmpd="sng" algn="ctr">
+                      <a:solidFill>
+                        <a:srgbClr val="D5DDE3"/>
+                      </a:solidFill>
+                      <a:prstDash val="solid"/>
+                      <a:round/>
+                      <a:headEnd type="none" w="med" len="med"/>
+                      <a:tailEnd type="none" w="med" len="med"/>
+                    </a:lnL>
+                    <a:lnR w="9525" cap="flat" cmpd="sng" algn="ctr">
+                      <a:solidFill>
+                        <a:srgbClr val="D5DDE3"/>
+                      </a:solidFill>
+                      <a:prstDash val="solid"/>
+                      <a:round/>
+                      <a:headEnd type="none" w="med" len="med"/>
+                      <a:tailEnd type="none" w="med" len="med"/>
+                    </a:lnR>
+                    <a:lnT w="9525" cap="flat" cmpd="sng" algn="ctr">
+                      <a:solidFill>
+                        <a:srgbClr val="D5DDE3"/>
+                      </a:solidFill>
+                      <a:prstDash val="solid"/>
+                      <a:round/>
+                      <a:headEnd type="none" w="med" len="med"/>
+                      <a:tailEnd type="none" w="med" len="med"/>
+                    </a:lnT>
+                    <a:lnB w="9525" cap="flat" cmpd="sng" algn="ctr">
+                      <a:solidFill>
+                        <a:srgbClr val="D5DDE3"/>
+                      </a:solidFill>
+                      <a:prstDash val="solid"/>
+                      <a:round/>
+                      <a:headEnd type="none" w="med" len="med"/>
+                      <a:tailEnd type="none" w="med" len="med"/>
+                    </a:lnB>
+                  </a:tcPr>
+                </a:tc>
+                <a:tc>
+                  <a:txBody>
+                    <a:bodyPr/>
+                    <a:lstStyle/>
+                    <a:p>
+                      <a:pPr algn="ctr" indent="0" marL="0">
+                        <a:buNone/>
+                      </a:pPr>
+                      <a:r>
+                        <a:rPr lang="en-US" sz="1200" b="1" dirty="0">
+                          <a:solidFill>
+                            <a:srgbClr val="1B2A38"/>
+                          </a:solidFill>
+                          <a:latin typeface="Calibri" pitchFamily="34" charset="0"/>
+                          <a:ea typeface="Calibri" pitchFamily="34" charset="-122"/>
+                          <a:cs typeface="Calibri" pitchFamily="34" charset="-120"/>
+                        </a:rPr>
+                        <a:t>97.04</a:t>
+                      </a:r>
+                      <a:endParaRPr lang="en-US" sz="1200" dirty="0">
+                        <a:latin typeface="Calibri" charset="0"/>
+                        <a:ea typeface="Calibri" charset="0"/>
+                        <a:cs typeface="Calibri" charset="0"/>
+                      </a:endParaRPr>
+                    </a:p>
+                  </a:txBody>
+                  <a:tcPr marL="91440" marR="91440" marT="45720" marB="45720">
+                    <a:lnL w="9525" cap="flat" cmpd="sng" algn="ctr">
+                      <a:solidFill>
+                        <a:srgbClr val="D5DDE3"/>
+                      </a:solidFill>
+                      <a:prstDash val="solid"/>
+                      <a:round/>
+                      <a:headEnd type="none" w="med" len="med"/>
+                      <a:tailEnd type="none" w="med" len="med"/>
+                    </a:lnL>
+                    <a:lnR w="9525" cap="flat" cmpd="sng" algn="ctr">
+                      <a:solidFill>
+                        <a:srgbClr val="D5DDE3"/>
+                      </a:solidFill>
+                      <a:prstDash val="solid"/>
+                      <a:round/>
+                      <a:headEnd type="none" w="med" len="med"/>
+                      <a:tailEnd type="none" w="med" len="med"/>
+                    </a:lnR>
+                    <a:lnT w="9525" cap="flat" cmpd="sng" algn="ctr">
+                      <a:solidFill>
+                        <a:srgbClr val="D5DDE3"/>
+                      </a:solidFill>
+                      <a:prstDash val="solid"/>
+                      <a:round/>
+                      <a:headEnd type="none" w="med" len="med"/>
+                      <a:tailEnd type="none" w="med" len="med"/>
+                    </a:lnT>
+                    <a:lnB w="9525" cap="flat" cmpd="sng" algn="ctr">
+                      <a:solidFill>
+                        <a:srgbClr val="D5DDE3"/>
+                      </a:solidFill>
+                      <a:prstDash val="solid"/>
+                      <a:round/>
+                      <a:headEnd type="none" w="med" len="med"/>
+                      <a:tailEnd type="none" w="med" len="med"/>
+                    </a:lnB>
+                  </a:tcPr>
+                </a:tc>
+              </a:tr>
+              <a:tr h="310896">
+                <a:tc>
+                  <a:txBody>
+                    <a:bodyPr/>
+                    <a:lstStyle/>
+                    <a:p>
+                      <a:pPr algn="l" indent="0" marL="0">
+                        <a:buNone/>
+                      </a:pPr>
+                      <a:r>
+                        <a:rPr lang="en-US" sz="1200" dirty="0">
+                          <a:solidFill>
+                            <a:srgbClr val="1B2A38"/>
+                          </a:solidFill>
+                          <a:latin typeface="Calibri" pitchFamily="34" charset="0"/>
+                          <a:ea typeface="Calibri" pitchFamily="34" charset="-122"/>
+                          <a:cs typeface="Calibri" pitchFamily="34" charset="-120"/>
+                        </a:rPr>
+                        <a:t>Ours, vehicle labels</a:t>
+                      </a:r>
+                      <a:endParaRPr lang="en-US" sz="1200" dirty="0">
+                        <a:latin typeface="Calibri" charset="0"/>
+                        <a:ea typeface="Calibri" charset="0"/>
+                        <a:cs typeface="Calibri" charset="0"/>
+                      </a:endParaRPr>
+                    </a:p>
+                  </a:txBody>
+                  <a:tcPr marL="91440" marR="91440" marT="45720" marB="45720">
+                    <a:lnL w="9525" cap="flat" cmpd="sng" algn="ctr">
+                      <a:solidFill>
+                        <a:srgbClr val="D5DDE3"/>
+                      </a:solidFill>
+                      <a:prstDash val="solid"/>
+                      <a:round/>
+                      <a:headEnd type="none" w="med" len="med"/>
+                      <a:tailEnd type="none" w="med" len="med"/>
+                    </a:lnL>
+                    <a:lnR w="9525" cap="flat" cmpd="sng" algn="ctr">
+                      <a:solidFill>
+                        <a:srgbClr val="D5DDE3"/>
+                      </a:solidFill>
+                      <a:prstDash val="solid"/>
+                      <a:round/>
+                      <a:headEnd type="none" w="med" len="med"/>
+                      <a:tailEnd type="none" w="med" len="med"/>
+                    </a:lnR>
+                    <a:lnT w="9525" cap="flat" cmpd="sng" algn="ctr">
+                      <a:solidFill>
+                        <a:srgbClr val="D5DDE3"/>
+                      </a:solidFill>
+                      <a:prstDash val="solid"/>
+                      <a:round/>
+                      <a:headEnd type="none" w="med" len="med"/>
+                      <a:tailEnd type="none" w="med" len="med"/>
+                    </a:lnT>
+                    <a:lnB w="9525" cap="flat" cmpd="sng" algn="ctr">
+                      <a:solidFill>
+                        <a:srgbClr val="D5DDE3"/>
+                      </a:solidFill>
+                      <a:prstDash val="solid"/>
+                      <a:round/>
+                      <a:headEnd type="none" w="med" len="med"/>
+                      <a:tailEnd type="none" w="med" len="med"/>
+                    </a:lnB>
+                  </a:tcPr>
+                </a:tc>
+                <a:tc>
+                  <a:txBody>
+                    <a:bodyPr/>
+                    <a:lstStyle/>
+                    <a:p>
+                      <a:pPr algn="ctr" indent="0" marL="0">
+                        <a:buNone/>
+                      </a:pPr>
+                      <a:r>
+                        <a:rPr lang="en-US" sz="1200" dirty="0">
+                          <a:solidFill>
+                            <a:srgbClr val="1B2A38"/>
+                          </a:solidFill>
+                          <a:latin typeface="Calibri" pitchFamily="34" charset="0"/>
+                          <a:ea typeface="Calibri" pitchFamily="34" charset="-122"/>
+                          <a:cs typeface="Calibri" pitchFamily="34" charset="-120"/>
+                        </a:rPr>
+                        <a:t>96.33</a:t>
+                      </a:r>
+                      <a:endParaRPr lang="en-US" sz="1200" dirty="0">
+                        <a:latin typeface="Calibri" charset="0"/>
+                        <a:ea typeface="Calibri" charset="0"/>
+                        <a:cs typeface="Calibri" charset="0"/>
+                      </a:endParaRPr>
+                    </a:p>
+                  </a:txBody>
+                  <a:tcPr marL="91440" marR="91440" marT="45720" marB="45720">
+                    <a:lnL w="9525" cap="flat" cmpd="sng" algn="ctr">
+                      <a:solidFill>
+                        <a:srgbClr val="D5DDE3"/>
+                      </a:solidFill>
+                      <a:prstDash val="solid"/>
+                      <a:round/>
+                      <a:headEnd type="none" w="med" len="med"/>
+                      <a:tailEnd type="none" w="med" len="med"/>
+                    </a:lnL>
+                    <a:lnR w="9525" cap="flat" cmpd="sng" algn="ctr">
+                      <a:solidFill>
+                        <a:srgbClr val="D5DDE3"/>
+                      </a:solidFill>
+                      <a:prstDash val="solid"/>
+                      <a:round/>
+                      <a:headEnd type="none" w="med" len="med"/>
+                      <a:tailEnd type="none" w="med" len="med"/>
+                    </a:lnR>
+                    <a:lnT w="9525" cap="flat" cmpd="sng" algn="ctr">
+                      <a:solidFill>
+                        <a:srgbClr val="D5DDE3"/>
+                      </a:solidFill>
+                      <a:prstDash val="solid"/>
+                      <a:round/>
+                      <a:headEnd type="none" w="med" len="med"/>
+                      <a:tailEnd type="none" w="med" len="med"/>
+                    </a:lnT>
+                    <a:lnB w="9525" cap="flat" cmpd="sng" algn="ctr">
+                      <a:solidFill>
+                        <a:srgbClr val="D5DDE3"/>
+                      </a:solidFill>
+                      <a:prstDash val="solid"/>
+                      <a:round/>
+                      <a:headEnd type="none" w="med" len="med"/>
+                      <a:tailEnd type="none" w="med" len="med"/>
+                    </a:lnB>
+                  </a:tcPr>
+                </a:tc>
+                <a:tc>
+                  <a:txBody>
+                    <a:bodyPr/>
+                    <a:lstStyle/>
+                    <a:p>
+                      <a:pPr algn="ctr" indent="0" marL="0">
+                        <a:buNone/>
+                      </a:pPr>
+                      <a:r>
+                        <a:rPr lang="en-US" sz="1200" dirty="0">
+                          <a:solidFill>
+                            <a:srgbClr val="1B2A38"/>
+                          </a:solidFill>
+                          <a:latin typeface="Calibri" pitchFamily="34" charset="0"/>
+                          <a:ea typeface="Calibri" pitchFamily="34" charset="-122"/>
+                          <a:cs typeface="Calibri" pitchFamily="34" charset="-120"/>
+                        </a:rPr>
+                        <a:t>94.44</a:t>
+                      </a:r>
+                      <a:endParaRPr lang="en-US" sz="1200" dirty="0">
+                        <a:latin typeface="Calibri" charset="0"/>
+                        <a:ea typeface="Calibri" charset="0"/>
+                        <a:cs typeface="Calibri" charset="0"/>
+                      </a:endParaRPr>
+                    </a:p>
+                  </a:txBody>
+                  <a:tcPr marL="91440" marR="91440" marT="45720" marB="45720">
+                    <a:lnL w="9525" cap="flat" cmpd="sng" algn="ctr">
+                      <a:solidFill>
+                        <a:srgbClr val="D5DDE3"/>
+                      </a:solidFill>
+                      <a:prstDash val="solid"/>
+                      <a:round/>
+                      <a:headEnd type="none" w="med" len="med"/>
+                      <a:tailEnd type="none" w="med" len="med"/>
+                    </a:lnL>
+                    <a:lnR w="9525" cap="flat" cmpd="sng" algn="ctr">
+                      <a:solidFill>
+                        <a:srgbClr val="D5DDE3"/>
+                      </a:solidFill>
+                      <a:prstDash val="solid"/>
+                      <a:round/>
+                      <a:headEnd type="none" w="med" len="med"/>
+                      <a:tailEnd type="none" w="med" len="med"/>
+                    </a:lnR>
+                    <a:lnT w="9525" cap="flat" cmpd="sng" algn="ctr">
+                      <a:solidFill>
+                        <a:srgbClr val="D5DDE3"/>
+                      </a:solidFill>
+                      <a:prstDash val="solid"/>
+                      <a:round/>
+                      <a:headEnd type="none" w="med" len="med"/>
+                      <a:tailEnd type="none" w="med" len="med"/>
+                    </a:lnT>
+                    <a:lnB w="9525" cap="flat" cmpd="sng" algn="ctr">
+                      <a:solidFill>
+                        <a:srgbClr val="D5DDE3"/>
+                      </a:solidFill>
+                      <a:prstDash val="solid"/>
+                      <a:round/>
+                      <a:headEnd type="none" w="med" len="med"/>
+                      <a:tailEnd type="none" w="med" len="med"/>
+                    </a:lnB>
+                  </a:tcPr>
+                </a:tc>
+                <a:tc>
+                  <a:txBody>
+                    <a:bodyPr/>
+                    <a:lstStyle/>
+                    <a:p>
+                      <a:pPr algn="ctr" indent="0" marL="0">
+                        <a:buNone/>
+                      </a:pPr>
+                      <a:r>
+                        <a:rPr lang="en-US" sz="1200" dirty="0">
+                          <a:solidFill>
+                            <a:srgbClr val="1B2A38"/>
+                          </a:solidFill>
+                          <a:latin typeface="Calibri" pitchFamily="34" charset="0"/>
+                          <a:ea typeface="Calibri" pitchFamily="34" charset="-122"/>
+                          <a:cs typeface="Calibri" pitchFamily="34" charset="-120"/>
+                        </a:rPr>
+                        <a:t>95.38</a:t>
+                      </a:r>
+                      <a:endParaRPr lang="en-US" sz="1200" dirty="0">
+                        <a:latin typeface="Calibri" charset="0"/>
+                        <a:ea typeface="Calibri" charset="0"/>
+                        <a:cs typeface="Calibri" charset="0"/>
+                      </a:endParaRPr>
+                    </a:p>
+                  </a:txBody>
+                  <a:tcPr marL="91440" marR="91440" marT="45720" marB="45720">
+                    <a:lnL w="9525" cap="flat" cmpd="sng" algn="ctr">
+                      <a:solidFill>
+                        <a:srgbClr val="D5DDE3"/>
+                      </a:solidFill>
+                      <a:prstDash val="solid"/>
+                      <a:round/>
+                      <a:headEnd type="none" w="med" len="med"/>
+                      <a:tailEnd type="none" w="med" len="med"/>
+                    </a:lnL>
+                    <a:lnR w="9525" cap="flat" cmpd="sng" algn="ctr">
+                      <a:solidFill>
+                        <a:srgbClr val="D5DDE3"/>
+                      </a:solidFill>
+                      <a:prstDash val="solid"/>
+                      <a:round/>
+                      <a:headEnd type="none" w="med" len="med"/>
+                      <a:tailEnd type="none" w="med" len="med"/>
+                    </a:lnR>
+                    <a:lnT w="9525" cap="flat" cmpd="sng" algn="ctr">
+                      <a:solidFill>
+                        <a:srgbClr val="D5DDE3"/>
+                      </a:solidFill>
+                      <a:prstDash val="solid"/>
+                      <a:round/>
+                      <a:headEnd type="none" w="med" len="med"/>
+                      <a:tailEnd type="none" w="med" len="med"/>
+                    </a:lnT>
+                    <a:lnB w="9525" cap="flat" cmpd="sng" algn="ctr">
+                      <a:solidFill>
+                        <a:srgbClr val="D5DDE3"/>
+                      </a:solidFill>
+                      <a:prstDash val="solid"/>
+                      <a:round/>
+                      <a:headEnd type="none" w="med" len="med"/>
+                      <a:tailEnd type="none" w="med" len="med"/>
+                    </a:lnB>
+                  </a:tcPr>
+                </a:tc>
+                <a:tc>
+                  <a:txBody>
+                    <a:bodyPr/>
+                    <a:lstStyle/>
+                    <a:p>
+                      <a:pPr algn="ctr" indent="0" marL="0">
+                        <a:buNone/>
+                      </a:pPr>
+                      <a:r>
+                        <a:rPr lang="en-US" sz="1200" dirty="0">
+                          <a:solidFill>
+                            <a:srgbClr val="1B2A38"/>
+                          </a:solidFill>
+                          <a:latin typeface="Calibri" pitchFamily="34" charset="0"/>
+                          <a:ea typeface="Calibri" pitchFamily="34" charset="-122"/>
+                          <a:cs typeface="Calibri" pitchFamily="34" charset="-120"/>
+                        </a:rPr>
+                        <a:t>96.66</a:t>
+                      </a:r>
+                      <a:endParaRPr lang="en-US" sz="1200" dirty="0">
+                        <a:latin typeface="Calibri" charset="0"/>
+                        <a:ea typeface="Calibri" charset="0"/>
+                        <a:cs typeface="Calibri" charset="0"/>
+                      </a:endParaRPr>
+                    </a:p>
+                  </a:txBody>
+                  <a:tcPr marL="91440" marR="91440" marT="45720" marB="45720">
+                    <a:lnL w="9525" cap="flat" cmpd="sng" algn="ctr">
+                      <a:solidFill>
+                        <a:srgbClr val="D5DDE3"/>
+                      </a:solidFill>
+                      <a:prstDash val="solid"/>
+                      <a:round/>
+                      <a:headEnd type="none" w="med" len="med"/>
+                      <a:tailEnd type="none" w="med" len="med"/>
+                    </a:lnL>
+                    <a:lnR w="9525" cap="flat" cmpd="sng" algn="ctr">
+                      <a:solidFill>
+                        <a:srgbClr val="D5DDE3"/>
+                      </a:solidFill>
+                      <a:prstDash val="solid"/>
+                      <a:round/>
+                      <a:headEnd type="none" w="med" len="med"/>
+                      <a:tailEnd type="none" w="med" len="med"/>
+                    </a:lnR>
+                    <a:lnT w="9525" cap="flat" cmpd="sng" algn="ctr">
+                      <a:solidFill>
+                        <a:srgbClr val="D5DDE3"/>
+                      </a:solidFill>
+                      <a:prstDash val="solid"/>
+                      <a:round/>
+                      <a:headEnd type="none" w="med" len="med"/>
+                      <a:tailEnd type="none" w="med" len="med"/>
+                    </a:lnT>
+                    <a:lnB w="9525" cap="flat" cmpd="sng" algn="ctr">
+                      <a:solidFill>
+                        <a:srgbClr val="D5DDE3"/>
+                      </a:solidFill>
+                      <a:prstDash val="solid"/>
+                      <a:round/>
+                      <a:headEnd type="none" w="med" len="med"/>
+                      <a:tailEnd type="none" w="med" len="med"/>
+                    </a:lnB>
+                  </a:tcPr>
+                </a:tc>
+              </a:tr>
+              <a:tr h="310896">
+                <a:tc>
+                  <a:txBody>
+                    <a:bodyPr/>
+                    <a:lstStyle/>
+                    <a:p>
+                      <a:pPr algn="l" indent="0" marL="0">
+                        <a:buNone/>
+                      </a:pPr>
+                      <a:r>
+                        <a:rPr lang="en-US" sz="1200" dirty="0">
+                          <a:solidFill>
+                            <a:srgbClr val="1B2A38"/>
+                          </a:solidFill>
+                          <a:latin typeface="Calibri" pitchFamily="34" charset="0"/>
+                          <a:ea typeface="Calibri" pitchFamily="34" charset="-122"/>
+                          <a:cs typeface="Calibri" pitchFamily="34" charset="-120"/>
+                        </a:rPr>
+                        <a:t>No neighbour attention, message</a:t>
+                      </a:r>
+                      <a:endParaRPr lang="en-US" sz="1200" dirty="0">
+                        <a:latin typeface="Calibri" charset="0"/>
+                        <a:ea typeface="Calibri" charset="0"/>
+                        <a:cs typeface="Calibri" charset="0"/>
+                      </a:endParaRPr>
+                    </a:p>
+                  </a:txBody>
+                  <a:tcPr marL="91440" marR="91440" marT="45720" marB="45720">
+                    <a:lnL w="9525" cap="flat" cmpd="sng" algn="ctr">
+                      <a:solidFill>
+                        <a:srgbClr val="D5DDE3"/>
+                      </a:solidFill>
+                      <a:prstDash val="solid"/>
+                      <a:round/>
+                      <a:headEnd type="none" w="med" len="med"/>
+                      <a:tailEnd type="none" w="med" len="med"/>
+                    </a:lnL>
+                    <a:lnR w="9525" cap="flat" cmpd="sng" algn="ctr">
+                      <a:solidFill>
+                        <a:srgbClr val="D5DDE3"/>
+                      </a:solidFill>
+                      <a:prstDash val="solid"/>
+                      <a:round/>
+                      <a:headEnd type="none" w="med" len="med"/>
+                      <a:tailEnd type="none" w="med" len="med"/>
+                    </a:lnR>
+                    <a:lnT w="9525" cap="flat" cmpd="sng" algn="ctr">
+                      <a:solidFill>
+                        <a:srgbClr val="D5DDE3"/>
+                      </a:solidFill>
+                      <a:prstDash val="solid"/>
+                      <a:round/>
+                      <a:headEnd type="none" w="med" len="med"/>
+                      <a:tailEnd type="none" w="med" len="med"/>
+                    </a:lnT>
+                    <a:lnB w="9525" cap="flat" cmpd="sng" algn="ctr">
+                      <a:solidFill>
+                        <a:srgbClr val="D5DDE3"/>
+                      </a:solidFill>
+                      <a:prstDash val="solid"/>
+                      <a:round/>
+                      <a:headEnd type="none" w="med" len="med"/>
+                      <a:tailEnd type="none" w="med" len="med"/>
+                    </a:lnB>
+                  </a:tcPr>
+                </a:tc>
+                <a:tc>
+                  <a:txBody>
+                    <a:bodyPr/>
+                    <a:lstStyle/>
+                    <a:p>
+                      <a:pPr algn="ctr" indent="0" marL="0">
+                        <a:buNone/>
+                      </a:pPr>
+                      <a:r>
+                        <a:rPr lang="en-US" sz="1200" dirty="0">
+                          <a:solidFill>
+                            <a:srgbClr val="1B2A38"/>
+                          </a:solidFill>
+                          <a:latin typeface="Calibri" pitchFamily="34" charset="0"/>
+                          <a:ea typeface="Calibri" pitchFamily="34" charset="-122"/>
+                          <a:cs typeface="Calibri" pitchFamily="34" charset="-120"/>
+                        </a:rPr>
+                        <a:t>96.28</a:t>
+                      </a:r>
+                      <a:endParaRPr lang="en-US" sz="1200" dirty="0">
+                        <a:latin typeface="Calibri" charset="0"/>
+                        <a:ea typeface="Calibri" charset="0"/>
+                        <a:cs typeface="Calibri" charset="0"/>
+                      </a:endParaRPr>
+                    </a:p>
+                  </a:txBody>
+                  <a:tcPr marL="91440" marR="91440" marT="45720" marB="45720">
+                    <a:lnL w="9525" cap="flat" cmpd="sng" algn="ctr">
+                      <a:solidFill>
+                        <a:srgbClr val="D5DDE3"/>
+                      </a:solidFill>
+                      <a:prstDash val="solid"/>
+                      <a:round/>
+                      <a:headEnd type="none" w="med" len="med"/>
+                      <a:tailEnd type="none" w="med" len="med"/>
+                    </a:lnL>
+                    <a:lnR w="9525" cap="flat" cmpd="sng" algn="ctr">
+                      <a:solidFill>
+                        <a:srgbClr val="D5DDE3"/>
+                      </a:solidFill>
+                      <a:prstDash val="solid"/>
+                      <a:round/>
+                      <a:headEnd type="none" w="med" len="med"/>
+                      <a:tailEnd type="none" w="med" len="med"/>
+                    </a:lnR>
+                    <a:lnT w="9525" cap="flat" cmpd="sng" algn="ctr">
+                      <a:solidFill>
+                        <a:srgbClr val="D5DDE3"/>
+                      </a:solidFill>
+                      <a:prstDash val="solid"/>
+                      <a:round/>
+                      <a:headEnd type="none" w="med" len="med"/>
+                      <a:tailEnd type="none" w="med" len="med"/>
+                    </a:lnT>
+                    <a:lnB w="9525" cap="flat" cmpd="sng" algn="ctr">
+                      <a:solidFill>
+                        <a:srgbClr val="D5DDE3"/>
+                      </a:solidFill>
+                      <a:prstDash val="solid"/>
+                      <a:round/>
+                      <a:headEnd type="none" w="med" len="med"/>
+                      <a:tailEnd type="none" w="med" len="med"/>
+                    </a:lnB>
+                  </a:tcPr>
+                </a:tc>
+                <a:tc>
+                  <a:txBody>
+                    <a:bodyPr/>
+                    <a:lstStyle/>
+                    <a:p>
+                      <a:pPr algn="ctr" indent="0" marL="0">
+                        <a:buNone/>
+                      </a:pPr>
+                      <a:r>
+                        <a:rPr lang="en-US" sz="1200" dirty="0">
+                          <a:solidFill>
+                            <a:srgbClr val="1B2A38"/>
+                          </a:solidFill>
+                          <a:latin typeface="Calibri" pitchFamily="34" charset="0"/>
+                          <a:ea typeface="Calibri" pitchFamily="34" charset="-122"/>
+                          <a:cs typeface="Calibri" pitchFamily="34" charset="-120"/>
+                        </a:rPr>
+                        <a:t>92.69</a:t>
+                      </a:r>
+                      <a:endParaRPr lang="en-US" sz="1200" dirty="0">
+                        <a:latin typeface="Calibri" charset="0"/>
+                        <a:ea typeface="Calibri" charset="0"/>
+                        <a:cs typeface="Calibri" charset="0"/>
+                      </a:endParaRPr>
+                    </a:p>
+                  </a:txBody>
+                  <a:tcPr marL="91440" marR="91440" marT="45720" marB="45720">
+                    <a:lnL w="9525" cap="flat" cmpd="sng" algn="ctr">
+                      <a:solidFill>
+                        <a:srgbClr val="D5DDE3"/>
+                      </a:solidFill>
+                      <a:prstDash val="solid"/>
+                      <a:round/>
+                      <a:headEnd type="none" w="med" len="med"/>
+                      <a:tailEnd type="none" w="med" len="med"/>
+                    </a:lnL>
+                    <a:lnR w="9525" cap="flat" cmpd="sng" algn="ctr">
+                      <a:solidFill>
+                        <a:srgbClr val="D5DDE3"/>
+                      </a:solidFill>
+                      <a:prstDash val="solid"/>
+                      <a:round/>
+                      <a:headEnd type="none" w="med" len="med"/>
+                      <a:tailEnd type="none" w="med" len="med"/>
+                    </a:lnR>
+                    <a:lnT w="9525" cap="flat" cmpd="sng" algn="ctr">
+                      <a:solidFill>
+                        <a:srgbClr val="D5DDE3"/>
+                      </a:solidFill>
+                      <a:prstDash val="solid"/>
+                      <a:round/>
+                      <a:headEnd type="none" w="med" len="med"/>
+                      <a:tailEnd type="none" w="med" len="med"/>
+                    </a:lnT>
+                    <a:lnB w="9525" cap="flat" cmpd="sng" algn="ctr">
+                      <a:solidFill>
+                        <a:srgbClr val="D5DDE3"/>
+                      </a:solidFill>
+                      <a:prstDash val="solid"/>
+                      <a:round/>
+                      <a:headEnd type="none" w="med" len="med"/>
+                      <a:tailEnd type="none" w="med" len="med"/>
+                    </a:lnB>
+                  </a:tcPr>
+                </a:tc>
+                <a:tc>
+                  <a:txBody>
+                    <a:bodyPr/>
+                    <a:lstStyle/>
+                    <a:p>
+                      <a:pPr algn="ctr" indent="0" marL="0">
+                        <a:buNone/>
+                      </a:pPr>
+                      <a:r>
+                        <a:rPr lang="en-US" sz="1200" dirty="0">
+                          <a:solidFill>
+                            <a:srgbClr val="1B2A38"/>
+                          </a:solidFill>
+                          <a:latin typeface="Calibri" pitchFamily="34" charset="0"/>
+                          <a:ea typeface="Calibri" pitchFamily="34" charset="-122"/>
+                          <a:cs typeface="Calibri" pitchFamily="34" charset="-120"/>
+                        </a:rPr>
+                        <a:t>94.45</a:t>
+                      </a:r>
+                      <a:endParaRPr lang="en-US" sz="1200" dirty="0">
+                        <a:latin typeface="Calibri" charset="0"/>
+                        <a:ea typeface="Calibri" charset="0"/>
+                        <a:cs typeface="Calibri" charset="0"/>
+                      </a:endParaRPr>
+                    </a:p>
+                  </a:txBody>
+                  <a:tcPr marL="91440" marR="91440" marT="45720" marB="45720">
+                    <a:lnL w="9525" cap="flat" cmpd="sng" algn="ctr">
+                      <a:solidFill>
+                        <a:srgbClr val="D5DDE3"/>
+                      </a:solidFill>
+                      <a:prstDash val="solid"/>
+                      <a:round/>
+                      <a:headEnd type="none" w="med" len="med"/>
+                      <a:tailEnd type="none" w="med" len="med"/>
+                    </a:lnL>
+                    <a:lnR w="9525" cap="flat" cmpd="sng" algn="ctr">
+                      <a:solidFill>
+                        <a:srgbClr val="D5DDE3"/>
+                      </a:solidFill>
+                      <a:prstDash val="solid"/>
+                      <a:round/>
+                      <a:headEnd type="none" w="med" len="med"/>
+                      <a:tailEnd type="none" w="med" len="med"/>
+                    </a:lnR>
+                    <a:lnT w="9525" cap="flat" cmpd="sng" algn="ctr">
+                      <a:solidFill>
+                        <a:srgbClr val="D5DDE3"/>
+                      </a:solidFill>
+                      <a:prstDash val="solid"/>
+                      <a:round/>
+                      <a:headEnd type="none" w="med" len="med"/>
+                      <a:tailEnd type="none" w="med" len="med"/>
+                    </a:lnT>
+                    <a:lnB w="9525" cap="flat" cmpd="sng" algn="ctr">
+                      <a:solidFill>
+                        <a:srgbClr val="D5DDE3"/>
+                      </a:solidFill>
+                      <a:prstDash val="solid"/>
+                      <a:round/>
+                      <a:headEnd type="none" w="med" len="med"/>
+                      <a:tailEnd type="none" w="med" len="med"/>
+                    </a:lnB>
+                  </a:tcPr>
+                </a:tc>
+                <a:tc>
+                  <a:txBody>
+                    <a:bodyPr/>
+                    <a:lstStyle/>
+                    <a:p>
+                      <a:pPr algn="ctr" indent="0" marL="0">
+                        <a:buNone/>
+                      </a:pPr>
+                      <a:r>
+                        <a:rPr lang="en-US" sz="1200" dirty="0">
+                          <a:solidFill>
+                            <a:srgbClr val="1B2A38"/>
+                          </a:solidFill>
+                          <a:latin typeface="Calibri" pitchFamily="34" charset="0"/>
+                          <a:ea typeface="Calibri" pitchFamily="34" charset="-122"/>
+                          <a:cs typeface="Calibri" pitchFamily="34" charset="-120"/>
+                        </a:rPr>
+                        <a:t>96.07</a:t>
+                      </a:r>
+                      <a:endParaRPr lang="en-US" sz="1200" dirty="0">
+                        <a:latin typeface="Calibri" charset="0"/>
+                        <a:ea typeface="Calibri" charset="0"/>
+                        <a:cs typeface="Calibri" charset="0"/>
+                      </a:endParaRPr>
+                    </a:p>
+                  </a:txBody>
+                  <a:tcPr marL="91440" marR="91440" marT="45720" marB="45720">
+                    <a:lnL w="9525" cap="flat" cmpd="sng" algn="ctr">
+                      <a:solidFill>
+                        <a:srgbClr val="D5DDE3"/>
+                      </a:solidFill>
+                      <a:prstDash val="solid"/>
+                      <a:round/>
+                      <a:headEnd type="none" w="med" len="med"/>
+                      <a:tailEnd type="none" w="med" len="med"/>
+                    </a:lnL>
+                    <a:lnR w="9525" cap="flat" cmpd="sng" algn="ctr">
+                      <a:solidFill>
+                        <a:srgbClr val="D5DDE3"/>
+                      </a:solidFill>
+                      <a:prstDash val="solid"/>
+                      <a:round/>
+                      <a:headEnd type="none" w="med" len="med"/>
+                      <a:tailEnd type="none" w="med" len="med"/>
+                    </a:lnR>
+                    <a:lnT w="9525" cap="flat" cmpd="sng" algn="ctr">
+                      <a:solidFill>
+                        <a:srgbClr val="D5DDE3"/>
+                      </a:solidFill>
+                      <a:prstDash val="solid"/>
+                      <a:round/>
+                      <a:headEnd type="none" w="med" len="med"/>
+                      <a:tailEnd type="none" w="med" len="med"/>
+                    </a:lnT>
+                    <a:lnB w="9525" cap="flat" cmpd="sng" algn="ctr">
+                      <a:solidFill>
+                        <a:srgbClr val="D5DDE3"/>
+                      </a:solidFill>
+                      <a:prstDash val="solid"/>
+                      <a:round/>
+                      <a:headEnd type="none" w="med" len="med"/>
+                      <a:tailEnd type="none" w="med" len="med"/>
+                    </a:lnB>
+                  </a:tcPr>
+                </a:tc>
+              </a:tr>
+            </a:tbl>
+          </a:graphicData>
+        </a:graphic>
+      </p:graphicFrame>
+      <p:graphicFrame>
+        <p:nvGraphicFramePr>
+          <p:cNvPr id="19" name="Table 1"/>
+          <p:cNvGraphicFramePr>
+            <a:graphicFrameLocks noGrp="1"/>
+          </p:cNvGraphicFramePr>
+          <p:nvPr>
+            <p:extLst>
+              <p:ext uri="{D42A27DB-BD31-4B8C-83A1-F6EECF244321}">
+                <p14:modId xmlns:p14="http://schemas.microsoft.com/office/powerpoint/2010/main" val="1579011935"/>
+              </p:ext>
+            </p:extLst>
+          </p:nvPr>
+        </p:nvGraphicFramePr>
+        <p:xfrm>
+          <a:off x="5897880" y="1051560"/>
+          <a:ext cx="2743200" cy="914400"/>
+        </p:xfrm>
+        <a:graphic>
+          <a:graphicData uri="http://schemas.openxmlformats.org/drawingml/2006/table">
+            <a:tbl>
+              <a:tblPr/>
+              <a:tblGrid>
+                <a:gridCol w="2011680"/>
+                <a:gridCol w="731520"/>
+              </a:tblGrid>
+              <a:tr h="310896">
+                <a:tc>
+                  <a:txBody>
+                    <a:bodyPr/>
+                    <a:lstStyle/>
+                    <a:p>
+                      <a:pPr algn="ctr" indent="0" marL="0">
+                        <a:buNone/>
+                      </a:pPr>
+                      <a:r>
+                        <a:rPr lang="en-US" sz="1200" b="1" dirty="0">
+                          <a:solidFill>
+                            <a:srgbClr val="FFFFFF"/>
+                          </a:solidFill>
+                          <a:latin typeface="Calibri" pitchFamily="34" charset="0"/>
+                          <a:ea typeface="Calibri" pitchFamily="34" charset="-122"/>
+                          <a:cs typeface="Calibri" pitchFamily="34" charset="-120"/>
+                        </a:rPr>
+                        <a:t>Sybil attack</a:t>
+                      </a:r>
+                      <a:endParaRPr lang="en-US" sz="1200" dirty="0">
+                        <a:latin typeface="Calibri" charset="0"/>
+                        <a:ea typeface="Calibri" charset="0"/>
+                        <a:cs typeface="Calibri" charset="0"/>
+                      </a:endParaRPr>
+                    </a:p>
+                  </a:txBody>
+                  <a:tcPr marL="91440" marR="91440" marT="45720" marB="45720">
+                    <a:lnL w="9525" cap="flat" cmpd="sng" algn="ctr">
+                      <a:solidFill>
+                        <a:srgbClr val="D5DDE3"/>
+                      </a:solidFill>
+                      <a:prstDash val="solid"/>
+                      <a:round/>
+                      <a:headEnd type="none" w="med" len="med"/>
+                      <a:tailEnd type="none" w="med" len="med"/>
+                    </a:lnL>
+                    <a:lnR w="9525" cap="flat" cmpd="sng" algn="ctr">
+                      <a:solidFill>
+                        <a:srgbClr val="D5DDE3"/>
+                      </a:solidFill>
+                      <a:prstDash val="solid"/>
+                      <a:round/>
+                      <a:headEnd type="none" w="med" len="med"/>
+                      <a:tailEnd type="none" w="med" len="med"/>
+                    </a:lnR>
+                    <a:lnT w="9525" cap="flat" cmpd="sng" algn="ctr">
+                      <a:solidFill>
+                        <a:srgbClr val="D5DDE3"/>
+                      </a:solidFill>
+                      <a:prstDash val="solid"/>
+                      <a:round/>
+                      <a:headEnd type="none" w="med" len="med"/>
+                      <a:tailEnd type="none" w="med" len="med"/>
+                    </a:lnT>
+                    <a:lnB w="9525" cap="flat" cmpd="sng" algn="ctr">
+                      <a:solidFill>
+                        <a:srgbClr val="D5DDE3"/>
+                      </a:solidFill>
+                      <a:prstDash val="solid"/>
+                      <a:round/>
+                      <a:headEnd type="none" w="med" len="med"/>
+                      <a:tailEnd type="none" w="med" len="med"/>
+                    </a:lnB>
+                    <a:solidFill>
+                      <a:srgbClr val="0B1F33"/>
+                    </a:solidFill>
+                  </a:tcPr>
+                </a:tc>
+                <a:tc>
+                  <a:txBody>
+                    <a:bodyPr/>
+                    <a:lstStyle/>
+                    <a:p>
+                      <a:pPr algn="ctr" indent="0" marL="0">
+                        <a:buNone/>
+                      </a:pPr>
+                      <a:r>
+                        <a:rPr lang="en-US" sz="1200" b="1" dirty="0">
+                          <a:solidFill>
+                            <a:srgbClr val="FFFFFF"/>
+                          </a:solidFill>
+                          <a:latin typeface="Calibri" pitchFamily="34" charset="0"/>
+                          <a:ea typeface="Calibri" pitchFamily="34" charset="-122"/>
+                          <a:cs typeface="Calibri" pitchFamily="34" charset="-120"/>
+                        </a:rPr>
+                        <a:t>Recall</a:t>
+                      </a:r>
+                      <a:endParaRPr lang="en-US" sz="1200" dirty="0">
+                        <a:latin typeface="Calibri" charset="0"/>
+                        <a:ea typeface="Calibri" charset="0"/>
+                        <a:cs typeface="Calibri" charset="0"/>
+                      </a:endParaRPr>
+                    </a:p>
+                  </a:txBody>
+                  <a:tcPr marL="91440" marR="91440" marT="45720" marB="45720">
+                    <a:lnL w="9525" cap="flat" cmpd="sng" algn="ctr">
+                      <a:solidFill>
+                        <a:srgbClr val="D5DDE3"/>
+                      </a:solidFill>
+                      <a:prstDash val="solid"/>
+                      <a:round/>
+                      <a:headEnd type="none" w="med" len="med"/>
+                      <a:tailEnd type="none" w="med" len="med"/>
+                    </a:lnL>
+                    <a:lnR w="9525" cap="flat" cmpd="sng" algn="ctr">
+                      <a:solidFill>
+                        <a:srgbClr val="D5DDE3"/>
+                      </a:solidFill>
+                      <a:prstDash val="solid"/>
+                      <a:round/>
+                      <a:headEnd type="none" w="med" len="med"/>
+                      <a:tailEnd type="none" w="med" len="med"/>
+                    </a:lnR>
+                    <a:lnT w="9525" cap="flat" cmpd="sng" algn="ctr">
+                      <a:solidFill>
+                        <a:srgbClr val="D5DDE3"/>
+                      </a:solidFill>
+                      <a:prstDash val="solid"/>
+                      <a:round/>
+                      <a:headEnd type="none" w="med" len="med"/>
+                      <a:tailEnd type="none" w="med" len="med"/>
+                    </a:lnT>
+                    <a:lnB w="9525" cap="flat" cmpd="sng" algn="ctr">
+                      <a:solidFill>
+                        <a:srgbClr val="D5DDE3"/>
+                      </a:solidFill>
+                      <a:prstDash val="solid"/>
+                      <a:round/>
+                      <a:headEnd type="none" w="med" len="med"/>
+                      <a:tailEnd type="none" w="med" len="med"/>
+                    </a:lnB>
+                    <a:solidFill>
+                      <a:srgbClr val="0B1F33"/>
+                    </a:solidFill>
+                  </a:tcPr>
+                </a:tc>
+              </a:tr>
+              <a:tr h="310896">
+                <a:tc>
+                  <a:txBody>
+                    <a:bodyPr/>
+                    <a:lstStyle/>
+                    <a:p>
+                      <a:pPr algn="l" indent="0" marL="0">
+                        <a:buNone/>
+                      </a:pPr>
+                      <a:r>
+                        <a:rPr lang="en-US" sz="1200" dirty="0">
+                          <a:solidFill>
+                            <a:srgbClr val="1B2A38"/>
+                          </a:solidFill>
+                          <a:latin typeface="Calibri" pitchFamily="34" charset="0"/>
+                          <a:ea typeface="Calibri" pitchFamily="34" charset="-122"/>
+                          <a:cs typeface="Calibri" pitchFamily="34" charset="-120"/>
+                        </a:rPr>
+                        <a:t>GridSybil (largest, 20,598 slots)</a:t>
+                      </a:r>
+                      <a:endParaRPr lang="en-US" sz="1200" dirty="0">
+                        <a:latin typeface="Calibri" charset="0"/>
+                        <a:ea typeface="Calibri" charset="0"/>
+                        <a:cs typeface="Calibri" charset="0"/>
+                      </a:endParaRPr>
+                    </a:p>
+                  </a:txBody>
+                  <a:tcPr marL="91440" marR="91440" marT="45720" marB="45720">
+                    <a:lnL w="9525" cap="flat" cmpd="sng" algn="ctr">
+                      <a:solidFill>
+                        <a:srgbClr val="D5DDE3"/>
+                      </a:solidFill>
+                      <a:prstDash val="solid"/>
+                      <a:round/>
+                      <a:headEnd type="none" w="med" len="med"/>
+                      <a:tailEnd type="none" w="med" len="med"/>
+                    </a:lnL>
+                    <a:lnR w="9525" cap="flat" cmpd="sng" algn="ctr">
+                      <a:solidFill>
+                        <a:srgbClr val="D5DDE3"/>
+                      </a:solidFill>
+                      <a:prstDash val="solid"/>
+                      <a:round/>
+                      <a:headEnd type="none" w="med" len="med"/>
+                      <a:tailEnd type="none" w="med" len="med"/>
+                    </a:lnR>
+                    <a:lnT w="9525" cap="flat" cmpd="sng" algn="ctr">
+                      <a:solidFill>
+                        <a:srgbClr val="D5DDE3"/>
+                      </a:solidFill>
+                      <a:prstDash val="solid"/>
+                      <a:round/>
+                      <a:headEnd type="none" w="med" len="med"/>
+                      <a:tailEnd type="none" w="med" len="med"/>
+                    </a:lnT>
+                    <a:lnB w="9525" cap="flat" cmpd="sng" algn="ctr">
+                      <a:solidFill>
+                        <a:srgbClr val="D5DDE3"/>
+                      </a:solidFill>
+                      <a:prstDash val="solid"/>
+                      <a:round/>
+                      <a:headEnd type="none" w="med" len="med"/>
+                      <a:tailEnd type="none" w="med" len="med"/>
+                    </a:lnB>
+                  </a:tcPr>
+                </a:tc>
+                <a:tc>
+                  <a:txBody>
+                    <a:bodyPr/>
+                    <a:lstStyle/>
+                    <a:p>
+                      <a:pPr algn="ctr" indent="0" marL="0">
+                        <a:buNone/>
+                      </a:pPr>
+                      <a:r>
+                        <a:rPr lang="en-US" sz="1200" b="1" dirty="0">
+                          <a:solidFill>
+                            <a:srgbClr val="1B2A38"/>
+                          </a:solidFill>
+                          <a:latin typeface="Calibri" pitchFamily="34" charset="0"/>
+                          <a:ea typeface="Calibri" pitchFamily="34" charset="-122"/>
+                          <a:cs typeface="Calibri" pitchFamily="34" charset="-120"/>
+                        </a:rPr>
+                        <a:t>0.823</a:t>
+                      </a:r>
+                      <a:endParaRPr lang="en-US" sz="1200" dirty="0">
+                        <a:latin typeface="Calibri" charset="0"/>
+                        <a:ea typeface="Calibri" charset="0"/>
+                        <a:cs typeface="Calibri" charset="0"/>
+                      </a:endParaRPr>
+                    </a:p>
+                  </a:txBody>
+                  <a:tcPr marL="91440" marR="91440" marT="45720" marB="45720">
+                    <a:lnL w="9525" cap="flat" cmpd="sng" algn="ctr">
+                      <a:solidFill>
+                        <a:srgbClr val="D5DDE3"/>
+                      </a:solidFill>
+                      <a:prstDash val="solid"/>
+                      <a:round/>
+                      <a:headEnd type="none" w="med" len="med"/>
+                      <a:tailEnd type="none" w="med" len="med"/>
+                    </a:lnL>
+                    <a:lnR w="9525" cap="flat" cmpd="sng" algn="ctr">
+                      <a:solidFill>
+                        <a:srgbClr val="D5DDE3"/>
+                      </a:solidFill>
+                      <a:prstDash val="solid"/>
+                      <a:round/>
+                      <a:headEnd type="none" w="med" len="med"/>
+                      <a:tailEnd type="none" w="med" len="med"/>
+                    </a:lnR>
+                    <a:lnT w="9525" cap="flat" cmpd="sng" algn="ctr">
+                      <a:solidFill>
+                        <a:srgbClr val="D5DDE3"/>
+                      </a:solidFill>
+                      <a:prstDash val="solid"/>
+                      <a:round/>
+                      <a:headEnd type="none" w="med" len="med"/>
+                      <a:tailEnd type="none" w="med" len="med"/>
+                    </a:lnT>
+                    <a:lnB w="9525" cap="flat" cmpd="sng" algn="ctr">
+                      <a:solidFill>
+                        <a:srgbClr val="D5DDE3"/>
+                      </a:solidFill>
+                      <a:prstDash val="solid"/>
+                      <a:round/>
+                      <a:headEnd type="none" w="med" len="med"/>
+                      <a:tailEnd type="none" w="med" len="med"/>
+                    </a:lnB>
+                  </a:tcPr>
+                </a:tc>
+              </a:tr>
+              <a:tr h="310896">
+                <a:tc>
+                  <a:txBody>
+                    <a:bodyPr/>
+                    <a:lstStyle/>
+                    <a:p>
+                      <a:pPr algn="l" indent="0" marL="0">
+                        <a:buNone/>
+                      </a:pPr>
+                      <a:r>
+                        <a:rPr lang="en-US" sz="1200" dirty="0">
+                          <a:solidFill>
+                            <a:srgbClr val="1B2A38"/>
+                          </a:solidFill>
+                          <a:latin typeface="Calibri" pitchFamily="34" charset="0"/>
+                          <a:ea typeface="Calibri" pitchFamily="34" charset="-122"/>
+                          <a:cs typeface="Calibri" pitchFamily="34" charset="-120"/>
+                        </a:rPr>
+                        <a:t>DataReplaySybil</a:t>
+                      </a:r>
+                      <a:endParaRPr lang="en-US" sz="1200" dirty="0">
+                        <a:latin typeface="Calibri" charset="0"/>
+                        <a:ea typeface="Calibri" charset="0"/>
+                        <a:cs typeface="Calibri" charset="0"/>
+                      </a:endParaRPr>
+                    </a:p>
+                  </a:txBody>
+                  <a:tcPr marL="91440" marR="91440" marT="45720" marB="45720">
+                    <a:lnL w="9525" cap="flat" cmpd="sng" algn="ctr">
+                      <a:solidFill>
+                        <a:srgbClr val="D5DDE3"/>
+                      </a:solidFill>
+                      <a:prstDash val="solid"/>
+                      <a:round/>
+                      <a:headEnd type="none" w="med" len="med"/>
+                      <a:tailEnd type="none" w="med" len="med"/>
+                    </a:lnL>
+                    <a:lnR w="9525" cap="flat" cmpd="sng" algn="ctr">
+                      <a:solidFill>
+                        <a:srgbClr val="D5DDE3"/>
+                      </a:solidFill>
+                      <a:prstDash val="solid"/>
+                      <a:round/>
+                      <a:headEnd type="none" w="med" len="med"/>
+                      <a:tailEnd type="none" w="med" len="med"/>
+                    </a:lnR>
+                    <a:lnT w="9525" cap="flat" cmpd="sng" algn="ctr">
+                      <a:solidFill>
+                        <a:srgbClr val="D5DDE3"/>
+                      </a:solidFill>
+                      <a:prstDash val="solid"/>
+                      <a:round/>
+                      <a:headEnd type="none" w="med" len="med"/>
+                      <a:tailEnd type="none" w="med" len="med"/>
+                    </a:lnT>
+                    <a:lnB w="9525" cap="flat" cmpd="sng" algn="ctr">
+                      <a:solidFill>
+                        <a:srgbClr val="D5DDE3"/>
+                      </a:solidFill>
+                      <a:prstDash val="solid"/>
+                      <a:round/>
+                      <a:headEnd type="none" w="med" len="med"/>
+                      <a:tailEnd type="none" w="med" len="med"/>
+                    </a:lnB>
+                  </a:tcPr>
+                </a:tc>
+                <a:tc>
+                  <a:txBody>
+                    <a:bodyPr/>
+                    <a:lstStyle/>
+                    <a:p>
+                      <a:pPr algn="ctr" indent="0" marL="0">
+                        <a:buNone/>
+                      </a:pPr>
+                      <a:r>
+                        <a:rPr lang="en-US" sz="1200" dirty="0">
+                          <a:solidFill>
+                            <a:srgbClr val="1B2A38"/>
+                          </a:solidFill>
+                          <a:latin typeface="Calibri" pitchFamily="34" charset="0"/>
+                          <a:ea typeface="Calibri" pitchFamily="34" charset="-122"/>
+                          <a:cs typeface="Calibri" pitchFamily="34" charset="-120"/>
+                        </a:rPr>
+                        <a:t>0.914</a:t>
+                      </a:r>
+                      <a:endParaRPr lang="en-US" sz="1200" dirty="0">
+                        <a:latin typeface="Calibri" charset="0"/>
+                        <a:ea typeface="Calibri" charset="0"/>
+                        <a:cs typeface="Calibri" charset="0"/>
+                      </a:endParaRPr>
+                    </a:p>
+                  </a:txBody>
+                  <a:tcPr marL="91440" marR="91440" marT="45720" marB="45720">
+                    <a:lnL w="9525" cap="flat" cmpd="sng" algn="ctr">
+                      <a:solidFill>
+                        <a:srgbClr val="D5DDE3"/>
+                      </a:solidFill>
+                      <a:prstDash val="solid"/>
+                      <a:round/>
+                      <a:headEnd type="none" w="med" len="med"/>
+                      <a:tailEnd type="none" w="med" len="med"/>
+                    </a:lnL>
+                    <a:lnR w="9525" cap="flat" cmpd="sng" algn="ctr">
+                      <a:solidFill>
+                        <a:srgbClr val="D5DDE3"/>
+                      </a:solidFill>
+                      <a:prstDash val="solid"/>
+                      <a:round/>
+                      <a:headEnd type="none" w="med" len="med"/>
+                      <a:tailEnd type="none" w="med" len="med"/>
+                    </a:lnR>
+                    <a:lnT w="9525" cap="flat" cmpd="sng" algn="ctr">
+                      <a:solidFill>
+                        <a:srgbClr val="D5DDE3"/>
+                      </a:solidFill>
+                      <a:prstDash val="solid"/>
+                      <a:round/>
+                      <a:headEnd type="none" w="med" len="med"/>
+                      <a:tailEnd type="none" w="med" len="med"/>
+                    </a:lnT>
+                    <a:lnB w="9525" cap="flat" cmpd="sng" algn="ctr">
+                      <a:solidFill>
+                        <a:srgbClr val="D5DDE3"/>
+                      </a:solidFill>
+                      <a:prstDash val="solid"/>
+                      <a:round/>
+                      <a:headEnd type="none" w="med" len="med"/>
+                      <a:tailEnd type="none" w="med" len="med"/>
+                    </a:lnB>
+                  </a:tcPr>
+                </a:tc>
+              </a:tr>
+              <a:tr h="310896">
+                <a:tc>
+                  <a:txBody>
+                    <a:bodyPr/>
+                    <a:lstStyle/>
+                    <a:p>
+                      <a:pPr algn="l" indent="0" marL="0">
+                        <a:buNone/>
+                      </a:pPr>
+                      <a:r>
+                        <a:rPr lang="en-US" sz="1200" dirty="0">
+                          <a:solidFill>
+                            <a:srgbClr val="1B2A38"/>
+                          </a:solidFill>
+                          <a:latin typeface="Calibri" pitchFamily="34" charset="0"/>
+                          <a:ea typeface="Calibri" pitchFamily="34" charset="-122"/>
+                          <a:cs typeface="Calibri" pitchFamily="34" charset="-120"/>
+                        </a:rPr>
+                        <a:t>DoSDisruptiveSybil</a:t>
+                      </a:r>
+                      <a:endParaRPr lang="en-US" sz="1200" dirty="0">
+                        <a:latin typeface="Calibri" charset="0"/>
+                        <a:ea typeface="Calibri" charset="0"/>
+                        <a:cs typeface="Calibri" charset="0"/>
+                      </a:endParaRPr>
+                    </a:p>
+                  </a:txBody>
+                  <a:tcPr marL="91440" marR="91440" marT="45720" marB="45720">
+                    <a:lnL w="9525" cap="flat" cmpd="sng" algn="ctr">
+                      <a:solidFill>
+                        <a:srgbClr val="D5DDE3"/>
+                      </a:solidFill>
+                      <a:prstDash val="solid"/>
+                      <a:round/>
+                      <a:headEnd type="none" w="med" len="med"/>
+                      <a:tailEnd type="none" w="med" len="med"/>
+                    </a:lnL>
+                    <a:lnR w="9525" cap="flat" cmpd="sng" algn="ctr">
+                      <a:solidFill>
+                        <a:srgbClr val="D5DDE3"/>
+                      </a:solidFill>
+                      <a:prstDash val="solid"/>
+                      <a:round/>
+                      <a:headEnd type="none" w="med" len="med"/>
+                      <a:tailEnd type="none" w="med" len="med"/>
+                    </a:lnR>
+                    <a:lnT w="9525" cap="flat" cmpd="sng" algn="ctr">
+                      <a:solidFill>
+                        <a:srgbClr val="D5DDE3"/>
+                      </a:solidFill>
+                      <a:prstDash val="solid"/>
+                      <a:round/>
+                      <a:headEnd type="none" w="med" len="med"/>
+                      <a:tailEnd type="none" w="med" len="med"/>
+                    </a:lnT>
+                    <a:lnB w="9525" cap="flat" cmpd="sng" algn="ctr">
+                      <a:solidFill>
+                        <a:srgbClr val="D5DDE3"/>
+                      </a:solidFill>
+                      <a:prstDash val="solid"/>
+                      <a:round/>
+                      <a:headEnd type="none" w="med" len="med"/>
+                      <a:tailEnd type="none" w="med" len="med"/>
+                    </a:lnB>
+                  </a:tcPr>
+                </a:tc>
+                <a:tc>
+                  <a:txBody>
+                    <a:bodyPr/>
+                    <a:lstStyle/>
+                    <a:p>
+                      <a:pPr algn="ctr" indent="0" marL="0">
+                        <a:buNone/>
+                      </a:pPr>
+                      <a:r>
+                        <a:rPr lang="en-US" sz="1200" dirty="0">
+                          <a:solidFill>
+                            <a:srgbClr val="1B2A38"/>
+                          </a:solidFill>
+                          <a:latin typeface="Calibri" pitchFamily="34" charset="0"/>
+                          <a:ea typeface="Calibri" pitchFamily="34" charset="-122"/>
+                          <a:cs typeface="Calibri" pitchFamily="34" charset="-120"/>
+                        </a:rPr>
+                        <a:t>0.969</a:t>
+                      </a:r>
+                      <a:endParaRPr lang="en-US" sz="1200" dirty="0">
+                        <a:latin typeface="Calibri" charset="0"/>
+                        <a:ea typeface="Calibri" charset="0"/>
+                        <a:cs typeface="Calibri" charset="0"/>
+                      </a:endParaRPr>
+                    </a:p>
+                  </a:txBody>
+                  <a:tcPr marL="91440" marR="91440" marT="45720" marB="45720">
+                    <a:lnL w="9525" cap="flat" cmpd="sng" algn="ctr">
+                      <a:solidFill>
+                        <a:srgbClr val="D5DDE3"/>
+                      </a:solidFill>
+                      <a:prstDash val="solid"/>
+                      <a:round/>
+                      <a:headEnd type="none" w="med" len="med"/>
+                      <a:tailEnd type="none" w="med" len="med"/>
+                    </a:lnL>
+                    <a:lnR w="9525" cap="flat" cmpd="sng" algn="ctr">
+                      <a:solidFill>
+                        <a:srgbClr val="D5DDE3"/>
+                      </a:solidFill>
+                      <a:prstDash val="solid"/>
+                      <a:round/>
+                      <a:headEnd type="none" w="med" len="med"/>
+                      <a:tailEnd type="none" w="med" len="med"/>
+                    </a:lnR>
+                    <a:lnT w="9525" cap="flat" cmpd="sng" algn="ctr">
+                      <a:solidFill>
+                        <a:srgbClr val="D5DDE3"/>
+                      </a:solidFill>
+                      <a:prstDash val="solid"/>
+                      <a:round/>
+                      <a:headEnd type="none" w="med" len="med"/>
+                      <a:tailEnd type="none" w="med" len="med"/>
+                    </a:lnT>
+                    <a:lnB w="9525" cap="flat" cmpd="sng" algn="ctr">
+                      <a:solidFill>
+                        <a:srgbClr val="D5DDE3"/>
+                      </a:solidFill>
+                      <a:prstDash val="solid"/>
+                      <a:round/>
+                      <a:headEnd type="none" w="med" len="med"/>
+                      <a:tailEnd type="none" w="med" len="med"/>
+                    </a:lnB>
+                  </a:tcPr>
+                </a:tc>
+              </a:tr>
+              <a:tr h="310896">
+                <a:tc>
+                  <a:txBody>
+                    <a:bodyPr/>
+                    <a:lstStyle/>
+                    <a:p>
+                      <a:pPr algn="l" indent="0" marL="0">
+                        <a:buNone/>
+                      </a:pPr>
+                      <a:r>
+                        <a:rPr lang="en-US" sz="1200" dirty="0">
+                          <a:solidFill>
+                            <a:srgbClr val="1B2A38"/>
+                          </a:solidFill>
+                          <a:latin typeface="Calibri" pitchFamily="34" charset="0"/>
+                          <a:ea typeface="Calibri" pitchFamily="34" charset="-122"/>
+                          <a:cs typeface="Calibri" pitchFamily="34" charset="-120"/>
+                        </a:rPr>
+                        <a:t>DoSRandomSybil</a:t>
+                      </a:r>
+                      <a:endParaRPr lang="en-US" sz="1200" dirty="0">
+                        <a:latin typeface="Calibri" charset="0"/>
+                        <a:ea typeface="Calibri" charset="0"/>
+                        <a:cs typeface="Calibri" charset="0"/>
+                      </a:endParaRPr>
+                    </a:p>
+                  </a:txBody>
+                  <a:tcPr marL="91440" marR="91440" marT="45720" marB="45720">
+                    <a:lnL w="9525" cap="flat" cmpd="sng" algn="ctr">
+                      <a:solidFill>
+                        <a:srgbClr val="D5DDE3"/>
+                      </a:solidFill>
+                      <a:prstDash val="solid"/>
+                      <a:round/>
+                      <a:headEnd type="none" w="med" len="med"/>
+                      <a:tailEnd type="none" w="med" len="med"/>
+                    </a:lnL>
+                    <a:lnR w="9525" cap="flat" cmpd="sng" algn="ctr">
+                      <a:solidFill>
+                        <a:srgbClr val="D5DDE3"/>
+                      </a:solidFill>
+                      <a:prstDash val="solid"/>
+                      <a:round/>
+                      <a:headEnd type="none" w="med" len="med"/>
+                      <a:tailEnd type="none" w="med" len="med"/>
+                    </a:lnR>
+                    <a:lnT w="9525" cap="flat" cmpd="sng" algn="ctr">
+                      <a:solidFill>
+                        <a:srgbClr val="D5DDE3"/>
+                      </a:solidFill>
+                      <a:prstDash val="solid"/>
+                      <a:round/>
+                      <a:headEnd type="none" w="med" len="med"/>
+                      <a:tailEnd type="none" w="med" len="med"/>
+                    </a:lnT>
+                    <a:lnB w="9525" cap="flat" cmpd="sng" algn="ctr">
+                      <a:solidFill>
+                        <a:srgbClr val="D5DDE3"/>
+                      </a:solidFill>
+                      <a:prstDash val="solid"/>
+                      <a:round/>
+                      <a:headEnd type="none" w="med" len="med"/>
+                      <a:tailEnd type="none" w="med" len="med"/>
+                    </a:lnB>
+                  </a:tcPr>
+                </a:tc>
+                <a:tc>
+                  <a:txBody>
+                    <a:bodyPr/>
+                    <a:lstStyle/>
+                    <a:p>
+                      <a:pPr algn="ctr" indent="0" marL="0">
+                        <a:buNone/>
+                      </a:pPr>
+                      <a:r>
+                        <a:rPr lang="en-US" sz="1200" dirty="0">
+                          <a:solidFill>
+                            <a:srgbClr val="1B2A38"/>
+                          </a:solidFill>
+                          <a:latin typeface="Calibri" pitchFamily="34" charset="0"/>
+                          <a:ea typeface="Calibri" pitchFamily="34" charset="-122"/>
+                          <a:cs typeface="Calibri" pitchFamily="34" charset="-120"/>
+                        </a:rPr>
+                        <a:t>0.997</a:t>
+                      </a:r>
+                      <a:endParaRPr lang="en-US" sz="1200" dirty="0">
+                        <a:latin typeface="Calibri" charset="0"/>
+                        <a:ea typeface="Calibri" charset="0"/>
+                        <a:cs typeface="Calibri" charset="0"/>
+                      </a:endParaRPr>
+                    </a:p>
+                  </a:txBody>
+                  <a:tcPr marL="91440" marR="91440" marT="45720" marB="45720">
+                    <a:lnL w="9525" cap="flat" cmpd="sng" algn="ctr">
+                      <a:solidFill>
+                        <a:srgbClr val="D5DDE3"/>
+                      </a:solidFill>
+                      <a:prstDash val="solid"/>
+                      <a:round/>
+                      <a:headEnd type="none" w="med" len="med"/>
+                      <a:tailEnd type="none" w="med" len="med"/>
+                    </a:lnL>
+                    <a:lnR w="9525" cap="flat" cmpd="sng" algn="ctr">
+                      <a:solidFill>
+                        <a:srgbClr val="D5DDE3"/>
+                      </a:solidFill>
+                      <a:prstDash val="solid"/>
+                      <a:round/>
+                      <a:headEnd type="none" w="med" len="med"/>
+                      <a:tailEnd type="none" w="med" len="med"/>
+                    </a:lnR>
+                    <a:lnT w="9525" cap="flat" cmpd="sng" algn="ctr">
+                      <a:solidFill>
+                        <a:srgbClr val="D5DDE3"/>
+                      </a:solidFill>
+                      <a:prstDash val="solid"/>
+                      <a:round/>
+                      <a:headEnd type="none" w="med" len="med"/>
+                      <a:tailEnd type="none" w="med" len="med"/>
+                    </a:lnT>
+                    <a:lnB w="9525" cap="flat" cmpd="sng" algn="ctr">
+                      <a:solidFill>
+                        <a:srgbClr val="D5DDE3"/>
+                      </a:solidFill>
+                      <a:prstDash val="solid"/>
+                      <a:round/>
+                      <a:headEnd type="none" w="med" len="med"/>
+                      <a:tailEnd type="none" w="med" len="med"/>
+                    </a:lnB>
+                  </a:tcPr>
+                </a:tc>
+              </a:tr>
+            </a:tbl>
+          </a:graphicData>
+        </a:graphic>
+      </p:graphicFrame>
       <p:sp>
         <p:nvSpPr>
-          <p:cNvPr id="3" name="Text 1"/>
+          <p:cNvPr id="5" name="Text 1"/>
           <p:cNvSpPr txBox="1"/>
           <p:nvPr/>
         </p:nvSpPr>
         <p:spPr>
           <a:xfrm>
-            <a:off x="548640" y="1188720"/>
-            <a:ext cx="8046720" cy="3291840"/>
+            <a:off x="548640" y="2743200"/>
+            <a:ext cx="8092440" cy="1737360"/>
           </a:xfrm>
           <a:prstGeom prst="rect">
             <a:avLst/>
@@ -8403,109 +10742,103 @@
           <a:bodyPr wrap="square" lIns="0" tIns="0" rIns="0" bIns="0" rtlCol="0" anchor="t"/>
           <a:lstStyle/>
           <a:p>
-            <a:pPr marL="342900" indent="-342900">
+            <a:pPr indent="0" marL="0">
               <a:spcAft>
-                <a:spcPts val="1000"/>
+                <a:spcPts val="600"/>
               </a:spcAft>
-              <a:buSzPct val="100000"/>
-              <a:buChar char="•"/>
+              <a:buNone/>
             </a:pPr>
             <a:r>
-              <a:rPr lang="en-US" sz="1800" dirty="0">
+              <a:rPr lang="en-US" sz="1300" dirty="0">
                 <a:solidFill>
-                  <a:srgbClr val="FFFFFF"/>
+                  <a:srgbClr val="1B2A38"/>
                 </a:solidFill>
                 <a:latin typeface="Calibri" pitchFamily="34" charset="0"/>
                 <a:ea typeface="Calibri" pitchFamily="34" charset="-122"/>
                 <a:cs typeface="Calibri" pitchFamily="34" charset="-120"/>
               </a:rPr>
-              <a:t>Sybil attacks (not covered yet)</a:t>
+              <a:t>Senders are tracked by pseudonym (what a receiver sees); three new inputs: identity age, handover distance, lockstep. Final = mean of 3 models. Message-label FPR 2.07%.</a:t>
             </a:r>
-            <a:endParaRPr lang="en-US" sz="1800" dirty="0"/>
+            <a:endParaRPr lang="en-US" sz="1300" dirty="0"/>
           </a:p>
           <a:p>
-            <a:pPr marL="342900" indent="-342900">
+            <a:pPr indent="0" marL="0">
               <a:spcAft>
-                <a:spcPts val="1000"/>
+                <a:spcPts val="600"/>
               </a:spcAft>
-              <a:buSzPct val="100000"/>
-              <a:buChar char="•"/>
+              <a:buNone/>
             </a:pPr>
             <a:r>
-              <a:rPr lang="en-US" sz="1800" dirty="0">
+              <a:rPr lang="en-US" sz="1300" b="1" dirty="0">
                 <a:solidFill>
-                  <a:srgbClr val="FFFFFF"/>
+                  <a:srgbClr val="1C7C7D"/>
                 </a:solidFill>
                 <a:latin typeface="Calibri" pitchFamily="34" charset="0"/>
                 <a:ea typeface="Calibri" pitchFamily="34" charset="-122"/>
                 <a:cs typeface="Calibri" pitchFamily="34" charset="-120"/>
               </a:rPr>
-              <a:t>Check on original VeReMi and VeReMi NextGen</a:t>
+              <a:t>Neighbour attention helps more with Sybil: +1.4 F1 (vs +0.3 on 14 attacks).</a:t>
             </a:r>
-            <a:endParaRPr lang="en-US" sz="1800" dirty="0"/>
+            <a:endParaRPr lang="en-US" sz="1300" dirty="0"/>
           </a:p>
           <a:p>
-            <a:pPr marL="342900" indent="-342900">
+            <a:pPr indent="0" marL="0">
               <a:spcAft>
-                <a:spcPts val="1000"/>
+                <a:spcPts val="600"/>
               </a:spcAft>
-              <a:buSzPct val="100000"/>
-              <a:buChar char="•"/>
+              <a:buNone/>
             </a:pPr>
             <a:r>
-              <a:rPr lang="en-US" sz="1800" dirty="0">
+              <a:rPr lang="en-US" sz="1300" b="1" dirty="0">
                 <a:solidFill>
-                  <a:srgbClr val="FFFFFF"/>
+                  <a:srgbClr val="C0392B"/>
                 </a:solidFill>
                 <a:latin typeface="Calibri" pitchFamily="34" charset="0"/>
                 <a:ea typeface="Calibri" pitchFamily="34" charset="-122"/>
                 <a:cs typeface="Calibri" pitchFamily="34" charset="-120"/>
               </a:rPr>
-              <a:t>Run v2 on dense traffic; add a 3rd seed</a:t>
+              <a:t>Honest result: on 18 attacks all four numbers are below the 97.37% reference. Missed GridSybil ghosts look honest on every content check; they need an independent signal.</a:t>
             </a:r>
-            <a:endParaRPr lang="en-US" sz="1800" dirty="0"/>
+            <a:endParaRPr lang="en-US" sz="1300" dirty="0"/>
           </a:p>
+        </p:txBody>
+      </p:sp>
+      <p:sp>
+        <p:nvSpPr>
+          <p:cNvPr id="6" name="Text 2"/>
+          <p:cNvSpPr txBox="1"/>
+          <p:nvPr/>
+        </p:nvSpPr>
+        <p:spPr>
+          <a:xfrm>
+            <a:off x="548640" y="4526280"/>
+            <a:ext cx="8046720" cy="365760"/>
+          </a:xfrm>
+          <a:prstGeom prst="rect">
+            <a:avLst/>
+          </a:prstGeom>
+          <a:noFill/>
+          <a:ln/>
+        </p:spPr>
+        <p:txBody>
+          <a:bodyPr wrap="square" lIns="0" tIns="0" rIns="0" bIns="0" rtlCol="0" anchor="ctr"/>
+          <a:lstStyle/>
           <a:p>
-            <a:pPr marL="342900" indent="-342900">
-              <a:spcAft>
-                <a:spcPts val="1000"/>
-              </a:spcAft>
-              <a:buSzPct val="100000"/>
-              <a:buChar char="•"/>
+            <a:pPr indent="0" marL="0">
+              <a:buNone/>
             </a:pPr>
             <a:r>
-              <a:rPr lang="en-US" sz="1800" dirty="0">
+              <a:rPr lang="en-US" sz="1050" i="1" dirty="0">
                 <a:solidFill>
-                  <a:srgbClr val="FFFFFF"/>
+                  <a:srgbClr val="5B6B7A"/>
                 </a:solidFill>
                 <a:latin typeface="Calibri" pitchFamily="34" charset="0"/>
                 <a:ea typeface="Calibri" pitchFamily="34" charset="-122"/>
                 <a:cs typeface="Calibri" pitchFamily="34" charset="-120"/>
               </a:rPr>
-              <a:t>On-road consistent lies need an independent signal: signal strength, on-board sensors, roadside units</a:t>
+              <a:t>All values in % except recall per attack (message labels). Source: results/results_v18_final.json, paper/tables_v18.tex.</a:t>
             </a:r>
-            <a:endParaRPr lang="en-US" sz="1800" dirty="0"/>
-          </a:p>
-          <a:p>
-            <a:pPr marL="342900" indent="-342900">
-              <a:spcAft>
-                <a:spcPts val="1000"/>
-              </a:spcAft>
-              <a:buSzPct val="100000"/>
-              <a:buChar char="•"/>
-            </a:pPr>
-            <a:r>
-              <a:rPr lang="en-US" sz="1800" dirty="0">
-                <a:solidFill>
-                  <a:srgbClr val="FFFFFF"/>
-                </a:solidFill>
-                <a:latin typeface="Calibri" pitchFamily="34" charset="0"/>
-                <a:ea typeface="Calibri" pitchFamily="34" charset="-122"/>
-                <a:cs typeface="Calibri" pitchFamily="34" charset="-120"/>
-              </a:rPr>
-              <a:t>Paper done: paper/main.pdf, IEEE conference format, 6 pages, 18 references</a:t>
-            </a:r>
-            <a:endParaRPr lang="en-US" sz="1800" dirty="0"/>
+            <a:endParaRPr lang="en-US" sz="1050" dirty="0"/>
           </a:p>
         </p:txBody>
       </p:sp>
